--- a/Documents/Original/FlexChroma_Tour_Guide_DE.pptx
+++ b/Documents/Original/FlexChroma_Tour_Guide_DE.pptx
@@ -1,25 +1,25 @@
 
 <file path=ppt/presentation.xml><?xml version="1.0" encoding="utf-8"?>
-<p:presentation xmlns:a="http://schemas.openxmlformats.org/drawingml/2006/main" xmlns:r="http://schemas.openxmlformats.org/officeDocument/2006/relationships" xmlns:p="http://schemas.openxmlformats.org/presentationml/2006/main" xmlns:m="http://schemas.openxmlformats.org/officeDocument/2006/math" xmlns:a14="http://schemas.microsoft.com/office/drawing/2010/main">
+<p:presentation xmlns:a="http://schemas.openxmlformats.org/drawingml/2006/main" xmlns:r="http://schemas.openxmlformats.org/officeDocument/2006/relationships" xmlns:p="http://schemas.openxmlformats.org/presentationml/2006/main">
   <p:sldMasterIdLst>
-    <p:sldMasterId id="2147483648" r:id="rId5"/>
+    <p:sldMasterId id="2147483648" r:id="rId1"/>
   </p:sldMasterIdLst>
   <p:notesMasterIdLst>
-    <p:notesMasterId r:id="rId7"/>
+    <p:notesMasterId r:id="rId11"/>
   </p:notesMasterIdLst>
   <p:sldIdLst>
-    <p:sldId id="256" r:id="rId8"/>
-    <p:sldId id="257" r:id="rId9"/>
-    <p:sldId id="258" r:id="rId10"/>
-    <p:sldId id="259" r:id="rId11"/>
-    <p:sldId id="260" r:id="rId12"/>
-    <p:sldId id="261" r:id="rId13"/>
-    <p:sldId id="262" r:id="rId14"/>
-    <p:sldId id="263" r:id="rId15"/>
-    <p:sldId id="264" r:id="rId16"/>
+    <p:sldId id="256" r:id="rId2"/>
+    <p:sldId id="257" r:id="rId3"/>
+    <p:sldId id="258" r:id="rId4"/>
+    <p:sldId id="259" r:id="rId5"/>
+    <p:sldId id="260" r:id="rId6"/>
+    <p:sldId id="261" r:id="rId7"/>
+    <p:sldId id="262" r:id="rId8"/>
+    <p:sldId id="263" r:id="rId9"/>
+    <p:sldId id="264" r:id="rId10"/>
   </p:sldIdLst>
-  <p:sldSz cx="6858000" cy="9144000"/>
-  <p:notesSz cx="6858000" cy="9144000"/>
+  <p:sldSz cx="6858000" cy="9144000" type="screen4x3"/>
+  <p:notesSz cx="7104063" cy="10234613"/>
   <p:defaultTextStyle>
     <a:defPPr marL="0" marR="0" indent="0" algn="l" defTabSz="914400" rtl="0" fontAlgn="auto" latinLnBrk="1" hangingPunct="0">
       <a:lnSpc>
@@ -36,7 +36,7 @@
       <a:buFontTx/>
       <a:buNone/>
       <a:tabLst/>
-      <a:defRPr b="0" baseline="0" cap="none" i="0" spc="0" strike="noStrike" sz="1800" u="none" kumimoji="0" normalizeH="0">
+      <a:defRPr kumimoji="0" sz="1800" b="0" i="0" u="none" strike="noStrike" cap="none" spc="0" normalizeH="0" baseline="0">
         <a:ln>
           <a:noFill/>
         </a:ln>
@@ -62,7 +62,7 @@
       <a:buFontTx/>
       <a:buNone/>
       <a:tabLst/>
-      <a:defRPr b="0" baseline="0" cap="none" i="0" spc="0" strike="noStrike" sz="1800" u="none" kumimoji="0" normalizeH="0">
+      <a:defRPr kumimoji="0" sz="1800" b="0" i="0" u="none" strike="noStrike" cap="none" spc="0" normalizeH="0" baseline="0">
         <a:ln>
           <a:noFill/>
         </a:ln>
@@ -92,7 +92,7 @@
       <a:buFontTx/>
       <a:buNone/>
       <a:tabLst/>
-      <a:defRPr b="0" baseline="0" cap="none" i="0" spc="0" strike="noStrike" sz="1800" u="none" kumimoji="0" normalizeH="0">
+      <a:defRPr kumimoji="0" sz="1800" b="0" i="0" u="none" strike="noStrike" cap="none" spc="0" normalizeH="0" baseline="0">
         <a:ln>
           <a:noFill/>
         </a:ln>
@@ -122,7 +122,7 @@
       <a:buFontTx/>
       <a:buNone/>
       <a:tabLst/>
-      <a:defRPr b="0" baseline="0" cap="none" i="0" spc="0" strike="noStrike" sz="1800" u="none" kumimoji="0" normalizeH="0">
+      <a:defRPr kumimoji="0" sz="1800" b="0" i="0" u="none" strike="noStrike" cap="none" spc="0" normalizeH="0" baseline="0">
         <a:ln>
           <a:noFill/>
         </a:ln>
@@ -152,7 +152,7 @@
       <a:buFontTx/>
       <a:buNone/>
       <a:tabLst/>
-      <a:defRPr b="0" baseline="0" cap="none" i="0" spc="0" strike="noStrike" sz="1800" u="none" kumimoji="0" normalizeH="0">
+      <a:defRPr kumimoji="0" sz="1800" b="0" i="0" u="none" strike="noStrike" cap="none" spc="0" normalizeH="0" baseline="0">
         <a:ln>
           <a:noFill/>
         </a:ln>
@@ -182,7 +182,7 @@
       <a:buFontTx/>
       <a:buNone/>
       <a:tabLst/>
-      <a:defRPr b="0" baseline="0" cap="none" i="0" spc="0" strike="noStrike" sz="1800" u="none" kumimoji="0" normalizeH="0">
+      <a:defRPr kumimoji="0" sz="1800" b="0" i="0" u="none" strike="noStrike" cap="none" spc="0" normalizeH="0" baseline="0">
         <a:ln>
           <a:noFill/>
         </a:ln>
@@ -212,7 +212,7 @@
       <a:buFontTx/>
       <a:buNone/>
       <a:tabLst/>
-      <a:defRPr b="0" baseline="0" cap="none" i="0" spc="0" strike="noStrike" sz="1800" u="none" kumimoji="0" normalizeH="0">
+      <a:defRPr kumimoji="0" sz="1800" b="0" i="0" u="none" strike="noStrike" cap="none" spc="0" normalizeH="0" baseline="0">
         <a:ln>
           <a:noFill/>
         </a:ln>
@@ -242,7 +242,7 @@
       <a:buFontTx/>
       <a:buNone/>
       <a:tabLst/>
-      <a:defRPr b="0" baseline="0" cap="none" i="0" spc="0" strike="noStrike" sz="1800" u="none" kumimoji="0" normalizeH="0">
+      <a:defRPr kumimoji="0" sz="1800" b="0" i="0" u="none" strike="noStrike" cap="none" spc="0" normalizeH="0" baseline="0">
         <a:ln>
           <a:noFill/>
         </a:ln>
@@ -272,7 +272,7 @@
       <a:buFontTx/>
       <a:buNone/>
       <a:tabLst/>
-      <a:defRPr b="0" baseline="0" cap="none" i="0" spc="0" strike="noStrike" sz="1800" u="none" kumimoji="0" normalizeH="0">
+      <a:defRPr kumimoji="0" sz="1800" b="0" i="0" u="none" strike="noStrike" cap="none" spc="0" normalizeH="0" baseline="0">
         <a:ln>
           <a:noFill/>
         </a:ln>
@@ -302,7 +302,7 @@
       <a:buFontTx/>
       <a:buNone/>
       <a:tabLst/>
-      <a:defRPr b="0" baseline="0" cap="none" i="0" spc="0" strike="noStrike" sz="1800" u="none" kumimoji="0" normalizeH="0">
+      <a:defRPr kumimoji="0" sz="1800" b="0" i="0" u="none" strike="noStrike" cap="none" spc="0" normalizeH="0" baseline="0">
         <a:ln>
           <a:noFill/>
         </a:ln>
@@ -318,16 +318,22 @@
       </a:defRPr>
     </a:lvl9pPr>
   </p:defaultTextStyle>
+  <p:extLst>
+    <p:ext uri="{EFAFB233-063F-42B5-8137-9DF3F51BA10A}">
+      <p15:sldGuideLst xmlns:p15="http://schemas.microsoft.com/office/powerpoint/2012/main"/>
+    </p:ext>
+  </p:extLst>
 </p:presentation>
 </file>
 
-<file path=ppt/commentAuthors.xml><?xml version="1.0" encoding="utf-8"?>
-<p:cmAuthorLst xmlns:a="http://schemas.openxmlformats.org/drawingml/2006/main" xmlns:r="http://schemas.openxmlformats.org/officeDocument/2006/relationships" xmlns:p="http://schemas.openxmlformats.org/presentationml/2006/main" xmlns:m="http://schemas.openxmlformats.org/officeDocument/2006/math" xmlns:a14="http://schemas.microsoft.com/office/drawing/2010/main"/>
-</file>
-
 <file path=ppt/notesMasters/notesMaster1.xml><?xml version="1.0" encoding="utf-8"?>
-<p:notesMaster xmlns:a="http://schemas.openxmlformats.org/drawingml/2006/main" xmlns:r="http://schemas.openxmlformats.org/officeDocument/2006/relationships" xmlns:p="http://schemas.openxmlformats.org/presentationml/2006/main" xmlns:m="http://schemas.openxmlformats.org/officeDocument/2006/math" xmlns:a14="http://schemas.microsoft.com/office/drawing/2010/main">
+<p:notesMaster xmlns:a="http://schemas.openxmlformats.org/drawingml/2006/main" xmlns:r="http://schemas.openxmlformats.org/officeDocument/2006/relationships" xmlns:p="http://schemas.openxmlformats.org/presentationml/2006/main">
   <p:cSld>
+    <p:bg>
+      <p:bgRef idx="1001">
+        <a:schemeClr val="bg1"/>
+      </p:bgRef>
+    </p:bg>
     <p:spTree>
       <p:nvGrpSpPr>
         <p:cNvPr id="1" name=""/>
@@ -345,50 +351,54 @@
       <p:sp>
         <p:nvSpPr>
           <p:cNvPr id="91" name="Shape 91"/>
-          <p:cNvSpPr/>
+          <p:cNvSpPr>
+            <a:spLocks noGrp="1" noRot="1" noChangeAspect="1"/>
+          </p:cNvSpPr>
           <p:nvPr>
             <p:ph type="sldImg"/>
           </p:nvPr>
         </p:nvSpPr>
         <p:spPr>
           <a:xfrm>
-            <a:off x="1143000" y="685800"/>
-            <a:ext cx="4572000" cy="3429000"/>
+            <a:off x="2112963" y="768350"/>
+            <a:ext cx="2878137" cy="3836988"/>
           </a:xfrm>
           <a:prstGeom prst="rect">
             <a:avLst/>
           </a:prstGeom>
         </p:spPr>
         <p:txBody>
-          <a:bodyPr/>
+          <a:bodyPr lIns="99075" tIns="49538" rIns="99075" bIns="49538"/>
           <a:lstStyle/>
           <a:p>
-            <a:pPr/>
+            <a:endParaRPr/>
           </a:p>
         </p:txBody>
       </p:sp>
       <p:sp>
         <p:nvSpPr>
           <p:cNvPr id="92" name="Shape 92"/>
-          <p:cNvSpPr/>
+          <p:cNvSpPr>
+            <a:spLocks noGrp="1"/>
+          </p:cNvSpPr>
           <p:nvPr>
             <p:ph type="body" sz="quarter" idx="1"/>
           </p:nvPr>
         </p:nvSpPr>
         <p:spPr>
           <a:xfrm>
-            <a:off x="914400" y="4343400"/>
-            <a:ext cx="5029200" cy="4114800"/>
+            <a:off x="947209" y="4861441"/>
+            <a:ext cx="5209646" cy="4605576"/>
           </a:xfrm>
           <a:prstGeom prst="rect">
             <a:avLst/>
           </a:prstGeom>
         </p:spPr>
         <p:txBody>
-          <a:bodyPr/>
+          <a:bodyPr lIns="99075" tIns="49538" rIns="99075" bIns="49538"/>
           <a:lstStyle/>
           <a:p>
-            <a:pPr/>
+            <a:endParaRPr/>
           </a:p>
         </p:txBody>
       </p:sp>
@@ -473,7 +483,7 @@
 </file>
 
 <file path=ppt/slideLayouts/slideLayout1.xml><?xml version="1.0" encoding="utf-8"?>
-<p:sldLayout xmlns:a="http://schemas.openxmlformats.org/drawingml/2006/main" xmlns:r="http://schemas.openxmlformats.org/officeDocument/2006/relationships" xmlns:p="http://schemas.openxmlformats.org/presentationml/2006/main" xmlns:m="http://schemas.openxmlformats.org/officeDocument/2006/math" xmlns:a14="http://schemas.microsoft.com/office/drawing/2010/main" type="title" showMasterSp="1" showMasterPhAnim="1">
+<p:sldLayout xmlns:a="http://schemas.openxmlformats.org/drawingml/2006/main" xmlns:r="http://schemas.openxmlformats.org/officeDocument/2006/relationships" xmlns:p="http://schemas.openxmlformats.org/presentationml/2006/main" type="title">
   <p:cSld name="タイトル スライド">
     <p:spTree>
       <p:nvGrpSpPr>
@@ -492,7 +502,9 @@
       <p:sp>
         <p:nvSpPr>
           <p:cNvPr id="11" name="タイトルテキスト"/>
-          <p:cNvSpPr txBox="1"/>
+          <p:cNvSpPr txBox="1">
+            <a:spLocks noGrp="1"/>
+          </p:cNvSpPr>
           <p:nvPr>
             <p:ph type="title"/>
           </p:nvPr>
@@ -514,7 +526,6 @@
             </a:lvl1pPr>
           </a:lstStyle>
           <a:p>
-            <a:pPr/>
             <a:r>
               <a:t>タイトルテキスト</a:t>
             </a:r>
@@ -524,7 +535,9 @@
       <p:sp>
         <p:nvSpPr>
           <p:cNvPr id="12" name="本文レベル1…"/>
-          <p:cNvSpPr txBox="1"/>
+          <p:cNvSpPr txBox="1">
+            <a:spLocks noGrp="1"/>
+          </p:cNvSpPr>
           <p:nvPr>
             <p:ph type="body" sz="quarter" idx="1"/>
           </p:nvPr>
@@ -573,7 +586,6 @@
             </a:lvl5pPr>
           </a:lstStyle>
           <a:p>
-            <a:pPr/>
             <a:r>
               <a:t>本文レベル1</a:t>
             </a:r>
@@ -607,7 +619,9 @@
       <p:sp>
         <p:nvSpPr>
           <p:cNvPr id="13" name="スライド番号"/>
-          <p:cNvSpPr txBox="1"/>
+          <p:cNvSpPr txBox="1">
+            <a:spLocks noGrp="1"/>
+          </p:cNvSpPr>
           <p:nvPr>
             <p:ph type="sldNum" sz="quarter" idx="2"/>
           </p:nvPr>
@@ -621,8 +635,10 @@
           <a:bodyPr/>
           <a:lstStyle/>
           <a:p>
-            <a:pPr/>
-            <a:fld id="{86CB4B4D-7CA3-9044-876B-883B54F8677D}" type="slidenum"/>
+            <a:fld id="{86CB4B4D-7CA3-9044-876B-883B54F8677D}" type="slidenum">
+              <a:t>‹#›</a:t>
+            </a:fld>
+            <a:endParaRPr/>
           </a:p>
         </p:txBody>
       </p:sp>
@@ -631,12 +647,12 @@
   <p:clrMapOvr>
     <a:masterClrMapping/>
   </p:clrMapOvr>
-  <p:transition xmlns:p14="http://schemas.microsoft.com/office/powerpoint/2010/main" spd="med" advClick="1"/>
+  <p:transition spd="med"/>
 </p:sldLayout>
 </file>
 
 <file path=ppt/slideLayouts/slideLayout2.xml><?xml version="1.0" encoding="utf-8"?>
-<p:sldLayout xmlns:a="http://schemas.openxmlformats.org/drawingml/2006/main" xmlns:r="http://schemas.openxmlformats.org/officeDocument/2006/relationships" xmlns:p="http://schemas.openxmlformats.org/presentationml/2006/main" xmlns:m="http://schemas.openxmlformats.org/officeDocument/2006/math" xmlns:a14="http://schemas.microsoft.com/office/drawing/2010/main" type="tx" showMasterSp="1" showMasterPhAnim="1">
+<p:sldLayout xmlns:a="http://schemas.openxmlformats.org/drawingml/2006/main" xmlns:r="http://schemas.openxmlformats.org/officeDocument/2006/relationships" xmlns:p="http://schemas.openxmlformats.org/presentationml/2006/main" type="tx">
   <p:cSld name="タイトルとコンテンツ">
     <p:spTree>
       <p:nvGrpSpPr>
@@ -655,7 +671,9 @@
       <p:sp>
         <p:nvSpPr>
           <p:cNvPr id="20" name="タイトルテキスト"/>
-          <p:cNvSpPr txBox="1"/>
+          <p:cNvSpPr txBox="1">
+            <a:spLocks noGrp="1"/>
+          </p:cNvSpPr>
           <p:nvPr>
             <p:ph type="title"/>
           </p:nvPr>
@@ -669,7 +687,6 @@
           <a:bodyPr/>
           <a:lstStyle/>
           <a:p>
-            <a:pPr/>
             <a:r>
               <a:t>タイトルテキスト</a:t>
             </a:r>
@@ -679,7 +696,9 @@
       <p:sp>
         <p:nvSpPr>
           <p:cNvPr id="21" name="本文レベル1…"/>
-          <p:cNvSpPr txBox="1"/>
+          <p:cNvSpPr txBox="1">
+            <a:spLocks noGrp="1"/>
+          </p:cNvSpPr>
           <p:nvPr>
             <p:ph type="body" idx="1"/>
           </p:nvPr>
@@ -693,7 +712,6 @@
           <a:bodyPr/>
           <a:lstStyle/>
           <a:p>
-            <a:pPr/>
             <a:r>
               <a:t>本文レベル1</a:t>
             </a:r>
@@ -727,7 +745,9 @@
       <p:sp>
         <p:nvSpPr>
           <p:cNvPr id="22" name="スライド番号"/>
-          <p:cNvSpPr txBox="1"/>
+          <p:cNvSpPr txBox="1">
+            <a:spLocks noGrp="1"/>
+          </p:cNvSpPr>
           <p:nvPr>
             <p:ph type="sldNum" sz="quarter" idx="2"/>
           </p:nvPr>
@@ -741,8 +761,10 @@
           <a:bodyPr/>
           <a:lstStyle/>
           <a:p>
-            <a:pPr/>
-            <a:fld id="{86CB4B4D-7CA3-9044-876B-883B54F8677D}" type="slidenum"/>
+            <a:fld id="{86CB4B4D-7CA3-9044-876B-883B54F8677D}" type="slidenum">
+              <a:t>‹#›</a:t>
+            </a:fld>
+            <a:endParaRPr/>
           </a:p>
         </p:txBody>
       </p:sp>
@@ -751,12 +773,12 @@
   <p:clrMapOvr>
     <a:masterClrMapping/>
   </p:clrMapOvr>
-  <p:transition xmlns:p14="http://schemas.microsoft.com/office/powerpoint/2010/main" spd="med" advClick="1"/>
+  <p:transition spd="med"/>
 </p:sldLayout>
 </file>
 
 <file path=ppt/slideLayouts/slideLayout3.xml><?xml version="1.0" encoding="utf-8"?>
-<p:sldLayout xmlns:a="http://schemas.openxmlformats.org/drawingml/2006/main" xmlns:r="http://schemas.openxmlformats.org/officeDocument/2006/relationships" xmlns:p="http://schemas.openxmlformats.org/presentationml/2006/main" xmlns:m="http://schemas.openxmlformats.org/officeDocument/2006/math" xmlns:a14="http://schemas.microsoft.com/office/drawing/2010/main" type="tx" showMasterSp="1" showMasterPhAnim="1">
+<p:sldLayout xmlns:a="http://schemas.openxmlformats.org/drawingml/2006/main" xmlns:r="http://schemas.openxmlformats.org/officeDocument/2006/relationships" xmlns:p="http://schemas.openxmlformats.org/presentationml/2006/main" type="tx">
   <p:cSld name="セクション見出し">
     <p:spTree>
       <p:nvGrpSpPr>
@@ -775,7 +797,9 @@
       <p:sp>
         <p:nvSpPr>
           <p:cNvPr id="29" name="タイトルテキスト"/>
-          <p:cNvSpPr txBox="1"/>
+          <p:cNvSpPr txBox="1">
+            <a:spLocks noGrp="1"/>
+          </p:cNvSpPr>
           <p:nvPr>
             <p:ph type="title"/>
           </p:nvPr>
@@ -797,7 +821,6 @@
             </a:lvl1pPr>
           </a:lstStyle>
           <a:p>
-            <a:pPr/>
             <a:r>
               <a:t>タイトルテキスト</a:t>
             </a:r>
@@ -807,7 +830,9 @@
       <p:sp>
         <p:nvSpPr>
           <p:cNvPr id="30" name="本文レベル1…"/>
-          <p:cNvSpPr txBox="1"/>
+          <p:cNvSpPr txBox="1">
+            <a:spLocks noGrp="1"/>
+          </p:cNvSpPr>
           <p:nvPr>
             <p:ph type="body" sz="quarter" idx="1"/>
           </p:nvPr>
@@ -876,7 +901,6 @@
             </a:lvl5pPr>
           </a:lstStyle>
           <a:p>
-            <a:pPr/>
             <a:r>
               <a:t>本文レベル1</a:t>
             </a:r>
@@ -910,7 +934,9 @@
       <p:sp>
         <p:nvSpPr>
           <p:cNvPr id="31" name="スライド番号"/>
-          <p:cNvSpPr txBox="1"/>
+          <p:cNvSpPr txBox="1">
+            <a:spLocks noGrp="1"/>
+          </p:cNvSpPr>
           <p:nvPr>
             <p:ph type="sldNum" sz="quarter" idx="2"/>
           </p:nvPr>
@@ -924,8 +950,10 @@
           <a:bodyPr/>
           <a:lstStyle/>
           <a:p>
-            <a:pPr/>
-            <a:fld id="{86CB4B4D-7CA3-9044-876B-883B54F8677D}" type="slidenum"/>
+            <a:fld id="{86CB4B4D-7CA3-9044-876B-883B54F8677D}" type="slidenum">
+              <a:t>‹#›</a:t>
+            </a:fld>
+            <a:endParaRPr/>
           </a:p>
         </p:txBody>
       </p:sp>
@@ -934,12 +962,12 @@
   <p:clrMapOvr>
     <a:masterClrMapping/>
   </p:clrMapOvr>
-  <p:transition xmlns:p14="http://schemas.microsoft.com/office/powerpoint/2010/main" spd="med" advClick="1"/>
+  <p:transition spd="med"/>
 </p:sldLayout>
 </file>
 
 <file path=ppt/slideLayouts/slideLayout4.xml><?xml version="1.0" encoding="utf-8"?>
-<p:sldLayout xmlns:a="http://schemas.openxmlformats.org/drawingml/2006/main" xmlns:r="http://schemas.openxmlformats.org/officeDocument/2006/relationships" xmlns:p="http://schemas.openxmlformats.org/presentationml/2006/main" xmlns:m="http://schemas.openxmlformats.org/officeDocument/2006/math" xmlns:a14="http://schemas.microsoft.com/office/drawing/2010/main" type="tx" showMasterSp="1" showMasterPhAnim="1">
+<p:sldLayout xmlns:a="http://schemas.openxmlformats.org/drawingml/2006/main" xmlns:r="http://schemas.openxmlformats.org/officeDocument/2006/relationships" xmlns:p="http://schemas.openxmlformats.org/presentationml/2006/main" type="tx">
   <p:cSld name="2 つのコンテンツ">
     <p:spTree>
       <p:nvGrpSpPr>
@@ -958,7 +986,9 @@
       <p:sp>
         <p:nvSpPr>
           <p:cNvPr id="38" name="タイトルテキスト"/>
-          <p:cNvSpPr txBox="1"/>
+          <p:cNvSpPr txBox="1">
+            <a:spLocks noGrp="1"/>
+          </p:cNvSpPr>
           <p:nvPr>
             <p:ph type="title"/>
           </p:nvPr>
@@ -972,7 +1002,6 @@
           <a:bodyPr/>
           <a:lstStyle/>
           <a:p>
-            <a:pPr/>
             <a:r>
               <a:t>タイトルテキスト</a:t>
             </a:r>
@@ -982,7 +1011,9 @@
       <p:sp>
         <p:nvSpPr>
           <p:cNvPr id="39" name="本文レベル1…"/>
-          <p:cNvSpPr txBox="1"/>
+          <p:cNvSpPr txBox="1">
+            <a:spLocks noGrp="1"/>
+          </p:cNvSpPr>
           <p:nvPr>
             <p:ph type="body" sz="half" idx="1"/>
           </p:nvPr>
@@ -1000,7 +1031,6 @@
           <a:bodyPr/>
           <a:lstStyle/>
           <a:p>
-            <a:pPr/>
             <a:r>
               <a:t>本文レベル1</a:t>
             </a:r>
@@ -1034,7 +1064,9 @@
       <p:sp>
         <p:nvSpPr>
           <p:cNvPr id="40" name="スライド番号"/>
-          <p:cNvSpPr txBox="1"/>
+          <p:cNvSpPr txBox="1">
+            <a:spLocks noGrp="1"/>
+          </p:cNvSpPr>
           <p:nvPr>
             <p:ph type="sldNum" sz="quarter" idx="2"/>
           </p:nvPr>
@@ -1048,8 +1080,10 @@
           <a:bodyPr/>
           <a:lstStyle/>
           <a:p>
-            <a:pPr/>
-            <a:fld id="{86CB4B4D-7CA3-9044-876B-883B54F8677D}" type="slidenum"/>
+            <a:fld id="{86CB4B4D-7CA3-9044-876B-883B54F8677D}" type="slidenum">
+              <a:t>‹#›</a:t>
+            </a:fld>
+            <a:endParaRPr/>
           </a:p>
         </p:txBody>
       </p:sp>
@@ -1058,12 +1092,12 @@
   <p:clrMapOvr>
     <a:masterClrMapping/>
   </p:clrMapOvr>
-  <p:transition xmlns:p14="http://schemas.microsoft.com/office/powerpoint/2010/main" spd="med" advClick="1"/>
+  <p:transition spd="med"/>
 </p:sldLayout>
 </file>
 
 <file path=ppt/slideLayouts/slideLayout5.xml><?xml version="1.0" encoding="utf-8"?>
-<p:sldLayout xmlns:a="http://schemas.openxmlformats.org/drawingml/2006/main" xmlns:r="http://schemas.openxmlformats.org/officeDocument/2006/relationships" xmlns:p="http://schemas.openxmlformats.org/presentationml/2006/main" xmlns:m="http://schemas.openxmlformats.org/officeDocument/2006/math" xmlns:a14="http://schemas.microsoft.com/office/drawing/2010/main" type="tx" showMasterSp="1" showMasterPhAnim="1">
+<p:sldLayout xmlns:a="http://schemas.openxmlformats.org/drawingml/2006/main" xmlns:r="http://schemas.openxmlformats.org/officeDocument/2006/relationships" xmlns:p="http://schemas.openxmlformats.org/presentationml/2006/main" type="tx">
   <p:cSld name="比較">
     <p:spTree>
       <p:nvGrpSpPr>
@@ -1082,7 +1116,9 @@
       <p:sp>
         <p:nvSpPr>
           <p:cNvPr id="47" name="タイトルテキスト"/>
-          <p:cNvSpPr txBox="1"/>
+          <p:cNvSpPr txBox="1">
+            <a:spLocks noGrp="1"/>
+          </p:cNvSpPr>
           <p:nvPr>
             <p:ph type="title"/>
           </p:nvPr>
@@ -1100,7 +1136,6 @@
           <a:bodyPr/>
           <a:lstStyle/>
           <a:p>
-            <a:pPr/>
             <a:r>
               <a:t>タイトルテキスト</a:t>
             </a:r>
@@ -1110,7 +1145,9 @@
       <p:sp>
         <p:nvSpPr>
           <p:cNvPr id="48" name="本文レベル1…"/>
-          <p:cNvSpPr txBox="1"/>
+          <p:cNvSpPr txBox="1">
+            <a:spLocks noGrp="1"/>
+          </p:cNvSpPr>
           <p:nvPr>
             <p:ph type="body" sz="quarter" idx="1"/>
           </p:nvPr>
@@ -1131,7 +1168,7 @@
               <a:buSzTx/>
               <a:buFontTx/>
               <a:buNone/>
-              <a:defRPr b="1" sz="1800">
+              <a:defRPr sz="1800" b="1">
                 <a:latin typeface="JostRoman-Bold"/>
                 <a:ea typeface="JostRoman-Bold"/>
                 <a:cs typeface="JostRoman-Bold"/>
@@ -1142,7 +1179,7 @@
               <a:buSzTx/>
               <a:buFontTx/>
               <a:buNone/>
-              <a:defRPr b="1" sz="1800">
+              <a:defRPr sz="1800" b="1">
                 <a:latin typeface="JostRoman-Bold"/>
                 <a:ea typeface="JostRoman-Bold"/>
                 <a:cs typeface="JostRoman-Bold"/>
@@ -1153,7 +1190,7 @@
               <a:buSzTx/>
               <a:buFontTx/>
               <a:buNone/>
-              <a:defRPr b="1" sz="1800">
+              <a:defRPr sz="1800" b="1">
                 <a:latin typeface="JostRoman-Bold"/>
                 <a:ea typeface="JostRoman-Bold"/>
                 <a:cs typeface="JostRoman-Bold"/>
@@ -1164,7 +1201,7 @@
               <a:buSzTx/>
               <a:buFontTx/>
               <a:buNone/>
-              <a:defRPr b="1" sz="1800">
+              <a:defRPr sz="1800" b="1">
                 <a:latin typeface="JostRoman-Bold"/>
                 <a:ea typeface="JostRoman-Bold"/>
                 <a:cs typeface="JostRoman-Bold"/>
@@ -1175,7 +1212,7 @@
               <a:buSzTx/>
               <a:buFontTx/>
               <a:buNone/>
-              <a:defRPr b="1" sz="1800">
+              <a:defRPr sz="1800" b="1">
                 <a:latin typeface="JostRoman-Bold"/>
                 <a:ea typeface="JostRoman-Bold"/>
                 <a:cs typeface="JostRoman-Bold"/>
@@ -1184,7 +1221,6 @@
             </a:lvl5pPr>
           </a:lstStyle>
           <a:p>
-            <a:pPr/>
             <a:r>
               <a:t>本文レベル1</a:t>
             </a:r>
@@ -1218,7 +1254,9 @@
       <p:sp>
         <p:nvSpPr>
           <p:cNvPr id="49" name="Text Placeholder 4"/>
-          <p:cNvSpPr/>
+          <p:cNvSpPr>
+            <a:spLocks noGrp="1"/>
+          </p:cNvSpPr>
           <p:nvPr>
             <p:ph type="body" sz="quarter" idx="21"/>
           </p:nvPr>
@@ -1240,20 +1278,23 @@
               <a:buSzTx/>
               <a:buFontTx/>
               <a:buNone/>
-              <a:defRPr b="1" sz="1800">
+              <a:defRPr sz="1800" b="1">
                 <a:latin typeface="JostRoman-Bold"/>
                 <a:ea typeface="JostRoman-Bold"/>
                 <a:cs typeface="JostRoman-Bold"/>
                 <a:sym typeface="JostRoman-Bold"/>
               </a:defRPr>
             </a:pPr>
+            <a:endParaRPr/>
           </a:p>
         </p:txBody>
       </p:sp>
       <p:sp>
         <p:nvSpPr>
           <p:cNvPr id="50" name="スライド番号"/>
-          <p:cNvSpPr txBox="1"/>
+          <p:cNvSpPr txBox="1">
+            <a:spLocks noGrp="1"/>
+          </p:cNvSpPr>
           <p:nvPr>
             <p:ph type="sldNum" sz="quarter" idx="2"/>
           </p:nvPr>
@@ -1267,8 +1308,10 @@
           <a:bodyPr/>
           <a:lstStyle/>
           <a:p>
-            <a:pPr/>
-            <a:fld id="{86CB4B4D-7CA3-9044-876B-883B54F8677D}" type="slidenum"/>
+            <a:fld id="{86CB4B4D-7CA3-9044-876B-883B54F8677D}" type="slidenum">
+              <a:t>‹#›</a:t>
+            </a:fld>
+            <a:endParaRPr/>
           </a:p>
         </p:txBody>
       </p:sp>
@@ -1277,12 +1320,12 @@
   <p:clrMapOvr>
     <a:masterClrMapping/>
   </p:clrMapOvr>
-  <p:transition xmlns:p14="http://schemas.microsoft.com/office/powerpoint/2010/main" spd="med" advClick="1"/>
+  <p:transition spd="med"/>
 </p:sldLayout>
 </file>
 
 <file path=ppt/slideLayouts/slideLayout6.xml><?xml version="1.0" encoding="utf-8"?>
-<p:sldLayout xmlns:a="http://schemas.openxmlformats.org/drawingml/2006/main" xmlns:r="http://schemas.openxmlformats.org/officeDocument/2006/relationships" xmlns:p="http://schemas.openxmlformats.org/presentationml/2006/main" xmlns:m="http://schemas.openxmlformats.org/officeDocument/2006/math" xmlns:a14="http://schemas.microsoft.com/office/drawing/2010/main" type="tx" showMasterSp="1" showMasterPhAnim="1">
+<p:sldLayout xmlns:a="http://schemas.openxmlformats.org/drawingml/2006/main" xmlns:r="http://schemas.openxmlformats.org/officeDocument/2006/relationships" xmlns:p="http://schemas.openxmlformats.org/presentationml/2006/main" type="tx">
   <p:cSld name="タイトルのみ">
     <p:spTree>
       <p:nvGrpSpPr>
@@ -1301,7 +1344,9 @@
       <p:sp>
         <p:nvSpPr>
           <p:cNvPr id="57" name="タイトルテキスト"/>
-          <p:cNvSpPr txBox="1"/>
+          <p:cNvSpPr txBox="1">
+            <a:spLocks noGrp="1"/>
+          </p:cNvSpPr>
           <p:nvPr>
             <p:ph type="title"/>
           </p:nvPr>
@@ -1315,7 +1360,6 @@
           <a:bodyPr/>
           <a:lstStyle/>
           <a:p>
-            <a:pPr/>
             <a:r>
               <a:t>タイトルテキスト</a:t>
             </a:r>
@@ -1325,7 +1369,9 @@
       <p:sp>
         <p:nvSpPr>
           <p:cNvPr id="58" name="スライド番号"/>
-          <p:cNvSpPr txBox="1"/>
+          <p:cNvSpPr txBox="1">
+            <a:spLocks noGrp="1"/>
+          </p:cNvSpPr>
           <p:nvPr>
             <p:ph type="sldNum" sz="quarter" idx="2"/>
           </p:nvPr>
@@ -1339,8 +1385,10 @@
           <a:bodyPr/>
           <a:lstStyle/>
           <a:p>
-            <a:pPr/>
-            <a:fld id="{86CB4B4D-7CA3-9044-876B-883B54F8677D}" type="slidenum"/>
+            <a:fld id="{86CB4B4D-7CA3-9044-876B-883B54F8677D}" type="slidenum">
+              <a:t>‹#›</a:t>
+            </a:fld>
+            <a:endParaRPr/>
           </a:p>
         </p:txBody>
       </p:sp>
@@ -1349,12 +1397,12 @@
   <p:clrMapOvr>
     <a:masterClrMapping/>
   </p:clrMapOvr>
-  <p:transition xmlns:p14="http://schemas.microsoft.com/office/powerpoint/2010/main" spd="med" advClick="1"/>
+  <p:transition spd="med"/>
 </p:sldLayout>
 </file>
 
 <file path=ppt/slideLayouts/slideLayout7.xml><?xml version="1.0" encoding="utf-8"?>
-<p:sldLayout xmlns:a="http://schemas.openxmlformats.org/drawingml/2006/main" xmlns:r="http://schemas.openxmlformats.org/officeDocument/2006/relationships" xmlns:p="http://schemas.openxmlformats.org/presentationml/2006/main" xmlns:m="http://schemas.openxmlformats.org/officeDocument/2006/math" xmlns:a14="http://schemas.microsoft.com/office/drawing/2010/main" type="tx" showMasterSp="1" showMasterPhAnim="1">
+<p:sldLayout xmlns:a="http://schemas.openxmlformats.org/drawingml/2006/main" xmlns:r="http://schemas.openxmlformats.org/officeDocument/2006/relationships" xmlns:p="http://schemas.openxmlformats.org/presentationml/2006/main" type="tx">
   <p:cSld name="白紙">
     <p:spTree>
       <p:nvGrpSpPr>
@@ -1373,7 +1421,9 @@
       <p:sp>
         <p:nvSpPr>
           <p:cNvPr id="65" name="スライド番号"/>
-          <p:cNvSpPr txBox="1"/>
+          <p:cNvSpPr txBox="1">
+            <a:spLocks noGrp="1"/>
+          </p:cNvSpPr>
           <p:nvPr>
             <p:ph type="sldNum" sz="quarter" idx="2"/>
           </p:nvPr>
@@ -1387,8 +1437,10 @@
           <a:bodyPr/>
           <a:lstStyle/>
           <a:p>
-            <a:pPr/>
-            <a:fld id="{86CB4B4D-7CA3-9044-876B-883B54F8677D}" type="slidenum"/>
+            <a:fld id="{86CB4B4D-7CA3-9044-876B-883B54F8677D}" type="slidenum">
+              <a:t>‹#›</a:t>
+            </a:fld>
+            <a:endParaRPr/>
           </a:p>
         </p:txBody>
       </p:sp>
@@ -1397,12 +1449,12 @@
   <p:clrMapOvr>
     <a:masterClrMapping/>
   </p:clrMapOvr>
-  <p:transition xmlns:p14="http://schemas.microsoft.com/office/powerpoint/2010/main" spd="med" advClick="1"/>
+  <p:transition spd="med"/>
 </p:sldLayout>
 </file>
 
 <file path=ppt/slideLayouts/slideLayout8.xml><?xml version="1.0" encoding="utf-8"?>
-<p:sldLayout xmlns:a="http://schemas.openxmlformats.org/drawingml/2006/main" xmlns:r="http://schemas.openxmlformats.org/officeDocument/2006/relationships" xmlns:p="http://schemas.openxmlformats.org/presentationml/2006/main" xmlns:m="http://schemas.openxmlformats.org/officeDocument/2006/math" xmlns:a14="http://schemas.microsoft.com/office/drawing/2010/main" type="tx" showMasterSp="1" showMasterPhAnim="1">
+<p:sldLayout xmlns:a="http://schemas.openxmlformats.org/drawingml/2006/main" xmlns:r="http://schemas.openxmlformats.org/officeDocument/2006/relationships" xmlns:p="http://schemas.openxmlformats.org/presentationml/2006/main" type="tx">
   <p:cSld name="タイトル付きのコンテンツ">
     <p:spTree>
       <p:nvGrpSpPr>
@@ -1421,7 +1473,9 @@
       <p:sp>
         <p:nvSpPr>
           <p:cNvPr id="72" name="タイトルテキスト"/>
-          <p:cNvSpPr txBox="1"/>
+          <p:cNvSpPr txBox="1">
+            <a:spLocks noGrp="1"/>
+          </p:cNvSpPr>
           <p:nvPr>
             <p:ph type="title"/>
           </p:nvPr>
@@ -1443,7 +1497,6 @@
             </a:lvl1pPr>
           </a:lstStyle>
           <a:p>
-            <a:pPr/>
             <a:r>
               <a:t>タイトルテキスト</a:t>
             </a:r>
@@ -1453,7 +1506,9 @@
       <p:sp>
         <p:nvSpPr>
           <p:cNvPr id="73" name="本文レベル1…"/>
-          <p:cNvSpPr txBox="1"/>
+          <p:cNvSpPr txBox="1">
+            <a:spLocks noGrp="1"/>
+          </p:cNvSpPr>
           <p:nvPr>
             <p:ph type="body" sz="half" idx="1"/>
           </p:nvPr>
@@ -1487,7 +1542,6 @@
             </a:lvl5pPr>
           </a:lstStyle>
           <a:p>
-            <a:pPr/>
             <a:r>
               <a:t>本文レベル1</a:t>
             </a:r>
@@ -1521,7 +1575,9 @@
       <p:sp>
         <p:nvSpPr>
           <p:cNvPr id="74" name="Text Placeholder 3"/>
-          <p:cNvSpPr/>
+          <p:cNvSpPr>
+            <a:spLocks noGrp="1"/>
+          </p:cNvSpPr>
           <p:nvPr>
             <p:ph type="body" sz="quarter" idx="21"/>
           </p:nvPr>
@@ -1545,13 +1601,16 @@
               <a:buNone/>
               <a:defRPr sz="1200"/>
             </a:pPr>
+            <a:endParaRPr/>
           </a:p>
         </p:txBody>
       </p:sp>
       <p:sp>
         <p:nvSpPr>
           <p:cNvPr id="75" name="スライド番号"/>
-          <p:cNvSpPr txBox="1"/>
+          <p:cNvSpPr txBox="1">
+            <a:spLocks noGrp="1"/>
+          </p:cNvSpPr>
           <p:nvPr>
             <p:ph type="sldNum" sz="quarter" idx="2"/>
           </p:nvPr>
@@ -1565,8 +1624,10 @@
           <a:bodyPr/>
           <a:lstStyle/>
           <a:p>
-            <a:pPr/>
-            <a:fld id="{86CB4B4D-7CA3-9044-876B-883B54F8677D}" type="slidenum"/>
+            <a:fld id="{86CB4B4D-7CA3-9044-876B-883B54F8677D}" type="slidenum">
+              <a:t>‹#›</a:t>
+            </a:fld>
+            <a:endParaRPr/>
           </a:p>
         </p:txBody>
       </p:sp>
@@ -1575,12 +1636,12 @@
   <p:clrMapOvr>
     <a:masterClrMapping/>
   </p:clrMapOvr>
-  <p:transition xmlns:p14="http://schemas.microsoft.com/office/powerpoint/2010/main" spd="med" advClick="1"/>
+  <p:transition spd="med"/>
 </p:sldLayout>
 </file>
 
 <file path=ppt/slideLayouts/slideLayout9.xml><?xml version="1.0" encoding="utf-8"?>
-<p:sldLayout xmlns:a="http://schemas.openxmlformats.org/drawingml/2006/main" xmlns:r="http://schemas.openxmlformats.org/officeDocument/2006/relationships" xmlns:p="http://schemas.openxmlformats.org/presentationml/2006/main" xmlns:m="http://schemas.openxmlformats.org/officeDocument/2006/math" xmlns:a14="http://schemas.microsoft.com/office/drawing/2010/main" type="tx" showMasterSp="1" showMasterPhAnim="1">
+<p:sldLayout xmlns:a="http://schemas.openxmlformats.org/drawingml/2006/main" xmlns:r="http://schemas.openxmlformats.org/officeDocument/2006/relationships" xmlns:p="http://schemas.openxmlformats.org/presentationml/2006/main" type="tx">
   <p:cSld name="タイトル付きの図">
     <p:spTree>
       <p:nvGrpSpPr>
@@ -1599,7 +1660,9 @@
       <p:sp>
         <p:nvSpPr>
           <p:cNvPr id="82" name="タイトルテキスト"/>
-          <p:cNvSpPr txBox="1"/>
+          <p:cNvSpPr txBox="1">
+            <a:spLocks noGrp="1"/>
+          </p:cNvSpPr>
           <p:nvPr>
             <p:ph type="title"/>
           </p:nvPr>
@@ -1621,7 +1684,6 @@
             </a:lvl1pPr>
           </a:lstStyle>
           <a:p>
-            <a:pPr/>
             <a:r>
               <a:t>タイトルテキスト</a:t>
             </a:r>
@@ -1631,7 +1693,9 @@
       <p:sp>
         <p:nvSpPr>
           <p:cNvPr id="83" name="Picture Placeholder 2"/>
-          <p:cNvSpPr/>
+          <p:cNvSpPr>
+            <a:spLocks noGrp="1"/>
+          </p:cNvSpPr>
           <p:nvPr>
             <p:ph type="pic" sz="half" idx="21"/>
           </p:nvPr>
@@ -1651,14 +1715,16 @@
           </a:bodyPr>
           <a:lstStyle/>
           <a:p>
-            <a:pPr/>
+            <a:endParaRPr/>
           </a:p>
         </p:txBody>
       </p:sp>
       <p:sp>
         <p:nvSpPr>
           <p:cNvPr id="84" name="本文レベル1…"/>
-          <p:cNvSpPr txBox="1"/>
+          <p:cNvSpPr txBox="1">
+            <a:spLocks noGrp="1"/>
+          </p:cNvSpPr>
           <p:nvPr>
             <p:ph type="body" sz="quarter" idx="1"/>
           </p:nvPr>
@@ -1707,7 +1773,6 @@
             </a:lvl5pPr>
           </a:lstStyle>
           <a:p>
-            <a:pPr/>
             <a:r>
               <a:t>本文レベル1</a:t>
             </a:r>
@@ -1741,7 +1806,9 @@
       <p:sp>
         <p:nvSpPr>
           <p:cNvPr id="85" name="スライド番号"/>
-          <p:cNvSpPr txBox="1"/>
+          <p:cNvSpPr txBox="1">
+            <a:spLocks noGrp="1"/>
+          </p:cNvSpPr>
           <p:nvPr>
             <p:ph type="sldNum" sz="quarter" idx="2"/>
           </p:nvPr>
@@ -1755,8 +1822,10 @@
           <a:bodyPr/>
           <a:lstStyle/>
           <a:p>
-            <a:pPr/>
-            <a:fld id="{86CB4B4D-7CA3-9044-876B-883B54F8677D}" type="slidenum"/>
+            <a:fld id="{86CB4B4D-7CA3-9044-876B-883B54F8677D}" type="slidenum">
+              <a:t>‹#›</a:t>
+            </a:fld>
+            <a:endParaRPr/>
           </a:p>
         </p:txBody>
       </p:sp>
@@ -1765,18 +1834,19 @@
   <p:clrMapOvr>
     <a:masterClrMapping/>
   </p:clrMapOvr>
-  <p:transition xmlns:p14="http://schemas.microsoft.com/office/powerpoint/2010/main" spd="med" advClick="1"/>
+  <p:transition spd="med"/>
 </p:sldLayout>
 </file>
 
 <file path=ppt/slideMasters/slideMaster1.xml><?xml version="1.0" encoding="utf-8"?>
-<p:sldMaster xmlns:a="http://schemas.openxmlformats.org/drawingml/2006/main" xmlns:r="http://schemas.openxmlformats.org/officeDocument/2006/relationships" xmlns:p="http://schemas.openxmlformats.org/presentationml/2006/main" xmlns:m="http://schemas.openxmlformats.org/officeDocument/2006/math" xmlns:a14="http://schemas.microsoft.com/office/drawing/2010/main">
+<p:sldMaster xmlns:a="http://schemas.openxmlformats.org/drawingml/2006/main" xmlns:r="http://schemas.openxmlformats.org/officeDocument/2006/relationships" xmlns:p="http://schemas.openxmlformats.org/presentationml/2006/main">
   <p:cSld>
     <p:bg>
       <p:bgPr>
         <a:solidFill>
           <a:srgbClr val="FFFFFF"/>
         </a:solidFill>
+        <a:effectLst/>
       </p:bgPr>
     </p:bg>
     <p:spTree>
@@ -1796,7 +1866,9 @@
       <p:sp>
         <p:nvSpPr>
           <p:cNvPr id="2" name="タイトルテキスト"/>
-          <p:cNvSpPr txBox="1"/>
+          <p:cNvSpPr txBox="1">
+            <a:spLocks noGrp="1"/>
+          </p:cNvSpPr>
           <p:nvPr>
             <p:ph type="title"/>
           </p:nvPr>
@@ -1814,17 +1886,16 @@
           </a:ln>
           <a:extLst>
             <a:ext uri="{C572A759-6A51-4108-AA02-DFA0A04FC94B}">
-              <ma14:wrappingTextBoxFlag xmlns:ma14="http://schemas.microsoft.com/office/mac/drawingml/2011/main" val="1"/>
+              <ma14:wrappingTextBoxFlag xmlns="" xmlns:m="http://schemas.openxmlformats.org/officeDocument/2006/math" xmlns:a14="http://schemas.microsoft.com/office/drawing/2010/main" xmlns:ma14="http://schemas.microsoft.com/office/mac/drawingml/2011/main" val="1"/>
             </a:ext>
           </a:extLst>
         </p:spPr>
         <p:txBody>
           <a:bodyPr lIns="45719" rIns="45719" anchor="ctr">
-            <a:normAutofit fontScale="100000" lnSpcReduction="0"/>
+            <a:normAutofit/>
           </a:bodyPr>
           <a:lstStyle/>
           <a:p>
-            <a:pPr/>
             <a:r>
               <a:t>タイトルテキスト</a:t>
             </a:r>
@@ -1834,7 +1905,9 @@
       <p:sp>
         <p:nvSpPr>
           <p:cNvPr id="3" name="本文レベル1…"/>
-          <p:cNvSpPr txBox="1"/>
+          <p:cNvSpPr txBox="1">
+            <a:spLocks noGrp="1"/>
+          </p:cNvSpPr>
           <p:nvPr>
             <p:ph type="body" idx="1"/>
           </p:nvPr>
@@ -1852,17 +1925,16 @@
           </a:ln>
           <a:extLst>
             <a:ext uri="{C572A759-6A51-4108-AA02-DFA0A04FC94B}">
-              <ma14:wrappingTextBoxFlag xmlns:ma14="http://schemas.microsoft.com/office/mac/drawingml/2011/main" val="1"/>
+              <ma14:wrappingTextBoxFlag xmlns="" xmlns:m="http://schemas.openxmlformats.org/officeDocument/2006/math" xmlns:a14="http://schemas.microsoft.com/office/drawing/2010/main" xmlns:ma14="http://schemas.microsoft.com/office/mac/drawingml/2011/main" val="1"/>
             </a:ext>
           </a:extLst>
         </p:spPr>
         <p:txBody>
           <a:bodyPr lIns="45719" rIns="45719">
-            <a:normAutofit fontScale="100000" lnSpcReduction="0"/>
+            <a:normAutofit/>
           </a:bodyPr>
           <a:lstStyle/>
           <a:p>
-            <a:pPr/>
             <a:r>
               <a:t>本文レベル1</a:t>
             </a:r>
@@ -1896,7 +1968,9 @@
       <p:sp>
         <p:nvSpPr>
           <p:cNvPr id="4" name="スライド番号"/>
-          <p:cNvSpPr txBox="1"/>
+          <p:cNvSpPr txBox="1">
+            <a:spLocks noGrp="1"/>
+          </p:cNvSpPr>
           <p:nvPr>
             <p:ph type="sldNum" sz="quarter" idx="2"/>
           </p:nvPr>
@@ -1927,8 +2001,10 @@
             </a:lvl1pPr>
           </a:lstStyle>
           <a:p>
-            <a:pPr/>
-            <a:fld id="{86CB4B4D-7CA3-9044-876B-883B54F8677D}" type="slidenum"/>
+            <a:fld id="{86CB4B4D-7CA3-9044-876B-883B54F8677D}" type="slidenum">
+              <a:t>‹#›</a:t>
+            </a:fld>
+            <a:endParaRPr/>
           </a:p>
         </p:txBody>
       </p:sp>
@@ -1936,17 +2012,17 @@
   </p:cSld>
   <p:clrMap bg1="lt1" tx1="dk1" bg2="lt2" tx2="dk2" accent1="accent1" accent2="accent2" accent3="accent3" accent4="accent4" accent5="accent5" accent6="accent6" hlink="hlink" folHlink="folHlink"/>
   <p:sldLayoutIdLst>
-    <p:sldLayoutId id="2147483649" r:id="rId2"/>
-    <p:sldLayoutId id="2147483650" r:id="rId3"/>
-    <p:sldLayoutId id="2147483651" r:id="rId4"/>
-    <p:sldLayoutId id="2147483652" r:id="rId5"/>
-    <p:sldLayoutId id="2147483653" r:id="rId6"/>
-    <p:sldLayoutId id="2147483654" r:id="rId7"/>
-    <p:sldLayoutId id="2147483655" r:id="rId8"/>
-    <p:sldLayoutId id="2147483656" r:id="rId9"/>
-    <p:sldLayoutId id="2147483657" r:id="rId10"/>
+    <p:sldLayoutId id="2147483649" r:id="rId1"/>
+    <p:sldLayoutId id="2147483650" r:id="rId2"/>
+    <p:sldLayoutId id="2147483651" r:id="rId3"/>
+    <p:sldLayoutId id="2147483652" r:id="rId4"/>
+    <p:sldLayoutId id="2147483653" r:id="rId5"/>
+    <p:sldLayoutId id="2147483654" r:id="rId6"/>
+    <p:sldLayoutId id="2147483655" r:id="rId7"/>
+    <p:sldLayoutId id="2147483656" r:id="rId8"/>
+    <p:sldLayoutId id="2147483657" r:id="rId9"/>
   </p:sldLayoutIdLst>
-  <p:transition xmlns:p14="http://schemas.microsoft.com/office/powerpoint/2010/main" spd="med" advClick="1"/>
+  <p:transition spd="med"/>
   <p:txStyles>
     <p:titleStyle>
       <a:lvl1pPr marL="0" marR="0" indent="0" algn="l" defTabSz="685800" rtl="0" latinLnBrk="0">
@@ -1964,7 +2040,7 @@
         <a:buFontTx/>
         <a:buNone/>
         <a:tabLst/>
-        <a:defRPr b="0" baseline="0" cap="none" i="0" spc="0" strike="noStrike" sz="3300" u="none">
+        <a:defRPr sz="3300" b="0" i="0" u="none" strike="noStrike" cap="none" spc="0" baseline="0">
           <a:solidFill>
             <a:srgbClr val="000000"/>
           </a:solidFill>
@@ -1990,7 +2066,7 @@
         <a:buFontTx/>
         <a:buNone/>
         <a:tabLst/>
-        <a:defRPr b="0" baseline="0" cap="none" i="0" spc="0" strike="noStrike" sz="3300" u="none">
+        <a:defRPr sz="3300" b="0" i="0" u="none" strike="noStrike" cap="none" spc="0" baseline="0">
           <a:solidFill>
             <a:srgbClr val="000000"/>
           </a:solidFill>
@@ -2016,7 +2092,7 @@
         <a:buFontTx/>
         <a:buNone/>
         <a:tabLst/>
-        <a:defRPr b="0" baseline="0" cap="none" i="0" spc="0" strike="noStrike" sz="3300" u="none">
+        <a:defRPr sz="3300" b="0" i="0" u="none" strike="noStrike" cap="none" spc="0" baseline="0">
           <a:solidFill>
             <a:srgbClr val="000000"/>
           </a:solidFill>
@@ -2042,7 +2118,7 @@
         <a:buFontTx/>
         <a:buNone/>
         <a:tabLst/>
-        <a:defRPr b="0" baseline="0" cap="none" i="0" spc="0" strike="noStrike" sz="3300" u="none">
+        <a:defRPr sz="3300" b="0" i="0" u="none" strike="noStrike" cap="none" spc="0" baseline="0">
           <a:solidFill>
             <a:srgbClr val="000000"/>
           </a:solidFill>
@@ -2068,7 +2144,7 @@
         <a:buFontTx/>
         <a:buNone/>
         <a:tabLst/>
-        <a:defRPr b="0" baseline="0" cap="none" i="0" spc="0" strike="noStrike" sz="3300" u="none">
+        <a:defRPr sz="3300" b="0" i="0" u="none" strike="noStrike" cap="none" spc="0" baseline="0">
           <a:solidFill>
             <a:srgbClr val="000000"/>
           </a:solidFill>
@@ -2094,7 +2170,7 @@
         <a:buFontTx/>
         <a:buNone/>
         <a:tabLst/>
-        <a:defRPr b="0" baseline="0" cap="none" i="0" spc="0" strike="noStrike" sz="3300" u="none">
+        <a:defRPr sz="3300" b="0" i="0" u="none" strike="noStrike" cap="none" spc="0" baseline="0">
           <a:solidFill>
             <a:srgbClr val="000000"/>
           </a:solidFill>
@@ -2120,7 +2196,7 @@
         <a:buFontTx/>
         <a:buNone/>
         <a:tabLst/>
-        <a:defRPr b="0" baseline="0" cap="none" i="0" spc="0" strike="noStrike" sz="3300" u="none">
+        <a:defRPr sz="3300" b="0" i="0" u="none" strike="noStrike" cap="none" spc="0" baseline="0">
           <a:solidFill>
             <a:srgbClr val="000000"/>
           </a:solidFill>
@@ -2146,7 +2222,7 @@
         <a:buFontTx/>
         <a:buNone/>
         <a:tabLst/>
-        <a:defRPr b="0" baseline="0" cap="none" i="0" spc="0" strike="noStrike" sz="3300" u="none">
+        <a:defRPr sz="3300" b="0" i="0" u="none" strike="noStrike" cap="none" spc="0" baseline="0">
           <a:solidFill>
             <a:srgbClr val="000000"/>
           </a:solidFill>
@@ -2172,7 +2248,7 @@
         <a:buFontTx/>
         <a:buNone/>
         <a:tabLst/>
-        <a:defRPr b="0" baseline="0" cap="none" i="0" spc="0" strike="noStrike" sz="3300" u="none">
+        <a:defRPr sz="3300" b="0" i="0" u="none" strike="noStrike" cap="none" spc="0" baseline="0">
           <a:solidFill>
             <a:srgbClr val="000000"/>
           </a:solidFill>
@@ -2200,7 +2276,7 @@
         <a:buFont typeface="Jost-Regular"/>
         <a:buChar char="•"/>
         <a:tabLst/>
-        <a:defRPr b="0" baseline="0" cap="none" i="0" spc="0" strike="noStrike" sz="2100" u="none">
+        <a:defRPr sz="2100" b="0" i="0" u="none" strike="noStrike" cap="none" spc="0" baseline="0">
           <a:solidFill>
             <a:srgbClr val="000000"/>
           </a:solidFill>
@@ -2226,7 +2302,7 @@
         <a:buFont typeface="Jost-Regular"/>
         <a:buChar char="•"/>
         <a:tabLst/>
-        <a:defRPr b="0" baseline="0" cap="none" i="0" spc="0" strike="noStrike" sz="2100" u="none">
+        <a:defRPr sz="2100" b="0" i="0" u="none" strike="noStrike" cap="none" spc="0" baseline="0">
           <a:solidFill>
             <a:srgbClr val="000000"/>
           </a:solidFill>
@@ -2252,7 +2328,7 @@
         <a:buFont typeface="Jost-Regular"/>
         <a:buChar char="•"/>
         <a:tabLst/>
-        <a:defRPr b="0" baseline="0" cap="none" i="0" spc="0" strike="noStrike" sz="2100" u="none">
+        <a:defRPr sz="2100" b="0" i="0" u="none" strike="noStrike" cap="none" spc="0" baseline="0">
           <a:solidFill>
             <a:srgbClr val="000000"/>
           </a:solidFill>
@@ -2278,7 +2354,7 @@
         <a:buFont typeface="Jost-Regular"/>
         <a:buChar char="•"/>
         <a:tabLst/>
-        <a:defRPr b="0" baseline="0" cap="none" i="0" spc="0" strike="noStrike" sz="2100" u="none">
+        <a:defRPr sz="2100" b="0" i="0" u="none" strike="noStrike" cap="none" spc="0" baseline="0">
           <a:solidFill>
             <a:srgbClr val="000000"/>
           </a:solidFill>
@@ -2304,7 +2380,7 @@
         <a:buFont typeface="Jost-Regular"/>
         <a:buChar char="•"/>
         <a:tabLst/>
-        <a:defRPr b="0" baseline="0" cap="none" i="0" spc="0" strike="noStrike" sz="2100" u="none">
+        <a:defRPr sz="2100" b="0" i="0" u="none" strike="noStrike" cap="none" spc="0" baseline="0">
           <a:solidFill>
             <a:srgbClr val="000000"/>
           </a:solidFill>
@@ -2330,7 +2406,7 @@
         <a:buFont typeface="Jost-Regular"/>
         <a:buChar char="•"/>
         <a:tabLst/>
-        <a:defRPr b="0" baseline="0" cap="none" i="0" spc="0" strike="noStrike" sz="2100" u="none">
+        <a:defRPr sz="2100" b="0" i="0" u="none" strike="noStrike" cap="none" spc="0" baseline="0">
           <a:solidFill>
             <a:srgbClr val="000000"/>
           </a:solidFill>
@@ -2356,7 +2432,7 @@
         <a:buFont typeface="Jost-Regular"/>
         <a:buChar char="•"/>
         <a:tabLst/>
-        <a:defRPr b="0" baseline="0" cap="none" i="0" spc="0" strike="noStrike" sz="2100" u="none">
+        <a:defRPr sz="2100" b="0" i="0" u="none" strike="noStrike" cap="none" spc="0" baseline="0">
           <a:solidFill>
             <a:srgbClr val="000000"/>
           </a:solidFill>
@@ -2382,7 +2458,7 @@
         <a:buFont typeface="Jost-Regular"/>
         <a:buChar char="•"/>
         <a:tabLst/>
-        <a:defRPr b="0" baseline="0" cap="none" i="0" spc="0" strike="noStrike" sz="2100" u="none">
+        <a:defRPr sz="2100" b="0" i="0" u="none" strike="noStrike" cap="none" spc="0" baseline="0">
           <a:solidFill>
             <a:srgbClr val="000000"/>
           </a:solidFill>
@@ -2408,7 +2484,7 @@
         <a:buFont typeface="Jost-Regular"/>
         <a:buChar char="•"/>
         <a:tabLst/>
-        <a:defRPr b="0" baseline="0" cap="none" i="0" spc="0" strike="noStrike" sz="2100" u="none">
+        <a:defRPr sz="2100" b="0" i="0" u="none" strike="noStrike" cap="none" spc="0" baseline="0">
           <a:solidFill>
             <a:srgbClr val="000000"/>
           </a:solidFill>
@@ -2436,7 +2512,7 @@
         <a:buFontTx/>
         <a:buNone/>
         <a:tabLst/>
-        <a:defRPr b="0" baseline="0" cap="none" i="0" spc="0" strike="noStrike" sz="900" u="none">
+        <a:defRPr sz="900" b="0" i="0" u="none" strike="noStrike" cap="none" spc="0" baseline="0">
           <a:solidFill>
             <a:schemeClr val="tx1"/>
           </a:solidFill>
@@ -2462,7 +2538,7 @@
         <a:buFontTx/>
         <a:buNone/>
         <a:tabLst/>
-        <a:defRPr b="0" baseline="0" cap="none" i="0" spc="0" strike="noStrike" sz="900" u="none">
+        <a:defRPr sz="900" b="0" i="0" u="none" strike="noStrike" cap="none" spc="0" baseline="0">
           <a:solidFill>
             <a:schemeClr val="tx1"/>
           </a:solidFill>
@@ -2488,7 +2564,7 @@
         <a:buFontTx/>
         <a:buNone/>
         <a:tabLst/>
-        <a:defRPr b="0" baseline="0" cap="none" i="0" spc="0" strike="noStrike" sz="900" u="none">
+        <a:defRPr sz="900" b="0" i="0" u="none" strike="noStrike" cap="none" spc="0" baseline="0">
           <a:solidFill>
             <a:schemeClr val="tx1"/>
           </a:solidFill>
@@ -2514,7 +2590,7 @@
         <a:buFontTx/>
         <a:buNone/>
         <a:tabLst/>
-        <a:defRPr b="0" baseline="0" cap="none" i="0" spc="0" strike="noStrike" sz="900" u="none">
+        <a:defRPr sz="900" b="0" i="0" u="none" strike="noStrike" cap="none" spc="0" baseline="0">
           <a:solidFill>
             <a:schemeClr val="tx1"/>
           </a:solidFill>
@@ -2540,7 +2616,7 @@
         <a:buFontTx/>
         <a:buNone/>
         <a:tabLst/>
-        <a:defRPr b="0" baseline="0" cap="none" i="0" spc="0" strike="noStrike" sz="900" u="none">
+        <a:defRPr sz="900" b="0" i="0" u="none" strike="noStrike" cap="none" spc="0" baseline="0">
           <a:solidFill>
             <a:schemeClr val="tx1"/>
           </a:solidFill>
@@ -2566,7 +2642,7 @@
         <a:buFontTx/>
         <a:buNone/>
         <a:tabLst/>
-        <a:defRPr b="0" baseline="0" cap="none" i="0" spc="0" strike="noStrike" sz="900" u="none">
+        <a:defRPr sz="900" b="0" i="0" u="none" strike="noStrike" cap="none" spc="0" baseline="0">
           <a:solidFill>
             <a:schemeClr val="tx1"/>
           </a:solidFill>
@@ -2592,7 +2668,7 @@
         <a:buFontTx/>
         <a:buNone/>
         <a:tabLst/>
-        <a:defRPr b="0" baseline="0" cap="none" i="0" spc="0" strike="noStrike" sz="900" u="none">
+        <a:defRPr sz="900" b="0" i="0" u="none" strike="noStrike" cap="none" spc="0" baseline="0">
           <a:solidFill>
             <a:schemeClr val="tx1"/>
           </a:solidFill>
@@ -2618,7 +2694,7 @@
         <a:buFontTx/>
         <a:buNone/>
         <a:tabLst/>
-        <a:defRPr b="0" baseline="0" cap="none" i="0" spc="0" strike="noStrike" sz="900" u="none">
+        <a:defRPr sz="900" b="0" i="0" u="none" strike="noStrike" cap="none" spc="0" baseline="0">
           <a:solidFill>
             <a:schemeClr val="tx1"/>
           </a:solidFill>
@@ -2644,7 +2720,7 @@
         <a:buFontTx/>
         <a:buNone/>
         <a:tabLst/>
-        <a:defRPr b="0" baseline="0" cap="none" i="0" spc="0" strike="noStrike" sz="900" u="none">
+        <a:defRPr sz="900" b="0" i="0" u="none" strike="noStrike" cap="none" spc="0" baseline="0">
           <a:solidFill>
             <a:schemeClr val="tx1"/>
           </a:solidFill>
@@ -2661,7 +2737,7 @@
 </file>
 
 <file path=ppt/slides/slide1.xml><?xml version="1.0" encoding="utf-8"?>
-<p:sld xmlns:a="http://schemas.openxmlformats.org/drawingml/2006/main" xmlns:r="http://schemas.openxmlformats.org/officeDocument/2006/relationships" xmlns:p="http://schemas.openxmlformats.org/presentationml/2006/main" xmlns:m="http://schemas.openxmlformats.org/officeDocument/2006/math" xmlns:a14="http://schemas.microsoft.com/office/drawing/2010/main" showMasterSp="1" showMasterPhAnim="1">
+<p:sld xmlns:a="http://schemas.openxmlformats.org/drawingml/2006/main" xmlns:r="http://schemas.openxmlformats.org/officeDocument/2006/relationships" xmlns:p="http://schemas.openxmlformats.org/presentationml/2006/main">
   <p:cSld>
     <p:spTree>
       <p:nvGrpSpPr>
@@ -2720,6 +2796,7 @@
                 </a:solidFill>
               </a:defRPr>
             </a:pPr>
+            <a:endParaRPr/>
           </a:p>
         </p:txBody>
       </p:sp>
@@ -2755,6 +2832,7 @@
                 </a:solidFill>
               </a:defRPr>
             </a:pPr>
+            <a:endParaRPr/>
           </a:p>
         </p:txBody>
       </p:sp>
@@ -2813,6 +2891,7 @@
                   </a:solidFill>
                 </a:defRPr>
               </a:pPr>
+              <a:endParaRPr/>
             </a:p>
           </p:txBody>
         </p:sp>
@@ -2857,6 +2936,7 @@
                   </a:solidFill>
                 </a:defRPr>
               </a:pPr>
+              <a:endParaRPr/>
             </a:p>
           </p:txBody>
         </p:sp>
@@ -2901,6 +2981,7 @@
                   </a:solidFill>
                 </a:defRPr>
               </a:pPr>
+              <a:endParaRPr/>
             </a:p>
           </p:txBody>
         </p:sp>
@@ -2945,6 +3026,7 @@
                   </a:solidFill>
                 </a:defRPr>
               </a:pPr>
+              <a:endParaRPr/>
             </a:p>
           </p:txBody>
         </p:sp>
@@ -2984,6 +3066,7 @@
                 </a:solidFill>
               </a:defRPr>
             </a:pPr>
+            <a:endParaRPr/>
           </a:p>
         </p:txBody>
       </p:sp>
@@ -3022,6 +3105,7 @@
                 </a:solidFill>
               </a:defRPr>
             </a:pPr>
+            <a:endParaRPr/>
           </a:p>
         </p:txBody>
       </p:sp>
@@ -3060,6 +3144,7 @@
                 </a:solidFill>
               </a:defRPr>
             </a:pPr>
+            <a:endParaRPr/>
           </a:p>
         </p:txBody>
       </p:sp>
@@ -3082,7 +3167,7 @@
           </a:ln>
           <a:extLst>
             <a:ext uri="{C572A759-6A51-4108-AA02-DFA0A04FC94B}">
-              <ma14:wrappingTextBoxFlag xmlns:ma14="http://schemas.microsoft.com/office/mac/drawingml/2011/main" val="1"/>
+              <ma14:wrappingTextBoxFlag xmlns="" xmlns:m="http://schemas.openxmlformats.org/officeDocument/2006/math" xmlns:a14="http://schemas.microsoft.com/office/drawing/2010/main" xmlns:ma14="http://schemas.microsoft.com/office/mac/drawingml/2011/main" val="1"/>
             </a:ext>
           </a:extLst>
         </p:spPr>
@@ -3094,7 +3179,6 @@
             <a:lvl1pPr algn="ctr"/>
           </a:lstStyle>
           <a:p>
-            <a:pPr/>
             <a:r>
               <a:t>1</a:t>
             </a:r>
@@ -3106,12 +3190,12 @@
   <p:clrMapOvr>
     <a:masterClrMapping/>
   </p:clrMapOvr>
-  <p:transition xmlns:p14="http://schemas.microsoft.com/office/powerpoint/2010/main" spd="med" advClick="1"/>
+  <p:transition spd="med"/>
 </p:sld>
 </file>
 
 <file path=ppt/slides/slide2.xml><?xml version="1.0" encoding="utf-8"?>
-<p:sld xmlns:a="http://schemas.openxmlformats.org/drawingml/2006/main" xmlns:r="http://schemas.openxmlformats.org/officeDocument/2006/relationships" xmlns:p="http://schemas.openxmlformats.org/presentationml/2006/main" xmlns:m="http://schemas.openxmlformats.org/officeDocument/2006/math" xmlns:a14="http://schemas.microsoft.com/office/drawing/2010/main" showMasterSp="1" showMasterPhAnim="1">
+<p:sld xmlns:a="http://schemas.openxmlformats.org/drawingml/2006/main" xmlns:r="http://schemas.openxmlformats.org/officeDocument/2006/relationships" xmlns:p="http://schemas.openxmlformats.org/presentationml/2006/main">
   <p:cSld>
     <p:spTree>
       <p:nvGrpSpPr>
@@ -3135,8 +3219,8 @@
         </p:nvSpPr>
         <p:spPr>
           <a:xfrm>
-            <a:off x="0" y="0"/>
-            <a:ext cx="6858000" cy="9144000"/>
+            <a:off x="33951" y="45268"/>
+            <a:ext cx="6790099" cy="9053465"/>
           </a:xfrm>
           <a:prstGeom prst="rect">
             <a:avLst/>
@@ -3170,6 +3254,7 @@
                 </a:solidFill>
               </a:defRPr>
             </a:pPr>
+            <a:endParaRPr/>
           </a:p>
         </p:txBody>
       </p:sp>
@@ -3181,7 +3266,7 @@
         </p:nvSpPr>
         <p:spPr>
           <a:xfrm>
-            <a:off x="0" y="0"/>
+            <a:off x="0" y="9342"/>
             <a:ext cx="6858000" cy="9144000"/>
           </a:xfrm>
           <a:prstGeom prst="rect">
@@ -3205,6 +3290,7 @@
                 </a:solidFill>
               </a:defRPr>
             </a:pPr>
+            <a:endParaRPr/>
           </a:p>
         </p:txBody>
       </p:sp>
@@ -3263,6 +3349,7 @@
                   </a:solidFill>
                 </a:defRPr>
               </a:pPr>
+              <a:endParaRPr/>
             </a:p>
           </p:txBody>
         </p:sp>
@@ -3307,6 +3394,7 @@
                   </a:solidFill>
                 </a:defRPr>
               </a:pPr>
+              <a:endParaRPr/>
             </a:p>
           </p:txBody>
         </p:sp>
@@ -3351,6 +3439,7 @@
                   </a:solidFill>
                 </a:defRPr>
               </a:pPr>
+              <a:endParaRPr/>
             </a:p>
           </p:txBody>
         </p:sp>
@@ -3395,6 +3484,7 @@
                   </a:solidFill>
                 </a:defRPr>
               </a:pPr>
+              <a:endParaRPr/>
             </a:p>
           </p:txBody>
         </p:sp>
@@ -3434,6 +3524,7 @@
                 </a:solidFill>
               </a:defRPr>
             </a:pPr>
+            <a:endParaRPr/>
           </a:p>
         </p:txBody>
       </p:sp>
@@ -3472,6 +3563,7 @@
                 </a:solidFill>
               </a:defRPr>
             </a:pPr>
+            <a:endParaRPr/>
           </a:p>
         </p:txBody>
       </p:sp>
@@ -3494,7 +3586,7 @@
           </a:ln>
           <a:extLst>
             <a:ext uri="{C572A759-6A51-4108-AA02-DFA0A04FC94B}">
-              <ma14:wrappingTextBoxFlag xmlns:ma14="http://schemas.microsoft.com/office/mac/drawingml/2011/main" val="1"/>
+              <ma14:wrappingTextBoxFlag xmlns="" xmlns:m="http://schemas.openxmlformats.org/officeDocument/2006/math" xmlns:a14="http://schemas.microsoft.com/office/drawing/2010/main" xmlns:ma14="http://schemas.microsoft.com/office/mac/drawingml/2011/main" val="1"/>
             </a:ext>
           </a:extLst>
         </p:spPr>
@@ -3506,7 +3598,6 @@
             <a:lvl1pPr algn="ctr"/>
           </a:lstStyle>
           <a:p>
-            <a:pPr/>
             <a:r>
               <a:t>1</a:t>
             </a:r>
@@ -3522,7 +3613,7 @@
         <p:spPr>
           <a:xfrm>
             <a:off x="1599039" y="846314"/>
-            <a:ext cx="4226358" cy="675641"/>
+            <a:ext cx="4088618" cy="584775"/>
           </a:xfrm>
           <a:prstGeom prst="rect">
             <a:avLst/>
@@ -3532,7 +3623,7 @@
           </a:ln>
           <a:extLst>
             <a:ext uri="{C572A759-6A51-4108-AA02-DFA0A04FC94B}">
-              <ma14:wrappingTextBoxFlag xmlns:ma14="http://schemas.microsoft.com/office/mac/drawingml/2011/main" val="1"/>
+              <ma14:wrappingTextBoxFlag xmlns="" xmlns:m="http://schemas.openxmlformats.org/officeDocument/2006/math" xmlns:a14="http://schemas.microsoft.com/office/drawing/2010/main" xmlns:ma14="http://schemas.microsoft.com/office/mac/drawingml/2011/main" val="1"/>
             </a:ext>
           </a:extLst>
         </p:spPr>
@@ -3551,16 +3642,25 @@
               </a:defRPr>
             </a:pPr>
             <a:r>
+              <a:rPr dirty="0"/>
               <a:t>FlexChroma</a:t>
             </a:r>
             <a:r>
-              <a:rPr>
+              <a:rPr dirty="0">
                 <a:latin typeface="+mn-lt"/>
                 <a:ea typeface="+mn-ea"/>
                 <a:cs typeface="+mn-cs"/>
                 <a:sym typeface="Jost-Regular"/>
               </a:rPr>
-              <a:t> Tour-Guide</a:t>
+              <a:t> </a:t>
+            </a:r>
+            <a:r>
+              <a:rPr dirty="0">
+                <a:ea typeface="+mn-ea"/>
+                <a:cs typeface="+mn-cs"/>
+                <a:sym typeface="Jost-Regular"/>
+              </a:rPr>
+              <a:t>Tour-Guide</a:t>
             </a:r>
           </a:p>
         </p:txBody>
@@ -3573,7 +3673,7 @@
         </p:nvSpPr>
         <p:spPr>
           <a:xfrm>
-            <a:off x="566174" y="2834254"/>
+            <a:off x="566174" y="3114670"/>
             <a:ext cx="204671" cy="204671"/>
           </a:xfrm>
           <a:prstGeom prst="ellipse">
@@ -3600,6 +3700,7 @@
                 </a:solidFill>
               </a:defRPr>
             </a:pPr>
+            <a:endParaRPr/>
           </a:p>
         </p:txBody>
       </p:sp>
@@ -3611,7 +3712,7 @@
         </p:nvSpPr>
         <p:spPr>
           <a:xfrm>
-            <a:off x="816563" y="2715569"/>
+            <a:off x="816563" y="2995985"/>
             <a:ext cx="1530936" cy="459741"/>
           </a:xfrm>
           <a:prstGeom prst="rect">
@@ -3622,7 +3723,7 @@
           </a:ln>
           <a:extLst>
             <a:ext uri="{C572A759-6A51-4108-AA02-DFA0A04FC94B}">
-              <ma14:wrappingTextBoxFlag xmlns:ma14="http://schemas.microsoft.com/office/mac/drawingml/2011/main" val="1"/>
+              <ma14:wrappingTextBoxFlag xmlns="" xmlns:m="http://schemas.openxmlformats.org/officeDocument/2006/math" xmlns:a14="http://schemas.microsoft.com/office/drawing/2010/main" xmlns:ma14="http://schemas.microsoft.com/office/mac/drawingml/2011/main" val="1"/>
             </a:ext>
           </a:extLst>
         </p:spPr>
@@ -3632,7 +3733,7 @@
           </a:bodyPr>
           <a:lstStyle>
             <a:lvl1pPr>
-              <a:defRPr b="1" sz="2000">
+              <a:defRPr sz="2000" b="1">
                 <a:latin typeface="JostRoman-SemiBold"/>
                 <a:ea typeface="JostRoman-SemiBold"/>
                 <a:cs typeface="JostRoman-SemiBold"/>
@@ -3641,7 +3742,6 @@
             </a:lvl1pPr>
           </a:lstStyle>
           <a:p>
-            <a:pPr/>
             <a:r>
               <a:t>1. Einleitung</a:t>
             </a:r>
@@ -3656,7 +3756,7 @@
         </p:nvSpPr>
         <p:spPr>
           <a:xfrm>
-            <a:off x="714228" y="3138509"/>
+            <a:off x="714228" y="3418925"/>
             <a:ext cx="5558051" cy="662941"/>
           </a:xfrm>
           <a:prstGeom prst="rect">
@@ -3667,7 +3767,7 @@
           </a:ln>
           <a:extLst>
             <a:ext uri="{C572A759-6A51-4108-AA02-DFA0A04FC94B}">
-              <ma14:wrappingTextBoxFlag xmlns:ma14="http://schemas.microsoft.com/office/mac/drawingml/2011/main" val="1"/>
+              <ma14:wrappingTextBoxFlag xmlns="" xmlns:m="http://schemas.openxmlformats.org/officeDocument/2006/math" xmlns:a14="http://schemas.microsoft.com/office/drawing/2010/main" xmlns:ma14="http://schemas.microsoft.com/office/mac/drawingml/2011/main" val="1"/>
             </a:ext>
           </a:extLst>
         </p:spPr>
@@ -3678,7 +3778,7 @@
           <a:lstStyle/>
           <a:p>
             <a:pPr>
-              <a:defRPr b="1" sz="1000">
+              <a:defRPr sz="1000" b="1">
                 <a:latin typeface="JostRoman-Bold"/>
                 <a:ea typeface="JostRoman-Bold"/>
                 <a:cs typeface="JostRoman-Bold"/>
@@ -3697,12 +3797,6 @@
               </a:rPr>
               <a:t> umfasst Modelle zur Herstellung eigener Filamente aus handelsüblichen Materialien. </a:t>
             </a:r>
-            <a:endParaRPr b="0">
-              <a:latin typeface="+mn-lt"/>
-              <a:ea typeface="+mn-ea"/>
-              <a:cs typeface="+mn-cs"/>
-              <a:sym typeface="Jost-Regular"/>
-            </a:endParaRPr>
           </a:p>
           <a:p>
             <a:pPr>
@@ -3722,7 +3816,7 @@
         </p:nvSpPr>
         <p:spPr>
           <a:xfrm>
-            <a:off x="561095" y="4083275"/>
+            <a:off x="561095" y="4363691"/>
             <a:ext cx="204671" cy="204671"/>
           </a:xfrm>
           <a:prstGeom prst="ellipse">
@@ -3749,6 +3843,7 @@
                 </a:solidFill>
               </a:defRPr>
             </a:pPr>
+            <a:endParaRPr/>
           </a:p>
         </p:txBody>
       </p:sp>
@@ -3760,7 +3855,7 @@
         </p:nvSpPr>
         <p:spPr>
           <a:xfrm>
-            <a:off x="816563" y="3962050"/>
+            <a:off x="816563" y="4242466"/>
             <a:ext cx="3033713" cy="459741"/>
           </a:xfrm>
           <a:prstGeom prst="rect">
@@ -3771,7 +3866,7 @@
           </a:ln>
           <a:extLst>
             <a:ext uri="{C572A759-6A51-4108-AA02-DFA0A04FC94B}">
-              <ma14:wrappingTextBoxFlag xmlns:ma14="http://schemas.microsoft.com/office/mac/drawingml/2011/main" val="1"/>
+              <ma14:wrappingTextBoxFlag xmlns="" xmlns:m="http://schemas.openxmlformats.org/officeDocument/2006/math" xmlns:a14="http://schemas.microsoft.com/office/drawing/2010/main" xmlns:ma14="http://schemas.microsoft.com/office/mac/drawingml/2011/main" val="1"/>
             </a:ext>
           </a:extLst>
         </p:spPr>
@@ -3781,7 +3876,7 @@
           </a:bodyPr>
           <a:lstStyle>
             <a:lvl1pPr>
-              <a:defRPr b="1" sz="2000">
+              <a:defRPr sz="2000" b="1">
                 <a:latin typeface="JostRoman-SemiBold"/>
                 <a:ea typeface="JostRoman-SemiBold"/>
                 <a:cs typeface="JostRoman-SemiBold"/>
@@ -3790,7 +3885,6 @@
             </a:lvl1pPr>
           </a:lstStyle>
           <a:p>
-            <a:pPr/>
             <a:r>
               <a:t>2. Auswahl eines Modells</a:t>
             </a:r>
@@ -3805,7 +3899,7 @@
         </p:nvSpPr>
         <p:spPr>
           <a:xfrm>
-            <a:off x="706959" y="4363473"/>
+            <a:off x="706959" y="4643889"/>
             <a:ext cx="5558052" cy="472441"/>
           </a:xfrm>
           <a:prstGeom prst="rect">
@@ -3816,7 +3910,7 @@
           </a:ln>
           <a:extLst>
             <a:ext uri="{C572A759-6A51-4108-AA02-DFA0A04FC94B}">
-              <ma14:wrappingTextBoxFlag xmlns:ma14="http://schemas.microsoft.com/office/mac/drawingml/2011/main" val="1"/>
+              <ma14:wrappingTextBoxFlag xmlns="" xmlns:m="http://schemas.openxmlformats.org/officeDocument/2006/math" xmlns:a14="http://schemas.microsoft.com/office/drawing/2010/main" xmlns:ma14="http://schemas.microsoft.com/office/mac/drawingml/2011/main" val="1"/>
             </a:ext>
           </a:extLst>
         </p:spPr>
@@ -3830,7 +3924,6 @@
             </a:lvl1pPr>
           </a:lstStyle>
           <a:p>
-            <a:pPr/>
             <a:r>
               <a:t>Folgen Sie zuerst diesem kurzen Auswahlprozess, um die richtigen Daten herunterzuladen und zu drucken.</a:t>
             </a:r>
@@ -3845,7 +3938,7 @@
         </p:nvSpPr>
         <p:spPr>
           <a:xfrm>
-            <a:off x="706958" y="6105607"/>
+            <a:off x="706958" y="6386023"/>
             <a:ext cx="5565321" cy="281941"/>
           </a:xfrm>
           <a:prstGeom prst="rect">
@@ -3856,7 +3949,7 @@
           </a:ln>
           <a:extLst>
             <a:ext uri="{C572A759-6A51-4108-AA02-DFA0A04FC94B}">
-              <ma14:wrappingTextBoxFlag xmlns:ma14="http://schemas.microsoft.com/office/mac/drawingml/2011/main" val="1"/>
+              <ma14:wrappingTextBoxFlag xmlns="" xmlns:m="http://schemas.openxmlformats.org/officeDocument/2006/math" xmlns:a14="http://schemas.microsoft.com/office/drawing/2010/main" xmlns:ma14="http://schemas.microsoft.com/office/mac/drawingml/2011/main" val="1"/>
             </a:ext>
           </a:extLst>
         </p:spPr>
@@ -3870,9 +3963,77 @@
             </a:lvl1pPr>
           </a:lstStyle>
           <a:p>
-            <a:pPr/>
-            <a:r>
-              <a:t>Wählen Sie zuerst die gewünschte Filamentart aus, wenn Sie sich für ein Modell entscheiden.</a:t>
+            <a:r>
+              <a:rPr dirty="0" err="1"/>
+              <a:t>Wählen</a:t>
+            </a:r>
+            <a:r>
+              <a:rPr dirty="0"/>
+              <a:t> Sie </a:t>
+            </a:r>
+            <a:r>
+              <a:rPr dirty="0" err="1"/>
+              <a:t>zuerst</a:t>
+            </a:r>
+            <a:r>
+              <a:rPr dirty="0"/>
+              <a:t> die </a:t>
+            </a:r>
+            <a:r>
+              <a:rPr dirty="0" err="1"/>
+              <a:t>gewünschte</a:t>
+            </a:r>
+            <a:r>
+              <a:rPr dirty="0"/>
+              <a:t> </a:t>
+            </a:r>
+            <a:r>
+              <a:rPr dirty="0" err="1"/>
+              <a:t>Filamentart</a:t>
+            </a:r>
+            <a:r>
+              <a:rPr dirty="0"/>
+              <a:t> </a:t>
+            </a:r>
+            <a:r>
+              <a:rPr dirty="0" err="1"/>
+              <a:t>aus</a:t>
+            </a:r>
+            <a:r>
+              <a:rPr dirty="0"/>
+              <a:t>, </a:t>
+            </a:r>
+            <a:r>
+              <a:rPr dirty="0" err="1"/>
+              <a:t>wenn</a:t>
+            </a:r>
+            <a:r>
+              <a:rPr dirty="0"/>
+              <a:t> Sie </a:t>
+            </a:r>
+            <a:r>
+              <a:rPr dirty="0" err="1"/>
+              <a:t>sich</a:t>
+            </a:r>
+            <a:r>
+              <a:rPr dirty="0"/>
+              <a:t> für </a:t>
+            </a:r>
+            <a:r>
+              <a:rPr dirty="0" err="1"/>
+              <a:t>ein</a:t>
+            </a:r>
+            <a:r>
+              <a:rPr dirty="0"/>
+              <a:t> Modell </a:t>
+            </a:r>
+            <a:r>
+              <a:rPr dirty="0" err="1"/>
+              <a:t>entscheiden</a:t>
+            </a:r>
+            <a:r>
+              <a:rPr dirty="0"/>
+              <a:t>.</a:t>
             </a:r>
           </a:p>
         </p:txBody>
@@ -3885,7 +4046,7 @@
         </p:nvSpPr>
         <p:spPr>
           <a:xfrm>
-            <a:off x="816563" y="6428203"/>
+            <a:off x="816563" y="6696427"/>
             <a:ext cx="5462985" cy="1615441"/>
           </a:xfrm>
           <a:prstGeom prst="rect">
@@ -3896,7 +4057,7 @@
           </a:ln>
           <a:extLst>
             <a:ext uri="{C572A759-6A51-4108-AA02-DFA0A04FC94B}">
-              <ma14:wrappingTextBoxFlag xmlns:ma14="http://schemas.microsoft.com/office/mac/drawingml/2011/main" val="1"/>
+              <ma14:wrappingTextBoxFlag xmlns="" xmlns:m="http://schemas.openxmlformats.org/officeDocument/2006/math" xmlns:a14="http://schemas.microsoft.com/office/drawing/2010/main" xmlns:ma14="http://schemas.microsoft.com/office/mac/drawingml/2011/main" val="1"/>
             </a:ext>
           </a:extLst>
         </p:spPr>
@@ -3908,41 +4069,405 @@
           <a:p>
             <a:pPr marL="228600" indent="-228600">
               <a:buSzPct val="100000"/>
-              <a:buAutoNum type="arabicPeriod" startAt="1"/>
+              <a:buAutoNum type="arabicPeriod"/>
               <a:defRPr sz="1000"/>
             </a:pPr>
             <a:r>
-              <a:t>Wählen Sie eine Serie: Mischfilament für Mischfarben, Farbverlaufsfilament für Farbwechsel.</a:t>
+              <a:rPr dirty="0" err="1"/>
+              <a:t>Wählen</a:t>
+            </a:r>
+            <a:r>
+              <a:rPr dirty="0"/>
+              <a:t> Sie </a:t>
+            </a:r>
+            <a:r>
+              <a:rPr dirty="0" err="1"/>
+              <a:t>eine</a:t>
+            </a:r>
+            <a:r>
+              <a:rPr dirty="0"/>
+              <a:t> Serie: </a:t>
+            </a:r>
+            <a:r>
+              <a:rPr dirty="0" err="1"/>
+              <a:t>Mischfilament</a:t>
+            </a:r>
+            <a:r>
+              <a:rPr dirty="0"/>
+              <a:t> für </a:t>
+            </a:r>
+            <a:r>
+              <a:rPr dirty="0" err="1"/>
+              <a:t>Mischfarben</a:t>
+            </a:r>
+            <a:r>
+              <a:rPr dirty="0"/>
+              <a:t>, </a:t>
+            </a:r>
+            <a:r>
+              <a:rPr dirty="0" err="1"/>
+              <a:t>Farbverlaufsfilament</a:t>
+            </a:r>
+            <a:r>
+              <a:rPr dirty="0"/>
+              <a:t> für </a:t>
+            </a:r>
+            <a:r>
+              <a:rPr dirty="0" err="1"/>
+              <a:t>Farbwechsel</a:t>
+            </a:r>
+            <a:r>
+              <a:rPr dirty="0"/>
+              <a:t>.</a:t>
             </a:r>
           </a:p>
           <a:p>
             <a:pPr marL="228600" indent="-228600">
               <a:buSzPct val="100000"/>
-              <a:buAutoNum type="arabicPeriod" startAt="1"/>
+              <a:buAutoNum type="arabicPeriod"/>
               <a:defRPr sz="1000"/>
             </a:pPr>
             <a:r>
-              <a:t>Wählen Sie eine Modellgröße: Nutzen Sie ein S4-Modell für kleine Objekte oder ein M1-Modell für größere Drucke, die etwa 70 g Filament benötigen.</a:t>
+              <a:rPr dirty="0" err="1"/>
+              <a:t>Wählen</a:t>
+            </a:r>
+            <a:r>
+              <a:rPr dirty="0"/>
+              <a:t> Sie </a:t>
+            </a:r>
+            <a:r>
+              <a:rPr dirty="0" err="1"/>
+              <a:t>eine</a:t>
+            </a:r>
+            <a:r>
+              <a:rPr dirty="0"/>
+              <a:t> </a:t>
+            </a:r>
+            <a:r>
+              <a:rPr dirty="0" err="1"/>
+              <a:t>Modellgröße</a:t>
+            </a:r>
+            <a:r>
+              <a:rPr dirty="0"/>
+              <a:t>: </a:t>
+            </a:r>
+            <a:r>
+              <a:rPr dirty="0" err="1"/>
+              <a:t>Nutzen</a:t>
+            </a:r>
+            <a:r>
+              <a:rPr dirty="0"/>
+              <a:t> Sie </a:t>
+            </a:r>
+            <a:r>
+              <a:rPr dirty="0" err="1"/>
+              <a:t>ein</a:t>
+            </a:r>
+            <a:r>
+              <a:rPr dirty="0"/>
+              <a:t> S4-Modell für </a:t>
+            </a:r>
+            <a:r>
+              <a:rPr dirty="0" err="1"/>
+              <a:t>kleine</a:t>
+            </a:r>
+            <a:r>
+              <a:rPr dirty="0"/>
+              <a:t> </a:t>
+            </a:r>
+            <a:r>
+              <a:rPr dirty="0" err="1"/>
+              <a:t>Objekte</a:t>
+            </a:r>
+            <a:r>
+              <a:rPr dirty="0"/>
+              <a:t> </a:t>
+            </a:r>
+            <a:r>
+              <a:rPr dirty="0" err="1"/>
+              <a:t>oder</a:t>
+            </a:r>
+            <a:r>
+              <a:rPr dirty="0"/>
+              <a:t> </a:t>
+            </a:r>
+            <a:r>
+              <a:rPr dirty="0" err="1"/>
+              <a:t>ein</a:t>
+            </a:r>
+            <a:r>
+              <a:rPr dirty="0"/>
+              <a:t> M1-Modell für </a:t>
+            </a:r>
+            <a:r>
+              <a:rPr dirty="0" err="1"/>
+              <a:t>größere</a:t>
+            </a:r>
+            <a:r>
+              <a:rPr dirty="0"/>
+              <a:t> </a:t>
+            </a:r>
+            <a:r>
+              <a:rPr dirty="0" err="1"/>
+              <a:t>Drucke</a:t>
+            </a:r>
+            <a:r>
+              <a:rPr dirty="0"/>
+              <a:t>, die </a:t>
+            </a:r>
+            <a:r>
+              <a:rPr dirty="0" err="1"/>
+              <a:t>etwa</a:t>
+            </a:r>
+            <a:r>
+              <a:rPr dirty="0"/>
+              <a:t> 70 g Filament </a:t>
+            </a:r>
+            <a:r>
+              <a:rPr dirty="0" err="1"/>
+              <a:t>benötigen</a:t>
+            </a:r>
+            <a:r>
+              <a:rPr dirty="0"/>
+              <a:t>.</a:t>
             </a:r>
           </a:p>
           <a:p>
             <a:pPr marL="228600" indent="-228600">
               <a:buSzPct val="100000"/>
-              <a:buAutoNum type="arabicPeriod" startAt="1"/>
+              <a:buAutoNum type="arabicPeriod"/>
               <a:defRPr sz="1000"/>
             </a:pPr>
             <a:r>
-              <a:t>Profil und Druckplatte auswählen: Entscheiden Sie sich für die Druckplatte, die zu Ihrem gewünschten Mischungsverhältnis oder Muster passt.</a:t>
+              <a:rPr dirty="0" err="1"/>
+              <a:t>Profil</a:t>
+            </a:r>
+            <a:r>
+              <a:rPr dirty="0"/>
+              <a:t> und </a:t>
+            </a:r>
+            <a:r>
+              <a:rPr dirty="0" err="1"/>
+              <a:t>Druckplatte</a:t>
+            </a:r>
+            <a:r>
+              <a:rPr dirty="0"/>
+              <a:t> </a:t>
+            </a:r>
+            <a:r>
+              <a:rPr dirty="0" err="1"/>
+              <a:t>auswählen</a:t>
+            </a:r>
+            <a:r>
+              <a:rPr dirty="0"/>
+              <a:t>: </a:t>
+            </a:r>
+            <a:r>
+              <a:rPr dirty="0" err="1"/>
+              <a:t>Entscheiden</a:t>
+            </a:r>
+            <a:r>
+              <a:rPr dirty="0"/>
+              <a:t> Sie </a:t>
+            </a:r>
+            <a:r>
+              <a:rPr dirty="0" err="1"/>
+              <a:t>sich</a:t>
+            </a:r>
+            <a:r>
+              <a:rPr dirty="0"/>
+              <a:t> für die </a:t>
+            </a:r>
+            <a:r>
+              <a:rPr dirty="0" err="1"/>
+              <a:t>Druckplatte</a:t>
+            </a:r>
+            <a:r>
+              <a:rPr dirty="0"/>
+              <a:t>, die </a:t>
+            </a:r>
+            <a:r>
+              <a:rPr dirty="0" err="1"/>
+              <a:t>zu</a:t>
+            </a:r>
+            <a:r>
+              <a:rPr dirty="0"/>
+              <a:t> </a:t>
+            </a:r>
+            <a:r>
+              <a:rPr dirty="0" err="1"/>
+              <a:t>Ihrem</a:t>
+            </a:r>
+            <a:r>
+              <a:rPr dirty="0"/>
+              <a:t> </a:t>
+            </a:r>
+            <a:r>
+              <a:rPr dirty="0" err="1"/>
+              <a:t>gewünschten</a:t>
+            </a:r>
+            <a:r>
+              <a:rPr dirty="0"/>
+              <a:t> </a:t>
+            </a:r>
+            <a:r>
+              <a:rPr dirty="0" err="1"/>
+              <a:t>Mischungsverhältnis</a:t>
+            </a:r>
+            <a:r>
+              <a:rPr dirty="0"/>
+              <a:t> </a:t>
+            </a:r>
+            <a:r>
+              <a:rPr dirty="0" err="1"/>
+              <a:t>oder</a:t>
+            </a:r>
+            <a:r>
+              <a:rPr dirty="0"/>
+              <a:t> Muster </a:t>
+            </a:r>
+            <a:r>
+              <a:rPr dirty="0" err="1"/>
+              <a:t>passt</a:t>
+            </a:r>
+            <a:r>
+              <a:rPr dirty="0"/>
+              <a:t>.</a:t>
             </a:r>
           </a:p>
           <a:p>
             <a:pPr marL="228600" indent="-228600">
               <a:buSzPct val="100000"/>
-              <a:buAutoNum type="arabicPeriod" startAt="1"/>
+              <a:buAutoNum type="arabicPeriod"/>
               <a:defRPr sz="1000"/>
             </a:pPr>
             <a:r>
-              <a:t>Filamente zuweisen und slicen: Nutzen Sie Filamente mit identischem oder ähnlichem Material, führen Sie die Zuweisung durch, slicen Sie das Modell und beachten Sie vor dem Druck die Druckhinweise.</a:t>
+              <a:rPr dirty="0" err="1"/>
+              <a:t>Filamente</a:t>
+            </a:r>
+            <a:r>
+              <a:rPr dirty="0"/>
+              <a:t> </a:t>
+            </a:r>
+            <a:r>
+              <a:rPr dirty="0" err="1"/>
+              <a:t>zuweisen</a:t>
+            </a:r>
+            <a:r>
+              <a:rPr dirty="0"/>
+              <a:t> und </a:t>
+            </a:r>
+            <a:r>
+              <a:rPr dirty="0" err="1"/>
+              <a:t>slicen</a:t>
+            </a:r>
+            <a:r>
+              <a:rPr dirty="0"/>
+              <a:t>: </a:t>
+            </a:r>
+            <a:r>
+              <a:rPr dirty="0" err="1"/>
+              <a:t>Nutzen</a:t>
+            </a:r>
+            <a:r>
+              <a:rPr dirty="0"/>
+              <a:t> Sie </a:t>
+            </a:r>
+            <a:r>
+              <a:rPr dirty="0" err="1"/>
+              <a:t>Filamente</a:t>
+            </a:r>
+            <a:r>
+              <a:rPr dirty="0"/>
+              <a:t> </a:t>
+            </a:r>
+            <a:r>
+              <a:rPr dirty="0" err="1"/>
+              <a:t>mit</a:t>
+            </a:r>
+            <a:r>
+              <a:rPr dirty="0"/>
+              <a:t> </a:t>
+            </a:r>
+            <a:r>
+              <a:rPr dirty="0" err="1"/>
+              <a:t>identischem</a:t>
+            </a:r>
+            <a:r>
+              <a:rPr dirty="0"/>
+              <a:t> </a:t>
+            </a:r>
+            <a:r>
+              <a:rPr dirty="0" err="1"/>
+              <a:t>oder</a:t>
+            </a:r>
+            <a:r>
+              <a:rPr dirty="0"/>
+              <a:t> </a:t>
+            </a:r>
+            <a:r>
+              <a:rPr dirty="0" err="1"/>
+              <a:t>ähnlichem</a:t>
+            </a:r>
+            <a:r>
+              <a:rPr dirty="0"/>
+              <a:t> Material, </a:t>
+            </a:r>
+            <a:r>
+              <a:rPr dirty="0" err="1"/>
+              <a:t>führen</a:t>
+            </a:r>
+            <a:r>
+              <a:rPr dirty="0"/>
+              <a:t> Sie die </a:t>
+            </a:r>
+            <a:r>
+              <a:rPr dirty="0" err="1"/>
+              <a:t>Zuweisung</a:t>
+            </a:r>
+            <a:r>
+              <a:rPr dirty="0"/>
+              <a:t> </a:t>
+            </a:r>
+            <a:r>
+              <a:rPr dirty="0" err="1"/>
+              <a:t>durch</a:t>
+            </a:r>
+            <a:r>
+              <a:rPr dirty="0"/>
+              <a:t>, </a:t>
+            </a:r>
+            <a:r>
+              <a:rPr dirty="0" err="1"/>
+              <a:t>slicen</a:t>
+            </a:r>
+            <a:r>
+              <a:rPr dirty="0"/>
+              <a:t> Sie das Modell und </a:t>
+            </a:r>
+            <a:r>
+              <a:rPr dirty="0" err="1"/>
+              <a:t>beachten</a:t>
+            </a:r>
+            <a:r>
+              <a:rPr dirty="0"/>
+              <a:t> Sie </a:t>
+            </a:r>
+            <a:r>
+              <a:rPr dirty="0" err="1"/>
+              <a:t>vor</a:t>
+            </a:r>
+            <a:r>
+              <a:rPr dirty="0"/>
+              <a:t> dem Druck die </a:t>
+            </a:r>
+            <a:r>
+              <a:rPr dirty="0" err="1"/>
+              <a:t>Druckhinweise</a:t>
+            </a:r>
+            <a:r>
+              <a:rPr dirty="0"/>
+              <a:t>.</a:t>
             </a:r>
           </a:p>
         </p:txBody>
@@ -3955,7 +4480,7 @@
         </p:nvSpPr>
         <p:spPr>
           <a:xfrm>
-            <a:off x="816562" y="8206671"/>
+            <a:off x="816562" y="8157903"/>
             <a:ext cx="5372560" cy="421641"/>
           </a:xfrm>
           <a:prstGeom prst="rect">
@@ -3966,7 +4491,7 @@
           </a:ln>
           <a:extLst>
             <a:ext uri="{C572A759-6A51-4108-AA02-DFA0A04FC94B}">
-              <ma14:wrappingTextBoxFlag xmlns:ma14="http://schemas.microsoft.com/office/mac/drawingml/2011/main" val="1"/>
+              <ma14:wrappingTextBoxFlag xmlns="" xmlns:m="http://schemas.openxmlformats.org/officeDocument/2006/math" xmlns:a14="http://schemas.microsoft.com/office/drawing/2010/main" xmlns:ma14="http://schemas.microsoft.com/office/mac/drawingml/2011/main" val="1"/>
             </a:ext>
           </a:extLst>
         </p:spPr>
@@ -3985,10 +4510,7 @@
               </a:defRPr>
             </a:pPr>
             <a:r>
-              <a:t>*</a:t>
-            </a:r>
-            <a:r>
-              <a:t>Hinweis: Der Begriff „Profil“ steht in FlexChroma für eine Einteilung nach Verwendungszweck, nicht für abweichende Druckeinstellungen.</a:t>
+              <a:t>*Hinweis: Der Begriff „Profil“ steht in FlexChroma für eine Einteilung nach Verwendungszweck, nicht für abweichende Druckeinstellungen.</a:t>
             </a:r>
           </a:p>
         </p:txBody>
@@ -4038,7 +4560,7 @@
               </a:cxnLst>
               <a:rect l="0" t="0" r="r" b="b"/>
               <a:pathLst>
-                <a:path w="21600" h="21600" fill="norm" stroke="1" extrusionOk="0">
+                <a:path w="21600" h="21600" extrusionOk="0">
                   <a:moveTo>
                     <a:pt x="853" y="0"/>
                   </a:moveTo>
@@ -4093,6 +4615,7 @@
                   </a:solidFill>
                 </a:defRPr>
               </a:pPr>
+              <a:endParaRPr/>
             </a:p>
           </p:txBody>
         </p:sp>
@@ -4127,7 +4650,7 @@
               </a:cxnLst>
               <a:rect l="0" t="0" r="r" b="b"/>
               <a:pathLst>
-                <a:path w="21600" h="21600" fill="norm" stroke="1" extrusionOk="0">
+                <a:path w="21600" h="21600" extrusionOk="0">
                   <a:moveTo>
                     <a:pt x="250" y="0"/>
                   </a:moveTo>
@@ -4182,6 +4705,7 @@
                   </a:solidFill>
                 </a:defRPr>
               </a:pPr>
+              <a:endParaRPr/>
             </a:p>
           </p:txBody>
         </p:sp>
@@ -4231,7 +4755,7 @@
               </a:cxnLst>
               <a:rect l="0" t="0" r="r" b="b"/>
               <a:pathLst>
-                <a:path w="21600" h="21600" fill="norm" stroke="1" extrusionOk="0">
+                <a:path w="21600" h="21600" extrusionOk="0">
                   <a:moveTo>
                     <a:pt x="853" y="0"/>
                   </a:moveTo>
@@ -4286,6 +4810,7 @@
                   </a:solidFill>
                 </a:defRPr>
               </a:pPr>
+              <a:endParaRPr/>
             </a:p>
           </p:txBody>
         </p:sp>
@@ -4320,7 +4845,7 @@
               </a:cxnLst>
               <a:rect l="0" t="0" r="r" b="b"/>
               <a:pathLst>
-                <a:path w="21600" h="21600" fill="norm" stroke="1" extrusionOk="0">
+                <a:path w="21600" h="21600" extrusionOk="0">
                   <a:moveTo>
                     <a:pt x="250" y="0"/>
                   </a:moveTo>
@@ -4375,6 +4900,7 @@
                   </a:solidFill>
                 </a:defRPr>
               </a:pPr>
+              <a:endParaRPr/>
             </a:p>
           </p:txBody>
         </p:sp>
@@ -4398,7 +4924,7 @@
           </a:ln>
           <a:extLst>
             <a:ext uri="{C572A759-6A51-4108-AA02-DFA0A04FC94B}">
-              <ma14:wrappingTextBoxFlag xmlns:ma14="http://schemas.microsoft.com/office/mac/drawingml/2011/main" val="1"/>
+              <ma14:wrappingTextBoxFlag xmlns="" xmlns:m="http://schemas.openxmlformats.org/officeDocument/2006/math" xmlns:a14="http://schemas.microsoft.com/office/drawing/2010/main" xmlns:ma14="http://schemas.microsoft.com/office/mac/drawingml/2011/main" val="1"/>
             </a:ext>
           </a:extLst>
         </p:spPr>
@@ -4412,7 +4938,6 @@
             </a:lvl1pPr>
           </a:lstStyle>
           <a:p>
-            <a:pPr/>
             <a:r>
               <a:t>- FlexChroma Dokumentenarchiv -</a:t>
             </a:r>
@@ -4438,7 +4963,7 @@
           </a:ln>
           <a:extLst>
             <a:ext uri="{C572A759-6A51-4108-AA02-DFA0A04FC94B}">
-              <ma14:wrappingTextBoxFlag xmlns:ma14="http://schemas.microsoft.com/office/mac/drawingml/2011/main" val="1"/>
+              <ma14:wrappingTextBoxFlag xmlns="" xmlns:m="http://schemas.openxmlformats.org/officeDocument/2006/math" xmlns:a14="http://schemas.microsoft.com/office/drawing/2010/main" xmlns:ma14="http://schemas.microsoft.com/office/mac/drawingml/2011/main" val="1"/>
             </a:ext>
           </a:extLst>
         </p:spPr>
@@ -4452,7 +4977,6 @@
             </a:lvl1pPr>
           </a:lstStyle>
           <a:p>
-            <a:pPr/>
             <a:r>
               <a:t>Ver.1.00  2026.9.1</a:t>
             </a:r>
@@ -4468,9 +4992,7 @@
           <p:nvPr/>
         </p:nvPicPr>
         <p:blipFill>
-          <a:blip r:embed="rId2">
-            <a:extLst/>
-          </a:blip>
+          <a:blip r:embed="rId2"/>
           <a:stretch>
             <a:fillRect/>
           </a:stretch>
@@ -4490,31 +5012,49 @@
       </p:pic>
       <p:pic>
         <p:nvPicPr>
-          <p:cNvPr id="135" name="ペーストされたムービー.png" descr="ペーストされたムービー.png"/>
+          <p:cNvPr id="2" name="図 1">
+            <a:extLst>
+              <a:ext uri="{FF2B5EF4-FFF2-40B4-BE49-F238E27FC236}">
+                <a16:creationId xmlns:a16="http://schemas.microsoft.com/office/drawing/2014/main" id="{6E8A4CD3-6911-29A5-264C-B3E55E7BDF68}"/>
+              </a:ext>
+            </a:extLst>
+          </p:cNvPr>
           <p:cNvPicPr>
-            <a:picLocks noChangeAspect="1"/>
+            <a:picLocks noChangeAspect="1" noChangeArrowheads="1"/>
           </p:cNvPicPr>
           <p:nvPr/>
         </p:nvPicPr>
         <p:blipFill>
           <a:blip r:embed="rId3">
-            <a:extLst/>
+            <a:extLst>
+              <a:ext uri="{28A0092B-C50C-407E-A947-70E740481C1C}">
+                <a14:useLocalDpi xmlns:a14="http://schemas.microsoft.com/office/drawing/2010/main" val="0"/>
+              </a:ext>
+            </a:extLst>
           </a:blip>
+          <a:srcRect/>
           <a:stretch>
             <a:fillRect/>
           </a:stretch>
         </p:blipFill>
-        <p:spPr>
+        <p:spPr bwMode="auto">
           <a:xfrm>
-            <a:off x="325255" y="4916473"/>
-            <a:ext cx="6188663" cy="1129092"/>
+            <a:off x="540001" y="5093007"/>
+            <a:ext cx="5813043" cy="1099409"/>
           </a:xfrm>
           <a:prstGeom prst="rect">
             <a:avLst/>
           </a:prstGeom>
-          <a:ln w="12700">
-            <a:miter lim="400000"/>
-          </a:ln>
+          <a:noFill/>
+          <a:extLst>
+            <a:ext uri="{909E8E84-426E-40DD-AFC4-6F175D3DCCD1}">
+              <a14:hiddenFill xmlns:a14="http://schemas.microsoft.com/office/drawing/2010/main">
+                <a:solidFill>
+                  <a:srgbClr val="FFFFFF"/>
+                </a:solidFill>
+              </a14:hiddenFill>
+            </a:ext>
+          </a:extLst>
         </p:spPr>
       </p:pic>
     </p:spTree>
@@ -4522,12 +5062,12 @@
   <p:clrMapOvr>
     <a:masterClrMapping/>
   </p:clrMapOvr>
-  <p:transition xmlns:p14="http://schemas.microsoft.com/office/powerpoint/2010/main" spd="med" advClick="1"/>
+  <p:transition spd="med"/>
 </p:sld>
 </file>
 
 <file path=ppt/slides/slide3.xml><?xml version="1.0" encoding="utf-8"?>
-<p:sld xmlns:a="http://schemas.openxmlformats.org/drawingml/2006/main" xmlns:r="http://schemas.openxmlformats.org/officeDocument/2006/relationships" xmlns:p="http://schemas.openxmlformats.org/presentationml/2006/main" xmlns:m="http://schemas.openxmlformats.org/officeDocument/2006/math" xmlns:a14="http://schemas.microsoft.com/office/drawing/2010/main" showMasterSp="1" showMasterPhAnim="1">
+<p:sld xmlns:a="http://schemas.openxmlformats.org/drawingml/2006/main" xmlns:r="http://schemas.openxmlformats.org/officeDocument/2006/relationships" xmlns:p="http://schemas.openxmlformats.org/presentationml/2006/main">
   <p:cSld>
     <p:spTree>
       <p:nvGrpSpPr>
@@ -4551,8 +5091,8 @@
         </p:nvSpPr>
         <p:spPr>
           <a:xfrm>
-            <a:off x="0" y="0"/>
-            <a:ext cx="6858000" cy="9144000"/>
+            <a:off x="33951" y="45268"/>
+            <a:ext cx="6790099" cy="9053465"/>
           </a:xfrm>
           <a:prstGeom prst="rect">
             <a:avLst/>
@@ -4586,6 +5126,7 @@
                 </a:solidFill>
               </a:defRPr>
             </a:pPr>
+            <a:endParaRPr/>
           </a:p>
         </p:txBody>
       </p:sp>
@@ -4597,7 +5138,7 @@
         </p:nvSpPr>
         <p:spPr>
           <a:xfrm>
-            <a:off x="7268" y="0"/>
+            <a:off x="7825" y="0"/>
             <a:ext cx="6858001" cy="9144000"/>
           </a:xfrm>
           <a:prstGeom prst="rect">
@@ -4621,6 +5162,7 @@
                 </a:solidFill>
               </a:defRPr>
             </a:pPr>
+            <a:endParaRPr/>
           </a:p>
         </p:txBody>
       </p:sp>
@@ -4679,6 +5221,7 @@
                   </a:solidFill>
                 </a:defRPr>
               </a:pPr>
+              <a:endParaRPr/>
             </a:p>
           </p:txBody>
         </p:sp>
@@ -4723,6 +5266,7 @@
                   </a:solidFill>
                 </a:defRPr>
               </a:pPr>
+              <a:endParaRPr/>
             </a:p>
           </p:txBody>
         </p:sp>
@@ -4767,6 +5311,7 @@
                   </a:solidFill>
                 </a:defRPr>
               </a:pPr>
+              <a:endParaRPr/>
             </a:p>
           </p:txBody>
         </p:sp>
@@ -4811,6 +5356,7 @@
                   </a:solidFill>
                 </a:defRPr>
               </a:pPr>
+              <a:endParaRPr/>
             </a:p>
           </p:txBody>
         </p:sp>
@@ -4850,6 +5396,7 @@
                 </a:solidFill>
               </a:defRPr>
             </a:pPr>
+            <a:endParaRPr/>
           </a:p>
         </p:txBody>
       </p:sp>
@@ -4888,6 +5435,7 @@
                 </a:solidFill>
               </a:defRPr>
             </a:pPr>
+            <a:endParaRPr/>
           </a:p>
         </p:txBody>
       </p:sp>
@@ -4926,6 +5474,7 @@
                 </a:solidFill>
               </a:defRPr>
             </a:pPr>
+            <a:endParaRPr/>
           </a:p>
         </p:txBody>
       </p:sp>
@@ -4948,7 +5497,7 @@
           </a:ln>
           <a:extLst>
             <a:ext uri="{C572A759-6A51-4108-AA02-DFA0A04FC94B}">
-              <ma14:wrappingTextBoxFlag xmlns:ma14="http://schemas.microsoft.com/office/mac/drawingml/2011/main" val="1"/>
+              <ma14:wrappingTextBoxFlag xmlns="" xmlns:m="http://schemas.openxmlformats.org/officeDocument/2006/math" xmlns:a14="http://schemas.microsoft.com/office/drawing/2010/main" xmlns:ma14="http://schemas.microsoft.com/office/mac/drawingml/2011/main" val="1"/>
             </a:ext>
           </a:extLst>
         </p:spPr>
@@ -4960,7 +5509,6 @@
             <a:lvl1pPr algn="ctr"/>
           </a:lstStyle>
           <a:p>
-            <a:pPr/>
             <a:r>
               <a:t>2</a:t>
             </a:r>
@@ -4975,7 +5523,7 @@
         </p:nvSpPr>
         <p:spPr>
           <a:xfrm>
-            <a:off x="566174" y="667741"/>
+            <a:off x="566174" y="655549"/>
             <a:ext cx="204671" cy="204671"/>
           </a:xfrm>
           <a:prstGeom prst="ellipse">
@@ -5002,6 +5550,7 @@
                 </a:solidFill>
               </a:defRPr>
             </a:pPr>
+            <a:endParaRPr/>
           </a:p>
         </p:txBody>
       </p:sp>
@@ -5013,7 +5562,7 @@
         </p:nvSpPr>
         <p:spPr>
           <a:xfrm>
-            <a:off x="566174" y="2571089"/>
+            <a:off x="566174" y="2534513"/>
             <a:ext cx="204671" cy="204671"/>
           </a:xfrm>
           <a:prstGeom prst="ellipse">
@@ -5040,6 +5589,7 @@
                 </a:solidFill>
               </a:defRPr>
             </a:pPr>
+            <a:endParaRPr/>
           </a:p>
         </p:txBody>
       </p:sp>
@@ -5062,7 +5612,7 @@
           </a:ln>
           <a:extLst>
             <a:ext uri="{C572A759-6A51-4108-AA02-DFA0A04FC94B}">
-              <ma14:wrappingTextBoxFlag xmlns:ma14="http://schemas.microsoft.com/office/mac/drawingml/2011/main" val="1"/>
+              <ma14:wrappingTextBoxFlag xmlns="" xmlns:m="http://schemas.openxmlformats.org/officeDocument/2006/math" xmlns:a14="http://schemas.microsoft.com/office/drawing/2010/main" xmlns:ma14="http://schemas.microsoft.com/office/mac/drawingml/2011/main" val="1"/>
             </a:ext>
           </a:extLst>
         </p:spPr>
@@ -5072,7 +5622,7 @@
           </a:bodyPr>
           <a:lstStyle>
             <a:lvl1pPr>
-              <a:defRPr b="1" sz="2000">
+              <a:defRPr sz="2000" b="1">
                 <a:latin typeface="JostRoman-SemiBold"/>
                 <a:ea typeface="JostRoman-SemiBold"/>
                 <a:cs typeface="JostRoman-SemiBold"/>
@@ -5081,8 +5631,8 @@
             </a:lvl1pPr>
           </a:lstStyle>
           <a:p>
-            <a:pPr/>
-            <a:r>
+            <a:r>
+              <a:rPr dirty="0"/>
               <a:t>3. FlexChroma HUB</a:t>
             </a:r>
           </a:p>
@@ -5097,7 +5647,7 @@
         <p:spPr>
           <a:xfrm>
             <a:off x="714228" y="886688"/>
-            <a:ext cx="5558051" cy="662941"/>
+            <a:ext cx="5558051" cy="553998"/>
           </a:xfrm>
           <a:prstGeom prst="rect">
             <a:avLst/>
@@ -5107,7 +5657,7 @@
           </a:ln>
           <a:extLst>
             <a:ext uri="{C572A759-6A51-4108-AA02-DFA0A04FC94B}">
-              <ma14:wrappingTextBoxFlag xmlns:ma14="http://schemas.microsoft.com/office/mac/drawingml/2011/main" val="1"/>
+              <ma14:wrappingTextBoxFlag xmlns="" xmlns:m="http://schemas.openxmlformats.org/officeDocument/2006/math" xmlns:a14="http://schemas.microsoft.com/office/drawing/2010/main" xmlns:ma14="http://schemas.microsoft.com/office/mac/drawingml/2011/main" val="1"/>
             </a:ext>
           </a:extLst>
         </p:spPr>
@@ -5121,16 +5671,252 @@
               <a:defRPr sz="1000"/>
             </a:pPr>
             <a:r>
-              <a:t>Der FlexChroma-Hub ist der zentrale Einstiegspunkt auf MakerWorld und bietet Zugang zu allen Serien und externen Portalen. </a:t>
-            </a:r>
-            <a:r>
-              <a:rPr b="1">
+              <a:rPr dirty="0"/>
+              <a:t>Der </a:t>
+            </a:r>
+            <a:r>
+              <a:rPr dirty="0">
+                <a:latin typeface="Jost Medium" pitchFamily="2" charset="0"/>
+                <a:ea typeface="Jost Medium" pitchFamily="2" charset="0"/>
+              </a:rPr>
+              <a:t>FlexChroma</a:t>
+            </a:r>
+            <a:r>
+              <a:rPr dirty="0"/>
+              <a:t>-Hub </a:t>
+            </a:r>
+            <a:r>
+              <a:rPr dirty="0" err="1"/>
+              <a:t>ist</a:t>
+            </a:r>
+            <a:r>
+              <a:rPr dirty="0"/>
+              <a:t> der </a:t>
+            </a:r>
+            <a:r>
+              <a:rPr dirty="0" err="1"/>
+              <a:t>zentrale</a:t>
+            </a:r>
+            <a:r>
+              <a:rPr dirty="0"/>
+              <a:t> </a:t>
+            </a:r>
+            <a:r>
+              <a:rPr dirty="0" err="1"/>
+              <a:t>Einstiegspunkt</a:t>
+            </a:r>
+            <a:r>
+              <a:rPr dirty="0"/>
+              <a:t> auf MakerWorld und </a:t>
+            </a:r>
+            <a:r>
+              <a:rPr dirty="0" err="1"/>
+              <a:t>bietet</a:t>
+            </a:r>
+            <a:r>
+              <a:rPr dirty="0"/>
+              <a:t> </a:t>
+            </a:r>
+            <a:r>
+              <a:rPr dirty="0" err="1"/>
+              <a:t>Zugang</a:t>
+            </a:r>
+            <a:r>
+              <a:rPr dirty="0"/>
+              <a:t> </a:t>
+            </a:r>
+            <a:r>
+              <a:rPr dirty="0" err="1"/>
+              <a:t>zu</a:t>
+            </a:r>
+            <a:r>
+              <a:rPr dirty="0"/>
+              <a:t> </a:t>
+            </a:r>
+            <a:r>
+              <a:rPr dirty="0" err="1"/>
+              <a:t>allen</a:t>
+            </a:r>
+            <a:r>
+              <a:rPr dirty="0"/>
+              <a:t> </a:t>
+            </a:r>
+            <a:r>
+              <a:rPr dirty="0" err="1"/>
+              <a:t>Serien</a:t>
+            </a:r>
+            <a:r>
+              <a:rPr dirty="0"/>
+              <a:t> und </a:t>
+            </a:r>
+            <a:r>
+              <a:rPr dirty="0" err="1"/>
+              <a:t>externen</a:t>
+            </a:r>
+            <a:r>
+              <a:rPr dirty="0"/>
+              <a:t> </a:t>
+            </a:r>
+            <a:r>
+              <a:rPr dirty="0" err="1"/>
+              <a:t>Portalen</a:t>
+            </a:r>
+            <a:r>
+              <a:rPr dirty="0"/>
+              <a:t>. </a:t>
+            </a:r>
+            <a:r>
+              <a:rPr b="1" dirty="0">
                 <a:latin typeface="JostRoman-Bold"/>
                 <a:ea typeface="JostRoman-Bold"/>
                 <a:cs typeface="JostRoman-Bold"/>
                 <a:sym typeface="JostRoman-Bold"/>
               </a:rPr>
-              <a:t>Wenn Sie sich unsicher sind, wo Sie beginnen sollen, öffnen Sie am besten zuerst dieses Modell.</a:t>
+              <a:t>Wenn Sie </a:t>
+            </a:r>
+            <a:r>
+              <a:rPr b="1" dirty="0" err="1">
+                <a:latin typeface="JostRoman-Bold"/>
+                <a:ea typeface="JostRoman-Bold"/>
+                <a:cs typeface="JostRoman-Bold"/>
+                <a:sym typeface="JostRoman-Bold"/>
+              </a:rPr>
+              <a:t>sich</a:t>
+            </a:r>
+            <a:r>
+              <a:rPr b="1" dirty="0">
+                <a:latin typeface="JostRoman-Bold"/>
+                <a:ea typeface="JostRoman-Bold"/>
+                <a:cs typeface="JostRoman-Bold"/>
+                <a:sym typeface="JostRoman-Bold"/>
+              </a:rPr>
+              <a:t> </a:t>
+            </a:r>
+            <a:r>
+              <a:rPr b="1" dirty="0" err="1">
+                <a:latin typeface="JostRoman-Bold"/>
+                <a:ea typeface="JostRoman-Bold"/>
+                <a:cs typeface="JostRoman-Bold"/>
+                <a:sym typeface="JostRoman-Bold"/>
+              </a:rPr>
+              <a:t>unsicher</a:t>
+            </a:r>
+            <a:r>
+              <a:rPr b="1" dirty="0">
+                <a:latin typeface="JostRoman-Bold"/>
+                <a:ea typeface="JostRoman-Bold"/>
+                <a:cs typeface="JostRoman-Bold"/>
+                <a:sym typeface="JostRoman-Bold"/>
+              </a:rPr>
+              <a:t> </a:t>
+            </a:r>
+            <a:r>
+              <a:rPr b="1" dirty="0" err="1">
+                <a:latin typeface="JostRoman-Bold"/>
+                <a:ea typeface="JostRoman-Bold"/>
+                <a:cs typeface="JostRoman-Bold"/>
+                <a:sym typeface="JostRoman-Bold"/>
+              </a:rPr>
+              <a:t>sind</a:t>
+            </a:r>
+            <a:r>
+              <a:rPr b="1" dirty="0">
+                <a:latin typeface="JostRoman-Bold"/>
+                <a:ea typeface="JostRoman-Bold"/>
+                <a:cs typeface="JostRoman-Bold"/>
+                <a:sym typeface="JostRoman-Bold"/>
+              </a:rPr>
+              <a:t>, wo Sie </a:t>
+            </a:r>
+            <a:r>
+              <a:rPr b="1" dirty="0" err="1">
+                <a:latin typeface="JostRoman-Bold"/>
+                <a:ea typeface="JostRoman-Bold"/>
+                <a:cs typeface="JostRoman-Bold"/>
+                <a:sym typeface="JostRoman-Bold"/>
+              </a:rPr>
+              <a:t>beginnen</a:t>
+            </a:r>
+            <a:r>
+              <a:rPr b="1" dirty="0">
+                <a:latin typeface="JostRoman-Bold"/>
+                <a:ea typeface="JostRoman-Bold"/>
+                <a:cs typeface="JostRoman-Bold"/>
+                <a:sym typeface="JostRoman-Bold"/>
+              </a:rPr>
+              <a:t> </a:t>
+            </a:r>
+            <a:r>
+              <a:rPr b="1" dirty="0" err="1">
+                <a:latin typeface="JostRoman-Bold"/>
+                <a:ea typeface="JostRoman-Bold"/>
+                <a:cs typeface="JostRoman-Bold"/>
+                <a:sym typeface="JostRoman-Bold"/>
+              </a:rPr>
+              <a:t>sollen</a:t>
+            </a:r>
+            <a:r>
+              <a:rPr b="1" dirty="0">
+                <a:latin typeface="JostRoman-Bold"/>
+                <a:ea typeface="JostRoman-Bold"/>
+                <a:cs typeface="JostRoman-Bold"/>
+                <a:sym typeface="JostRoman-Bold"/>
+              </a:rPr>
+              <a:t>, </a:t>
+            </a:r>
+            <a:r>
+              <a:rPr b="1" dirty="0" err="1">
+                <a:latin typeface="JostRoman-Bold"/>
+                <a:ea typeface="JostRoman-Bold"/>
+                <a:cs typeface="JostRoman-Bold"/>
+                <a:sym typeface="JostRoman-Bold"/>
+              </a:rPr>
+              <a:t>öffnen</a:t>
+            </a:r>
+            <a:r>
+              <a:rPr b="1" dirty="0">
+                <a:latin typeface="JostRoman-Bold"/>
+                <a:ea typeface="JostRoman-Bold"/>
+                <a:cs typeface="JostRoman-Bold"/>
+                <a:sym typeface="JostRoman-Bold"/>
+              </a:rPr>
+              <a:t> Sie am </a:t>
+            </a:r>
+            <a:r>
+              <a:rPr b="1" dirty="0" err="1">
+                <a:latin typeface="JostRoman-Bold"/>
+                <a:ea typeface="JostRoman-Bold"/>
+                <a:cs typeface="JostRoman-Bold"/>
+                <a:sym typeface="JostRoman-Bold"/>
+              </a:rPr>
+              <a:t>besten</a:t>
+            </a:r>
+            <a:r>
+              <a:rPr b="1" dirty="0">
+                <a:latin typeface="JostRoman-Bold"/>
+                <a:ea typeface="JostRoman-Bold"/>
+                <a:cs typeface="JostRoman-Bold"/>
+                <a:sym typeface="JostRoman-Bold"/>
+              </a:rPr>
+              <a:t> </a:t>
+            </a:r>
+            <a:r>
+              <a:rPr b="1" dirty="0" err="1">
+                <a:latin typeface="JostRoman-Bold"/>
+                <a:ea typeface="JostRoman-Bold"/>
+                <a:cs typeface="JostRoman-Bold"/>
+                <a:sym typeface="JostRoman-Bold"/>
+              </a:rPr>
+              <a:t>zuerst</a:t>
+            </a:r>
+            <a:r>
+              <a:rPr b="1" dirty="0">
+                <a:latin typeface="JostRoman-Bold"/>
+                <a:ea typeface="JostRoman-Bold"/>
+                <a:cs typeface="JostRoman-Bold"/>
+                <a:sym typeface="JostRoman-Bold"/>
+              </a:rPr>
+              <a:t> dieses Modell.</a:t>
             </a:r>
           </a:p>
         </p:txBody>
@@ -5154,7 +5940,7 @@
           </a:ln>
           <a:extLst>
             <a:ext uri="{C572A759-6A51-4108-AA02-DFA0A04FC94B}">
-              <ma14:wrappingTextBoxFlag xmlns:ma14="http://schemas.microsoft.com/office/mac/drawingml/2011/main" val="1"/>
+              <ma14:wrappingTextBoxFlag xmlns="" xmlns:m="http://schemas.openxmlformats.org/officeDocument/2006/math" xmlns:a14="http://schemas.microsoft.com/office/drawing/2010/main" xmlns:ma14="http://schemas.microsoft.com/office/mac/drawingml/2011/main" val="1"/>
             </a:ext>
           </a:extLst>
         </p:spPr>
@@ -5164,7 +5950,7 @@
           </a:bodyPr>
           <a:lstStyle>
             <a:lvl1pPr>
-              <a:defRPr b="1" sz="2000">
+              <a:defRPr sz="2000" b="1">
                 <a:latin typeface="JostRoman-SemiBold"/>
                 <a:ea typeface="JostRoman-SemiBold"/>
                 <a:cs typeface="JostRoman-SemiBold"/>
@@ -5173,7 +5959,6 @@
             </a:lvl1pPr>
           </a:lstStyle>
           <a:p>
-            <a:pPr/>
             <a:r>
               <a:t>4. Mischfilament</a:t>
             </a:r>
@@ -5199,7 +5984,7 @@
           </a:ln>
           <a:extLst>
             <a:ext uri="{C572A759-6A51-4108-AA02-DFA0A04FC94B}">
-              <ma14:wrappingTextBoxFlag xmlns:ma14="http://schemas.microsoft.com/office/mac/drawingml/2011/main" val="1"/>
+              <ma14:wrappingTextBoxFlag xmlns="" xmlns:m="http://schemas.openxmlformats.org/officeDocument/2006/math" xmlns:a14="http://schemas.microsoft.com/office/drawing/2010/main" xmlns:ma14="http://schemas.microsoft.com/office/mac/drawingml/2011/main" val="1"/>
             </a:ext>
           </a:extLst>
         </p:spPr>
@@ -5218,7 +6003,7 @@
           </a:p>
           <a:p>
             <a:pPr>
-              <a:defRPr b="1" sz="1000">
+              <a:defRPr sz="1000" b="1">
                 <a:latin typeface="JostRoman-Bold"/>
                 <a:ea typeface="JostRoman-Bold"/>
                 <a:cs typeface="JostRoman-Bold"/>
@@ -5231,13 +6016,14 @@
           </a:p>
           <a:p>
             <a:pPr>
-              <a:defRPr b="1" sz="500">
+              <a:defRPr sz="500" b="1">
                 <a:latin typeface="JostRoman-Bold"/>
                 <a:ea typeface="JostRoman-Bold"/>
                 <a:cs typeface="JostRoman-Bold"/>
                 <a:sym typeface="JostRoman-Bold"/>
               </a:defRPr>
             </a:pPr>
+            <a:endParaRPr/>
           </a:p>
           <a:p>
             <a:pPr>
@@ -5268,7 +6054,7 @@
           </a:ln>
           <a:extLst>
             <a:ext uri="{C572A759-6A51-4108-AA02-DFA0A04FC94B}">
-              <ma14:wrappingTextBoxFlag xmlns:ma14="http://schemas.microsoft.com/office/mac/drawingml/2011/main" val="1"/>
+              <ma14:wrappingTextBoxFlag xmlns="" xmlns:m="http://schemas.openxmlformats.org/officeDocument/2006/math" xmlns:a14="http://schemas.microsoft.com/office/drawing/2010/main" xmlns:ma14="http://schemas.microsoft.com/office/mac/drawingml/2011/main" val="1"/>
             </a:ext>
           </a:extLst>
         </p:spPr>
@@ -5282,7 +6068,6 @@
             </a:lvl1pPr>
           </a:lstStyle>
           <a:p>
-            <a:pPr/>
             <a:r>
               <a:t>Nachfolgend finden Sie die Modellkonfiguration für das Mischfilament.</a:t>
             </a:r>
@@ -5298,9 +6083,7 @@
           <p:nvPr/>
         </p:nvPicPr>
         <p:blipFill>
-          <a:blip r:embed="rId2">
-            <a:extLst/>
-          </a:blip>
+          <a:blip r:embed="rId2"/>
           <a:stretch>
             <a:fillRect/>
           </a:stretch>
@@ -5327,16 +6110,14 @@
           <p:nvPr/>
         </p:nvPicPr>
         <p:blipFill>
-          <a:blip r:embed="rId3">
-            <a:extLst/>
-          </a:blip>
+          <a:blip r:embed="rId3"/>
           <a:stretch>
             <a:fillRect/>
           </a:stretch>
         </p:blipFill>
         <p:spPr>
           <a:xfrm>
-            <a:off x="1204664" y="1565210"/>
+            <a:off x="1204664" y="1492058"/>
             <a:ext cx="4098506" cy="913899"/>
           </a:xfrm>
           <a:prstGeom prst="rect">
@@ -5349,31 +6130,49 @@
       </p:pic>
       <p:pic>
         <p:nvPicPr>
-          <p:cNvPr id="157" name="ペーストされたムービー.png" descr="ペーストされたムービー.png"/>
+          <p:cNvPr id="5" name="図 4">
+            <a:extLst>
+              <a:ext uri="{FF2B5EF4-FFF2-40B4-BE49-F238E27FC236}">
+                <a16:creationId xmlns:a16="http://schemas.microsoft.com/office/drawing/2014/main" id="{5F8BCD32-B926-C125-5103-9FBDBFFE9C44}"/>
+              </a:ext>
+            </a:extLst>
+          </p:cNvPr>
           <p:cNvPicPr>
-            <a:picLocks noChangeAspect="1"/>
+            <a:picLocks noChangeAspect="1" noChangeArrowheads="1"/>
           </p:cNvPicPr>
           <p:nvPr/>
         </p:nvPicPr>
         <p:blipFill>
           <a:blip r:embed="rId4">
-            <a:extLst/>
+            <a:extLst>
+              <a:ext uri="{28A0092B-C50C-407E-A947-70E740481C1C}">
+                <a14:useLocalDpi xmlns:a14="http://schemas.microsoft.com/office/drawing/2010/main" val="0"/>
+              </a:ext>
+            </a:extLst>
           </a:blip>
+          <a:srcRect/>
           <a:stretch>
             <a:fillRect/>
           </a:stretch>
         </p:blipFill>
-        <p:spPr>
+        <p:spPr bwMode="auto">
           <a:xfrm>
-            <a:off x="404000" y="4571288"/>
-            <a:ext cx="6069986" cy="819394"/>
+            <a:off x="540000" y="4252052"/>
+            <a:ext cx="5812703" cy="1097100"/>
           </a:xfrm>
           <a:prstGeom prst="rect">
             <a:avLst/>
           </a:prstGeom>
-          <a:ln w="12700">
-            <a:miter lim="400000"/>
-          </a:ln>
+          <a:noFill/>
+          <a:extLst>
+            <a:ext uri="{909E8E84-426E-40DD-AFC4-6F175D3DCCD1}">
+              <a14:hiddenFill xmlns:a14="http://schemas.microsoft.com/office/drawing/2010/main">
+                <a:solidFill>
+                  <a:srgbClr val="FFFFFF"/>
+                </a:solidFill>
+              </a14:hiddenFill>
+            </a:ext>
+          </a:extLst>
         </p:spPr>
       </p:pic>
     </p:spTree>
@@ -5381,12 +6180,12 @@
   <p:clrMapOvr>
     <a:masterClrMapping/>
   </p:clrMapOvr>
-  <p:transition xmlns:p14="http://schemas.microsoft.com/office/powerpoint/2010/main" spd="med" advClick="1"/>
+  <p:transition spd="med"/>
 </p:sld>
 </file>
 
 <file path=ppt/slides/slide4.xml><?xml version="1.0" encoding="utf-8"?>
-<p:sld xmlns:a="http://schemas.openxmlformats.org/drawingml/2006/main" xmlns:r="http://schemas.openxmlformats.org/officeDocument/2006/relationships" xmlns:p="http://schemas.openxmlformats.org/presentationml/2006/main" xmlns:m="http://schemas.openxmlformats.org/officeDocument/2006/math" xmlns:a14="http://schemas.microsoft.com/office/drawing/2010/main" showMasterSp="1" showMasterPhAnim="1">
+<p:sld xmlns:a="http://schemas.openxmlformats.org/drawingml/2006/main" xmlns:r="http://schemas.openxmlformats.org/officeDocument/2006/relationships" xmlns:p="http://schemas.openxmlformats.org/presentationml/2006/main">
   <p:cSld>
     <p:spTree>
       <p:nvGrpSpPr>
@@ -5445,6 +6244,7 @@
                 </a:solidFill>
               </a:defRPr>
             </a:pPr>
+            <a:endParaRPr/>
           </a:p>
         </p:txBody>
       </p:sp>
@@ -5480,6 +6280,7 @@
                 </a:solidFill>
               </a:defRPr>
             </a:pPr>
+            <a:endParaRPr/>
           </a:p>
         </p:txBody>
       </p:sp>
@@ -5538,6 +6339,7 @@
                   </a:solidFill>
                 </a:defRPr>
               </a:pPr>
+              <a:endParaRPr/>
             </a:p>
           </p:txBody>
         </p:sp>
@@ -5582,6 +6384,7 @@
                   </a:solidFill>
                 </a:defRPr>
               </a:pPr>
+              <a:endParaRPr/>
             </a:p>
           </p:txBody>
         </p:sp>
@@ -5626,6 +6429,7 @@
                   </a:solidFill>
                 </a:defRPr>
               </a:pPr>
+              <a:endParaRPr/>
             </a:p>
           </p:txBody>
         </p:sp>
@@ -5670,6 +6474,7 @@
                   </a:solidFill>
                 </a:defRPr>
               </a:pPr>
+              <a:endParaRPr/>
             </a:p>
           </p:txBody>
         </p:sp>
@@ -5709,6 +6514,7 @@
                 </a:solidFill>
               </a:defRPr>
             </a:pPr>
+            <a:endParaRPr/>
           </a:p>
         </p:txBody>
       </p:sp>
@@ -5747,6 +6553,7 @@
                 </a:solidFill>
               </a:defRPr>
             </a:pPr>
+            <a:endParaRPr/>
           </a:p>
         </p:txBody>
       </p:sp>
@@ -5785,6 +6592,7 @@
                 </a:solidFill>
               </a:defRPr>
             </a:pPr>
+            <a:endParaRPr/>
           </a:p>
         </p:txBody>
       </p:sp>
@@ -5807,7 +6615,7 @@
           </a:ln>
           <a:extLst>
             <a:ext uri="{C572A759-6A51-4108-AA02-DFA0A04FC94B}">
-              <ma14:wrappingTextBoxFlag xmlns:ma14="http://schemas.microsoft.com/office/mac/drawingml/2011/main" val="1"/>
+              <ma14:wrappingTextBoxFlag xmlns="" xmlns:m="http://schemas.openxmlformats.org/officeDocument/2006/math" xmlns:a14="http://schemas.microsoft.com/office/drawing/2010/main" xmlns:ma14="http://schemas.microsoft.com/office/mac/drawingml/2011/main" val="1"/>
             </a:ext>
           </a:extLst>
         </p:spPr>
@@ -5819,7 +6627,6 @@
             <a:lvl1pPr algn="ctr"/>
           </a:lstStyle>
           <a:p>
-            <a:pPr/>
             <a:r>
               <a:t>3</a:t>
             </a:r>
@@ -5861,6 +6668,7 @@
                 </a:solidFill>
               </a:defRPr>
             </a:pPr>
+            <a:endParaRPr/>
           </a:p>
         </p:txBody>
       </p:sp>
@@ -5872,7 +6680,7 @@
         </p:nvSpPr>
         <p:spPr>
           <a:xfrm>
-            <a:off x="816563" y="546516"/>
+            <a:off x="816563" y="570900"/>
             <a:ext cx="2813096" cy="459741"/>
           </a:xfrm>
           <a:prstGeom prst="rect">
@@ -5883,7 +6691,7 @@
           </a:ln>
           <a:extLst>
             <a:ext uri="{C572A759-6A51-4108-AA02-DFA0A04FC94B}">
-              <ma14:wrappingTextBoxFlag xmlns:ma14="http://schemas.microsoft.com/office/mac/drawingml/2011/main" val="1"/>
+              <ma14:wrappingTextBoxFlag xmlns="" xmlns:m="http://schemas.openxmlformats.org/officeDocument/2006/math" xmlns:a14="http://schemas.microsoft.com/office/drawing/2010/main" xmlns:ma14="http://schemas.microsoft.com/office/mac/drawingml/2011/main" val="1"/>
             </a:ext>
           </a:extLst>
         </p:spPr>
@@ -5893,7 +6701,7 @@
           </a:bodyPr>
           <a:lstStyle>
             <a:lvl1pPr>
-              <a:defRPr b="1" sz="2000">
+              <a:defRPr sz="2000" b="1">
                 <a:latin typeface="JostRoman-SemiBold"/>
                 <a:ea typeface="JostRoman-SemiBold"/>
                 <a:cs typeface="JostRoman-SemiBold"/>
@@ -5902,9 +6710,17 @@
             </a:lvl1pPr>
           </a:lstStyle>
           <a:p>
-            <a:pPr/>
-            <a:r>
-              <a:t>5. Farbverlaufsfilament </a:t>
+            <a:r>
+              <a:rPr dirty="0"/>
+              <a:t>5. </a:t>
+            </a:r>
+            <a:r>
+              <a:rPr dirty="0" err="1"/>
+              <a:t>Farbverlaufsfilament</a:t>
+            </a:r>
+            <a:r>
+              <a:rPr dirty="0"/>
+              <a:t> </a:t>
             </a:r>
           </a:p>
         </p:txBody>
@@ -5917,7 +6733,7 @@
         </p:nvSpPr>
         <p:spPr>
           <a:xfrm>
-            <a:off x="721497" y="4572000"/>
+            <a:off x="721497" y="4547616"/>
             <a:ext cx="5550783" cy="281940"/>
           </a:xfrm>
           <a:prstGeom prst="rect">
@@ -5928,7 +6744,7 @@
           </a:ln>
           <a:extLst>
             <a:ext uri="{C572A759-6A51-4108-AA02-DFA0A04FC94B}">
-              <ma14:wrappingTextBoxFlag xmlns:ma14="http://schemas.microsoft.com/office/mac/drawingml/2011/main" val="1"/>
+              <ma14:wrappingTextBoxFlag xmlns="" xmlns:m="http://schemas.openxmlformats.org/officeDocument/2006/math" xmlns:a14="http://schemas.microsoft.com/office/drawing/2010/main" xmlns:ma14="http://schemas.microsoft.com/office/mac/drawingml/2011/main" val="1"/>
             </a:ext>
           </a:extLst>
         </p:spPr>
@@ -5942,42 +6758,41 @@
             </a:lvl1pPr>
           </a:lstStyle>
           <a:p>
-            <a:pPr/>
-            <a:r>
-              <a:t>Nachfolgend finden Sie die Modellkonfiguration für das Farbverlaufsfilament.</a:t>
+            <a:r>
+              <a:rPr dirty="0" err="1"/>
+              <a:t>Nachfolgend</a:t>
+            </a:r>
+            <a:r>
+              <a:rPr dirty="0"/>
+              <a:t> </a:t>
+            </a:r>
+            <a:r>
+              <a:rPr dirty="0" err="1"/>
+              <a:t>finden</a:t>
+            </a:r>
+            <a:r>
+              <a:rPr dirty="0"/>
+              <a:t> Sie die </a:t>
+            </a:r>
+            <a:r>
+              <a:rPr dirty="0" err="1"/>
+              <a:t>Modellkonfiguration</a:t>
+            </a:r>
+            <a:r>
+              <a:rPr dirty="0"/>
+              <a:t> für das </a:t>
+            </a:r>
+            <a:r>
+              <a:rPr dirty="0" err="1"/>
+              <a:t>Farbverlaufsfilament</a:t>
+            </a:r>
+            <a:r>
+              <a:rPr dirty="0"/>
+              <a:t>.</a:t>
             </a:r>
           </a:p>
         </p:txBody>
       </p:sp>
-      <p:pic>
-        <p:nvPicPr>
-          <p:cNvPr id="173" name="図 3" descr="図 3"/>
-          <p:cNvPicPr>
-            <a:picLocks noChangeAspect="1"/>
-          </p:cNvPicPr>
-          <p:nvPr/>
-        </p:nvPicPr>
-        <p:blipFill>
-          <a:blip r:embed="rId2">
-            <a:extLst/>
-          </a:blip>
-          <a:stretch>
-            <a:fillRect/>
-          </a:stretch>
-        </p:blipFill>
-        <p:spPr>
-          <a:xfrm>
-            <a:off x="807622" y="4877620"/>
-            <a:ext cx="5250025" cy="3684063"/>
-          </a:xfrm>
-          <a:prstGeom prst="rect">
-            <a:avLst/>
-          </a:prstGeom>
-          <a:ln w="12700">
-            <a:miter lim="400000"/>
-          </a:ln>
-        </p:spPr>
-      </p:pic>
       <p:sp>
         <p:nvSpPr>
           <p:cNvPr id="174" name="テキスト ボックス 18"/>
@@ -5997,7 +6812,7 @@
           </a:ln>
           <a:extLst>
             <a:ext uri="{C572A759-6A51-4108-AA02-DFA0A04FC94B}">
-              <ma14:wrappingTextBoxFlag xmlns:ma14="http://schemas.microsoft.com/office/mac/drawingml/2011/main" val="1"/>
+              <ma14:wrappingTextBoxFlag xmlns="" xmlns:m="http://schemas.openxmlformats.org/officeDocument/2006/math" xmlns:a14="http://schemas.microsoft.com/office/drawing/2010/main" xmlns:ma14="http://schemas.microsoft.com/office/mac/drawingml/2011/main" val="1"/>
             </a:ext>
           </a:extLst>
         </p:spPr>
@@ -6011,13 +6826,135 @@
               <a:defRPr sz="1000"/>
             </a:pPr>
             <a:r>
-              <a:t>Die Farbverlaufsfilament Serie bietet mehrere farbwechselnde Profile und Druckplatten mit unterschiedlichen Zyklusanzahlen. Die Details variieren je nach Modell. Bitte beachten Sie daher die Beschreibung des jeweiligen Modells.</a:t>
+              <a:rPr dirty="0"/>
+              <a:t>Die </a:t>
+            </a:r>
+            <a:r>
+              <a:rPr dirty="0" err="1"/>
+              <a:t>Farbverlaufsfilament</a:t>
+            </a:r>
+            <a:r>
+              <a:rPr dirty="0"/>
+              <a:t> Serie </a:t>
+            </a:r>
+            <a:r>
+              <a:rPr dirty="0" err="1"/>
+              <a:t>bietet</a:t>
+            </a:r>
+            <a:r>
+              <a:rPr dirty="0"/>
+              <a:t> </a:t>
+            </a:r>
+            <a:r>
+              <a:rPr dirty="0" err="1"/>
+              <a:t>mehrere</a:t>
+            </a:r>
+            <a:r>
+              <a:rPr dirty="0"/>
+              <a:t> </a:t>
+            </a:r>
+            <a:r>
+              <a:rPr dirty="0" err="1"/>
+              <a:t>farbwechselnde</a:t>
+            </a:r>
+            <a:r>
+              <a:rPr dirty="0"/>
+              <a:t> Profile und </a:t>
+            </a:r>
+            <a:r>
+              <a:rPr dirty="0" err="1"/>
+              <a:t>Druckplatten</a:t>
+            </a:r>
+            <a:r>
+              <a:rPr dirty="0"/>
+              <a:t> </a:t>
+            </a:r>
+            <a:r>
+              <a:rPr dirty="0" err="1"/>
+              <a:t>mit</a:t>
+            </a:r>
+            <a:r>
+              <a:rPr dirty="0"/>
+              <a:t> </a:t>
+            </a:r>
+            <a:r>
+              <a:rPr dirty="0" err="1"/>
+              <a:t>unterschiedlichen</a:t>
+            </a:r>
+            <a:r>
+              <a:rPr dirty="0"/>
+              <a:t> </a:t>
+            </a:r>
+            <a:r>
+              <a:rPr dirty="0" err="1"/>
+              <a:t>Zyklusanzahlen</a:t>
+            </a:r>
+            <a:r>
+              <a:rPr dirty="0"/>
+              <a:t>. Die Details </a:t>
+            </a:r>
+            <a:r>
+              <a:rPr dirty="0" err="1"/>
+              <a:t>variieren</a:t>
+            </a:r>
+            <a:r>
+              <a:rPr dirty="0"/>
+              <a:t> je </a:t>
+            </a:r>
+            <a:r>
+              <a:rPr dirty="0" err="1"/>
+              <a:t>nach</a:t>
+            </a:r>
+            <a:r>
+              <a:rPr dirty="0"/>
+              <a:t> Modell. Bitte </a:t>
+            </a:r>
+            <a:r>
+              <a:rPr dirty="0" err="1"/>
+              <a:t>beachten</a:t>
+            </a:r>
+            <a:r>
+              <a:rPr dirty="0"/>
+              <a:t> Sie </a:t>
+            </a:r>
+            <a:r>
+              <a:rPr dirty="0" err="1"/>
+              <a:t>daher</a:t>
+            </a:r>
+            <a:r>
+              <a:rPr dirty="0"/>
+              <a:t> die </a:t>
+            </a:r>
+            <a:r>
+              <a:rPr dirty="0" err="1"/>
+              <a:t>Beschreibung</a:t>
+            </a:r>
+            <a:r>
+              <a:rPr dirty="0"/>
+              <a:t> des </a:t>
+            </a:r>
+            <a:r>
+              <a:rPr dirty="0" err="1"/>
+              <a:t>jeweiligen</a:t>
+            </a:r>
+            <a:r>
+              <a:rPr dirty="0"/>
+              <a:t> </a:t>
+            </a:r>
+            <a:r>
+              <a:rPr dirty="0" err="1"/>
+              <a:t>Modells</a:t>
+            </a:r>
+            <a:r>
+              <a:rPr dirty="0"/>
+              <a:t>.</a:t>
             </a:r>
           </a:p>
           <a:p>
             <a:pPr>
               <a:defRPr sz="1000"/>
             </a:pPr>
+            <a:endParaRPr dirty="0"/>
           </a:p>
           <a:p>
             <a:pPr marL="171450" indent="-171450">
@@ -6027,13 +6964,131 @@
               <a:defRPr sz="1000"/>
             </a:pPr>
             <a:r>
-              <a:t>Farbkurve: Einstellungen basierend auf Farbkombinationen. Diese Option ermöglicht es Ihnen, den optimalen Verlauf für jede Farbe auszuwählen – zum Beispiel „Lebendig“ für Cyan und Gelb oder „Kontrast“ für Weiß und Magenta.</a:t>
+              <a:rPr dirty="0" err="1"/>
+              <a:t>Farbkurve</a:t>
+            </a:r>
+            <a:r>
+              <a:rPr dirty="0"/>
+              <a:t>: </a:t>
+            </a:r>
+            <a:r>
+              <a:rPr dirty="0" err="1"/>
+              <a:t>Einstellungen</a:t>
+            </a:r>
+            <a:r>
+              <a:rPr dirty="0"/>
+              <a:t> </a:t>
+            </a:r>
+            <a:r>
+              <a:rPr dirty="0" err="1"/>
+              <a:t>basierend</a:t>
+            </a:r>
+            <a:r>
+              <a:rPr dirty="0"/>
+              <a:t> auf </a:t>
+            </a:r>
+            <a:r>
+              <a:rPr dirty="0" err="1"/>
+              <a:t>Farbkombinationen</a:t>
+            </a:r>
+            <a:r>
+              <a:rPr dirty="0"/>
+              <a:t>. </a:t>
+            </a:r>
+            <a:r>
+              <a:rPr dirty="0" err="1"/>
+              <a:t>Diese</a:t>
+            </a:r>
+            <a:r>
+              <a:rPr dirty="0"/>
+              <a:t> Option </a:t>
+            </a:r>
+            <a:r>
+              <a:rPr dirty="0" err="1"/>
+              <a:t>ermöglicht</a:t>
+            </a:r>
+            <a:r>
+              <a:rPr dirty="0"/>
+              <a:t> es Ihnen, den </a:t>
+            </a:r>
+            <a:r>
+              <a:rPr dirty="0" err="1"/>
+              <a:t>optimalen</a:t>
+            </a:r>
+            <a:r>
+              <a:rPr dirty="0"/>
+              <a:t> </a:t>
+            </a:r>
+            <a:r>
+              <a:rPr dirty="0" err="1"/>
+              <a:t>Verlauf</a:t>
+            </a:r>
+            <a:r>
+              <a:rPr dirty="0"/>
+              <a:t> für </a:t>
+            </a:r>
+            <a:r>
+              <a:rPr dirty="0" err="1"/>
+              <a:t>jede</a:t>
+            </a:r>
+            <a:r>
+              <a:rPr dirty="0"/>
+              <a:t> </a:t>
+            </a:r>
+            <a:r>
+              <a:rPr dirty="0" err="1"/>
+              <a:t>Farbe</a:t>
+            </a:r>
+            <a:r>
+              <a:rPr dirty="0"/>
+              <a:t> </a:t>
+            </a:r>
+            <a:r>
+              <a:rPr dirty="0" err="1"/>
+              <a:t>auszuwählen</a:t>
+            </a:r>
+            <a:r>
+              <a:rPr dirty="0"/>
+              <a:t> – </a:t>
+            </a:r>
+            <a:r>
+              <a:rPr dirty="0" err="1"/>
+              <a:t>zum</a:t>
+            </a:r>
+            <a:r>
+              <a:rPr dirty="0"/>
+              <a:t> </a:t>
+            </a:r>
+            <a:r>
+              <a:rPr dirty="0" err="1"/>
+              <a:t>Beispiel</a:t>
+            </a:r>
+            <a:r>
+              <a:rPr dirty="0"/>
+              <a:t> „Lebendig“ für Cyan und Gelb </a:t>
+            </a:r>
+            <a:r>
+              <a:rPr dirty="0" err="1"/>
+              <a:t>oder</a:t>
+            </a:r>
+            <a:r>
+              <a:rPr dirty="0"/>
+              <a:t> „</a:t>
+            </a:r>
+            <a:r>
+              <a:rPr dirty="0" err="1"/>
+              <a:t>Kontrast</a:t>
+            </a:r>
+            <a:r>
+              <a:rPr dirty="0"/>
+              <a:t>“ für Weiß und Magenta.</a:t>
             </a:r>
           </a:p>
           <a:p>
             <a:pPr>
               <a:defRPr sz="600"/>
             </a:pPr>
+            <a:endParaRPr dirty="0"/>
           </a:p>
           <a:p>
             <a:pPr marL="171450" indent="-171450">
@@ -6043,51 +7098,407 @@
               <a:defRPr sz="1000"/>
             </a:pPr>
             <a:r>
-              <a:t>Zyklusanzahl: Die Zahl, welche die Häufigkeit des Verlaufs bestimmt. Als ein Zyklus zählt ein vollständiger Durchlauf, in dem das Filament von A nach B nach A und wieder zurück wechselt.</a:t>
+              <a:rPr dirty="0" err="1"/>
+              <a:t>Zyklusanzahl</a:t>
+            </a:r>
+            <a:r>
+              <a:rPr dirty="0"/>
+              <a:t>: Die Zahl, </a:t>
+            </a:r>
+            <a:r>
+              <a:rPr dirty="0" err="1"/>
+              <a:t>welche</a:t>
+            </a:r>
+            <a:r>
+              <a:rPr dirty="0"/>
+              <a:t> die </a:t>
+            </a:r>
+            <a:r>
+              <a:rPr dirty="0" err="1"/>
+              <a:t>Häufigkeit</a:t>
+            </a:r>
+            <a:r>
+              <a:rPr dirty="0"/>
+              <a:t> des </a:t>
+            </a:r>
+            <a:r>
+              <a:rPr dirty="0" err="1"/>
+              <a:t>Verlaufs</a:t>
+            </a:r>
+            <a:r>
+              <a:rPr dirty="0"/>
+              <a:t> </a:t>
+            </a:r>
+            <a:r>
+              <a:rPr dirty="0" err="1"/>
+              <a:t>bestimmt</a:t>
+            </a:r>
+            <a:r>
+              <a:rPr dirty="0"/>
+              <a:t>. Als </a:t>
+            </a:r>
+            <a:r>
+              <a:rPr dirty="0" err="1"/>
+              <a:t>ein</a:t>
+            </a:r>
+            <a:r>
+              <a:rPr dirty="0"/>
+              <a:t> </a:t>
+            </a:r>
+            <a:r>
+              <a:rPr dirty="0" err="1"/>
+              <a:t>Zyklus</a:t>
+            </a:r>
+            <a:r>
+              <a:rPr dirty="0"/>
+              <a:t> </a:t>
+            </a:r>
+            <a:r>
+              <a:rPr dirty="0" err="1"/>
+              <a:t>zählt</a:t>
+            </a:r>
+            <a:r>
+              <a:rPr dirty="0"/>
+              <a:t> </a:t>
+            </a:r>
+            <a:r>
+              <a:rPr dirty="0" err="1"/>
+              <a:t>ein</a:t>
+            </a:r>
+            <a:r>
+              <a:rPr dirty="0"/>
+              <a:t> </a:t>
+            </a:r>
+            <a:r>
+              <a:rPr dirty="0" err="1"/>
+              <a:t>vollständiger</a:t>
+            </a:r>
+            <a:r>
+              <a:rPr dirty="0"/>
+              <a:t> </a:t>
+            </a:r>
+            <a:r>
+              <a:rPr dirty="0" err="1"/>
+              <a:t>Durchlauf</a:t>
+            </a:r>
+            <a:r>
+              <a:rPr dirty="0"/>
+              <a:t>, in dem das Filament von A </a:t>
+            </a:r>
+            <a:r>
+              <a:rPr dirty="0" err="1"/>
+              <a:t>nach</a:t>
+            </a:r>
+            <a:r>
+              <a:rPr dirty="0"/>
+              <a:t> B </a:t>
+            </a:r>
+            <a:r>
+              <a:rPr dirty="0" err="1"/>
+              <a:t>nach</a:t>
+            </a:r>
+            <a:r>
+              <a:rPr dirty="0"/>
+              <a:t> A und </a:t>
+            </a:r>
+            <a:r>
+              <a:rPr dirty="0" err="1"/>
+              <a:t>wieder</a:t>
+            </a:r>
+            <a:r>
+              <a:rPr dirty="0"/>
+              <a:t> </a:t>
+            </a:r>
+            <a:r>
+              <a:rPr dirty="0" err="1"/>
+              <a:t>zurück</a:t>
+            </a:r>
+            <a:r>
+              <a:rPr dirty="0"/>
+              <a:t> </a:t>
+            </a:r>
+            <a:r>
+              <a:rPr dirty="0" err="1"/>
+              <a:t>wechselt</a:t>
+            </a:r>
+            <a:r>
+              <a:rPr dirty="0"/>
+              <a:t>.</a:t>
             </a:r>
           </a:p>
           <a:p>
             <a:pPr>
               <a:defRPr sz="1000"/>
             </a:pPr>
+            <a:endParaRPr dirty="0"/>
           </a:p>
           <a:p>
             <a:pPr>
               <a:defRPr sz="1000"/>
             </a:pPr>
             <a:r>
-              <a:t>Beispiel: Um ein schnell wechselndes Farbverlaufsfilament mit Cyan und Magenta zu erstellen, wählen Sie ein S4 Modell, entscheiden sich für eine 4 Zyklus Druckplatte und nutzen aufgrund des hohen Farbkontrasts das Profil mit der Kurve Lebendig.</a:t>
+              <a:rPr dirty="0" err="1"/>
+              <a:t>Beispiel</a:t>
+            </a:r>
+            <a:r>
+              <a:rPr dirty="0"/>
+              <a:t>: Um </a:t>
+            </a:r>
+            <a:r>
+              <a:rPr dirty="0" err="1"/>
+              <a:t>ein</a:t>
+            </a:r>
+            <a:r>
+              <a:rPr dirty="0"/>
+              <a:t> schnell </a:t>
+            </a:r>
+            <a:r>
+              <a:rPr dirty="0" err="1"/>
+              <a:t>wechselndes</a:t>
+            </a:r>
+            <a:r>
+              <a:rPr dirty="0"/>
+              <a:t> </a:t>
+            </a:r>
+            <a:r>
+              <a:rPr dirty="0" err="1"/>
+              <a:t>Farbverlaufsfilament</a:t>
+            </a:r>
+            <a:r>
+              <a:rPr dirty="0"/>
+              <a:t> </a:t>
+            </a:r>
+            <a:r>
+              <a:rPr dirty="0" err="1"/>
+              <a:t>mit</a:t>
+            </a:r>
+            <a:r>
+              <a:rPr dirty="0"/>
+              <a:t> Cyan und Magenta </a:t>
+            </a:r>
+            <a:r>
+              <a:rPr dirty="0" err="1"/>
+              <a:t>zu</a:t>
+            </a:r>
+            <a:r>
+              <a:rPr dirty="0"/>
+              <a:t> </a:t>
+            </a:r>
+            <a:r>
+              <a:rPr dirty="0" err="1"/>
+              <a:t>erstellen</a:t>
+            </a:r>
+            <a:r>
+              <a:rPr dirty="0"/>
+              <a:t>, </a:t>
+            </a:r>
+            <a:r>
+              <a:rPr dirty="0" err="1"/>
+              <a:t>wählen</a:t>
+            </a:r>
+            <a:r>
+              <a:rPr dirty="0"/>
+              <a:t> Sie </a:t>
+            </a:r>
+            <a:r>
+              <a:rPr dirty="0" err="1"/>
+              <a:t>ein</a:t>
+            </a:r>
+            <a:r>
+              <a:rPr dirty="0"/>
+              <a:t> S4 Modell, </a:t>
+            </a:r>
+            <a:r>
+              <a:rPr dirty="0" err="1"/>
+              <a:t>entscheiden</a:t>
+            </a:r>
+            <a:r>
+              <a:rPr dirty="0"/>
+              <a:t> </a:t>
+            </a:r>
+            <a:r>
+              <a:rPr dirty="0" err="1"/>
+              <a:t>sich</a:t>
+            </a:r>
+            <a:r>
+              <a:rPr dirty="0"/>
+              <a:t> für </a:t>
+            </a:r>
+            <a:r>
+              <a:rPr dirty="0" err="1"/>
+              <a:t>eine</a:t>
+            </a:r>
+            <a:r>
+              <a:rPr dirty="0"/>
+              <a:t> 4 </a:t>
+            </a:r>
+            <a:r>
+              <a:rPr dirty="0" err="1"/>
+              <a:t>Zyklus</a:t>
+            </a:r>
+            <a:r>
+              <a:rPr dirty="0"/>
+              <a:t> </a:t>
+            </a:r>
+            <a:r>
+              <a:rPr dirty="0" err="1"/>
+              <a:t>Druckplatte</a:t>
+            </a:r>
+            <a:r>
+              <a:rPr dirty="0"/>
+              <a:t> und </a:t>
+            </a:r>
+            <a:r>
+              <a:rPr dirty="0" err="1"/>
+              <a:t>nutzen</a:t>
+            </a:r>
+            <a:r>
+              <a:rPr dirty="0"/>
+              <a:t> </a:t>
+            </a:r>
+            <a:r>
+              <a:rPr dirty="0" err="1"/>
+              <a:t>aufgrund</a:t>
+            </a:r>
+            <a:r>
+              <a:rPr dirty="0"/>
+              <a:t> des </a:t>
+            </a:r>
+            <a:r>
+              <a:rPr dirty="0" err="1"/>
+              <a:t>hohen</a:t>
+            </a:r>
+            <a:r>
+              <a:rPr dirty="0"/>
+              <a:t> </a:t>
+            </a:r>
+            <a:r>
+              <a:rPr dirty="0" err="1"/>
+              <a:t>Farbkontrasts</a:t>
+            </a:r>
+            <a:r>
+              <a:rPr dirty="0"/>
+              <a:t> das </a:t>
+            </a:r>
+            <a:r>
+              <a:rPr dirty="0" err="1"/>
+              <a:t>Profil</a:t>
+            </a:r>
+            <a:r>
+              <a:rPr dirty="0"/>
+              <a:t> </a:t>
+            </a:r>
+            <a:r>
+              <a:rPr dirty="0" err="1"/>
+              <a:t>mit</a:t>
+            </a:r>
+            <a:r>
+              <a:rPr dirty="0"/>
+              <a:t> der </a:t>
+            </a:r>
+            <a:r>
+              <a:rPr dirty="0" err="1"/>
+              <a:t>Kurve</a:t>
+            </a:r>
+            <a:r>
+              <a:rPr dirty="0"/>
+              <a:t> Lebendig.</a:t>
             </a:r>
           </a:p>
         </p:txBody>
       </p:sp>
       <p:pic>
         <p:nvPicPr>
-          <p:cNvPr id="175" name="ペーストされたムービー.png" descr="ペーストされたムービー.png"/>
+          <p:cNvPr id="4" name="図 3">
+            <a:extLst>
+              <a:ext uri="{FF2B5EF4-FFF2-40B4-BE49-F238E27FC236}">
+                <a16:creationId xmlns:a16="http://schemas.microsoft.com/office/drawing/2014/main" id="{E19BFAA9-BAA9-A287-8B2F-5211E1A2705E}"/>
+              </a:ext>
+            </a:extLst>
+          </p:cNvPr>
           <p:cNvPicPr>
-            <a:picLocks noChangeAspect="1"/>
+            <a:picLocks noChangeAspect="1" noChangeArrowheads="1"/>
+          </p:cNvPicPr>
+          <p:nvPr/>
+        </p:nvPicPr>
+        <p:blipFill>
+          <a:blip r:embed="rId2">
+            <a:extLst>
+              <a:ext uri="{28A0092B-C50C-407E-A947-70E740481C1C}">
+                <a14:useLocalDpi xmlns:a14="http://schemas.microsoft.com/office/drawing/2010/main" val="0"/>
+              </a:ext>
+            </a:extLst>
+          </a:blip>
+          <a:srcRect/>
+          <a:stretch>
+            <a:fillRect/>
+          </a:stretch>
+        </p:blipFill>
+        <p:spPr bwMode="auto">
+          <a:xfrm>
+            <a:off x="535797" y="3305622"/>
+            <a:ext cx="5818062" cy="1117376"/>
+          </a:xfrm>
+          <a:prstGeom prst="rect">
+            <a:avLst/>
+          </a:prstGeom>
+          <a:noFill/>
+          <a:extLst>
+            <a:ext uri="{909E8E84-426E-40DD-AFC4-6F175D3DCCD1}">
+              <a14:hiddenFill xmlns:a14="http://schemas.microsoft.com/office/drawing/2010/main">
+                <a:solidFill>
+                  <a:srgbClr val="FFFFFF"/>
+                </a:solidFill>
+              </a14:hiddenFill>
+            </a:ext>
+          </a:extLst>
+        </p:spPr>
+      </p:pic>
+      <p:pic>
+        <p:nvPicPr>
+          <p:cNvPr id="3" name="図 2">
+            <a:extLst>
+              <a:ext uri="{FF2B5EF4-FFF2-40B4-BE49-F238E27FC236}">
+                <a16:creationId xmlns:a16="http://schemas.microsoft.com/office/drawing/2014/main" id="{D2653145-492D-9AEA-3B54-C14567956A64}"/>
+              </a:ext>
+            </a:extLst>
+          </p:cNvPr>
+          <p:cNvPicPr>
+            <a:picLocks noChangeAspect="1" noChangeArrowheads="1"/>
           </p:cNvPicPr>
           <p:nvPr/>
         </p:nvPicPr>
         <p:blipFill>
           <a:blip r:embed="rId3">
-            <a:extLst/>
+            <a:extLst>
+              <a:ext uri="{28A0092B-C50C-407E-A947-70E740481C1C}">
+                <a14:useLocalDpi xmlns:a14="http://schemas.microsoft.com/office/drawing/2010/main" val="0"/>
+              </a:ext>
+            </a:extLst>
           </a:blip>
+          <a:srcRect/>
           <a:stretch>
             <a:fillRect/>
           </a:stretch>
         </p:blipFill>
-        <p:spPr>
+        <p:spPr bwMode="auto">
           <a:xfrm>
-            <a:off x="336311" y="3702891"/>
-            <a:ext cx="6219648" cy="858519"/>
+            <a:off x="803027" y="4873452"/>
+            <a:ext cx="5251946" cy="3665739"/>
           </a:xfrm>
           <a:prstGeom prst="rect">
             <a:avLst/>
           </a:prstGeom>
-          <a:ln w="12700">
-            <a:miter lim="400000"/>
-          </a:ln>
+          <a:noFill/>
+          <a:extLst>
+            <a:ext uri="{909E8E84-426E-40DD-AFC4-6F175D3DCCD1}">
+              <a14:hiddenFill xmlns:a14="http://schemas.microsoft.com/office/drawing/2010/main">
+                <a:solidFill>
+                  <a:srgbClr val="FFFFFF"/>
+                </a:solidFill>
+              </a14:hiddenFill>
+            </a:ext>
+          </a:extLst>
         </p:spPr>
       </p:pic>
     </p:spTree>
@@ -6095,12 +7506,12 @@
   <p:clrMapOvr>
     <a:masterClrMapping/>
   </p:clrMapOvr>
-  <p:transition xmlns:p14="http://schemas.microsoft.com/office/powerpoint/2010/main" spd="med" advClick="1"/>
+  <p:transition spd="med"/>
 </p:sld>
 </file>
 
 <file path=ppt/slides/slide5.xml><?xml version="1.0" encoding="utf-8"?>
-<p:sld xmlns:a="http://schemas.openxmlformats.org/drawingml/2006/main" xmlns:r="http://schemas.openxmlformats.org/officeDocument/2006/relationships" xmlns:p="http://schemas.openxmlformats.org/presentationml/2006/main" xmlns:m="http://schemas.openxmlformats.org/officeDocument/2006/math" xmlns:a14="http://schemas.microsoft.com/office/drawing/2010/main" showMasterSp="1" showMasterPhAnim="1">
+<p:sld xmlns:a="http://schemas.openxmlformats.org/drawingml/2006/main" xmlns:r="http://schemas.openxmlformats.org/officeDocument/2006/relationships" xmlns:p="http://schemas.openxmlformats.org/presentationml/2006/main">
   <p:cSld>
     <p:spTree>
       <p:nvGrpSpPr>
@@ -6159,6 +7570,7 @@
                 </a:solidFill>
               </a:defRPr>
             </a:pPr>
+            <a:endParaRPr/>
           </a:p>
         </p:txBody>
       </p:sp>
@@ -6194,6 +7606,7 @@
                 </a:solidFill>
               </a:defRPr>
             </a:pPr>
+            <a:endParaRPr/>
           </a:p>
         </p:txBody>
       </p:sp>
@@ -6252,6 +7665,7 @@
                   </a:solidFill>
                 </a:defRPr>
               </a:pPr>
+              <a:endParaRPr/>
             </a:p>
           </p:txBody>
         </p:sp>
@@ -6296,6 +7710,7 @@
                   </a:solidFill>
                 </a:defRPr>
               </a:pPr>
+              <a:endParaRPr/>
             </a:p>
           </p:txBody>
         </p:sp>
@@ -6340,6 +7755,7 @@
                   </a:solidFill>
                 </a:defRPr>
               </a:pPr>
+              <a:endParaRPr/>
             </a:p>
           </p:txBody>
         </p:sp>
@@ -6384,6 +7800,7 @@
                   </a:solidFill>
                 </a:defRPr>
               </a:pPr>
+              <a:endParaRPr/>
             </a:p>
           </p:txBody>
         </p:sp>
@@ -6423,6 +7840,7 @@
                 </a:solidFill>
               </a:defRPr>
             </a:pPr>
+            <a:endParaRPr/>
           </a:p>
         </p:txBody>
       </p:sp>
@@ -6461,6 +7879,7 @@
                 </a:solidFill>
               </a:defRPr>
             </a:pPr>
+            <a:endParaRPr/>
           </a:p>
         </p:txBody>
       </p:sp>
@@ -6499,6 +7918,7 @@
                 </a:solidFill>
               </a:defRPr>
             </a:pPr>
+            <a:endParaRPr/>
           </a:p>
         </p:txBody>
       </p:sp>
@@ -6521,7 +7941,7 @@
           </a:ln>
           <a:extLst>
             <a:ext uri="{C572A759-6A51-4108-AA02-DFA0A04FC94B}">
-              <ma14:wrappingTextBoxFlag xmlns:ma14="http://schemas.microsoft.com/office/mac/drawingml/2011/main" val="1"/>
+              <ma14:wrappingTextBoxFlag xmlns="" xmlns:m="http://schemas.openxmlformats.org/officeDocument/2006/math" xmlns:a14="http://schemas.microsoft.com/office/drawing/2010/main" xmlns:ma14="http://schemas.microsoft.com/office/mac/drawingml/2011/main" val="1"/>
             </a:ext>
           </a:extLst>
         </p:spPr>
@@ -6533,7 +7953,6 @@
             <a:lvl1pPr algn="ctr"/>
           </a:lstStyle>
           <a:p>
-            <a:pPr/>
             <a:r>
               <a:t>4</a:t>
             </a:r>
@@ -6575,6 +7994,7 @@
                 </a:solidFill>
               </a:defRPr>
             </a:pPr>
+            <a:endParaRPr/>
           </a:p>
         </p:txBody>
       </p:sp>
@@ -6586,7 +8006,7 @@
         </p:nvSpPr>
         <p:spPr>
           <a:xfrm>
-            <a:off x="823834" y="784293"/>
+            <a:off x="823834" y="772101"/>
             <a:ext cx="1804552" cy="383541"/>
           </a:xfrm>
           <a:prstGeom prst="rect">
@@ -6597,7 +8017,7 @@
           </a:ln>
           <a:extLst>
             <a:ext uri="{C572A759-6A51-4108-AA02-DFA0A04FC94B}">
-              <ma14:wrappingTextBoxFlag xmlns:ma14="http://schemas.microsoft.com/office/mac/drawingml/2011/main" val="1"/>
+              <ma14:wrappingTextBoxFlag xmlns="" xmlns:m="http://schemas.openxmlformats.org/officeDocument/2006/math" xmlns:a14="http://schemas.microsoft.com/office/drawing/2010/main" xmlns:ma14="http://schemas.microsoft.com/office/mac/drawingml/2011/main" val="1"/>
             </a:ext>
           </a:extLst>
         </p:spPr>
@@ -6607,7 +8027,7 @@
           </a:bodyPr>
           <a:lstStyle>
             <a:lvl1pPr>
-              <a:defRPr b="1" sz="1600">
+              <a:defRPr sz="1600" b="1">
                 <a:latin typeface="JostRoman-SemiBold"/>
                 <a:ea typeface="JostRoman-SemiBold"/>
                 <a:cs typeface="JostRoman-SemiBold"/>
@@ -6616,10 +8036,15 @@
             </a:lvl1pPr>
           </a:lstStyle>
           <a:p>
-            <a:pPr/>
-            <a:r>
-              <a:t>6. Update Historie</a:t>
-            </a:r>
+            <a:r>
+              <a:rPr dirty="0"/>
+              <a:t>6. Update </a:t>
+            </a:r>
+            <a:r>
+              <a:rPr dirty="0" err="1"/>
+              <a:t>Historie</a:t>
+            </a:r>
+            <a:endParaRPr dirty="0"/>
           </a:p>
         </p:txBody>
       </p:sp>
@@ -6642,7 +8067,7 @@
           </a:ln>
           <a:extLst>
             <a:ext uri="{C572A759-6A51-4108-AA02-DFA0A04FC94B}">
-              <ma14:wrappingTextBoxFlag xmlns:ma14="http://schemas.microsoft.com/office/mac/drawingml/2011/main" val="1"/>
+              <ma14:wrappingTextBoxFlag xmlns="" xmlns:m="http://schemas.openxmlformats.org/officeDocument/2006/math" xmlns:a14="http://schemas.microsoft.com/office/drawing/2010/main" xmlns:ma14="http://schemas.microsoft.com/office/mac/drawingml/2011/main" val="1"/>
             </a:ext>
           </a:extLst>
         </p:spPr>
@@ -6656,10 +8081,80 @@
             </a:lvl1pPr>
           </a:lstStyle>
           <a:p>
-            <a:pPr/>
-            <a:r>
-              <a:t>Ver.1.00  2026-09-01  Erste Version veröffentlicht</a:t>
-            </a:r>
+            <a:r>
+              <a:rPr dirty="0"/>
+              <a:t>Ver.1.00  2026-09-01  Erste Version </a:t>
+            </a:r>
+            <a:r>
+              <a:rPr dirty="0" err="1"/>
+              <a:t>veröffentlicht</a:t>
+            </a:r>
+            <a:endParaRPr dirty="0"/>
+          </a:p>
+        </p:txBody>
+      </p:sp>
+      <p:sp>
+        <p:nvSpPr>
+          <p:cNvPr id="3" name="テキスト ボックス 34">
+            <a:extLst>
+              <a:ext uri="{FF2B5EF4-FFF2-40B4-BE49-F238E27FC236}">
+                <a16:creationId xmlns:a16="http://schemas.microsoft.com/office/drawing/2014/main" id="{428EAF54-F90C-9FE7-D2B3-BCDADCCF8091}"/>
+              </a:ext>
+            </a:extLst>
+          </p:cNvPr>
+          <p:cNvSpPr txBox="1"/>
+          <p:nvPr/>
+        </p:nvSpPr>
+        <p:spPr>
+          <a:xfrm>
+            <a:off x="684043" y="1985257"/>
+            <a:ext cx="5558051" cy="400110"/>
+          </a:xfrm>
+          <a:prstGeom prst="rect">
+            <a:avLst/>
+          </a:prstGeom>
+          <a:ln w="12700">
+            <a:miter lim="400000"/>
+          </a:ln>
+          <a:extLst>
+            <a:ext uri="{C572A759-6A51-4108-AA02-DFA0A04FC94B}">
+              <ma14:wrappingTextBoxFlag xmlns="" xmlns:m="http://schemas.openxmlformats.org/officeDocument/2006/math" xmlns:a14="http://schemas.microsoft.com/office/drawing/2010/main" xmlns:ma14="http://schemas.microsoft.com/office/mac/drawingml/2011/main" val="1"/>
+            </a:ext>
+          </a:extLst>
+        </p:spPr>
+        <p:txBody>
+          <a:bodyPr lIns="45719" rIns="45719">
+            <a:spAutoFit/>
+          </a:bodyPr>
+          <a:lstStyle>
+            <a:lvl1pPr>
+              <a:defRPr sz="900"/>
+            </a:lvl1pPr>
+          </a:lstStyle>
+          <a:p>
+            <a:r>
+              <a:rPr lang="en-US" sz="1000" dirty="0" err="1"/>
+              <a:t>Nennung</a:t>
+            </a:r>
+            <a:r>
+              <a:rPr lang="en-US" sz="1000" dirty="0"/>
+              <a:t> : </a:t>
+            </a:r>
+          </a:p>
+          <a:p>
+            <a:r>
+              <a:rPr lang="en-US" sz="1000" dirty="0"/>
+              <a:t> Deutsche </a:t>
+            </a:r>
+            <a:r>
+              <a:rPr lang="en-US" sz="1000" dirty="0" err="1"/>
+              <a:t>Übersetzung</a:t>
+            </a:r>
+            <a:r>
+              <a:rPr lang="en-US" sz="1000" dirty="0"/>
+              <a:t> –Domenik</a:t>
+            </a:r>
+            <a:endParaRPr sz="1000" dirty="0"/>
           </a:p>
         </p:txBody>
       </p:sp>
@@ -6668,16 +8163,22 @@
   <p:clrMapOvr>
     <a:masterClrMapping/>
   </p:clrMapOvr>
-  <p:transition xmlns:p14="http://schemas.microsoft.com/office/powerpoint/2010/main" spd="med" advClick="1"/>
+  <p:transition spd="med"/>
 </p:sld>
 </file>
 
 <file path=ppt/slides/slide6.xml><?xml version="1.0" encoding="utf-8"?>
-<p:sld xmlns:a="http://schemas.openxmlformats.org/drawingml/2006/main" xmlns:r="http://schemas.openxmlformats.org/officeDocument/2006/relationships" xmlns:p="http://schemas.openxmlformats.org/presentationml/2006/main" xmlns:m="http://schemas.openxmlformats.org/officeDocument/2006/math" xmlns:a14="http://schemas.microsoft.com/office/drawing/2010/main" showMasterSp="1" showMasterPhAnim="1">
+<p:sld xmlns:a="http://schemas.openxmlformats.org/drawingml/2006/main" xmlns:r="http://schemas.openxmlformats.org/officeDocument/2006/relationships" xmlns:p="http://schemas.openxmlformats.org/presentationml/2006/main">
   <p:cSld>
     <p:spTree>
       <p:nvGrpSpPr>
-        <p:cNvPr id="1" name=""/>
+        <p:cNvPr id="1" name="">
+          <a:extLst>
+            <a:ext uri="{FF2B5EF4-FFF2-40B4-BE49-F238E27FC236}">
+              <a16:creationId xmlns:a16="http://schemas.microsoft.com/office/drawing/2014/main" id="{B181533B-51BE-0125-C0AC-3E921E28248A}"/>
+            </a:ext>
+          </a:extLst>
+        </p:cNvPr>
         <p:cNvGrpSpPr/>
         <p:nvPr/>
       </p:nvGrpSpPr>
@@ -6691,14 +8192,20 @@
       </p:grpSpPr>
       <p:sp>
         <p:nvSpPr>
-          <p:cNvPr id="192" name="正方形/長方形 31"/>
+          <p:cNvPr id="106" name="正方形/長方形 31">
+            <a:extLst>
+              <a:ext uri="{FF2B5EF4-FFF2-40B4-BE49-F238E27FC236}">
+                <a16:creationId xmlns:a16="http://schemas.microsoft.com/office/drawing/2014/main" id="{9758962D-A558-7663-91E8-5236D817CF32}"/>
+              </a:ext>
+            </a:extLst>
+          </p:cNvPr>
           <p:cNvSpPr/>
           <p:nvPr/>
         </p:nvSpPr>
         <p:spPr>
           <a:xfrm>
-            <a:off x="0" y="0"/>
-            <a:ext cx="6858000" cy="9144000"/>
+            <a:off x="33951" y="45268"/>
+            <a:ext cx="6790099" cy="9053465"/>
           </a:xfrm>
           <a:prstGeom prst="rect">
             <a:avLst/>
@@ -6732,209 +8239,411 @@
                 </a:solidFill>
               </a:defRPr>
             </a:pPr>
+            <a:endParaRPr/>
           </a:p>
         </p:txBody>
       </p:sp>
       <p:sp>
         <p:nvSpPr>
-          <p:cNvPr id="193" name="正方形/長方形 4"/>
+          <p:cNvPr id="11" name="フリーフォーム: 図形 10">
+            <a:extLst>
+              <a:ext uri="{FF2B5EF4-FFF2-40B4-BE49-F238E27FC236}">
+                <a16:creationId xmlns:a16="http://schemas.microsoft.com/office/drawing/2014/main" id="{3B252398-2709-408A-29D1-04934C29BB60}"/>
+              </a:ext>
+            </a:extLst>
+          </p:cNvPr>
           <p:cNvSpPr/>
           <p:nvPr/>
         </p:nvSpPr>
         <p:spPr>
           <a:xfrm>
-            <a:off x="-7269" y="0"/>
-            <a:ext cx="6872538" cy="9144000"/>
+            <a:off x="-4150" y="0"/>
+            <a:ext cx="6858000" cy="9144000"/>
           </a:xfrm>
           <a:custGeom>
             <a:avLst/>
-            <a:gdLst/>
+            <a:gdLst>
+              <a:gd name="connsiteX0" fmla="*/ 3734844 w 6858000"/>
+              <a:gd name="connsiteY0" fmla="*/ 8661917 h 9144000"/>
+              <a:gd name="connsiteX1" fmla="*/ 3734844 w 6858000"/>
+              <a:gd name="connsiteY1" fmla="*/ 8715918 h 9144000"/>
+              <a:gd name="connsiteX2" fmla="*/ 6326845 w 6858000"/>
+              <a:gd name="connsiteY2" fmla="*/ 8715918 h 9144000"/>
+              <a:gd name="connsiteX3" fmla="*/ 6326845 w 6858000"/>
+              <a:gd name="connsiteY3" fmla="*/ 8661917 h 9144000"/>
+              <a:gd name="connsiteX4" fmla="*/ 554537 w 6858000"/>
+              <a:gd name="connsiteY4" fmla="*/ 8661917 h 9144000"/>
+              <a:gd name="connsiteX5" fmla="*/ 554537 w 6858000"/>
+              <a:gd name="connsiteY5" fmla="*/ 8715918 h 9144000"/>
+              <a:gd name="connsiteX6" fmla="*/ 3146539 w 6858000"/>
+              <a:gd name="connsiteY6" fmla="*/ 8715918 h 9144000"/>
+              <a:gd name="connsiteX7" fmla="*/ 3146539 w 6858000"/>
+              <a:gd name="connsiteY7" fmla="*/ 8661917 h 9144000"/>
+              <a:gd name="connsiteX8" fmla="*/ 663431 w 6858000"/>
+              <a:gd name="connsiteY8" fmla="*/ 4344641 h 9144000"/>
+              <a:gd name="connsiteX9" fmla="*/ 561095 w 6858000"/>
+              <a:gd name="connsiteY9" fmla="*/ 4446977 h 9144000"/>
+              <a:gd name="connsiteX10" fmla="*/ 663431 w 6858000"/>
+              <a:gd name="connsiteY10" fmla="*/ 4549313 h 9144000"/>
+              <a:gd name="connsiteX11" fmla="*/ 765767 w 6858000"/>
+              <a:gd name="connsiteY11" fmla="*/ 4446977 h 9144000"/>
+              <a:gd name="connsiteX12" fmla="*/ 663431 w 6858000"/>
+              <a:gd name="connsiteY12" fmla="*/ 4344641 h 9144000"/>
+              <a:gd name="connsiteX13" fmla="*/ 668510 w 6858000"/>
+              <a:gd name="connsiteY13" fmla="*/ 3089647 h 9144000"/>
+              <a:gd name="connsiteX14" fmla="*/ 566174 w 6858000"/>
+              <a:gd name="connsiteY14" fmla="*/ 3191983 h 9144000"/>
+              <a:gd name="connsiteX15" fmla="*/ 668510 w 6858000"/>
+              <a:gd name="connsiteY15" fmla="*/ 3294319 h 9144000"/>
+              <a:gd name="connsiteX16" fmla="*/ 770846 w 6858000"/>
+              <a:gd name="connsiteY16" fmla="*/ 3191983 h 9144000"/>
+              <a:gd name="connsiteX17" fmla="*/ 668510 w 6858000"/>
+              <a:gd name="connsiteY17" fmla="*/ 3089647 h 9144000"/>
+              <a:gd name="connsiteX18" fmla="*/ 5823241 w 6858000"/>
+              <a:gd name="connsiteY18" fmla="*/ 2279980 h 9144000"/>
+              <a:gd name="connsiteX19" fmla="*/ 5807028 w 6858000"/>
+              <a:gd name="connsiteY19" fmla="*/ 2319085 h 9144000"/>
+              <a:gd name="connsiteX20" fmla="*/ 5767904 w 6858000"/>
+              <a:gd name="connsiteY20" fmla="*/ 2335283 h 9144000"/>
+              <a:gd name="connsiteX21" fmla="*/ 1097361 w 6858000"/>
+              <a:gd name="connsiteY21" fmla="*/ 2335283 h 9144000"/>
+              <a:gd name="connsiteX22" fmla="*/ 1058237 w 6858000"/>
+              <a:gd name="connsiteY22" fmla="*/ 2319085 h 9144000"/>
+              <a:gd name="connsiteX23" fmla="*/ 1042025 w 6858000"/>
+              <a:gd name="connsiteY23" fmla="*/ 2279982 h 9144000"/>
+              <a:gd name="connsiteX24" fmla="*/ 1042025 w 6858000"/>
+              <a:gd name="connsiteY24" fmla="*/ 2413569 h 9144000"/>
+              <a:gd name="connsiteX25" fmla="*/ 1230839 w 6858000"/>
+              <a:gd name="connsiteY25" fmla="*/ 2602467 h 9144000"/>
+              <a:gd name="connsiteX26" fmla="*/ 5634427 w 6858000"/>
+              <a:gd name="connsiteY26" fmla="*/ 2602467 h 9144000"/>
+              <a:gd name="connsiteX27" fmla="*/ 5823241 w 6858000"/>
+              <a:gd name="connsiteY27" fmla="*/ 2413570 h 9144000"/>
+              <a:gd name="connsiteX28" fmla="*/ 1230839 w 6858000"/>
+              <a:gd name="connsiteY28" fmla="*/ 436680 h 9144000"/>
+              <a:gd name="connsiteX29" fmla="*/ 1042025 w 6858000"/>
+              <a:gd name="connsiteY29" fmla="*/ 625578 h 9144000"/>
+              <a:gd name="connsiteX30" fmla="*/ 1042025 w 6858000"/>
+              <a:gd name="connsiteY30" fmla="*/ 763930 h 9144000"/>
+              <a:gd name="connsiteX31" fmla="*/ 1058238 w 6858000"/>
+              <a:gd name="connsiteY31" fmla="*/ 724825 h 9144000"/>
+              <a:gd name="connsiteX32" fmla="*/ 1097362 w 6858000"/>
+              <a:gd name="connsiteY32" fmla="*/ 708627 h 9144000"/>
+              <a:gd name="connsiteX33" fmla="*/ 5767905 w 6858000"/>
+              <a:gd name="connsiteY33" fmla="*/ 708627 h 9144000"/>
+              <a:gd name="connsiteX34" fmla="*/ 5807029 w 6858000"/>
+              <a:gd name="connsiteY34" fmla="*/ 724825 h 9144000"/>
+              <a:gd name="connsiteX35" fmla="*/ 5823241 w 6858000"/>
+              <a:gd name="connsiteY35" fmla="*/ 763928 h 9144000"/>
+              <a:gd name="connsiteX36" fmla="*/ 5823241 w 6858000"/>
+              <a:gd name="connsiteY36" fmla="*/ 625578 h 9144000"/>
+              <a:gd name="connsiteX37" fmla="*/ 5634427 w 6858000"/>
+              <a:gd name="connsiteY37" fmla="*/ 436680 h 9144000"/>
+              <a:gd name="connsiteX38" fmla="*/ 0 w 6858000"/>
+              <a:gd name="connsiteY38" fmla="*/ 0 h 9144000"/>
+              <a:gd name="connsiteX39" fmla="*/ 6858000 w 6858000"/>
+              <a:gd name="connsiteY39" fmla="*/ 0 h 9144000"/>
+              <a:gd name="connsiteX40" fmla="*/ 6858000 w 6858000"/>
+              <a:gd name="connsiteY40" fmla="*/ 9144000 h 9144000"/>
+              <a:gd name="connsiteX41" fmla="*/ 0 w 6858000"/>
+              <a:gd name="connsiteY41" fmla="*/ 9144000 h 9144000"/>
+            </a:gdLst>
             <a:ahLst/>
             <a:cxnLst>
               <a:cxn ang="0">
-                <a:pos x="wd2" y="hd2"/>
+                <a:pos x="connsiteX0" y="connsiteY0"/>
               </a:cxn>
-              <a:cxn ang="5400000">
-                <a:pos x="wd2" y="hd2"/>
+              <a:cxn ang="0">
+                <a:pos x="connsiteX1" y="connsiteY1"/>
               </a:cxn>
-              <a:cxn ang="10800000">
-                <a:pos x="wd2" y="hd2"/>
+              <a:cxn ang="0">
+                <a:pos x="connsiteX2" y="connsiteY2"/>
               </a:cxn>
-              <a:cxn ang="16200000">
-                <a:pos x="wd2" y="hd2"/>
+              <a:cxn ang="0">
+                <a:pos x="connsiteX3" y="connsiteY3"/>
+              </a:cxn>
+              <a:cxn ang="0">
+                <a:pos x="connsiteX4" y="connsiteY4"/>
+              </a:cxn>
+              <a:cxn ang="0">
+                <a:pos x="connsiteX5" y="connsiteY5"/>
+              </a:cxn>
+              <a:cxn ang="0">
+                <a:pos x="connsiteX6" y="connsiteY6"/>
+              </a:cxn>
+              <a:cxn ang="0">
+                <a:pos x="connsiteX7" y="connsiteY7"/>
+              </a:cxn>
+              <a:cxn ang="0">
+                <a:pos x="connsiteX8" y="connsiteY8"/>
+              </a:cxn>
+              <a:cxn ang="0">
+                <a:pos x="connsiteX9" y="connsiteY9"/>
+              </a:cxn>
+              <a:cxn ang="0">
+                <a:pos x="connsiteX10" y="connsiteY10"/>
+              </a:cxn>
+              <a:cxn ang="0">
+                <a:pos x="connsiteX11" y="connsiteY11"/>
+              </a:cxn>
+              <a:cxn ang="0">
+                <a:pos x="connsiteX12" y="connsiteY12"/>
+              </a:cxn>
+              <a:cxn ang="0">
+                <a:pos x="connsiteX13" y="connsiteY13"/>
+              </a:cxn>
+              <a:cxn ang="0">
+                <a:pos x="connsiteX14" y="connsiteY14"/>
+              </a:cxn>
+              <a:cxn ang="0">
+                <a:pos x="connsiteX15" y="connsiteY15"/>
+              </a:cxn>
+              <a:cxn ang="0">
+                <a:pos x="connsiteX16" y="connsiteY16"/>
+              </a:cxn>
+              <a:cxn ang="0">
+                <a:pos x="connsiteX17" y="connsiteY17"/>
+              </a:cxn>
+              <a:cxn ang="0">
+                <a:pos x="connsiteX18" y="connsiteY18"/>
+              </a:cxn>
+              <a:cxn ang="0">
+                <a:pos x="connsiteX19" y="connsiteY19"/>
+              </a:cxn>
+              <a:cxn ang="0">
+                <a:pos x="connsiteX20" y="connsiteY20"/>
+              </a:cxn>
+              <a:cxn ang="0">
+                <a:pos x="connsiteX21" y="connsiteY21"/>
+              </a:cxn>
+              <a:cxn ang="0">
+                <a:pos x="connsiteX22" y="connsiteY22"/>
+              </a:cxn>
+              <a:cxn ang="0">
+                <a:pos x="connsiteX23" y="connsiteY23"/>
+              </a:cxn>
+              <a:cxn ang="0">
+                <a:pos x="connsiteX24" y="connsiteY24"/>
+              </a:cxn>
+              <a:cxn ang="0">
+                <a:pos x="connsiteX25" y="connsiteY25"/>
+              </a:cxn>
+              <a:cxn ang="0">
+                <a:pos x="connsiteX26" y="connsiteY26"/>
+              </a:cxn>
+              <a:cxn ang="0">
+                <a:pos x="connsiteX27" y="connsiteY27"/>
+              </a:cxn>
+              <a:cxn ang="0">
+                <a:pos x="connsiteX28" y="connsiteY28"/>
+              </a:cxn>
+              <a:cxn ang="0">
+                <a:pos x="connsiteX29" y="connsiteY29"/>
+              </a:cxn>
+              <a:cxn ang="0">
+                <a:pos x="connsiteX30" y="connsiteY30"/>
+              </a:cxn>
+              <a:cxn ang="0">
+                <a:pos x="connsiteX31" y="connsiteY31"/>
+              </a:cxn>
+              <a:cxn ang="0">
+                <a:pos x="connsiteX32" y="connsiteY32"/>
+              </a:cxn>
+              <a:cxn ang="0">
+                <a:pos x="connsiteX33" y="connsiteY33"/>
+              </a:cxn>
+              <a:cxn ang="0">
+                <a:pos x="connsiteX34" y="connsiteY34"/>
+              </a:cxn>
+              <a:cxn ang="0">
+                <a:pos x="connsiteX35" y="connsiteY35"/>
+              </a:cxn>
+              <a:cxn ang="0">
+                <a:pos x="connsiteX36" y="connsiteY36"/>
+              </a:cxn>
+              <a:cxn ang="0">
+                <a:pos x="connsiteX37" y="connsiteY37"/>
+              </a:cxn>
+              <a:cxn ang="0">
+                <a:pos x="connsiteX38" y="connsiteY38"/>
+              </a:cxn>
+              <a:cxn ang="0">
+                <a:pos x="connsiteX39" y="connsiteY39"/>
+              </a:cxn>
+              <a:cxn ang="0">
+                <a:pos x="connsiteX40" y="connsiteY40"/>
+              </a:cxn>
+              <a:cxn ang="0">
+                <a:pos x="connsiteX41" y="connsiteY41"/>
               </a:cxn>
             </a:cxnLst>
-            <a:rect l="0" t="0" r="r" b="b"/>
+            <a:rect l="l" t="t" r="r" b="b"/>
             <a:pathLst>
-              <a:path w="21600" h="21600" fill="norm" stroke="1" extrusionOk="0">
+              <a:path w="6858000" h="9144000">
                 <a:moveTo>
-                  <a:pt x="21600" y="21600"/>
+                  <a:pt x="3734844" y="8661917"/>
                 </a:moveTo>
                 <a:lnTo>
-                  <a:pt x="0" y="21600"/>
+                  <a:pt x="3734844" y="8715918"/>
                 </a:lnTo>
                 <a:lnTo>
-                  <a:pt x="0" y="0"/>
+                  <a:pt x="6326845" y="8715918"/>
                 </a:lnTo>
                 <a:lnTo>
-                  <a:pt x="21600" y="0"/>
+                  <a:pt x="6326845" y="8661917"/>
                 </a:lnTo>
                 <a:close/>
                 <a:moveTo>
-                  <a:pt x="1764" y="20589"/>
+                  <a:pt x="554537" y="8661917"/>
                 </a:moveTo>
                 <a:lnTo>
-                  <a:pt x="9927" y="20589"/>
+                  <a:pt x="554537" y="8715918"/>
                 </a:lnTo>
                 <a:lnTo>
-                  <a:pt x="9927" y="20461"/>
+                  <a:pt x="3146539" y="8715918"/>
                 </a:lnTo>
                 <a:lnTo>
-                  <a:pt x="1764" y="20461"/>
+                  <a:pt x="3146539" y="8661917"/>
                 </a:lnTo>
                 <a:close/>
                 <a:moveTo>
-                  <a:pt x="11780" y="20461"/>
-                </a:moveTo>
-                <a:lnTo>
-                  <a:pt x="11780" y="20589"/>
-                </a:lnTo>
-                <a:lnTo>
-                  <a:pt x="19944" y="20589"/>
-                </a:lnTo>
-                <a:lnTo>
-                  <a:pt x="19944" y="20461"/>
-                </a:lnTo>
-                <a:close/>
-                <a:moveTo>
-                  <a:pt x="1879" y="9716"/>
+                  <a:pt x="663431" y="4344641"/>
                 </a:moveTo>
                 <a:cubicBezTo>
-                  <a:pt x="1753" y="9811"/>
-                  <a:pt x="1753" y="9964"/>
-                  <a:pt x="1879" y="10058"/>
+                  <a:pt x="606912" y="4344641"/>
+                  <a:pt x="561095" y="4390458"/>
+                  <a:pt x="561095" y="4446977"/>
                 </a:cubicBezTo>
                 <a:cubicBezTo>
-                  <a:pt x="2005" y="10153"/>
-                  <a:pt x="2209" y="10153"/>
-                  <a:pt x="2335" y="10058"/>
+                  <a:pt x="561095" y="4503496"/>
+                  <a:pt x="606912" y="4549313"/>
+                  <a:pt x="663431" y="4549313"/>
                 </a:cubicBezTo>
                 <a:cubicBezTo>
-                  <a:pt x="2460" y="9964"/>
-                  <a:pt x="2460" y="9811"/>
-                  <a:pt x="2335" y="9716"/>
+                  <a:pt x="719950" y="4549313"/>
+                  <a:pt x="765767" y="4503496"/>
+                  <a:pt x="765767" y="4446977"/>
                 </a:cubicBezTo>
                 <a:cubicBezTo>
-                  <a:pt x="2209" y="9622"/>
-                  <a:pt x="2005" y="9622"/>
-                  <a:pt x="1879" y="9716"/>
+                  <a:pt x="765767" y="4390458"/>
+                  <a:pt x="719950" y="4344641"/>
+                  <a:pt x="663431" y="4344641"/>
                 </a:cubicBezTo>
                 <a:close/>
                 <a:moveTo>
-                  <a:pt x="1895" y="6766"/>
+                  <a:pt x="668510" y="3089647"/>
                 </a:moveTo>
                 <a:cubicBezTo>
-                  <a:pt x="1769" y="6860"/>
-                  <a:pt x="1769" y="7013"/>
-                  <a:pt x="1895" y="7108"/>
+                  <a:pt x="611991" y="3089647"/>
+                  <a:pt x="566174" y="3135464"/>
+                  <a:pt x="566174" y="3191983"/>
                 </a:cubicBezTo>
                 <a:cubicBezTo>
-                  <a:pt x="2021" y="7202"/>
-                  <a:pt x="2225" y="7202"/>
-                  <a:pt x="2351" y="7108"/>
+                  <a:pt x="566174" y="3248502"/>
+                  <a:pt x="611991" y="3294319"/>
+                  <a:pt x="668510" y="3294319"/>
                 </a:cubicBezTo>
                 <a:cubicBezTo>
-                  <a:pt x="2476" y="7013"/>
-                  <a:pt x="2476" y="6860"/>
-                  <a:pt x="2351" y="6766"/>
+                  <a:pt x="725029" y="3294319"/>
+                  <a:pt x="770846" y="3248502"/>
+                  <a:pt x="770846" y="3191983"/>
                 </a:cubicBezTo>
                 <a:cubicBezTo>
-                  <a:pt x="2225" y="6671"/>
-                  <a:pt x="2021" y="6671"/>
-                  <a:pt x="1895" y="6766"/>
+                  <a:pt x="770846" y="3135464"/>
+                  <a:pt x="725029" y="3089647"/>
+                  <a:pt x="668510" y="3089647"/>
                 </a:cubicBezTo>
                 <a:close/>
                 <a:moveTo>
-                  <a:pt x="18184" y="5516"/>
+                  <a:pt x="5823241" y="2279980"/>
                 </a:moveTo>
                 <a:lnTo>
-                  <a:pt x="3473" y="5516"/>
+                  <a:pt x="5807028" y="2319085"/>
                 </a:lnTo>
                 <a:cubicBezTo>
-                  <a:pt x="3377" y="5516"/>
-                  <a:pt x="3299" y="5458"/>
-                  <a:pt x="3299" y="5386"/>
+                  <a:pt x="5797011" y="2329093"/>
+                  <a:pt x="5783177" y="2335283"/>
+                  <a:pt x="5767904" y="2335283"/>
                 </a:cubicBezTo>
                 <a:lnTo>
-                  <a:pt x="3299" y="5701"/>
+                  <a:pt x="1097361" y="2335283"/>
                 </a:lnTo>
                 <a:cubicBezTo>
-                  <a:pt x="3299" y="5948"/>
-                  <a:pt x="3565" y="6148"/>
-                  <a:pt x="3894" y="6148"/>
+                  <a:pt x="1082088" y="2335283"/>
+                  <a:pt x="1068253" y="2329093"/>
+                  <a:pt x="1058237" y="2319085"/>
                 </a:cubicBezTo>
                 <a:lnTo>
-                  <a:pt x="17763" y="6148"/>
+                  <a:pt x="1042025" y="2279982"/>
+                </a:lnTo>
+                <a:lnTo>
+                  <a:pt x="1042025" y="2413569"/>
                 </a:lnTo>
                 <a:cubicBezTo>
-                  <a:pt x="18092" y="6148"/>
-                  <a:pt x="18358" y="5948"/>
-                  <a:pt x="18358" y="5701"/>
+                  <a:pt x="1042025" y="2517900"/>
+                  <a:pt x="1126581" y="2602467"/>
+                  <a:pt x="1230839" y="2602467"/>
                 </a:cubicBezTo>
                 <a:lnTo>
-                  <a:pt x="18358" y="5386"/>
+                  <a:pt x="5634427" y="2602467"/>
                 </a:lnTo>
                 <a:cubicBezTo>
-                  <a:pt x="18358" y="5458"/>
-                  <a:pt x="18280" y="5516"/>
-                  <a:pt x="18184" y="5516"/>
+                  <a:pt x="5738684" y="2602467"/>
+                  <a:pt x="5823241" y="2517901"/>
+                  <a:pt x="5823241" y="2413570"/>
                 </a:cubicBezTo>
                 <a:close/>
                 <a:moveTo>
-                  <a:pt x="3299" y="5264"/>
+                  <a:pt x="1230839" y="436680"/>
+                </a:moveTo>
+                <a:cubicBezTo>
+                  <a:pt x="1126582" y="436680"/>
+                  <a:pt x="1042025" y="521247"/>
+                  <a:pt x="1042025" y="625578"/>
+                </a:cubicBezTo>
+                <a:lnTo>
+                  <a:pt x="1042025" y="763930"/>
+                </a:lnTo>
+                <a:lnTo>
+                  <a:pt x="1058238" y="724825"/>
+                </a:lnTo>
+                <a:cubicBezTo>
+                  <a:pt x="1068254" y="714817"/>
+                  <a:pt x="1082089" y="708627"/>
+                  <a:pt x="1097362" y="708627"/>
+                </a:cubicBezTo>
+                <a:lnTo>
+                  <a:pt x="5767905" y="708627"/>
+                </a:lnTo>
+                <a:cubicBezTo>
+                  <a:pt x="5783178" y="708627"/>
+                  <a:pt x="5797013" y="714817"/>
+                  <a:pt x="5807029" y="724825"/>
+                </a:cubicBezTo>
+                <a:lnTo>
+                  <a:pt x="5823241" y="763928"/>
+                </a:lnTo>
+                <a:lnTo>
+                  <a:pt x="5823241" y="625578"/>
+                </a:lnTo>
+                <a:cubicBezTo>
+                  <a:pt x="5823241" y="521247"/>
+                  <a:pt x="5738685" y="436680"/>
+                  <a:pt x="5634427" y="436680"/>
+                </a:cubicBezTo>
+                <a:close/>
+                <a:moveTo>
+                  <a:pt x="0" y="0"/>
                 </a:moveTo>
                 <a:lnTo>
-                  <a:pt x="3299" y="5255"/>
+                  <a:pt x="6858000" y="0"/>
                 </a:lnTo>
                 <a:lnTo>
-                  <a:pt x="3299" y="5255"/>
+                  <a:pt x="6858000" y="9144000"/>
                 </a:lnTo>
-                <a:close/>
-                <a:moveTo>
-                  <a:pt x="3299" y="1489"/>
-                </a:moveTo>
                 <a:lnTo>
-                  <a:pt x="3299" y="1835"/>
+                  <a:pt x="0" y="9144000"/>
                 </a:lnTo>
-                <a:cubicBezTo>
-                  <a:pt x="3299" y="1762"/>
-                  <a:pt x="3377" y="1704"/>
-                  <a:pt x="3473" y="1704"/>
-                </a:cubicBezTo>
-                <a:lnTo>
-                  <a:pt x="18184" y="1704"/>
-                </a:lnTo>
-                <a:cubicBezTo>
-                  <a:pt x="18280" y="1704"/>
-                  <a:pt x="18358" y="1762"/>
-                  <a:pt x="18358" y="1835"/>
-                </a:cubicBezTo>
-                <a:lnTo>
-                  <a:pt x="18358" y="1489"/>
-                </a:lnTo>
-                <a:cubicBezTo>
-                  <a:pt x="18358" y="1243"/>
-                  <a:pt x="18092" y="1043"/>
-                  <a:pt x="17763" y="1043"/>
-                </a:cubicBezTo>
-                <a:lnTo>
-                  <a:pt x="3894" y="1043"/>
-                </a:lnTo>
-                <a:cubicBezTo>
-                  <a:pt x="3565" y="1043"/>
-                  <a:pt x="3299" y="1243"/>
-                  <a:pt x="3299" y="1489"/>
-                </a:cubicBezTo>
                 <a:close/>
               </a:path>
             </a:pathLst>
@@ -6947,7 +8656,9 @@
           </a:ln>
         </p:spPr>
         <p:txBody>
-          <a:bodyPr lIns="45719" rIns="45719" anchor="ctr"/>
+          <a:bodyPr wrap="square" lIns="45719" rIns="45719" anchor="ctr">
+            <a:noAutofit/>
+          </a:bodyPr>
           <a:lstStyle/>
           <a:p>
             <a:pPr algn="ctr">
@@ -6957,12 +8668,19 @@
                 </a:solidFill>
               </a:defRPr>
             </a:pPr>
+            <a:endParaRPr/>
           </a:p>
         </p:txBody>
       </p:sp>
       <p:sp>
         <p:nvSpPr>
-          <p:cNvPr id="194" name="テキスト ボックス 16"/>
+          <p:cNvPr id="115" name="テキスト ボックス 16">
+            <a:extLst>
+              <a:ext uri="{FF2B5EF4-FFF2-40B4-BE49-F238E27FC236}">
+                <a16:creationId xmlns:a16="http://schemas.microsoft.com/office/drawing/2014/main" id="{0B15B1FE-7F2C-2239-01F2-4A88DB500E16}"/>
+              </a:ext>
+            </a:extLst>
+          </p:cNvPr>
           <p:cNvSpPr txBox="1"/>
           <p:nvPr/>
         </p:nvSpPr>
@@ -6979,7 +8697,7 @@
           </a:ln>
           <a:extLst>
             <a:ext uri="{C572A759-6A51-4108-AA02-DFA0A04FC94B}">
-              <ma14:wrappingTextBoxFlag xmlns:ma14="http://schemas.microsoft.com/office/mac/drawingml/2011/main" val="1"/>
+              <ma14:wrappingTextBoxFlag xmlns="" xmlns:m="http://schemas.openxmlformats.org/officeDocument/2006/math" xmlns:a14="http://schemas.microsoft.com/office/drawing/2010/main" xmlns:ma14="http://schemas.microsoft.com/office/mac/drawingml/2011/main" val="1"/>
             </a:ext>
           </a:extLst>
         </p:spPr>
@@ -6991,7 +8709,6 @@
             <a:lvl1pPr algn="ctr"/>
           </a:lstStyle>
           <a:p>
-            <a:pPr/>
             <a:r>
               <a:t>1</a:t>
             </a:r>
@@ -7000,14 +8717,20 @@
       </p:sp>
       <p:sp>
         <p:nvSpPr>
-          <p:cNvPr id="195" name="テキスト ボックス 1"/>
+          <p:cNvPr id="116" name="テキスト ボックス 1">
+            <a:extLst>
+              <a:ext uri="{FF2B5EF4-FFF2-40B4-BE49-F238E27FC236}">
+                <a16:creationId xmlns:a16="http://schemas.microsoft.com/office/drawing/2014/main" id="{FF6A6F4D-0377-B8C0-99D6-7577D998AFDF}"/>
+              </a:ext>
+            </a:extLst>
+          </p:cNvPr>
           <p:cNvSpPr txBox="1"/>
           <p:nvPr/>
         </p:nvSpPr>
         <p:spPr>
           <a:xfrm>
             <a:off x="1599039" y="846314"/>
-            <a:ext cx="4226358" cy="675641"/>
+            <a:ext cx="4252124" cy="584775"/>
           </a:xfrm>
           <a:prstGeom prst="rect">
             <a:avLst/>
@@ -7017,7 +8740,7 @@
           </a:ln>
           <a:extLst>
             <a:ext uri="{C572A759-6A51-4108-AA02-DFA0A04FC94B}">
-              <ma14:wrappingTextBoxFlag xmlns:ma14="http://schemas.microsoft.com/office/mac/drawingml/2011/main" val="1"/>
+              <ma14:wrappingTextBoxFlag xmlns="" xmlns:m="http://schemas.openxmlformats.org/officeDocument/2006/math" xmlns:a14="http://schemas.microsoft.com/office/drawing/2010/main" xmlns:ma14="http://schemas.microsoft.com/office/mac/drawingml/2011/main" val="1"/>
             </a:ext>
           </a:extLst>
         </p:spPr>
@@ -7036,29 +8759,47 @@
               </a:defRPr>
             </a:pPr>
             <a:r>
+              <a:rPr dirty="0">
+                <a:latin typeface="Jost Medium" pitchFamily="2" charset="0"/>
+                <a:ea typeface="Jost Medium" pitchFamily="2" charset="0"/>
+              </a:rPr>
               <a:t>FlexChroma</a:t>
             </a:r>
             <a:r>
-              <a:rPr>
+              <a:rPr dirty="0">
                 <a:latin typeface="+mn-lt"/>
                 <a:ea typeface="+mn-ea"/>
                 <a:cs typeface="+mn-cs"/>
                 <a:sym typeface="Jost-Regular"/>
               </a:rPr>
-              <a:t> Tour-Guide</a:t>
+              <a:t> </a:t>
+            </a:r>
+            <a:r>
+              <a:rPr dirty="0">
+                <a:ea typeface="+mn-ea"/>
+                <a:cs typeface="+mn-cs"/>
+                <a:sym typeface="Jost-Regular"/>
+              </a:rPr>
+              <a:t>Tour-Guide</a:t>
             </a:r>
           </a:p>
         </p:txBody>
       </p:sp>
       <p:sp>
         <p:nvSpPr>
-          <p:cNvPr id="196" name="テキスト ボックス 17"/>
+          <p:cNvPr id="118" name="テキスト ボックス 17">
+            <a:extLst>
+              <a:ext uri="{FF2B5EF4-FFF2-40B4-BE49-F238E27FC236}">
+                <a16:creationId xmlns:a16="http://schemas.microsoft.com/office/drawing/2014/main" id="{3C83112A-5E24-4EDC-E84B-7A418B54ADB1}"/>
+              </a:ext>
+            </a:extLst>
+          </p:cNvPr>
           <p:cNvSpPr txBox="1"/>
           <p:nvPr/>
         </p:nvSpPr>
         <p:spPr>
           <a:xfrm>
-            <a:off x="816563" y="2715569"/>
+            <a:off x="816563" y="2995985"/>
             <a:ext cx="1530936" cy="459741"/>
           </a:xfrm>
           <a:prstGeom prst="rect">
@@ -7069,7 +8810,7 @@
           </a:ln>
           <a:extLst>
             <a:ext uri="{C572A759-6A51-4108-AA02-DFA0A04FC94B}">
-              <ma14:wrappingTextBoxFlag xmlns:ma14="http://schemas.microsoft.com/office/mac/drawingml/2011/main" val="1"/>
+              <ma14:wrappingTextBoxFlag xmlns="" xmlns:m="http://schemas.openxmlformats.org/officeDocument/2006/math" xmlns:a14="http://schemas.microsoft.com/office/drawing/2010/main" xmlns:ma14="http://schemas.microsoft.com/office/mac/drawingml/2011/main" val="1"/>
             </a:ext>
           </a:extLst>
         </p:spPr>
@@ -7079,7 +8820,7 @@
           </a:bodyPr>
           <a:lstStyle>
             <a:lvl1pPr>
-              <a:defRPr b="1" sz="2000">
+              <a:defRPr sz="2000" b="1">
                 <a:latin typeface="JostRoman-SemiBold"/>
                 <a:ea typeface="JostRoman-SemiBold"/>
                 <a:cs typeface="JostRoman-SemiBold"/>
@@ -7088,7 +8829,6 @@
             </a:lvl1pPr>
           </a:lstStyle>
           <a:p>
-            <a:pPr/>
             <a:r>
               <a:t>1. Einleitung</a:t>
             </a:r>
@@ -7097,14 +8837,20 @@
       </p:sp>
       <p:sp>
         <p:nvSpPr>
-          <p:cNvPr id="197" name="テキスト ボックス 18"/>
+          <p:cNvPr id="119" name="テキスト ボックス 18">
+            <a:extLst>
+              <a:ext uri="{FF2B5EF4-FFF2-40B4-BE49-F238E27FC236}">
+                <a16:creationId xmlns:a16="http://schemas.microsoft.com/office/drawing/2014/main" id="{1139D95F-C700-149F-93CE-3AC5F823FD44}"/>
+              </a:ext>
+            </a:extLst>
+          </p:cNvPr>
           <p:cNvSpPr txBox="1"/>
           <p:nvPr/>
         </p:nvSpPr>
         <p:spPr>
           <a:xfrm>
-            <a:off x="714228" y="3138509"/>
-            <a:ext cx="5558051" cy="662941"/>
+            <a:off x="714228" y="3418925"/>
+            <a:ext cx="5558051" cy="553998"/>
           </a:xfrm>
           <a:prstGeom prst="rect">
             <a:avLst/>
@@ -7114,7 +8860,7 @@
           </a:ln>
           <a:extLst>
             <a:ext uri="{C572A759-6A51-4108-AA02-DFA0A04FC94B}">
-              <ma14:wrappingTextBoxFlag xmlns:ma14="http://schemas.microsoft.com/office/mac/drawingml/2011/main" val="1"/>
+              <ma14:wrappingTextBoxFlag xmlns="" xmlns:m="http://schemas.openxmlformats.org/officeDocument/2006/math" xmlns:a14="http://schemas.microsoft.com/office/drawing/2010/main" xmlns:ma14="http://schemas.microsoft.com/office/mac/drawingml/2011/main" val="1"/>
             </a:ext>
           </a:extLst>
         </p:spPr>
@@ -7125,7 +8871,7 @@
           <a:lstStyle/>
           <a:p>
             <a:pPr>
-              <a:defRPr b="1" sz="1000">
+              <a:defRPr sz="1000" b="1">
                 <a:latin typeface="JostRoman-Bold"/>
                 <a:ea typeface="JostRoman-Bold"/>
                 <a:cs typeface="JostRoman-Bold"/>
@@ -7133,43 +8879,297 @@
               </a:defRPr>
             </a:pPr>
             <a:r>
+              <a:rPr lang="en-US" altLang="ja-JP" b="0" dirty="0">
+                <a:latin typeface="Jost Medium" pitchFamily="2" charset="0"/>
+                <a:ea typeface="Jost Medium" pitchFamily="2" charset="0"/>
+                <a:sym typeface="Jost-Regular"/>
+              </a:rPr>
               <a:t>FlexChroma</a:t>
             </a:r>
             <a:r>
-              <a:rPr b="0">
+              <a:rPr lang="en-US" altLang="ja-JP" b="0" dirty="0">
                 <a:latin typeface="+mn-lt"/>
                 <a:ea typeface="+mn-ea"/>
                 <a:cs typeface="+mn-cs"/>
                 <a:sym typeface="Jost-Regular"/>
               </a:rPr>
-              <a:t> umfasst Modelle zur Herstellung eigener Filamente aus handelsüblichen Materialien. </a:t>
-            </a:r>
-            <a:endParaRPr b="0">
-              <a:latin typeface="+mn-lt"/>
-              <a:ea typeface="+mn-ea"/>
-              <a:cs typeface="+mn-cs"/>
-              <a:sym typeface="Jost-Regular"/>
-            </a:endParaRPr>
+              <a:t> </a:t>
+            </a:r>
+            <a:r>
+              <a:rPr b="0" dirty="0" err="1">
+                <a:latin typeface="+mn-lt"/>
+                <a:ea typeface="+mn-ea"/>
+                <a:cs typeface="+mn-cs"/>
+                <a:sym typeface="Jost-Regular"/>
+              </a:rPr>
+              <a:t>umfasst</a:t>
+            </a:r>
+            <a:r>
+              <a:rPr b="0" dirty="0">
+                <a:latin typeface="+mn-lt"/>
+                <a:ea typeface="+mn-ea"/>
+                <a:cs typeface="+mn-cs"/>
+                <a:sym typeface="Jost-Regular"/>
+              </a:rPr>
+              <a:t> Modelle </a:t>
+            </a:r>
+            <a:r>
+              <a:rPr b="0" dirty="0" err="1">
+                <a:latin typeface="+mn-lt"/>
+                <a:ea typeface="+mn-ea"/>
+                <a:cs typeface="+mn-cs"/>
+                <a:sym typeface="Jost-Regular"/>
+              </a:rPr>
+              <a:t>zur</a:t>
+            </a:r>
+            <a:r>
+              <a:rPr b="0" dirty="0">
+                <a:latin typeface="+mn-lt"/>
+                <a:ea typeface="+mn-ea"/>
+                <a:cs typeface="+mn-cs"/>
+                <a:sym typeface="Jost-Regular"/>
+              </a:rPr>
+              <a:t> </a:t>
+            </a:r>
+            <a:r>
+              <a:rPr b="0" dirty="0" err="1">
+                <a:latin typeface="+mn-lt"/>
+                <a:ea typeface="+mn-ea"/>
+                <a:cs typeface="+mn-cs"/>
+                <a:sym typeface="Jost-Regular"/>
+              </a:rPr>
+              <a:t>Herstellung</a:t>
+            </a:r>
+            <a:r>
+              <a:rPr b="0" dirty="0">
+                <a:latin typeface="+mn-lt"/>
+                <a:ea typeface="+mn-ea"/>
+                <a:cs typeface="+mn-cs"/>
+                <a:sym typeface="Jost-Regular"/>
+              </a:rPr>
+              <a:t> </a:t>
+            </a:r>
+            <a:r>
+              <a:rPr b="0" dirty="0" err="1">
+                <a:latin typeface="+mn-lt"/>
+                <a:ea typeface="+mn-ea"/>
+                <a:cs typeface="+mn-cs"/>
+                <a:sym typeface="Jost-Regular"/>
+              </a:rPr>
+              <a:t>eigener</a:t>
+            </a:r>
+            <a:r>
+              <a:rPr b="0" dirty="0">
+                <a:latin typeface="+mn-lt"/>
+                <a:ea typeface="+mn-ea"/>
+                <a:cs typeface="+mn-cs"/>
+                <a:sym typeface="Jost-Regular"/>
+              </a:rPr>
+              <a:t> </a:t>
+            </a:r>
+            <a:r>
+              <a:rPr b="0" dirty="0" err="1">
+                <a:latin typeface="+mn-lt"/>
+                <a:ea typeface="+mn-ea"/>
+                <a:cs typeface="+mn-cs"/>
+                <a:sym typeface="Jost-Regular"/>
+              </a:rPr>
+              <a:t>Filamente</a:t>
+            </a:r>
+            <a:r>
+              <a:rPr b="0" dirty="0">
+                <a:latin typeface="+mn-lt"/>
+                <a:ea typeface="+mn-ea"/>
+                <a:cs typeface="+mn-cs"/>
+                <a:sym typeface="Jost-Regular"/>
+              </a:rPr>
+              <a:t> </a:t>
+            </a:r>
+            <a:r>
+              <a:rPr b="0" dirty="0" err="1">
+                <a:latin typeface="+mn-lt"/>
+                <a:ea typeface="+mn-ea"/>
+                <a:cs typeface="+mn-cs"/>
+                <a:sym typeface="Jost-Regular"/>
+              </a:rPr>
+              <a:t>aus</a:t>
+            </a:r>
+            <a:r>
+              <a:rPr b="0" dirty="0">
+                <a:latin typeface="+mn-lt"/>
+                <a:ea typeface="+mn-ea"/>
+                <a:cs typeface="+mn-cs"/>
+                <a:sym typeface="Jost-Regular"/>
+              </a:rPr>
+              <a:t> </a:t>
+            </a:r>
+            <a:r>
+              <a:rPr b="0" dirty="0" err="1">
+                <a:latin typeface="+mn-lt"/>
+                <a:ea typeface="+mn-ea"/>
+                <a:cs typeface="+mn-cs"/>
+                <a:sym typeface="Jost-Regular"/>
+              </a:rPr>
+              <a:t>handelsüblichen</a:t>
+            </a:r>
+            <a:r>
+              <a:rPr b="0" dirty="0">
+                <a:latin typeface="+mn-lt"/>
+                <a:ea typeface="+mn-ea"/>
+                <a:cs typeface="+mn-cs"/>
+                <a:sym typeface="Jost-Regular"/>
+              </a:rPr>
+              <a:t> </a:t>
+            </a:r>
+            <a:r>
+              <a:rPr b="0" dirty="0" err="1">
+                <a:latin typeface="+mn-lt"/>
+                <a:ea typeface="+mn-ea"/>
+                <a:cs typeface="+mn-cs"/>
+                <a:sym typeface="Jost-Regular"/>
+              </a:rPr>
+              <a:t>Materialien</a:t>
+            </a:r>
+            <a:r>
+              <a:rPr b="0" dirty="0">
+                <a:latin typeface="+mn-lt"/>
+                <a:ea typeface="+mn-ea"/>
+                <a:cs typeface="+mn-cs"/>
+                <a:sym typeface="Jost-Regular"/>
+              </a:rPr>
+              <a:t>. </a:t>
+            </a:r>
           </a:p>
           <a:p>
             <a:pPr>
               <a:defRPr sz="1000"/>
             </a:pPr>
             <a:r>
-              <a:t>Das System unterteilt sich in verschiedene Serien für unterschiedliche Einsatzzwecke. Jede Serie bietet mehrere Modelle, Profile und Druckplatten, abgestimmt auf Größe und Anwendung.</a:t>
+              <a:rPr dirty="0"/>
+              <a:t>Das System </a:t>
+            </a:r>
+            <a:r>
+              <a:rPr dirty="0" err="1"/>
+              <a:t>unterteilt</a:t>
+            </a:r>
+            <a:r>
+              <a:rPr dirty="0"/>
+              <a:t> </a:t>
+            </a:r>
+            <a:r>
+              <a:rPr dirty="0" err="1"/>
+              <a:t>sich</a:t>
+            </a:r>
+            <a:r>
+              <a:rPr dirty="0"/>
+              <a:t> in </a:t>
+            </a:r>
+            <a:r>
+              <a:rPr dirty="0" err="1"/>
+              <a:t>verschiedene</a:t>
+            </a:r>
+            <a:r>
+              <a:rPr dirty="0"/>
+              <a:t> </a:t>
+            </a:r>
+            <a:r>
+              <a:rPr dirty="0" err="1"/>
+              <a:t>Serien</a:t>
+            </a:r>
+            <a:r>
+              <a:rPr dirty="0"/>
+              <a:t> für </a:t>
+            </a:r>
+            <a:r>
+              <a:rPr dirty="0" err="1"/>
+              <a:t>unterschiedliche</a:t>
+            </a:r>
+            <a:r>
+              <a:rPr dirty="0"/>
+              <a:t> </a:t>
+            </a:r>
+            <a:r>
+              <a:rPr dirty="0" err="1"/>
+              <a:t>Einsatzzwecke</a:t>
+            </a:r>
+            <a:r>
+              <a:rPr dirty="0"/>
+              <a:t>. </a:t>
+            </a:r>
+            <a:r>
+              <a:rPr dirty="0" err="1"/>
+              <a:t>Jede</a:t>
+            </a:r>
+            <a:r>
+              <a:rPr dirty="0"/>
+              <a:t> Serie </a:t>
+            </a:r>
+            <a:r>
+              <a:rPr dirty="0" err="1"/>
+              <a:t>bietet</a:t>
+            </a:r>
+            <a:r>
+              <a:rPr dirty="0"/>
+              <a:t> </a:t>
+            </a:r>
+            <a:r>
+              <a:rPr dirty="0" err="1"/>
+              <a:t>mehrere</a:t>
+            </a:r>
+            <a:r>
+              <a:rPr dirty="0"/>
+              <a:t> Modelle, Profile und </a:t>
+            </a:r>
+            <a:r>
+              <a:rPr dirty="0" err="1"/>
+              <a:t>Druckplatten</a:t>
+            </a:r>
+            <a:r>
+              <a:rPr dirty="0"/>
+              <a:t>, </a:t>
+            </a:r>
+            <a:r>
+              <a:rPr dirty="0" err="1"/>
+              <a:t>abgestimmt</a:t>
+            </a:r>
+            <a:r>
+              <a:rPr dirty="0"/>
+              <a:t> auf </a:t>
+            </a:r>
+            <a:r>
+              <a:rPr dirty="0" err="1"/>
+              <a:t>Größe</a:t>
+            </a:r>
+            <a:r>
+              <a:rPr dirty="0"/>
+              <a:t> und </a:t>
+            </a:r>
+            <a:r>
+              <a:rPr dirty="0" err="1"/>
+              <a:t>Anwendung</a:t>
+            </a:r>
+            <a:r>
+              <a:rPr dirty="0"/>
+              <a:t>.</a:t>
             </a:r>
           </a:p>
         </p:txBody>
       </p:sp>
       <p:sp>
         <p:nvSpPr>
-          <p:cNvPr id="198" name="テキスト ボックス 20"/>
+          <p:cNvPr id="121" name="テキスト ボックス 20">
+            <a:extLst>
+              <a:ext uri="{FF2B5EF4-FFF2-40B4-BE49-F238E27FC236}">
+                <a16:creationId xmlns:a16="http://schemas.microsoft.com/office/drawing/2014/main" id="{C89A22A8-9C63-F6A9-D99B-BE1157857DC3}"/>
+              </a:ext>
+            </a:extLst>
+          </p:cNvPr>
           <p:cNvSpPr txBox="1"/>
           <p:nvPr/>
         </p:nvSpPr>
         <p:spPr>
           <a:xfrm>
-            <a:off x="816563" y="3962050"/>
+            <a:off x="816563" y="4242466"/>
             <a:ext cx="3033713" cy="459741"/>
           </a:xfrm>
           <a:prstGeom prst="rect">
@@ -7180,7 +9180,7 @@
           </a:ln>
           <a:extLst>
             <a:ext uri="{C572A759-6A51-4108-AA02-DFA0A04FC94B}">
-              <ma14:wrappingTextBoxFlag xmlns:ma14="http://schemas.microsoft.com/office/mac/drawingml/2011/main" val="1"/>
+              <ma14:wrappingTextBoxFlag xmlns="" xmlns:m="http://schemas.openxmlformats.org/officeDocument/2006/math" xmlns:a14="http://schemas.microsoft.com/office/drawing/2010/main" xmlns:ma14="http://schemas.microsoft.com/office/mac/drawingml/2011/main" val="1"/>
             </a:ext>
           </a:extLst>
         </p:spPr>
@@ -7190,7 +9190,7 @@
           </a:bodyPr>
           <a:lstStyle>
             <a:lvl1pPr>
-              <a:defRPr b="1" sz="2000">
+              <a:defRPr sz="2000" b="1">
                 <a:latin typeface="JostRoman-SemiBold"/>
                 <a:ea typeface="JostRoman-SemiBold"/>
                 <a:cs typeface="JostRoman-SemiBold"/>
@@ -7199,7 +9199,6 @@
             </a:lvl1pPr>
           </a:lstStyle>
           <a:p>
-            <a:pPr/>
             <a:r>
               <a:t>2. Auswahl eines Modells</a:t>
             </a:r>
@@ -7208,13 +9207,19 @@
       </p:sp>
       <p:sp>
         <p:nvSpPr>
-          <p:cNvPr id="199" name="テキスト ボックス 21"/>
+          <p:cNvPr id="122" name="テキスト ボックス 21">
+            <a:extLst>
+              <a:ext uri="{FF2B5EF4-FFF2-40B4-BE49-F238E27FC236}">
+                <a16:creationId xmlns:a16="http://schemas.microsoft.com/office/drawing/2014/main" id="{1A4D55E4-1CC0-F260-C218-3C5FABD6E41B}"/>
+              </a:ext>
+            </a:extLst>
+          </p:cNvPr>
           <p:cNvSpPr txBox="1"/>
           <p:nvPr/>
         </p:nvSpPr>
         <p:spPr>
           <a:xfrm>
-            <a:off x="706959" y="4363473"/>
+            <a:off x="706959" y="4643889"/>
             <a:ext cx="5558052" cy="472441"/>
           </a:xfrm>
           <a:prstGeom prst="rect">
@@ -7225,7 +9230,7 @@
           </a:ln>
           <a:extLst>
             <a:ext uri="{C572A759-6A51-4108-AA02-DFA0A04FC94B}">
-              <ma14:wrappingTextBoxFlag xmlns:ma14="http://schemas.microsoft.com/office/mac/drawingml/2011/main" val="1"/>
+              <ma14:wrappingTextBoxFlag xmlns="" xmlns:m="http://schemas.openxmlformats.org/officeDocument/2006/math" xmlns:a14="http://schemas.microsoft.com/office/drawing/2010/main" xmlns:ma14="http://schemas.microsoft.com/office/mac/drawingml/2011/main" val="1"/>
             </a:ext>
           </a:extLst>
         </p:spPr>
@@ -7239,7 +9244,6 @@
             </a:lvl1pPr>
           </a:lstStyle>
           <a:p>
-            <a:pPr/>
             <a:r>
               <a:t>Folgen Sie zuerst diesem kurzen Auswahlprozess, um die richtigen Daten herunterzuladen und zu drucken.</a:t>
             </a:r>
@@ -7248,13 +9252,19 @@
       </p:sp>
       <p:sp>
         <p:nvSpPr>
-          <p:cNvPr id="200" name="テキスト ボックス 24"/>
+          <p:cNvPr id="123" name="テキスト ボックス 24">
+            <a:extLst>
+              <a:ext uri="{FF2B5EF4-FFF2-40B4-BE49-F238E27FC236}">
+                <a16:creationId xmlns:a16="http://schemas.microsoft.com/office/drawing/2014/main" id="{85F6A698-3F75-1C1C-A794-F2EA27EED6AA}"/>
+              </a:ext>
+            </a:extLst>
+          </p:cNvPr>
           <p:cNvSpPr txBox="1"/>
           <p:nvPr/>
         </p:nvSpPr>
         <p:spPr>
           <a:xfrm>
-            <a:off x="706958" y="6105607"/>
+            <a:off x="706958" y="6386023"/>
             <a:ext cx="5565321" cy="281941"/>
           </a:xfrm>
           <a:prstGeom prst="rect">
@@ -7265,7 +9275,7 @@
           </a:ln>
           <a:extLst>
             <a:ext uri="{C572A759-6A51-4108-AA02-DFA0A04FC94B}">
-              <ma14:wrappingTextBoxFlag xmlns:ma14="http://schemas.microsoft.com/office/mac/drawingml/2011/main" val="1"/>
+              <ma14:wrappingTextBoxFlag xmlns="" xmlns:m="http://schemas.openxmlformats.org/officeDocument/2006/math" xmlns:a14="http://schemas.microsoft.com/office/drawing/2010/main" xmlns:ma14="http://schemas.microsoft.com/office/mac/drawingml/2011/main" val="1"/>
             </a:ext>
           </a:extLst>
         </p:spPr>
@@ -7279,22 +9289,96 @@
             </a:lvl1pPr>
           </a:lstStyle>
           <a:p>
-            <a:pPr/>
-            <a:r>
-              <a:t>Wählen Sie zuerst die gewünschte Filamentart aus, wenn Sie sich für ein Modell entscheiden.</a:t>
+            <a:r>
+              <a:rPr dirty="0" err="1"/>
+              <a:t>Wählen</a:t>
+            </a:r>
+            <a:r>
+              <a:rPr dirty="0"/>
+              <a:t> Sie </a:t>
+            </a:r>
+            <a:r>
+              <a:rPr dirty="0" err="1"/>
+              <a:t>zuerst</a:t>
+            </a:r>
+            <a:r>
+              <a:rPr dirty="0"/>
+              <a:t> die </a:t>
+            </a:r>
+            <a:r>
+              <a:rPr dirty="0" err="1"/>
+              <a:t>gewünschte</a:t>
+            </a:r>
+            <a:r>
+              <a:rPr dirty="0"/>
+              <a:t> </a:t>
+            </a:r>
+            <a:r>
+              <a:rPr dirty="0" err="1"/>
+              <a:t>Filamentart</a:t>
+            </a:r>
+            <a:r>
+              <a:rPr dirty="0"/>
+              <a:t> </a:t>
+            </a:r>
+            <a:r>
+              <a:rPr dirty="0" err="1"/>
+              <a:t>aus</a:t>
+            </a:r>
+            <a:r>
+              <a:rPr dirty="0"/>
+              <a:t>, </a:t>
+            </a:r>
+            <a:r>
+              <a:rPr dirty="0" err="1"/>
+              <a:t>wenn</a:t>
+            </a:r>
+            <a:r>
+              <a:rPr dirty="0"/>
+              <a:t> Sie </a:t>
+            </a:r>
+            <a:r>
+              <a:rPr dirty="0" err="1"/>
+              <a:t>sich</a:t>
+            </a:r>
+            <a:r>
+              <a:rPr dirty="0"/>
+              <a:t> für </a:t>
+            </a:r>
+            <a:r>
+              <a:rPr dirty="0" err="1"/>
+              <a:t>ein</a:t>
+            </a:r>
+            <a:r>
+              <a:rPr dirty="0"/>
+              <a:t> Modell </a:t>
+            </a:r>
+            <a:r>
+              <a:rPr dirty="0" err="1"/>
+              <a:t>entscheiden</a:t>
+            </a:r>
+            <a:r>
+              <a:rPr dirty="0"/>
+              <a:t>.</a:t>
             </a:r>
           </a:p>
         </p:txBody>
       </p:sp>
       <p:sp>
         <p:nvSpPr>
-          <p:cNvPr id="201" name="テキスト ボックス 25"/>
+          <p:cNvPr id="124" name="テキスト ボックス 25">
+            <a:extLst>
+              <a:ext uri="{FF2B5EF4-FFF2-40B4-BE49-F238E27FC236}">
+                <a16:creationId xmlns:a16="http://schemas.microsoft.com/office/drawing/2014/main" id="{027C453D-F9C9-F551-93DB-DB8E8582E58B}"/>
+              </a:ext>
+            </a:extLst>
+          </p:cNvPr>
           <p:cNvSpPr txBox="1"/>
           <p:nvPr/>
         </p:nvSpPr>
         <p:spPr>
           <a:xfrm>
-            <a:off x="816563" y="6453603"/>
+            <a:off x="816563" y="6696427"/>
             <a:ext cx="5462985" cy="1615441"/>
           </a:xfrm>
           <a:prstGeom prst="rect">
@@ -7305,7 +9389,7 @@
           </a:ln>
           <a:extLst>
             <a:ext uri="{C572A759-6A51-4108-AA02-DFA0A04FC94B}">
-              <ma14:wrappingTextBoxFlag xmlns:ma14="http://schemas.microsoft.com/office/mac/drawingml/2011/main" val="1"/>
+              <ma14:wrappingTextBoxFlag xmlns="" xmlns:m="http://schemas.openxmlformats.org/officeDocument/2006/math" xmlns:a14="http://schemas.microsoft.com/office/drawing/2010/main" xmlns:ma14="http://schemas.microsoft.com/office/mac/drawingml/2011/main" val="1"/>
             </a:ext>
           </a:extLst>
         </p:spPr>
@@ -7317,54 +9401,424 @@
           <a:p>
             <a:pPr marL="228600" indent="-228600">
               <a:buSzPct val="100000"/>
-              <a:buAutoNum type="arabicPeriod" startAt="1"/>
+              <a:buAutoNum type="arabicPeriod"/>
               <a:defRPr sz="1000"/>
             </a:pPr>
             <a:r>
-              <a:t>Wählen Sie eine Serie: Mischfilament für Mischfarben, Farbverlaufsfilament für Farbwechsel.</a:t>
+              <a:rPr dirty="0" err="1"/>
+              <a:t>Wählen</a:t>
+            </a:r>
+            <a:r>
+              <a:rPr dirty="0"/>
+              <a:t> Sie </a:t>
+            </a:r>
+            <a:r>
+              <a:rPr dirty="0" err="1"/>
+              <a:t>eine</a:t>
+            </a:r>
+            <a:r>
+              <a:rPr dirty="0"/>
+              <a:t> Serie: </a:t>
+            </a:r>
+            <a:r>
+              <a:rPr dirty="0" err="1"/>
+              <a:t>Mischfilament</a:t>
+            </a:r>
+            <a:r>
+              <a:rPr dirty="0"/>
+              <a:t> für </a:t>
+            </a:r>
+            <a:r>
+              <a:rPr dirty="0" err="1"/>
+              <a:t>Mischfarben</a:t>
+            </a:r>
+            <a:r>
+              <a:rPr dirty="0"/>
+              <a:t>, </a:t>
+            </a:r>
+            <a:r>
+              <a:rPr dirty="0" err="1"/>
+              <a:t>Farbverlaufsfilament</a:t>
+            </a:r>
+            <a:r>
+              <a:rPr dirty="0"/>
+              <a:t> für </a:t>
+            </a:r>
+            <a:r>
+              <a:rPr dirty="0" err="1"/>
+              <a:t>Farbwechsel</a:t>
+            </a:r>
+            <a:r>
+              <a:rPr dirty="0"/>
+              <a:t>.</a:t>
             </a:r>
           </a:p>
           <a:p>
             <a:pPr marL="228600" indent="-228600">
               <a:buSzPct val="100000"/>
-              <a:buAutoNum type="arabicPeriod" startAt="1"/>
+              <a:buAutoNum type="arabicPeriod"/>
               <a:defRPr sz="1000"/>
             </a:pPr>
             <a:r>
-              <a:t>Wählen Sie eine Modellgröße: Nutzen Sie ein S4-Modell für kleine Objekte oder ein M1-Modell für größere Drucke, die etwa 70 g Filament benötigen.</a:t>
+              <a:rPr dirty="0" err="1"/>
+              <a:t>Wählen</a:t>
+            </a:r>
+            <a:r>
+              <a:rPr dirty="0"/>
+              <a:t> Sie </a:t>
+            </a:r>
+            <a:r>
+              <a:rPr dirty="0" err="1"/>
+              <a:t>eine</a:t>
+            </a:r>
+            <a:r>
+              <a:rPr dirty="0"/>
+              <a:t> </a:t>
+            </a:r>
+            <a:r>
+              <a:rPr dirty="0" err="1"/>
+              <a:t>Modellgröße</a:t>
+            </a:r>
+            <a:r>
+              <a:rPr dirty="0"/>
+              <a:t>: </a:t>
+            </a:r>
+            <a:r>
+              <a:rPr dirty="0" err="1"/>
+              <a:t>Nutzen</a:t>
+            </a:r>
+            <a:r>
+              <a:rPr dirty="0"/>
+              <a:t> Sie </a:t>
+            </a:r>
+            <a:r>
+              <a:rPr dirty="0" err="1"/>
+              <a:t>ein</a:t>
+            </a:r>
+            <a:r>
+              <a:rPr dirty="0"/>
+              <a:t> S4-Modell für </a:t>
+            </a:r>
+            <a:r>
+              <a:rPr dirty="0" err="1"/>
+              <a:t>kleine</a:t>
+            </a:r>
+            <a:r>
+              <a:rPr dirty="0"/>
+              <a:t> </a:t>
+            </a:r>
+            <a:r>
+              <a:rPr dirty="0" err="1"/>
+              <a:t>Objekte</a:t>
+            </a:r>
+            <a:r>
+              <a:rPr dirty="0"/>
+              <a:t> </a:t>
+            </a:r>
+            <a:r>
+              <a:rPr dirty="0" err="1"/>
+              <a:t>oder</a:t>
+            </a:r>
+            <a:r>
+              <a:rPr dirty="0"/>
+              <a:t> </a:t>
+            </a:r>
+            <a:r>
+              <a:rPr dirty="0" err="1"/>
+              <a:t>ein</a:t>
+            </a:r>
+            <a:r>
+              <a:rPr dirty="0"/>
+              <a:t> M1-Modell für </a:t>
+            </a:r>
+            <a:r>
+              <a:rPr dirty="0" err="1"/>
+              <a:t>größere</a:t>
+            </a:r>
+            <a:r>
+              <a:rPr dirty="0"/>
+              <a:t> </a:t>
+            </a:r>
+            <a:r>
+              <a:rPr dirty="0" err="1"/>
+              <a:t>Drucke</a:t>
+            </a:r>
+            <a:r>
+              <a:rPr dirty="0"/>
+              <a:t>, die </a:t>
+            </a:r>
+            <a:r>
+              <a:rPr dirty="0" err="1"/>
+              <a:t>etwa</a:t>
+            </a:r>
+            <a:r>
+              <a:rPr dirty="0"/>
+              <a:t> 70 g Filament </a:t>
+            </a:r>
+            <a:r>
+              <a:rPr dirty="0" err="1"/>
+              <a:t>benötigen</a:t>
+            </a:r>
+            <a:r>
+              <a:rPr dirty="0"/>
+              <a:t>.</a:t>
             </a:r>
           </a:p>
           <a:p>
             <a:pPr marL="228600" indent="-228600">
               <a:buSzPct val="100000"/>
-              <a:buAutoNum type="arabicPeriod" startAt="1"/>
+              <a:buAutoNum type="arabicPeriod"/>
               <a:defRPr sz="1000"/>
             </a:pPr>
             <a:r>
-              <a:t>Profil und Druckplatte auswählen: Entscheiden Sie sich für die Druckplatte, die zu Ihrem gewünschten Mischungsverhältnis oder Muster passt.</a:t>
+              <a:rPr dirty="0" err="1"/>
+              <a:t>Profil</a:t>
+            </a:r>
+            <a:r>
+              <a:rPr dirty="0"/>
+              <a:t> und </a:t>
+            </a:r>
+            <a:r>
+              <a:rPr dirty="0" err="1"/>
+              <a:t>Druckplatte</a:t>
+            </a:r>
+            <a:r>
+              <a:rPr dirty="0"/>
+              <a:t> </a:t>
+            </a:r>
+            <a:r>
+              <a:rPr dirty="0" err="1"/>
+              <a:t>auswählen</a:t>
+            </a:r>
+            <a:r>
+              <a:rPr dirty="0"/>
+              <a:t>: </a:t>
+            </a:r>
+            <a:r>
+              <a:rPr dirty="0" err="1"/>
+              <a:t>Entscheiden</a:t>
+            </a:r>
+            <a:r>
+              <a:rPr dirty="0"/>
+              <a:t> Sie </a:t>
+            </a:r>
+            <a:r>
+              <a:rPr dirty="0" err="1"/>
+              <a:t>sich</a:t>
+            </a:r>
+            <a:r>
+              <a:rPr dirty="0"/>
+              <a:t> für die </a:t>
+            </a:r>
+            <a:r>
+              <a:rPr dirty="0" err="1"/>
+              <a:t>Druckplatte</a:t>
+            </a:r>
+            <a:r>
+              <a:rPr dirty="0"/>
+              <a:t>, die </a:t>
+            </a:r>
+            <a:r>
+              <a:rPr dirty="0" err="1"/>
+              <a:t>zu</a:t>
+            </a:r>
+            <a:r>
+              <a:rPr dirty="0"/>
+              <a:t> </a:t>
+            </a:r>
+            <a:r>
+              <a:rPr dirty="0" err="1"/>
+              <a:t>Ihrem</a:t>
+            </a:r>
+            <a:r>
+              <a:rPr dirty="0"/>
+              <a:t> </a:t>
+            </a:r>
+            <a:r>
+              <a:rPr dirty="0" err="1"/>
+              <a:t>gewünschten</a:t>
+            </a:r>
+            <a:r>
+              <a:rPr dirty="0"/>
+              <a:t> </a:t>
+            </a:r>
+            <a:r>
+              <a:rPr dirty="0" err="1"/>
+              <a:t>Mischungsverhältnis</a:t>
+            </a:r>
+            <a:r>
+              <a:rPr dirty="0"/>
+              <a:t> </a:t>
+            </a:r>
+            <a:r>
+              <a:rPr dirty="0" err="1"/>
+              <a:t>oder</a:t>
+            </a:r>
+            <a:r>
+              <a:rPr dirty="0"/>
+              <a:t> Muster </a:t>
+            </a:r>
+            <a:r>
+              <a:rPr dirty="0" err="1"/>
+              <a:t>passt</a:t>
+            </a:r>
+            <a:r>
+              <a:rPr dirty="0"/>
+              <a:t>.</a:t>
             </a:r>
           </a:p>
           <a:p>
             <a:pPr marL="228600" indent="-228600">
               <a:buSzPct val="100000"/>
-              <a:buAutoNum type="arabicPeriod" startAt="1"/>
+              <a:buAutoNum type="arabicPeriod"/>
               <a:defRPr sz="1000"/>
             </a:pPr>
             <a:r>
-              <a:t>Filamente zuweisen und slicen: Nutzen Sie Filamente mit identischem oder ähnlichem Material, führen Sie die Zuweisung durch, slicen Sie das Modell und beachten Sie vor dem Druck die Druckhinweise.</a:t>
+              <a:rPr dirty="0" err="1"/>
+              <a:t>Filamente</a:t>
+            </a:r>
+            <a:r>
+              <a:rPr dirty="0"/>
+              <a:t> </a:t>
+            </a:r>
+            <a:r>
+              <a:rPr dirty="0" err="1"/>
+              <a:t>zuweisen</a:t>
+            </a:r>
+            <a:r>
+              <a:rPr dirty="0"/>
+              <a:t> und </a:t>
+            </a:r>
+            <a:r>
+              <a:rPr dirty="0" err="1"/>
+              <a:t>slicen</a:t>
+            </a:r>
+            <a:r>
+              <a:rPr dirty="0"/>
+              <a:t>: </a:t>
+            </a:r>
+            <a:r>
+              <a:rPr dirty="0" err="1"/>
+              <a:t>Nutzen</a:t>
+            </a:r>
+            <a:r>
+              <a:rPr dirty="0"/>
+              <a:t> Sie </a:t>
+            </a:r>
+            <a:r>
+              <a:rPr dirty="0" err="1"/>
+              <a:t>Filamente</a:t>
+            </a:r>
+            <a:r>
+              <a:rPr dirty="0"/>
+              <a:t> </a:t>
+            </a:r>
+            <a:r>
+              <a:rPr dirty="0" err="1"/>
+              <a:t>mit</a:t>
+            </a:r>
+            <a:r>
+              <a:rPr dirty="0"/>
+              <a:t> </a:t>
+            </a:r>
+            <a:r>
+              <a:rPr dirty="0" err="1"/>
+              <a:t>identischem</a:t>
+            </a:r>
+            <a:r>
+              <a:rPr dirty="0"/>
+              <a:t> </a:t>
+            </a:r>
+            <a:r>
+              <a:rPr dirty="0" err="1"/>
+              <a:t>oder</a:t>
+            </a:r>
+            <a:r>
+              <a:rPr dirty="0"/>
+              <a:t> </a:t>
+            </a:r>
+            <a:r>
+              <a:rPr dirty="0" err="1"/>
+              <a:t>ähnlichem</a:t>
+            </a:r>
+            <a:r>
+              <a:rPr dirty="0"/>
+              <a:t> Material, </a:t>
+            </a:r>
+            <a:r>
+              <a:rPr dirty="0" err="1"/>
+              <a:t>führen</a:t>
+            </a:r>
+            <a:r>
+              <a:rPr dirty="0"/>
+              <a:t> Sie die </a:t>
+            </a:r>
+            <a:r>
+              <a:rPr dirty="0" err="1"/>
+              <a:t>Zuweisung</a:t>
+            </a:r>
+            <a:r>
+              <a:rPr dirty="0"/>
+              <a:t> </a:t>
+            </a:r>
+            <a:r>
+              <a:rPr dirty="0" err="1"/>
+              <a:t>durch</a:t>
+            </a:r>
+            <a:r>
+              <a:rPr dirty="0"/>
+              <a:t>, </a:t>
+            </a:r>
+            <a:r>
+              <a:rPr dirty="0" err="1"/>
+              <a:t>slicen</a:t>
+            </a:r>
+            <a:r>
+              <a:rPr dirty="0"/>
+              <a:t> Sie das Modell und </a:t>
+            </a:r>
+            <a:r>
+              <a:rPr dirty="0" err="1"/>
+              <a:t>beachten</a:t>
+            </a:r>
+            <a:r>
+              <a:rPr dirty="0"/>
+              <a:t> Sie </a:t>
+            </a:r>
+            <a:r>
+              <a:rPr dirty="0" err="1"/>
+              <a:t>vor</a:t>
+            </a:r>
+            <a:r>
+              <a:rPr dirty="0"/>
+              <a:t> dem Druck die </a:t>
+            </a:r>
+            <a:r>
+              <a:rPr dirty="0" err="1"/>
+              <a:t>Druckhinweise</a:t>
+            </a:r>
+            <a:r>
+              <a:rPr dirty="0"/>
+              <a:t>.</a:t>
             </a:r>
           </a:p>
         </p:txBody>
       </p:sp>
       <p:sp>
         <p:nvSpPr>
-          <p:cNvPr id="202" name="テキスト ボックス 26"/>
+          <p:cNvPr id="125" name="テキスト ボックス 26">
+            <a:extLst>
+              <a:ext uri="{FF2B5EF4-FFF2-40B4-BE49-F238E27FC236}">
+                <a16:creationId xmlns:a16="http://schemas.microsoft.com/office/drawing/2014/main" id="{8E8B847F-FA03-A969-8B37-801820A5731E}"/>
+              </a:ext>
+            </a:extLst>
+          </p:cNvPr>
           <p:cNvSpPr txBox="1"/>
           <p:nvPr/>
         </p:nvSpPr>
         <p:spPr>
           <a:xfrm>
-            <a:off x="816562" y="8168571"/>
+            <a:off x="816562" y="8157903"/>
             <a:ext cx="5372560" cy="421641"/>
           </a:xfrm>
           <a:prstGeom prst="rect">
@@ -7375,7 +9829,7 @@
           </a:ln>
           <a:extLst>
             <a:ext uri="{C572A759-6A51-4108-AA02-DFA0A04FC94B}">
-              <ma14:wrappingTextBoxFlag xmlns:ma14="http://schemas.microsoft.com/office/mac/drawingml/2011/main" val="1"/>
+              <ma14:wrappingTextBoxFlag xmlns="" xmlns:m="http://schemas.openxmlformats.org/officeDocument/2006/math" xmlns:a14="http://schemas.microsoft.com/office/drawing/2010/main" xmlns:ma14="http://schemas.microsoft.com/office/mac/drawingml/2011/main" val="1"/>
             </a:ext>
           </a:extLst>
         </p:spPr>
@@ -7394,24 +9848,27 @@
               </a:defRPr>
             </a:pPr>
             <a:r>
-              <a:t>*</a:t>
-            </a:r>
-            <a:r>
-              <a:t>Hinweis: Der Begriff „Profil“ steht in FlexChroma für eine Einteilung nach Verwendungszweck, nicht für abweichende Druckeinstellungen.</a:t>
+              <a:t>*Hinweis: Der Begriff „Profil“ steht in FlexChroma für eine Einteilung nach Verwendungszweck, nicht für abweichende Druckeinstellungen.</a:t>
             </a:r>
           </a:p>
         </p:txBody>
       </p:sp>
       <p:sp>
         <p:nvSpPr>
-          <p:cNvPr id="203" name="テキスト ボックス 30"/>
+          <p:cNvPr id="132" name="テキスト ボックス 30">
+            <a:extLst>
+              <a:ext uri="{FF2B5EF4-FFF2-40B4-BE49-F238E27FC236}">
+                <a16:creationId xmlns:a16="http://schemas.microsoft.com/office/drawing/2014/main" id="{CFED4C0C-94D5-F7FE-7ABA-C963717D818B}"/>
+              </a:ext>
+            </a:extLst>
+          </p:cNvPr>
           <p:cNvSpPr txBox="1"/>
           <p:nvPr/>
         </p:nvSpPr>
         <p:spPr>
           <a:xfrm>
-            <a:off x="1966250" y="1436866"/>
-            <a:ext cx="2970886" cy="383541"/>
+            <a:off x="1934144" y="1459500"/>
+            <a:ext cx="3107580" cy="338554"/>
           </a:xfrm>
           <a:prstGeom prst="rect">
             <a:avLst/>
@@ -7421,7 +9878,7 @@
           </a:ln>
           <a:extLst>
             <a:ext uri="{C572A759-6A51-4108-AA02-DFA0A04FC94B}">
-              <ma14:wrappingTextBoxFlag xmlns:ma14="http://schemas.microsoft.com/office/mac/drawingml/2011/main" val="1"/>
+              <ma14:wrappingTextBoxFlag xmlns="" xmlns:m="http://schemas.openxmlformats.org/officeDocument/2006/math" xmlns:a14="http://schemas.microsoft.com/office/drawing/2010/main" xmlns:ma14="http://schemas.microsoft.com/office/mac/drawingml/2011/main" val="1"/>
             </a:ext>
           </a:extLst>
         </p:spPr>
@@ -7435,22 +9892,47 @@
             </a:lvl1pPr>
           </a:lstStyle>
           <a:p>
-            <a:pPr/>
-            <a:r>
-              <a:t>- FlexChroma Dokumentenarchiv -</a:t>
+            <a:r>
+              <a:rPr dirty="0"/>
+              <a:t>- </a:t>
+            </a:r>
+            <a:r>
+              <a:rPr dirty="0">
+                <a:latin typeface="Jost Medium" pitchFamily="2" charset="0"/>
+                <a:ea typeface="Jost Medium" pitchFamily="2" charset="0"/>
+              </a:rPr>
+              <a:t>FlexChroma</a:t>
+            </a:r>
+            <a:r>
+              <a:rPr dirty="0"/>
+              <a:t> </a:t>
+            </a:r>
+            <a:r>
+              <a:rPr dirty="0" err="1"/>
+              <a:t>Dokumentenarchiv</a:t>
+            </a:r>
+            <a:r>
+              <a:rPr dirty="0"/>
+              <a:t> -</a:t>
             </a:r>
           </a:p>
         </p:txBody>
       </p:sp>
       <p:sp>
         <p:nvSpPr>
-          <p:cNvPr id="204" name="テキスト ボックス 33"/>
+          <p:cNvPr id="133" name="テキスト ボックス 33">
+            <a:extLst>
+              <a:ext uri="{FF2B5EF4-FFF2-40B4-BE49-F238E27FC236}">
+                <a16:creationId xmlns:a16="http://schemas.microsoft.com/office/drawing/2014/main" id="{DD85EE58-2B6C-3D5C-CBB9-40D003BB3BC8}"/>
+              </a:ext>
+            </a:extLst>
+          </p:cNvPr>
           <p:cNvSpPr txBox="1"/>
           <p:nvPr/>
         </p:nvSpPr>
         <p:spPr>
           <a:xfrm>
-            <a:off x="2608122" y="1853185"/>
+            <a:off x="2657017" y="1806153"/>
             <a:ext cx="1543966" cy="345441"/>
           </a:xfrm>
           <a:prstGeom prst="rect">
@@ -7461,7 +9943,7 @@
           </a:ln>
           <a:extLst>
             <a:ext uri="{C572A759-6A51-4108-AA02-DFA0A04FC94B}">
-              <ma14:wrappingTextBoxFlag xmlns:ma14="http://schemas.microsoft.com/office/mac/drawingml/2011/main" val="1"/>
+              <ma14:wrappingTextBoxFlag xmlns="" xmlns:m="http://schemas.openxmlformats.org/officeDocument/2006/math" xmlns:a14="http://schemas.microsoft.com/office/drawing/2010/main" xmlns:ma14="http://schemas.microsoft.com/office/mac/drawingml/2011/main" val="1"/>
             </a:ext>
           </a:extLst>
         </p:spPr>
@@ -7475,7 +9957,6 @@
             </a:lvl1pPr>
           </a:lstStyle>
           <a:p>
-            <a:pPr/>
             <a:r>
               <a:t>Ver.1.00  2026.9.1</a:t>
             </a:r>
@@ -7484,16 +9965,20 @@
       </p:sp>
       <p:pic>
         <p:nvPicPr>
-          <p:cNvPr id="205" name="FlexChroma-icon3.png" descr="FlexChroma-icon3.png"/>
+          <p:cNvPr id="134" name="FlexChroma-icon3.png" descr="FlexChroma-icon3.png">
+            <a:extLst>
+              <a:ext uri="{FF2B5EF4-FFF2-40B4-BE49-F238E27FC236}">
+                <a16:creationId xmlns:a16="http://schemas.microsoft.com/office/drawing/2014/main" id="{DAF96A4E-261E-83CF-EEA1-B63B3697F249}"/>
+              </a:ext>
+            </a:extLst>
+          </p:cNvPr>
           <p:cNvPicPr>
             <a:picLocks noChangeAspect="1"/>
           </p:cNvPicPr>
           <p:nvPr/>
         </p:nvPicPr>
         <p:blipFill>
-          <a:blip r:embed="rId2">
-            <a:extLst/>
-          </a:blip>
+          <a:blip r:embed="rId2"/>
           <a:stretch>
             <a:fillRect/>
           </a:stretch>
@@ -7513,48 +9998,77 @@
       </p:pic>
       <p:pic>
         <p:nvPicPr>
-          <p:cNvPr id="206" name="ペーストされたムービー.png" descr="ペーストされたムービー.png"/>
+          <p:cNvPr id="2" name="図 1">
+            <a:extLst>
+              <a:ext uri="{FF2B5EF4-FFF2-40B4-BE49-F238E27FC236}">
+                <a16:creationId xmlns:a16="http://schemas.microsoft.com/office/drawing/2014/main" id="{4F3F5446-B5C9-6482-CD2E-BFEB90739B0D}"/>
+              </a:ext>
+            </a:extLst>
+          </p:cNvPr>
           <p:cNvPicPr>
-            <a:picLocks noChangeAspect="1"/>
+            <a:picLocks noChangeAspect="1" noChangeArrowheads="1"/>
           </p:cNvPicPr>
           <p:nvPr/>
         </p:nvPicPr>
         <p:blipFill>
           <a:blip r:embed="rId3">
-            <a:extLst/>
+            <a:extLst>
+              <a:ext uri="{28A0092B-C50C-407E-A947-70E740481C1C}">
+                <a14:useLocalDpi xmlns:a14="http://schemas.microsoft.com/office/drawing/2010/main" val="0"/>
+              </a:ext>
+            </a:extLst>
           </a:blip>
+          <a:srcRect/>
           <a:stretch>
             <a:fillRect/>
           </a:stretch>
         </p:blipFill>
-        <p:spPr>
+        <p:spPr bwMode="auto">
           <a:xfrm>
-            <a:off x="325255" y="4916473"/>
-            <a:ext cx="6188663" cy="1129092"/>
+            <a:off x="540001" y="5093007"/>
+            <a:ext cx="5813043" cy="1099409"/>
           </a:xfrm>
           <a:prstGeom prst="rect">
             <a:avLst/>
           </a:prstGeom>
-          <a:ln w="12700">
-            <a:miter lim="400000"/>
-          </a:ln>
+          <a:noFill/>
+          <a:extLst>
+            <a:ext uri="{909E8E84-426E-40DD-AFC4-6F175D3DCCD1}">
+              <a14:hiddenFill xmlns:a14="http://schemas.microsoft.com/office/drawing/2010/main">
+                <a:solidFill>
+                  <a:srgbClr val="FFFFFF"/>
+                </a:solidFill>
+              </a14:hiddenFill>
+            </a:ext>
+          </a:extLst>
         </p:spPr>
       </p:pic>
     </p:spTree>
+    <p:extLst>
+      <p:ext uri="{BB962C8B-B14F-4D97-AF65-F5344CB8AC3E}">
+        <p14:creationId xmlns:p14="http://schemas.microsoft.com/office/powerpoint/2010/main" val="1508769660"/>
+      </p:ext>
+    </p:extLst>
   </p:cSld>
   <p:clrMapOvr>
     <a:masterClrMapping/>
   </p:clrMapOvr>
-  <p:transition xmlns:p14="http://schemas.microsoft.com/office/powerpoint/2010/main" spd="med" advClick="1"/>
+  <p:transition spd="med"/>
 </p:sld>
 </file>
 
 <file path=ppt/slides/slide7.xml><?xml version="1.0" encoding="utf-8"?>
-<p:sld xmlns:a="http://schemas.openxmlformats.org/drawingml/2006/main" xmlns:r="http://schemas.openxmlformats.org/officeDocument/2006/relationships" xmlns:p="http://schemas.openxmlformats.org/presentationml/2006/main" xmlns:m="http://schemas.openxmlformats.org/officeDocument/2006/math" xmlns:a14="http://schemas.microsoft.com/office/drawing/2010/main" showMasterSp="1" showMasterPhAnim="1">
+<p:sld xmlns:a="http://schemas.openxmlformats.org/drawingml/2006/main" xmlns:r="http://schemas.openxmlformats.org/officeDocument/2006/relationships" xmlns:p="http://schemas.openxmlformats.org/presentationml/2006/main">
   <p:cSld>
     <p:spTree>
       <p:nvGrpSpPr>
-        <p:cNvPr id="1" name=""/>
+        <p:cNvPr id="1" name="">
+          <a:extLst>
+            <a:ext uri="{FF2B5EF4-FFF2-40B4-BE49-F238E27FC236}">
+              <a16:creationId xmlns:a16="http://schemas.microsoft.com/office/drawing/2014/main" id="{0E363A08-F6DA-C98D-7F81-40E0C00F90AF}"/>
+            </a:ext>
+          </a:extLst>
+        </p:cNvPr>
         <p:cNvGrpSpPr/>
         <p:nvPr/>
       </p:nvGrpSpPr>
@@ -7568,14 +10082,20 @@
       </p:grpSpPr>
       <p:sp>
         <p:nvSpPr>
-          <p:cNvPr id="208" name="正方形/長方形 1"/>
+          <p:cNvPr id="137" name="正方形/長方形 1">
+            <a:extLst>
+              <a:ext uri="{FF2B5EF4-FFF2-40B4-BE49-F238E27FC236}">
+                <a16:creationId xmlns:a16="http://schemas.microsoft.com/office/drawing/2014/main" id="{FE41F440-6320-04BB-8D8A-4A93DEF88F88}"/>
+              </a:ext>
+            </a:extLst>
+          </p:cNvPr>
           <p:cNvSpPr/>
           <p:nvPr/>
         </p:nvSpPr>
         <p:spPr>
           <a:xfrm>
-            <a:off x="0" y="0"/>
-            <a:ext cx="6858000" cy="9144000"/>
+            <a:off x="33951" y="45268"/>
+            <a:ext cx="6790099" cy="9053465"/>
           </a:xfrm>
           <a:prstGeom prst="rect">
             <a:avLst/>
@@ -7609,139 +10129,265 @@
                 </a:solidFill>
               </a:defRPr>
             </a:pPr>
+            <a:endParaRPr/>
           </a:p>
         </p:txBody>
       </p:sp>
       <p:sp>
         <p:nvSpPr>
-          <p:cNvPr id="209" name="正方形/長方形 4"/>
+          <p:cNvPr id="7" name="フリーフォーム: 図形 6">
+            <a:extLst>
+              <a:ext uri="{FF2B5EF4-FFF2-40B4-BE49-F238E27FC236}">
+                <a16:creationId xmlns:a16="http://schemas.microsoft.com/office/drawing/2014/main" id="{BEC6A02F-0DFC-E14F-FD82-8A1F0A796629}"/>
+              </a:ext>
+            </a:extLst>
+          </p:cNvPr>
           <p:cNvSpPr/>
           <p:nvPr/>
         </p:nvSpPr>
         <p:spPr>
           <a:xfrm>
-            <a:off x="-7269" y="0"/>
-            <a:ext cx="6872538" cy="9144000"/>
+            <a:off x="7825" y="0"/>
+            <a:ext cx="6858001" cy="9144000"/>
           </a:xfrm>
           <a:custGeom>
             <a:avLst/>
-            <a:gdLst/>
+            <a:gdLst>
+              <a:gd name="connsiteX0" fmla="*/ 3727576 w 6858001"/>
+              <a:gd name="connsiteY0" fmla="*/ 8661917 h 9144000"/>
+              <a:gd name="connsiteX1" fmla="*/ 3727576 w 6858001"/>
+              <a:gd name="connsiteY1" fmla="*/ 8715918 h 9144000"/>
+              <a:gd name="connsiteX2" fmla="*/ 6319577 w 6858001"/>
+              <a:gd name="connsiteY2" fmla="*/ 8715918 h 9144000"/>
+              <a:gd name="connsiteX3" fmla="*/ 6319577 w 6858001"/>
+              <a:gd name="connsiteY3" fmla="*/ 8661917 h 9144000"/>
+              <a:gd name="connsiteX4" fmla="*/ 547269 w 6858001"/>
+              <a:gd name="connsiteY4" fmla="*/ 8661917 h 9144000"/>
+              <a:gd name="connsiteX5" fmla="*/ 547269 w 6858001"/>
+              <a:gd name="connsiteY5" fmla="*/ 8715918 h 9144000"/>
+              <a:gd name="connsiteX6" fmla="*/ 3139271 w 6858001"/>
+              <a:gd name="connsiteY6" fmla="*/ 8715918 h 9144000"/>
+              <a:gd name="connsiteX7" fmla="*/ 3139271 w 6858001"/>
+              <a:gd name="connsiteY7" fmla="*/ 8661917 h 9144000"/>
+              <a:gd name="connsiteX8" fmla="*/ 661242 w 6858001"/>
+              <a:gd name="connsiteY8" fmla="*/ 2534513 h 9144000"/>
+              <a:gd name="connsiteX9" fmla="*/ 558906 w 6858001"/>
+              <a:gd name="connsiteY9" fmla="*/ 2636849 h 9144000"/>
+              <a:gd name="connsiteX10" fmla="*/ 661242 w 6858001"/>
+              <a:gd name="connsiteY10" fmla="*/ 2739185 h 9144000"/>
+              <a:gd name="connsiteX11" fmla="*/ 763578 w 6858001"/>
+              <a:gd name="connsiteY11" fmla="*/ 2636849 h 9144000"/>
+              <a:gd name="connsiteX12" fmla="*/ 661242 w 6858001"/>
+              <a:gd name="connsiteY12" fmla="*/ 2534513 h 9144000"/>
+              <a:gd name="connsiteX13" fmla="*/ 661242 w 6858001"/>
+              <a:gd name="connsiteY13" fmla="*/ 655549 h 9144000"/>
+              <a:gd name="connsiteX14" fmla="*/ 558906 w 6858001"/>
+              <a:gd name="connsiteY14" fmla="*/ 757885 h 9144000"/>
+              <a:gd name="connsiteX15" fmla="*/ 661242 w 6858001"/>
+              <a:gd name="connsiteY15" fmla="*/ 860221 h 9144000"/>
+              <a:gd name="connsiteX16" fmla="*/ 763578 w 6858001"/>
+              <a:gd name="connsiteY16" fmla="*/ 757885 h 9144000"/>
+              <a:gd name="connsiteX17" fmla="*/ 661242 w 6858001"/>
+              <a:gd name="connsiteY17" fmla="*/ 655549 h 9144000"/>
+              <a:gd name="connsiteX18" fmla="*/ 547268 w 6858001"/>
+              <a:gd name="connsiteY18" fmla="*/ 452468 h 9144000"/>
+              <a:gd name="connsiteX19" fmla="*/ 547268 w 6858001"/>
+              <a:gd name="connsiteY19" fmla="*/ 506469 h 9144000"/>
+              <a:gd name="connsiteX20" fmla="*/ 6303463 w 6858001"/>
+              <a:gd name="connsiteY20" fmla="*/ 506469 h 9144000"/>
+              <a:gd name="connsiteX21" fmla="*/ 6303463 w 6858001"/>
+              <a:gd name="connsiteY21" fmla="*/ 452468 h 9144000"/>
+              <a:gd name="connsiteX22" fmla="*/ 0 w 6858001"/>
+              <a:gd name="connsiteY22" fmla="*/ 0 h 9144000"/>
+              <a:gd name="connsiteX23" fmla="*/ 6858001 w 6858001"/>
+              <a:gd name="connsiteY23" fmla="*/ 0 h 9144000"/>
+              <a:gd name="connsiteX24" fmla="*/ 6858001 w 6858001"/>
+              <a:gd name="connsiteY24" fmla="*/ 9144000 h 9144000"/>
+              <a:gd name="connsiteX25" fmla="*/ 0 w 6858001"/>
+              <a:gd name="connsiteY25" fmla="*/ 9144000 h 9144000"/>
+            </a:gdLst>
             <a:ahLst/>
             <a:cxnLst>
               <a:cxn ang="0">
-                <a:pos x="wd2" y="hd2"/>
+                <a:pos x="connsiteX0" y="connsiteY0"/>
               </a:cxn>
-              <a:cxn ang="5400000">
-                <a:pos x="wd2" y="hd2"/>
+              <a:cxn ang="0">
+                <a:pos x="connsiteX1" y="connsiteY1"/>
               </a:cxn>
-              <a:cxn ang="10800000">
-                <a:pos x="wd2" y="hd2"/>
+              <a:cxn ang="0">
+                <a:pos x="connsiteX2" y="connsiteY2"/>
               </a:cxn>
-              <a:cxn ang="16200000">
-                <a:pos x="wd2" y="hd2"/>
+              <a:cxn ang="0">
+                <a:pos x="connsiteX3" y="connsiteY3"/>
+              </a:cxn>
+              <a:cxn ang="0">
+                <a:pos x="connsiteX4" y="connsiteY4"/>
+              </a:cxn>
+              <a:cxn ang="0">
+                <a:pos x="connsiteX5" y="connsiteY5"/>
+              </a:cxn>
+              <a:cxn ang="0">
+                <a:pos x="connsiteX6" y="connsiteY6"/>
+              </a:cxn>
+              <a:cxn ang="0">
+                <a:pos x="connsiteX7" y="connsiteY7"/>
+              </a:cxn>
+              <a:cxn ang="0">
+                <a:pos x="connsiteX8" y="connsiteY8"/>
+              </a:cxn>
+              <a:cxn ang="0">
+                <a:pos x="connsiteX9" y="connsiteY9"/>
+              </a:cxn>
+              <a:cxn ang="0">
+                <a:pos x="connsiteX10" y="connsiteY10"/>
+              </a:cxn>
+              <a:cxn ang="0">
+                <a:pos x="connsiteX11" y="connsiteY11"/>
+              </a:cxn>
+              <a:cxn ang="0">
+                <a:pos x="connsiteX12" y="connsiteY12"/>
+              </a:cxn>
+              <a:cxn ang="0">
+                <a:pos x="connsiteX13" y="connsiteY13"/>
+              </a:cxn>
+              <a:cxn ang="0">
+                <a:pos x="connsiteX14" y="connsiteY14"/>
+              </a:cxn>
+              <a:cxn ang="0">
+                <a:pos x="connsiteX15" y="connsiteY15"/>
+              </a:cxn>
+              <a:cxn ang="0">
+                <a:pos x="connsiteX16" y="connsiteY16"/>
+              </a:cxn>
+              <a:cxn ang="0">
+                <a:pos x="connsiteX17" y="connsiteY17"/>
+              </a:cxn>
+              <a:cxn ang="0">
+                <a:pos x="connsiteX18" y="connsiteY18"/>
+              </a:cxn>
+              <a:cxn ang="0">
+                <a:pos x="connsiteX19" y="connsiteY19"/>
+              </a:cxn>
+              <a:cxn ang="0">
+                <a:pos x="connsiteX20" y="connsiteY20"/>
+              </a:cxn>
+              <a:cxn ang="0">
+                <a:pos x="connsiteX21" y="connsiteY21"/>
+              </a:cxn>
+              <a:cxn ang="0">
+                <a:pos x="connsiteX22" y="connsiteY22"/>
+              </a:cxn>
+              <a:cxn ang="0">
+                <a:pos x="connsiteX23" y="connsiteY23"/>
+              </a:cxn>
+              <a:cxn ang="0">
+                <a:pos x="connsiteX24" y="connsiteY24"/>
+              </a:cxn>
+              <a:cxn ang="0">
+                <a:pos x="connsiteX25" y="connsiteY25"/>
               </a:cxn>
             </a:cxnLst>
-            <a:rect l="0" t="0" r="r" b="b"/>
+            <a:rect l="l" t="t" r="r" b="b"/>
             <a:pathLst>
-              <a:path w="21600" h="21600" fill="norm" stroke="1" extrusionOk="0">
+              <a:path w="6858001" h="9144000">
                 <a:moveTo>
-                  <a:pt x="21600" y="21600"/>
+                  <a:pt x="3727576" y="8661917"/>
                 </a:moveTo>
                 <a:lnTo>
-                  <a:pt x="0" y="21600"/>
+                  <a:pt x="3727576" y="8715918"/>
                 </a:lnTo>
                 <a:lnTo>
-                  <a:pt x="0" y="0"/>
+                  <a:pt x="6319577" y="8715918"/>
                 </a:lnTo>
                 <a:lnTo>
-                  <a:pt x="21600" y="0"/>
+                  <a:pt x="6319577" y="8661917"/>
                 </a:lnTo>
                 <a:close/>
                 <a:moveTo>
-                  <a:pt x="1766" y="20461"/>
+                  <a:pt x="547269" y="8661917"/>
                 </a:moveTo>
                 <a:lnTo>
-                  <a:pt x="1766" y="20589"/>
+                  <a:pt x="547269" y="8715918"/>
                 </a:lnTo>
                 <a:lnTo>
-                  <a:pt x="9912" y="20589"/>
+                  <a:pt x="3139271" y="8715918"/>
                 </a:lnTo>
                 <a:lnTo>
-                  <a:pt x="9912" y="20461"/>
+                  <a:pt x="3139271" y="8661917"/>
                 </a:lnTo>
                 <a:close/>
                 <a:moveTo>
-                  <a:pt x="11761" y="20461"/>
+                  <a:pt x="661242" y="2534513"/>
+                </a:moveTo>
+                <a:cubicBezTo>
+                  <a:pt x="604723" y="2534513"/>
+                  <a:pt x="558906" y="2580330"/>
+                  <a:pt x="558906" y="2636849"/>
+                </a:cubicBezTo>
+                <a:cubicBezTo>
+                  <a:pt x="558906" y="2693368"/>
+                  <a:pt x="604723" y="2739185"/>
+                  <a:pt x="661242" y="2739185"/>
+                </a:cubicBezTo>
+                <a:cubicBezTo>
+                  <a:pt x="717761" y="2739185"/>
+                  <a:pt x="763578" y="2693368"/>
+                  <a:pt x="763578" y="2636849"/>
+                </a:cubicBezTo>
+                <a:cubicBezTo>
+                  <a:pt x="763578" y="2580330"/>
+                  <a:pt x="717761" y="2534513"/>
+                  <a:pt x="661242" y="2534513"/>
+                </a:cubicBezTo>
+                <a:close/>
+                <a:moveTo>
+                  <a:pt x="661242" y="655549"/>
+                </a:moveTo>
+                <a:cubicBezTo>
+                  <a:pt x="604723" y="655549"/>
+                  <a:pt x="558906" y="701366"/>
+                  <a:pt x="558906" y="757885"/>
+                </a:cubicBezTo>
+                <a:cubicBezTo>
+                  <a:pt x="558906" y="814404"/>
+                  <a:pt x="604723" y="860221"/>
+                  <a:pt x="661242" y="860221"/>
+                </a:cubicBezTo>
+                <a:cubicBezTo>
+                  <a:pt x="717761" y="860221"/>
+                  <a:pt x="763578" y="814404"/>
+                  <a:pt x="763578" y="757885"/>
+                </a:cubicBezTo>
+                <a:cubicBezTo>
+                  <a:pt x="763578" y="701366"/>
+                  <a:pt x="717761" y="655549"/>
+                  <a:pt x="661242" y="655549"/>
+                </a:cubicBezTo>
+                <a:close/>
+                <a:moveTo>
+                  <a:pt x="547268" y="452468"/>
                 </a:moveTo>
                 <a:lnTo>
-                  <a:pt x="11761" y="20589"/>
+                  <a:pt x="547268" y="506469"/>
                 </a:lnTo>
                 <a:lnTo>
-                  <a:pt x="19908" y="20589"/>
+                  <a:pt x="6303463" y="506469"/>
                 </a:lnTo>
                 <a:lnTo>
-                  <a:pt x="19908" y="20461"/>
+                  <a:pt x="6303463" y="452468"/>
                 </a:lnTo>
                 <a:close/>
                 <a:moveTo>
-                  <a:pt x="1897" y="6144"/>
-                </a:moveTo>
-                <a:cubicBezTo>
-                  <a:pt x="1771" y="6239"/>
-                  <a:pt x="1771" y="6392"/>
-                  <a:pt x="1897" y="6486"/>
-                </a:cubicBezTo>
-                <a:cubicBezTo>
-                  <a:pt x="2022" y="6581"/>
-                  <a:pt x="2226" y="6581"/>
-                  <a:pt x="2351" y="6486"/>
-                </a:cubicBezTo>
-                <a:cubicBezTo>
-                  <a:pt x="2477" y="6392"/>
-                  <a:pt x="2477" y="6239"/>
-                  <a:pt x="2351" y="6144"/>
-                </a:cubicBezTo>
-                <a:cubicBezTo>
-                  <a:pt x="2226" y="6050"/>
-                  <a:pt x="2022" y="6050"/>
-                  <a:pt x="1897" y="6144"/>
-                </a:cubicBezTo>
-                <a:close/>
-                <a:moveTo>
-                  <a:pt x="1897" y="1648"/>
-                </a:moveTo>
-                <a:cubicBezTo>
-                  <a:pt x="1771" y="1743"/>
-                  <a:pt x="1771" y="1896"/>
-                  <a:pt x="1897" y="1990"/>
-                </a:cubicBezTo>
-                <a:cubicBezTo>
-                  <a:pt x="2022" y="2084"/>
-                  <a:pt x="2226" y="2084"/>
-                  <a:pt x="2351" y="1990"/>
-                </a:cubicBezTo>
-                <a:cubicBezTo>
-                  <a:pt x="2477" y="1896"/>
-                  <a:pt x="2477" y="1743"/>
-                  <a:pt x="2351" y="1648"/>
-                </a:cubicBezTo>
-                <a:cubicBezTo>
-                  <a:pt x="2226" y="1554"/>
-                  <a:pt x="2022" y="1554"/>
-                  <a:pt x="1897" y="1648"/>
-                </a:cubicBezTo>
-                <a:close/>
-                <a:moveTo>
-                  <a:pt x="1766" y="1196"/>
+                  <a:pt x="0" y="0"/>
                 </a:moveTo>
                 <a:lnTo>
-                  <a:pt x="19857" y="1196"/>
+                  <a:pt x="6858001" y="0"/>
                 </a:lnTo>
                 <a:lnTo>
-                  <a:pt x="19857" y="1069"/>
+                  <a:pt x="6858001" y="9144000"/>
                 </a:lnTo>
                 <a:lnTo>
-                  <a:pt x="1766" y="1069"/>
+                  <a:pt x="0" y="9144000"/>
                 </a:lnTo>
                 <a:close/>
               </a:path>
@@ -7755,7 +10401,9 @@
           </a:ln>
         </p:spPr>
         <p:txBody>
-          <a:bodyPr lIns="45719" rIns="45719" anchor="ctr"/>
+          <a:bodyPr wrap="square" lIns="45719" rIns="45719" anchor="ctr">
+            <a:noAutofit/>
+          </a:bodyPr>
           <a:lstStyle/>
           <a:p>
             <a:pPr algn="ctr">
@@ -7765,12 +10413,19 @@
                 </a:solidFill>
               </a:defRPr>
             </a:pPr>
+            <a:endParaRPr/>
           </a:p>
         </p:txBody>
       </p:sp>
       <p:sp>
         <p:nvSpPr>
-          <p:cNvPr id="210" name="テキスト ボックス 16"/>
+          <p:cNvPr id="147" name="テキスト ボックス 16">
+            <a:extLst>
+              <a:ext uri="{FF2B5EF4-FFF2-40B4-BE49-F238E27FC236}">
+                <a16:creationId xmlns:a16="http://schemas.microsoft.com/office/drawing/2014/main" id="{9C00153E-3BF6-ACC4-5308-E6AF5A49BF2F}"/>
+              </a:ext>
+            </a:extLst>
+          </p:cNvPr>
           <p:cNvSpPr txBox="1"/>
           <p:nvPr/>
         </p:nvSpPr>
@@ -7787,7 +10442,7 @@
           </a:ln>
           <a:extLst>
             <a:ext uri="{C572A759-6A51-4108-AA02-DFA0A04FC94B}">
-              <ma14:wrappingTextBoxFlag xmlns:ma14="http://schemas.microsoft.com/office/mac/drawingml/2011/main" val="1"/>
+              <ma14:wrappingTextBoxFlag xmlns="" xmlns:m="http://schemas.openxmlformats.org/officeDocument/2006/math" xmlns:a14="http://schemas.microsoft.com/office/drawing/2010/main" xmlns:ma14="http://schemas.microsoft.com/office/mac/drawingml/2011/main" val="1"/>
             </a:ext>
           </a:extLst>
         </p:spPr>
@@ -7799,7 +10454,6 @@
             <a:lvl1pPr algn="ctr"/>
           </a:lstStyle>
           <a:p>
-            <a:pPr/>
             <a:r>
               <a:t>2</a:t>
             </a:r>
@@ -7808,7 +10462,13 @@
       </p:sp>
       <p:sp>
         <p:nvSpPr>
-          <p:cNvPr id="211" name="テキスト ボックス 2"/>
+          <p:cNvPr id="150" name="テキスト ボックス 2">
+            <a:extLst>
+              <a:ext uri="{FF2B5EF4-FFF2-40B4-BE49-F238E27FC236}">
+                <a16:creationId xmlns:a16="http://schemas.microsoft.com/office/drawing/2014/main" id="{A354347C-BCC8-1E90-02B4-070AE102021D}"/>
+              </a:ext>
+            </a:extLst>
+          </p:cNvPr>
           <p:cNvSpPr txBox="1"/>
           <p:nvPr/>
         </p:nvSpPr>
@@ -7825,7 +10485,7 @@
           </a:ln>
           <a:extLst>
             <a:ext uri="{C572A759-6A51-4108-AA02-DFA0A04FC94B}">
-              <ma14:wrappingTextBoxFlag xmlns:ma14="http://schemas.microsoft.com/office/mac/drawingml/2011/main" val="1"/>
+              <ma14:wrappingTextBoxFlag xmlns="" xmlns:m="http://schemas.openxmlformats.org/officeDocument/2006/math" xmlns:a14="http://schemas.microsoft.com/office/drawing/2010/main" xmlns:ma14="http://schemas.microsoft.com/office/mac/drawingml/2011/main" val="1"/>
             </a:ext>
           </a:extLst>
         </p:spPr>
@@ -7835,7 +10495,7 @@
           </a:bodyPr>
           <a:lstStyle>
             <a:lvl1pPr>
-              <a:defRPr b="1" sz="2000">
+              <a:defRPr sz="2000" b="1">
                 <a:latin typeface="JostRoman-SemiBold"/>
                 <a:ea typeface="JostRoman-SemiBold"/>
                 <a:cs typeface="JostRoman-SemiBold"/>
@@ -7844,8 +10504,8 @@
             </a:lvl1pPr>
           </a:lstStyle>
           <a:p>
-            <a:pPr/>
-            <a:r>
+            <a:r>
+              <a:rPr dirty="0"/>
               <a:t>3. FlexChroma HUB</a:t>
             </a:r>
           </a:p>
@@ -7853,14 +10513,20 @@
       </p:sp>
       <p:sp>
         <p:nvSpPr>
-          <p:cNvPr id="212" name="テキスト ボックス 10"/>
+          <p:cNvPr id="151" name="テキスト ボックス 10">
+            <a:extLst>
+              <a:ext uri="{FF2B5EF4-FFF2-40B4-BE49-F238E27FC236}">
+                <a16:creationId xmlns:a16="http://schemas.microsoft.com/office/drawing/2014/main" id="{97AAD561-B768-F02F-DFBC-0C864E489FA7}"/>
+              </a:ext>
+            </a:extLst>
+          </p:cNvPr>
           <p:cNvSpPr txBox="1"/>
           <p:nvPr/>
         </p:nvSpPr>
         <p:spPr>
           <a:xfrm>
             <a:off x="714228" y="886688"/>
-            <a:ext cx="5558051" cy="662941"/>
+            <a:ext cx="5558051" cy="553998"/>
           </a:xfrm>
           <a:prstGeom prst="rect">
             <a:avLst/>
@@ -7870,7 +10536,7 @@
           </a:ln>
           <a:extLst>
             <a:ext uri="{C572A759-6A51-4108-AA02-DFA0A04FC94B}">
-              <ma14:wrappingTextBoxFlag xmlns:ma14="http://schemas.microsoft.com/office/mac/drawingml/2011/main" val="1"/>
+              <ma14:wrappingTextBoxFlag xmlns="" xmlns:m="http://schemas.openxmlformats.org/officeDocument/2006/math" xmlns:a14="http://schemas.microsoft.com/office/drawing/2010/main" xmlns:ma14="http://schemas.microsoft.com/office/mac/drawingml/2011/main" val="1"/>
             </a:ext>
           </a:extLst>
         </p:spPr>
@@ -7884,23 +10550,265 @@
               <a:defRPr sz="1000"/>
             </a:pPr>
             <a:r>
-              <a:t>Der FlexChroma-Hub ist der zentrale Einstiegspunkt auf MakerWorld und bietet Zugang zu allen Serien und externen Portalen. </a:t>
-            </a:r>
-            <a:r>
-              <a:rPr b="1">
+              <a:rPr dirty="0"/>
+              <a:t>Der </a:t>
+            </a:r>
+            <a:r>
+              <a:rPr dirty="0">
+                <a:latin typeface="Jost Medium" pitchFamily="2" charset="0"/>
+                <a:ea typeface="Jost Medium" pitchFamily="2" charset="0"/>
+              </a:rPr>
+              <a:t>FlexChroma</a:t>
+            </a:r>
+            <a:r>
+              <a:rPr dirty="0"/>
+              <a:t>-Hub </a:t>
+            </a:r>
+            <a:r>
+              <a:rPr dirty="0" err="1"/>
+              <a:t>ist</a:t>
+            </a:r>
+            <a:r>
+              <a:rPr dirty="0"/>
+              <a:t> der </a:t>
+            </a:r>
+            <a:r>
+              <a:rPr dirty="0" err="1"/>
+              <a:t>zentrale</a:t>
+            </a:r>
+            <a:r>
+              <a:rPr dirty="0"/>
+              <a:t> </a:t>
+            </a:r>
+            <a:r>
+              <a:rPr dirty="0" err="1"/>
+              <a:t>Einstiegspunkt</a:t>
+            </a:r>
+            <a:r>
+              <a:rPr dirty="0"/>
+              <a:t> auf MakerWorld und </a:t>
+            </a:r>
+            <a:r>
+              <a:rPr dirty="0" err="1"/>
+              <a:t>bietet</a:t>
+            </a:r>
+            <a:r>
+              <a:rPr dirty="0"/>
+              <a:t> </a:t>
+            </a:r>
+            <a:r>
+              <a:rPr dirty="0" err="1"/>
+              <a:t>Zugang</a:t>
+            </a:r>
+            <a:r>
+              <a:rPr dirty="0"/>
+              <a:t> </a:t>
+            </a:r>
+            <a:r>
+              <a:rPr dirty="0" err="1"/>
+              <a:t>zu</a:t>
+            </a:r>
+            <a:r>
+              <a:rPr dirty="0"/>
+              <a:t> </a:t>
+            </a:r>
+            <a:r>
+              <a:rPr dirty="0" err="1"/>
+              <a:t>allen</a:t>
+            </a:r>
+            <a:r>
+              <a:rPr dirty="0"/>
+              <a:t> </a:t>
+            </a:r>
+            <a:r>
+              <a:rPr dirty="0" err="1"/>
+              <a:t>Serien</a:t>
+            </a:r>
+            <a:r>
+              <a:rPr dirty="0"/>
+              <a:t> und </a:t>
+            </a:r>
+            <a:r>
+              <a:rPr dirty="0" err="1"/>
+              <a:t>externen</a:t>
+            </a:r>
+            <a:r>
+              <a:rPr dirty="0"/>
+              <a:t> </a:t>
+            </a:r>
+            <a:r>
+              <a:rPr dirty="0" err="1"/>
+              <a:t>Portalen</a:t>
+            </a:r>
+            <a:r>
+              <a:rPr dirty="0"/>
+              <a:t>. </a:t>
+            </a:r>
+            <a:r>
+              <a:rPr b="1" dirty="0">
                 <a:latin typeface="JostRoman-Bold"/>
                 <a:ea typeface="JostRoman-Bold"/>
                 <a:cs typeface="JostRoman-Bold"/>
                 <a:sym typeface="JostRoman-Bold"/>
               </a:rPr>
-              <a:t>Wenn Sie sich unsicher sind, wo Sie beginnen sollen, öffnen Sie am besten zuerst dieses Modell.</a:t>
+              <a:t>Wenn Sie </a:t>
+            </a:r>
+            <a:r>
+              <a:rPr b="1" dirty="0" err="1">
+                <a:latin typeface="JostRoman-Bold"/>
+                <a:ea typeface="JostRoman-Bold"/>
+                <a:cs typeface="JostRoman-Bold"/>
+                <a:sym typeface="JostRoman-Bold"/>
+              </a:rPr>
+              <a:t>sich</a:t>
+            </a:r>
+            <a:r>
+              <a:rPr b="1" dirty="0">
+                <a:latin typeface="JostRoman-Bold"/>
+                <a:ea typeface="JostRoman-Bold"/>
+                <a:cs typeface="JostRoman-Bold"/>
+                <a:sym typeface="JostRoman-Bold"/>
+              </a:rPr>
+              <a:t> </a:t>
+            </a:r>
+            <a:r>
+              <a:rPr b="1" dirty="0" err="1">
+                <a:latin typeface="JostRoman-Bold"/>
+                <a:ea typeface="JostRoman-Bold"/>
+                <a:cs typeface="JostRoman-Bold"/>
+                <a:sym typeface="JostRoman-Bold"/>
+              </a:rPr>
+              <a:t>unsicher</a:t>
+            </a:r>
+            <a:r>
+              <a:rPr b="1" dirty="0">
+                <a:latin typeface="JostRoman-Bold"/>
+                <a:ea typeface="JostRoman-Bold"/>
+                <a:cs typeface="JostRoman-Bold"/>
+                <a:sym typeface="JostRoman-Bold"/>
+              </a:rPr>
+              <a:t> </a:t>
+            </a:r>
+            <a:r>
+              <a:rPr b="1" dirty="0" err="1">
+                <a:latin typeface="JostRoman-Bold"/>
+                <a:ea typeface="JostRoman-Bold"/>
+                <a:cs typeface="JostRoman-Bold"/>
+                <a:sym typeface="JostRoman-Bold"/>
+              </a:rPr>
+              <a:t>sind</a:t>
+            </a:r>
+            <a:r>
+              <a:rPr b="1" dirty="0">
+                <a:latin typeface="JostRoman-Bold"/>
+                <a:ea typeface="JostRoman-Bold"/>
+                <a:cs typeface="JostRoman-Bold"/>
+                <a:sym typeface="JostRoman-Bold"/>
+              </a:rPr>
+              <a:t>, wo Sie </a:t>
+            </a:r>
+            <a:r>
+              <a:rPr b="1" dirty="0" err="1">
+                <a:latin typeface="JostRoman-Bold"/>
+                <a:ea typeface="JostRoman-Bold"/>
+                <a:cs typeface="JostRoman-Bold"/>
+                <a:sym typeface="JostRoman-Bold"/>
+              </a:rPr>
+              <a:t>beginnen</a:t>
+            </a:r>
+            <a:r>
+              <a:rPr b="1" dirty="0">
+                <a:latin typeface="JostRoman-Bold"/>
+                <a:ea typeface="JostRoman-Bold"/>
+                <a:cs typeface="JostRoman-Bold"/>
+                <a:sym typeface="JostRoman-Bold"/>
+              </a:rPr>
+              <a:t> </a:t>
+            </a:r>
+            <a:r>
+              <a:rPr b="1" dirty="0" err="1">
+                <a:latin typeface="JostRoman-Bold"/>
+                <a:ea typeface="JostRoman-Bold"/>
+                <a:cs typeface="JostRoman-Bold"/>
+                <a:sym typeface="JostRoman-Bold"/>
+              </a:rPr>
+              <a:t>sollen</a:t>
+            </a:r>
+            <a:r>
+              <a:rPr b="1" dirty="0">
+                <a:latin typeface="JostRoman-Bold"/>
+                <a:ea typeface="JostRoman-Bold"/>
+                <a:cs typeface="JostRoman-Bold"/>
+                <a:sym typeface="JostRoman-Bold"/>
+              </a:rPr>
+              <a:t>, </a:t>
+            </a:r>
+            <a:r>
+              <a:rPr b="1" dirty="0" err="1">
+                <a:latin typeface="JostRoman-Bold"/>
+                <a:ea typeface="JostRoman-Bold"/>
+                <a:cs typeface="JostRoman-Bold"/>
+                <a:sym typeface="JostRoman-Bold"/>
+              </a:rPr>
+              <a:t>öffnen</a:t>
+            </a:r>
+            <a:r>
+              <a:rPr b="1" dirty="0">
+                <a:latin typeface="JostRoman-Bold"/>
+                <a:ea typeface="JostRoman-Bold"/>
+                <a:cs typeface="JostRoman-Bold"/>
+                <a:sym typeface="JostRoman-Bold"/>
+              </a:rPr>
+              <a:t> Sie am </a:t>
+            </a:r>
+            <a:r>
+              <a:rPr b="1" dirty="0" err="1">
+                <a:latin typeface="JostRoman-Bold"/>
+                <a:ea typeface="JostRoman-Bold"/>
+                <a:cs typeface="JostRoman-Bold"/>
+                <a:sym typeface="JostRoman-Bold"/>
+              </a:rPr>
+              <a:t>besten</a:t>
+            </a:r>
+            <a:r>
+              <a:rPr b="1" dirty="0">
+                <a:latin typeface="JostRoman-Bold"/>
+                <a:ea typeface="JostRoman-Bold"/>
+                <a:cs typeface="JostRoman-Bold"/>
+                <a:sym typeface="JostRoman-Bold"/>
+              </a:rPr>
+              <a:t> </a:t>
+            </a:r>
+            <a:r>
+              <a:rPr b="1" dirty="0" err="1">
+                <a:latin typeface="JostRoman-Bold"/>
+                <a:ea typeface="JostRoman-Bold"/>
+                <a:cs typeface="JostRoman-Bold"/>
+                <a:sym typeface="JostRoman-Bold"/>
+              </a:rPr>
+              <a:t>zuerst</a:t>
+            </a:r>
+            <a:r>
+              <a:rPr b="1" dirty="0">
+                <a:latin typeface="JostRoman-Bold"/>
+                <a:ea typeface="JostRoman-Bold"/>
+                <a:cs typeface="JostRoman-Bold"/>
+                <a:sym typeface="JostRoman-Bold"/>
+              </a:rPr>
+              <a:t> dieses Modell.</a:t>
             </a:r>
           </a:p>
         </p:txBody>
       </p:sp>
       <p:sp>
         <p:nvSpPr>
-          <p:cNvPr id="213" name="テキスト ボックス 11"/>
+          <p:cNvPr id="152" name="テキスト ボックス 11">
+            <a:extLst>
+              <a:ext uri="{FF2B5EF4-FFF2-40B4-BE49-F238E27FC236}">
+                <a16:creationId xmlns:a16="http://schemas.microsoft.com/office/drawing/2014/main" id="{BB2A2762-36EA-D126-7AEA-66FD3A54D01F}"/>
+              </a:ext>
+            </a:extLst>
+          </p:cNvPr>
           <p:cNvSpPr txBox="1"/>
           <p:nvPr/>
         </p:nvSpPr>
@@ -7917,7 +10825,7 @@
           </a:ln>
           <a:extLst>
             <a:ext uri="{C572A759-6A51-4108-AA02-DFA0A04FC94B}">
-              <ma14:wrappingTextBoxFlag xmlns:ma14="http://schemas.microsoft.com/office/mac/drawingml/2011/main" val="1"/>
+              <ma14:wrappingTextBoxFlag xmlns="" xmlns:m="http://schemas.openxmlformats.org/officeDocument/2006/math" xmlns:a14="http://schemas.microsoft.com/office/drawing/2010/main" xmlns:ma14="http://schemas.microsoft.com/office/mac/drawingml/2011/main" val="1"/>
             </a:ext>
           </a:extLst>
         </p:spPr>
@@ -7927,7 +10835,7 @@
           </a:bodyPr>
           <a:lstStyle>
             <a:lvl1pPr>
-              <a:defRPr b="1" sz="2000">
+              <a:defRPr sz="2000" b="1">
                 <a:latin typeface="JostRoman-SemiBold"/>
                 <a:ea typeface="JostRoman-SemiBold"/>
                 <a:cs typeface="JostRoman-SemiBold"/>
@@ -7936,7 +10844,6 @@
             </a:lvl1pPr>
           </a:lstStyle>
           <a:p>
-            <a:pPr/>
             <a:r>
               <a:t>4. Mischfilament</a:t>
             </a:r>
@@ -7945,7 +10852,13 @@
       </p:sp>
       <p:sp>
         <p:nvSpPr>
-          <p:cNvPr id="214" name="テキスト ボックス 22"/>
+          <p:cNvPr id="153" name="テキスト ボックス 22">
+            <a:extLst>
+              <a:ext uri="{FF2B5EF4-FFF2-40B4-BE49-F238E27FC236}">
+                <a16:creationId xmlns:a16="http://schemas.microsoft.com/office/drawing/2014/main" id="{3B69E9F9-BDD8-5DFB-ECBD-91CDAB1FC0C8}"/>
+              </a:ext>
+            </a:extLst>
+          </p:cNvPr>
           <p:cNvSpPr txBox="1"/>
           <p:nvPr/>
         </p:nvSpPr>
@@ -7962,7 +10875,7 @@
           </a:ln>
           <a:extLst>
             <a:ext uri="{C572A759-6A51-4108-AA02-DFA0A04FC94B}">
-              <ma14:wrappingTextBoxFlag xmlns:ma14="http://schemas.microsoft.com/office/mac/drawingml/2011/main" val="1"/>
+              <ma14:wrappingTextBoxFlag xmlns="" xmlns:m="http://schemas.openxmlformats.org/officeDocument/2006/math" xmlns:a14="http://schemas.microsoft.com/office/drawing/2010/main" xmlns:ma14="http://schemas.microsoft.com/office/mac/drawingml/2011/main" val="1"/>
             </a:ext>
           </a:extLst>
         </p:spPr>
@@ -7981,7 +10894,7 @@
           </a:p>
           <a:p>
             <a:pPr>
-              <a:defRPr b="1" sz="1000">
+              <a:defRPr sz="1000" b="1">
                 <a:latin typeface="JostRoman-Bold"/>
                 <a:ea typeface="JostRoman-Bold"/>
                 <a:cs typeface="JostRoman-Bold"/>
@@ -7994,13 +10907,14 @@
           </a:p>
           <a:p>
             <a:pPr>
-              <a:defRPr b="1" sz="500">
+              <a:defRPr sz="500" b="1">
                 <a:latin typeface="JostRoman-Bold"/>
                 <a:ea typeface="JostRoman-Bold"/>
                 <a:cs typeface="JostRoman-Bold"/>
                 <a:sym typeface="JostRoman-Bold"/>
               </a:defRPr>
             </a:pPr>
+            <a:endParaRPr/>
           </a:p>
           <a:p>
             <a:pPr>
@@ -8014,13 +10928,19 @@
       </p:sp>
       <p:sp>
         <p:nvSpPr>
-          <p:cNvPr id="215" name="テキスト ボックス 23"/>
+          <p:cNvPr id="154" name="テキスト ボックス 23">
+            <a:extLst>
+              <a:ext uri="{FF2B5EF4-FFF2-40B4-BE49-F238E27FC236}">
+                <a16:creationId xmlns:a16="http://schemas.microsoft.com/office/drawing/2014/main" id="{172C0EF1-2B71-0731-E3AF-2BB40F7C9795}"/>
+              </a:ext>
+            </a:extLst>
+          </p:cNvPr>
           <p:cNvSpPr txBox="1"/>
           <p:nvPr/>
         </p:nvSpPr>
         <p:spPr>
           <a:xfrm>
-            <a:off x="717862" y="5392072"/>
+            <a:off x="717862" y="5373022"/>
             <a:ext cx="5550783" cy="281941"/>
           </a:xfrm>
           <a:prstGeom prst="rect">
@@ -8031,7 +10951,7 @@
           </a:ln>
           <a:extLst>
             <a:ext uri="{C572A759-6A51-4108-AA02-DFA0A04FC94B}">
-              <ma14:wrappingTextBoxFlag xmlns:ma14="http://schemas.microsoft.com/office/mac/drawingml/2011/main" val="1"/>
+              <ma14:wrappingTextBoxFlag xmlns="" xmlns:m="http://schemas.openxmlformats.org/officeDocument/2006/math" xmlns:a14="http://schemas.microsoft.com/office/drawing/2010/main" xmlns:ma14="http://schemas.microsoft.com/office/mac/drawingml/2011/main" val="1"/>
             </a:ext>
           </a:extLst>
         </p:spPr>
@@ -8045,7 +10965,6 @@
             </a:lvl1pPr>
           </a:lstStyle>
           <a:p>
-            <a:pPr/>
             <a:r>
               <a:t>Nachfolgend finden Sie die Modellkonfiguration für das Mischfilament.</a:t>
             </a:r>
@@ -8054,23 +10973,27 @@
       </p:sp>
       <p:pic>
         <p:nvPicPr>
-          <p:cNvPr id="216" name="図 21" descr="図 21"/>
+          <p:cNvPr id="155" name="図 21" descr="図 21">
+            <a:extLst>
+              <a:ext uri="{FF2B5EF4-FFF2-40B4-BE49-F238E27FC236}">
+                <a16:creationId xmlns:a16="http://schemas.microsoft.com/office/drawing/2014/main" id="{648A668E-8B8F-EAEE-9D4E-D6FDF7EB215F}"/>
+              </a:ext>
+            </a:extLst>
+          </p:cNvPr>
           <p:cNvPicPr>
             <a:picLocks noChangeAspect="1"/>
           </p:cNvPicPr>
           <p:nvPr/>
         </p:nvPicPr>
         <p:blipFill>
-          <a:blip r:embed="rId2">
-            <a:extLst/>
-          </a:blip>
+          <a:blip r:embed="rId2"/>
           <a:stretch>
             <a:fillRect/>
           </a:stretch>
         </p:blipFill>
         <p:spPr>
           <a:xfrm>
-            <a:off x="1224630" y="5678858"/>
+            <a:off x="1224630" y="5640758"/>
             <a:ext cx="4408740" cy="2901785"/>
           </a:xfrm>
           <a:prstGeom prst="rect">
@@ -8083,23 +11006,27 @@
       </p:pic>
       <p:pic>
         <p:nvPicPr>
-          <p:cNvPr id="217" name="ペーストされたムービー.png" descr="ペーストされたムービー.png"/>
+          <p:cNvPr id="156" name="ペーストされたムービー.png" descr="ペーストされたムービー.png">
+            <a:extLst>
+              <a:ext uri="{FF2B5EF4-FFF2-40B4-BE49-F238E27FC236}">
+                <a16:creationId xmlns:a16="http://schemas.microsoft.com/office/drawing/2014/main" id="{0B6AF062-4E92-582C-A0E2-26B5152489CE}"/>
+              </a:ext>
+            </a:extLst>
+          </p:cNvPr>
           <p:cNvPicPr>
             <a:picLocks noChangeAspect="1"/>
           </p:cNvPicPr>
           <p:nvPr/>
         </p:nvPicPr>
         <p:blipFill>
-          <a:blip r:embed="rId3">
-            <a:extLst/>
-          </a:blip>
+          <a:blip r:embed="rId3"/>
           <a:stretch>
             <a:fillRect/>
           </a:stretch>
         </p:blipFill>
         <p:spPr>
           <a:xfrm>
-            <a:off x="1204664" y="1565210"/>
+            <a:off x="1204664" y="1492058"/>
             <a:ext cx="4098506" cy="913899"/>
           </a:xfrm>
           <a:prstGeom prst="rect">
@@ -8112,48 +11039,77 @@
       </p:pic>
       <p:pic>
         <p:nvPicPr>
-          <p:cNvPr id="218" name="ペーストされたムービー.png" descr="ペーストされたムービー.png"/>
+          <p:cNvPr id="5" name="図 4">
+            <a:extLst>
+              <a:ext uri="{FF2B5EF4-FFF2-40B4-BE49-F238E27FC236}">
+                <a16:creationId xmlns:a16="http://schemas.microsoft.com/office/drawing/2014/main" id="{CA8D5765-0413-AB84-AC5C-DC51DC685415}"/>
+              </a:ext>
+            </a:extLst>
+          </p:cNvPr>
           <p:cNvPicPr>
-            <a:picLocks noChangeAspect="1"/>
+            <a:picLocks noChangeAspect="1" noChangeArrowheads="1"/>
           </p:cNvPicPr>
           <p:nvPr/>
         </p:nvPicPr>
         <p:blipFill>
           <a:blip r:embed="rId4">
-            <a:extLst/>
+            <a:extLst>
+              <a:ext uri="{28A0092B-C50C-407E-A947-70E740481C1C}">
+                <a14:useLocalDpi xmlns:a14="http://schemas.microsoft.com/office/drawing/2010/main" val="0"/>
+              </a:ext>
+            </a:extLst>
           </a:blip>
+          <a:srcRect/>
           <a:stretch>
             <a:fillRect/>
           </a:stretch>
         </p:blipFill>
-        <p:spPr>
+        <p:spPr bwMode="auto">
           <a:xfrm>
-            <a:off x="404000" y="4571288"/>
-            <a:ext cx="6069986" cy="819394"/>
+            <a:off x="540000" y="4252052"/>
+            <a:ext cx="5812703" cy="1097100"/>
           </a:xfrm>
           <a:prstGeom prst="rect">
             <a:avLst/>
           </a:prstGeom>
-          <a:ln w="12700">
-            <a:miter lim="400000"/>
-          </a:ln>
+          <a:noFill/>
+          <a:extLst>
+            <a:ext uri="{909E8E84-426E-40DD-AFC4-6F175D3DCCD1}">
+              <a14:hiddenFill xmlns:a14="http://schemas.microsoft.com/office/drawing/2010/main">
+                <a:solidFill>
+                  <a:srgbClr val="FFFFFF"/>
+                </a:solidFill>
+              </a14:hiddenFill>
+            </a:ext>
+          </a:extLst>
         </p:spPr>
       </p:pic>
     </p:spTree>
+    <p:extLst>
+      <p:ext uri="{BB962C8B-B14F-4D97-AF65-F5344CB8AC3E}">
+        <p14:creationId xmlns:p14="http://schemas.microsoft.com/office/powerpoint/2010/main" val="3182504864"/>
+      </p:ext>
+    </p:extLst>
   </p:cSld>
   <p:clrMapOvr>
     <a:masterClrMapping/>
   </p:clrMapOvr>
-  <p:transition xmlns:p14="http://schemas.microsoft.com/office/powerpoint/2010/main" spd="med" advClick="1"/>
+  <p:transition spd="med"/>
 </p:sld>
 </file>
 
 <file path=ppt/slides/slide8.xml><?xml version="1.0" encoding="utf-8"?>
-<p:sld xmlns:a="http://schemas.openxmlformats.org/drawingml/2006/main" xmlns:r="http://schemas.openxmlformats.org/officeDocument/2006/relationships" xmlns:p="http://schemas.openxmlformats.org/presentationml/2006/main" xmlns:m="http://schemas.openxmlformats.org/officeDocument/2006/math" xmlns:a14="http://schemas.microsoft.com/office/drawing/2010/main" showMasterSp="1" showMasterPhAnim="1">
+<p:sld xmlns:a="http://schemas.openxmlformats.org/drawingml/2006/main" xmlns:r="http://schemas.openxmlformats.org/officeDocument/2006/relationships" xmlns:p="http://schemas.openxmlformats.org/presentationml/2006/main">
   <p:cSld>
     <p:spTree>
       <p:nvGrpSpPr>
-        <p:cNvPr id="1" name=""/>
+        <p:cNvPr id="1" name="">
+          <a:extLst>
+            <a:ext uri="{FF2B5EF4-FFF2-40B4-BE49-F238E27FC236}">
+              <a16:creationId xmlns:a16="http://schemas.microsoft.com/office/drawing/2014/main" id="{69BBB94A-357A-8CC1-6092-5E4642B721AD}"/>
+            </a:ext>
+          </a:extLst>
+        </p:cNvPr>
         <p:cNvGrpSpPr/>
         <p:nvPr/>
       </p:nvGrpSpPr>
@@ -8167,7 +11123,13 @@
       </p:grpSpPr>
       <p:sp>
         <p:nvSpPr>
-          <p:cNvPr id="220" name="正方形/長方形 29"/>
+          <p:cNvPr id="159" name="正方形/長方形 29">
+            <a:extLst>
+              <a:ext uri="{FF2B5EF4-FFF2-40B4-BE49-F238E27FC236}">
+                <a16:creationId xmlns:a16="http://schemas.microsoft.com/office/drawing/2014/main" id="{9C2D9634-BAD8-E396-FADC-1CD25BD4BC1F}"/>
+              </a:ext>
+            </a:extLst>
+          </p:cNvPr>
           <p:cNvSpPr/>
           <p:nvPr/>
         </p:nvSpPr>
@@ -8208,12 +11170,254 @@
                 </a:solidFill>
               </a:defRPr>
             </a:pPr>
+            <a:endParaRPr/>
           </a:p>
         </p:txBody>
       </p:sp>
       <p:sp>
         <p:nvSpPr>
-          <p:cNvPr id="221" name="テキスト ボックス 16"/>
+          <p:cNvPr id="6" name="フリーフォーム: 図形 5">
+            <a:extLst>
+              <a:ext uri="{FF2B5EF4-FFF2-40B4-BE49-F238E27FC236}">
+                <a16:creationId xmlns:a16="http://schemas.microsoft.com/office/drawing/2014/main" id="{2D9A8B50-FD90-91BE-4FC0-A204DAAEEE2F}"/>
+              </a:ext>
+            </a:extLst>
+          </p:cNvPr>
+          <p:cNvSpPr/>
+          <p:nvPr/>
+        </p:nvSpPr>
+        <p:spPr>
+          <a:xfrm>
+            <a:off x="17134" y="0"/>
+            <a:ext cx="6858001" cy="9144000"/>
+          </a:xfrm>
+          <a:custGeom>
+            <a:avLst/>
+            <a:gdLst>
+              <a:gd name="connsiteX0" fmla="*/ 3717710 w 6858001"/>
+              <a:gd name="connsiteY0" fmla="*/ 8661917 h 9144000"/>
+              <a:gd name="connsiteX1" fmla="*/ 3717710 w 6858001"/>
+              <a:gd name="connsiteY1" fmla="*/ 8715918 h 9144000"/>
+              <a:gd name="connsiteX2" fmla="*/ 6309711 w 6858001"/>
+              <a:gd name="connsiteY2" fmla="*/ 8715918 h 9144000"/>
+              <a:gd name="connsiteX3" fmla="*/ 6309711 w 6858001"/>
+              <a:gd name="connsiteY3" fmla="*/ 8661917 h 9144000"/>
+              <a:gd name="connsiteX4" fmla="*/ 537403 w 6858001"/>
+              <a:gd name="connsiteY4" fmla="*/ 8661917 h 9144000"/>
+              <a:gd name="connsiteX5" fmla="*/ 537403 w 6858001"/>
+              <a:gd name="connsiteY5" fmla="*/ 8715918 h 9144000"/>
+              <a:gd name="connsiteX6" fmla="*/ 3129405 w 6858001"/>
+              <a:gd name="connsiteY6" fmla="*/ 8715918 h 9144000"/>
+              <a:gd name="connsiteX7" fmla="*/ 3129405 w 6858001"/>
+              <a:gd name="connsiteY7" fmla="*/ 8661917 h 9144000"/>
+              <a:gd name="connsiteX8" fmla="*/ 651376 w 6858001"/>
+              <a:gd name="connsiteY8" fmla="*/ 677901 h 9144000"/>
+              <a:gd name="connsiteX9" fmla="*/ 549040 w 6858001"/>
+              <a:gd name="connsiteY9" fmla="*/ 780237 h 9144000"/>
+              <a:gd name="connsiteX10" fmla="*/ 651376 w 6858001"/>
+              <a:gd name="connsiteY10" fmla="*/ 882573 h 9144000"/>
+              <a:gd name="connsiteX11" fmla="*/ 753712 w 6858001"/>
+              <a:gd name="connsiteY11" fmla="*/ 780237 h 9144000"/>
+              <a:gd name="connsiteX12" fmla="*/ 651376 w 6858001"/>
+              <a:gd name="connsiteY12" fmla="*/ 677901 h 9144000"/>
+              <a:gd name="connsiteX13" fmla="*/ 537402 w 6858001"/>
+              <a:gd name="connsiteY13" fmla="*/ 452468 h 9144000"/>
+              <a:gd name="connsiteX14" fmla="*/ 537402 w 6858001"/>
+              <a:gd name="connsiteY14" fmla="*/ 506469 h 9144000"/>
+              <a:gd name="connsiteX15" fmla="*/ 6293597 w 6858001"/>
+              <a:gd name="connsiteY15" fmla="*/ 506469 h 9144000"/>
+              <a:gd name="connsiteX16" fmla="*/ 6293597 w 6858001"/>
+              <a:gd name="connsiteY16" fmla="*/ 452468 h 9144000"/>
+              <a:gd name="connsiteX17" fmla="*/ 0 w 6858001"/>
+              <a:gd name="connsiteY17" fmla="*/ 0 h 9144000"/>
+              <a:gd name="connsiteX18" fmla="*/ 6858001 w 6858001"/>
+              <a:gd name="connsiteY18" fmla="*/ 0 h 9144000"/>
+              <a:gd name="connsiteX19" fmla="*/ 6858001 w 6858001"/>
+              <a:gd name="connsiteY19" fmla="*/ 9144000 h 9144000"/>
+              <a:gd name="connsiteX20" fmla="*/ 0 w 6858001"/>
+              <a:gd name="connsiteY20" fmla="*/ 9144000 h 9144000"/>
+            </a:gdLst>
+            <a:ahLst/>
+            <a:cxnLst>
+              <a:cxn ang="0">
+                <a:pos x="connsiteX0" y="connsiteY0"/>
+              </a:cxn>
+              <a:cxn ang="0">
+                <a:pos x="connsiteX1" y="connsiteY1"/>
+              </a:cxn>
+              <a:cxn ang="0">
+                <a:pos x="connsiteX2" y="connsiteY2"/>
+              </a:cxn>
+              <a:cxn ang="0">
+                <a:pos x="connsiteX3" y="connsiteY3"/>
+              </a:cxn>
+              <a:cxn ang="0">
+                <a:pos x="connsiteX4" y="connsiteY4"/>
+              </a:cxn>
+              <a:cxn ang="0">
+                <a:pos x="connsiteX5" y="connsiteY5"/>
+              </a:cxn>
+              <a:cxn ang="0">
+                <a:pos x="connsiteX6" y="connsiteY6"/>
+              </a:cxn>
+              <a:cxn ang="0">
+                <a:pos x="connsiteX7" y="connsiteY7"/>
+              </a:cxn>
+              <a:cxn ang="0">
+                <a:pos x="connsiteX8" y="connsiteY8"/>
+              </a:cxn>
+              <a:cxn ang="0">
+                <a:pos x="connsiteX9" y="connsiteY9"/>
+              </a:cxn>
+              <a:cxn ang="0">
+                <a:pos x="connsiteX10" y="connsiteY10"/>
+              </a:cxn>
+              <a:cxn ang="0">
+                <a:pos x="connsiteX11" y="connsiteY11"/>
+              </a:cxn>
+              <a:cxn ang="0">
+                <a:pos x="connsiteX12" y="connsiteY12"/>
+              </a:cxn>
+              <a:cxn ang="0">
+                <a:pos x="connsiteX13" y="connsiteY13"/>
+              </a:cxn>
+              <a:cxn ang="0">
+                <a:pos x="connsiteX14" y="connsiteY14"/>
+              </a:cxn>
+              <a:cxn ang="0">
+                <a:pos x="connsiteX15" y="connsiteY15"/>
+              </a:cxn>
+              <a:cxn ang="0">
+                <a:pos x="connsiteX16" y="connsiteY16"/>
+              </a:cxn>
+              <a:cxn ang="0">
+                <a:pos x="connsiteX17" y="connsiteY17"/>
+              </a:cxn>
+              <a:cxn ang="0">
+                <a:pos x="connsiteX18" y="connsiteY18"/>
+              </a:cxn>
+              <a:cxn ang="0">
+                <a:pos x="connsiteX19" y="connsiteY19"/>
+              </a:cxn>
+              <a:cxn ang="0">
+                <a:pos x="connsiteX20" y="connsiteY20"/>
+              </a:cxn>
+            </a:cxnLst>
+            <a:rect l="l" t="t" r="r" b="b"/>
+            <a:pathLst>
+              <a:path w="6858001" h="9144000">
+                <a:moveTo>
+                  <a:pt x="3717710" y="8661917"/>
+                </a:moveTo>
+                <a:lnTo>
+                  <a:pt x="3717710" y="8715918"/>
+                </a:lnTo>
+                <a:lnTo>
+                  <a:pt x="6309711" y="8715918"/>
+                </a:lnTo>
+                <a:lnTo>
+                  <a:pt x="6309711" y="8661917"/>
+                </a:lnTo>
+                <a:close/>
+                <a:moveTo>
+                  <a:pt x="537403" y="8661917"/>
+                </a:moveTo>
+                <a:lnTo>
+                  <a:pt x="537403" y="8715918"/>
+                </a:lnTo>
+                <a:lnTo>
+                  <a:pt x="3129405" y="8715918"/>
+                </a:lnTo>
+                <a:lnTo>
+                  <a:pt x="3129405" y="8661917"/>
+                </a:lnTo>
+                <a:close/>
+                <a:moveTo>
+                  <a:pt x="651376" y="677901"/>
+                </a:moveTo>
+                <a:cubicBezTo>
+                  <a:pt x="594857" y="677901"/>
+                  <a:pt x="549040" y="723718"/>
+                  <a:pt x="549040" y="780237"/>
+                </a:cubicBezTo>
+                <a:cubicBezTo>
+                  <a:pt x="549040" y="836756"/>
+                  <a:pt x="594857" y="882573"/>
+                  <a:pt x="651376" y="882573"/>
+                </a:cubicBezTo>
+                <a:cubicBezTo>
+                  <a:pt x="707895" y="882573"/>
+                  <a:pt x="753712" y="836756"/>
+                  <a:pt x="753712" y="780237"/>
+                </a:cubicBezTo>
+                <a:cubicBezTo>
+                  <a:pt x="753712" y="723718"/>
+                  <a:pt x="707895" y="677901"/>
+                  <a:pt x="651376" y="677901"/>
+                </a:cubicBezTo>
+                <a:close/>
+                <a:moveTo>
+                  <a:pt x="537402" y="452468"/>
+                </a:moveTo>
+                <a:lnTo>
+                  <a:pt x="537402" y="506469"/>
+                </a:lnTo>
+                <a:lnTo>
+                  <a:pt x="6293597" y="506469"/>
+                </a:lnTo>
+                <a:lnTo>
+                  <a:pt x="6293597" y="452468"/>
+                </a:lnTo>
+                <a:close/>
+                <a:moveTo>
+                  <a:pt x="0" y="0"/>
+                </a:moveTo>
+                <a:lnTo>
+                  <a:pt x="6858001" y="0"/>
+                </a:lnTo>
+                <a:lnTo>
+                  <a:pt x="6858001" y="9144000"/>
+                </a:lnTo>
+                <a:lnTo>
+                  <a:pt x="0" y="9144000"/>
+                </a:lnTo>
+                <a:close/>
+              </a:path>
+            </a:pathLst>
+          </a:custGeom>
+          <a:solidFill>
+            <a:srgbClr val="FFFFFF"/>
+          </a:solidFill>
+          <a:ln w="12700">
+            <a:miter lim="400000"/>
+          </a:ln>
+        </p:spPr>
+        <p:txBody>
+          <a:bodyPr wrap="square" lIns="45719" rIns="45719" anchor="ctr">
+            <a:noAutofit/>
+          </a:bodyPr>
+          <a:lstStyle/>
+          <a:p>
+            <a:pPr algn="ctr">
+              <a:defRPr>
+                <a:solidFill>
+                  <a:srgbClr val="FFFFFF"/>
+                </a:solidFill>
+              </a:defRPr>
+            </a:pPr>
+            <a:endParaRPr/>
+          </a:p>
+        </p:txBody>
+      </p:sp>
+      <p:sp>
+        <p:nvSpPr>
+          <p:cNvPr id="169" name="テキスト ボックス 16">
+            <a:extLst>
+              <a:ext uri="{FF2B5EF4-FFF2-40B4-BE49-F238E27FC236}">
+                <a16:creationId xmlns:a16="http://schemas.microsoft.com/office/drawing/2014/main" id="{2401B375-2507-885F-D35B-A7B7404C2D62}"/>
+              </a:ext>
+            </a:extLst>
+          </p:cNvPr>
           <p:cNvSpPr txBox="1"/>
           <p:nvPr/>
         </p:nvSpPr>
@@ -8230,7 +11434,7 @@
           </a:ln>
           <a:extLst>
             <a:ext uri="{C572A759-6A51-4108-AA02-DFA0A04FC94B}">
-              <ma14:wrappingTextBoxFlag xmlns:ma14="http://schemas.microsoft.com/office/mac/drawingml/2011/main" val="1"/>
+              <ma14:wrappingTextBoxFlag xmlns="" xmlns:m="http://schemas.openxmlformats.org/officeDocument/2006/math" xmlns:a14="http://schemas.microsoft.com/office/drawing/2010/main" xmlns:ma14="http://schemas.microsoft.com/office/mac/drawingml/2011/main" val="1"/>
             </a:ext>
           </a:extLst>
         </p:spPr>
@@ -8242,7 +11446,6 @@
             <a:lvl1pPr algn="ctr"/>
           </a:lstStyle>
           <a:p>
-            <a:pPr/>
             <a:r>
               <a:t>3</a:t>
             </a:r>
@@ -8251,145 +11454,19 @@
       </p:sp>
       <p:sp>
         <p:nvSpPr>
-          <p:cNvPr id="222" name="正方形/長方形 4"/>
-          <p:cNvSpPr/>
-          <p:nvPr/>
-        </p:nvSpPr>
-        <p:spPr>
-          <a:xfrm>
-            <a:off x="17134" y="0"/>
-            <a:ext cx="6858001" cy="9144000"/>
-          </a:xfrm>
-          <a:custGeom>
-            <a:avLst/>
-            <a:gdLst/>
-            <a:ahLst/>
-            <a:cxnLst>
-              <a:cxn ang="0">
-                <a:pos x="wd2" y="hd2"/>
-              </a:cxn>
-              <a:cxn ang="5400000">
-                <a:pos x="wd2" y="hd2"/>
-              </a:cxn>
-              <a:cxn ang="10800000">
-                <a:pos x="wd2" y="hd2"/>
-              </a:cxn>
-              <a:cxn ang="16200000">
-                <a:pos x="wd2" y="hd2"/>
-              </a:cxn>
-            </a:cxnLst>
-            <a:rect l="0" t="0" r="r" b="b"/>
-            <a:pathLst>
-              <a:path w="21600" h="21600" fill="norm" stroke="1" extrusionOk="0">
-                <a:moveTo>
-                  <a:pt x="21600" y="21600"/>
-                </a:moveTo>
-                <a:lnTo>
-                  <a:pt x="0" y="21600"/>
-                </a:lnTo>
-                <a:lnTo>
-                  <a:pt x="0" y="0"/>
-                </a:lnTo>
-                <a:lnTo>
-                  <a:pt x="21600" y="0"/>
-                </a:lnTo>
-                <a:close/>
-                <a:moveTo>
-                  <a:pt x="1693" y="20461"/>
-                </a:moveTo>
-                <a:lnTo>
-                  <a:pt x="1693" y="20589"/>
-                </a:lnTo>
-                <a:lnTo>
-                  <a:pt x="9856" y="20589"/>
-                </a:lnTo>
-                <a:lnTo>
-                  <a:pt x="9856" y="20461"/>
-                </a:lnTo>
-                <a:close/>
-                <a:moveTo>
-                  <a:pt x="11709" y="20461"/>
-                </a:moveTo>
-                <a:lnTo>
-                  <a:pt x="11709" y="20589"/>
-                </a:lnTo>
-                <a:lnTo>
-                  <a:pt x="19873" y="20589"/>
-                </a:lnTo>
-                <a:lnTo>
-                  <a:pt x="19873" y="20461"/>
-                </a:lnTo>
-                <a:close/>
-                <a:moveTo>
-                  <a:pt x="1824" y="1672"/>
-                </a:moveTo>
-                <a:cubicBezTo>
-                  <a:pt x="1698" y="1767"/>
-                  <a:pt x="1698" y="1920"/>
-                  <a:pt x="1824" y="2014"/>
-                </a:cubicBezTo>
-                <a:cubicBezTo>
-                  <a:pt x="1950" y="2108"/>
-                  <a:pt x="2154" y="2108"/>
-                  <a:pt x="2279" y="2014"/>
-                </a:cubicBezTo>
-                <a:cubicBezTo>
-                  <a:pt x="2405" y="1920"/>
-                  <a:pt x="2405" y="1767"/>
-                  <a:pt x="2279" y="1672"/>
-                </a:cubicBezTo>
-                <a:cubicBezTo>
-                  <a:pt x="2154" y="1578"/>
-                  <a:pt x="1950" y="1578"/>
-                  <a:pt x="1824" y="1672"/>
-                </a:cubicBezTo>
-                <a:close/>
-                <a:moveTo>
-                  <a:pt x="1693" y="1069"/>
-                </a:moveTo>
-                <a:lnTo>
-                  <a:pt x="1693" y="1196"/>
-                </a:lnTo>
-                <a:lnTo>
-                  <a:pt x="19822" y="1196"/>
-                </a:lnTo>
-                <a:lnTo>
-                  <a:pt x="19822" y="1069"/>
-                </a:lnTo>
-                <a:close/>
-              </a:path>
-            </a:pathLst>
-          </a:custGeom>
-          <a:solidFill>
-            <a:srgbClr val="FFFFFF"/>
-          </a:solidFill>
-          <a:ln w="12700">
-            <a:miter lim="400000"/>
-          </a:ln>
-        </p:spPr>
-        <p:txBody>
-          <a:bodyPr lIns="45719" rIns="45719" anchor="ctr"/>
-          <a:lstStyle/>
-          <a:p>
-            <a:pPr algn="ctr">
-              <a:defRPr>
-                <a:solidFill>
-                  <a:srgbClr val="FFFFFF"/>
-                </a:solidFill>
-              </a:defRPr>
-            </a:pPr>
-          </a:p>
-        </p:txBody>
-      </p:sp>
-      <p:sp>
-        <p:nvSpPr>
-          <p:cNvPr id="223" name="テキスト ボックス 30"/>
+          <p:cNvPr id="171" name="テキスト ボックス 30">
+            <a:extLst>
+              <a:ext uri="{FF2B5EF4-FFF2-40B4-BE49-F238E27FC236}">
+                <a16:creationId xmlns:a16="http://schemas.microsoft.com/office/drawing/2014/main" id="{88F34578-DCC1-68E5-B4AC-69C030967868}"/>
+              </a:ext>
+            </a:extLst>
+          </p:cNvPr>
           <p:cNvSpPr txBox="1"/>
           <p:nvPr/>
         </p:nvSpPr>
         <p:spPr>
           <a:xfrm>
-            <a:off x="816563" y="546516"/>
+            <a:off x="816563" y="570900"/>
             <a:ext cx="2813096" cy="459741"/>
           </a:xfrm>
           <a:prstGeom prst="rect">
@@ -8400,7 +11477,7 @@
           </a:ln>
           <a:extLst>
             <a:ext uri="{C572A759-6A51-4108-AA02-DFA0A04FC94B}">
-              <ma14:wrappingTextBoxFlag xmlns:ma14="http://schemas.microsoft.com/office/mac/drawingml/2011/main" val="1"/>
+              <ma14:wrappingTextBoxFlag xmlns="" xmlns:m="http://schemas.openxmlformats.org/officeDocument/2006/math" xmlns:a14="http://schemas.microsoft.com/office/drawing/2010/main" xmlns:ma14="http://schemas.microsoft.com/office/mac/drawingml/2011/main" val="1"/>
             </a:ext>
           </a:extLst>
         </p:spPr>
@@ -8410,7 +11487,7 @@
           </a:bodyPr>
           <a:lstStyle>
             <a:lvl1pPr>
-              <a:defRPr b="1" sz="2000">
+              <a:defRPr sz="2000" b="1">
                 <a:latin typeface="JostRoman-SemiBold"/>
                 <a:ea typeface="JostRoman-SemiBold"/>
                 <a:cs typeface="JostRoman-SemiBold"/>
@@ -8419,22 +11496,36 @@
             </a:lvl1pPr>
           </a:lstStyle>
           <a:p>
-            <a:pPr/>
-            <a:r>
-              <a:t>5. Farbverlaufsfilament </a:t>
+            <a:r>
+              <a:rPr dirty="0"/>
+              <a:t>5. </a:t>
+            </a:r>
+            <a:r>
+              <a:rPr dirty="0" err="1"/>
+              <a:t>Farbverlaufsfilament</a:t>
+            </a:r>
+            <a:r>
+              <a:rPr dirty="0"/>
+              <a:t> </a:t>
             </a:r>
           </a:p>
         </p:txBody>
       </p:sp>
       <p:sp>
         <p:nvSpPr>
-          <p:cNvPr id="224" name="テキスト ボックス 32"/>
+          <p:cNvPr id="172" name="テキスト ボックス 32">
+            <a:extLst>
+              <a:ext uri="{FF2B5EF4-FFF2-40B4-BE49-F238E27FC236}">
+                <a16:creationId xmlns:a16="http://schemas.microsoft.com/office/drawing/2014/main" id="{EECE8F1E-0BB0-4D94-1D67-4BE275F3C55E}"/>
+              </a:ext>
+            </a:extLst>
+          </p:cNvPr>
           <p:cNvSpPr txBox="1"/>
           <p:nvPr/>
         </p:nvSpPr>
         <p:spPr>
           <a:xfrm>
-            <a:off x="721497" y="4572000"/>
+            <a:off x="721497" y="4547616"/>
             <a:ext cx="5550783" cy="281940"/>
           </a:xfrm>
           <a:prstGeom prst="rect">
@@ -8445,7 +11536,7 @@
           </a:ln>
           <a:extLst>
             <a:ext uri="{C572A759-6A51-4108-AA02-DFA0A04FC94B}">
-              <ma14:wrappingTextBoxFlag xmlns:ma14="http://schemas.microsoft.com/office/mac/drawingml/2011/main" val="1"/>
+              <ma14:wrappingTextBoxFlag xmlns="" xmlns:m="http://schemas.openxmlformats.org/officeDocument/2006/math" xmlns:a14="http://schemas.microsoft.com/office/drawing/2010/main" xmlns:ma14="http://schemas.microsoft.com/office/mac/drawingml/2011/main" val="1"/>
             </a:ext>
           </a:extLst>
         </p:spPr>
@@ -8459,45 +11550,50 @@
             </a:lvl1pPr>
           </a:lstStyle>
           <a:p>
-            <a:pPr/>
-            <a:r>
-              <a:t>Nachfolgend finden Sie die Modellkonfiguration für das Farbverlaufsfilament.</a:t>
+            <a:r>
+              <a:rPr dirty="0" err="1"/>
+              <a:t>Nachfolgend</a:t>
+            </a:r>
+            <a:r>
+              <a:rPr dirty="0"/>
+              <a:t> </a:t>
+            </a:r>
+            <a:r>
+              <a:rPr dirty="0" err="1"/>
+              <a:t>finden</a:t>
+            </a:r>
+            <a:r>
+              <a:rPr dirty="0"/>
+              <a:t> Sie die </a:t>
+            </a:r>
+            <a:r>
+              <a:rPr dirty="0" err="1"/>
+              <a:t>Modellkonfiguration</a:t>
+            </a:r>
+            <a:r>
+              <a:rPr dirty="0"/>
+              <a:t> für das </a:t>
+            </a:r>
+            <a:r>
+              <a:rPr dirty="0" err="1"/>
+              <a:t>Farbverlaufsfilament</a:t>
+            </a:r>
+            <a:r>
+              <a:rPr dirty="0"/>
+              <a:t>.</a:t>
             </a:r>
           </a:p>
         </p:txBody>
       </p:sp>
-      <p:pic>
-        <p:nvPicPr>
-          <p:cNvPr id="225" name="図 3" descr="図 3"/>
-          <p:cNvPicPr>
-            <a:picLocks noChangeAspect="1"/>
-          </p:cNvPicPr>
-          <p:nvPr/>
-        </p:nvPicPr>
-        <p:blipFill>
-          <a:blip r:embed="rId2">
-            <a:extLst/>
-          </a:blip>
-          <a:stretch>
-            <a:fillRect/>
-          </a:stretch>
-        </p:blipFill>
-        <p:spPr>
-          <a:xfrm>
-            <a:off x="807622" y="4877620"/>
-            <a:ext cx="5250025" cy="3684063"/>
-          </a:xfrm>
-          <a:prstGeom prst="rect">
-            <a:avLst/>
-          </a:prstGeom>
-          <a:ln w="12700">
-            <a:miter lim="400000"/>
-          </a:ln>
-        </p:spPr>
-      </p:pic>
       <p:sp>
         <p:nvSpPr>
-          <p:cNvPr id="226" name="テキスト ボックス 18"/>
+          <p:cNvPr id="174" name="テキスト ボックス 18">
+            <a:extLst>
+              <a:ext uri="{FF2B5EF4-FFF2-40B4-BE49-F238E27FC236}">
+                <a16:creationId xmlns:a16="http://schemas.microsoft.com/office/drawing/2014/main" id="{654BEC8C-B846-E75C-F208-611E4592D15F}"/>
+              </a:ext>
+            </a:extLst>
+          </p:cNvPr>
           <p:cNvSpPr txBox="1"/>
           <p:nvPr/>
         </p:nvSpPr>
@@ -8514,7 +11610,7 @@
           </a:ln>
           <a:extLst>
             <a:ext uri="{C572A759-6A51-4108-AA02-DFA0A04FC94B}">
-              <ma14:wrappingTextBoxFlag xmlns:ma14="http://schemas.microsoft.com/office/mac/drawingml/2011/main" val="1"/>
+              <ma14:wrappingTextBoxFlag xmlns="" xmlns:m="http://schemas.openxmlformats.org/officeDocument/2006/math" xmlns:a14="http://schemas.microsoft.com/office/drawing/2010/main" xmlns:ma14="http://schemas.microsoft.com/office/mac/drawingml/2011/main" val="1"/>
             </a:ext>
           </a:extLst>
         </p:spPr>
@@ -8535,6 +11631,7 @@
             <a:pPr>
               <a:defRPr sz="1000"/>
             </a:pPr>
+            <a:endParaRPr/>
           </a:p>
           <a:p>
             <a:pPr marL="171450" indent="-171450">
@@ -8551,6 +11648,7 @@
             <a:pPr>
               <a:defRPr sz="600"/>
             </a:pPr>
+            <a:endParaRPr/>
           </a:p>
           <a:p>
             <a:pPr marL="171450" indent="-171450">
@@ -8567,6 +11665,7 @@
             <a:pPr>
               <a:defRPr sz="1000"/>
             </a:pPr>
+            <a:endParaRPr/>
           </a:p>
           <a:p>
             <a:pPr>
@@ -8580,48 +11679,124 @@
       </p:sp>
       <p:pic>
         <p:nvPicPr>
-          <p:cNvPr id="227" name="ペーストされたムービー.png" descr="ペーストされたムービー.png"/>
+          <p:cNvPr id="4" name="図 3">
+            <a:extLst>
+              <a:ext uri="{FF2B5EF4-FFF2-40B4-BE49-F238E27FC236}">
+                <a16:creationId xmlns:a16="http://schemas.microsoft.com/office/drawing/2014/main" id="{F38C1769-2964-372D-55F4-2CF36C321C5B}"/>
+              </a:ext>
+            </a:extLst>
+          </p:cNvPr>
           <p:cNvPicPr>
-            <a:picLocks noChangeAspect="1"/>
+            <a:picLocks noChangeAspect="1" noChangeArrowheads="1"/>
+          </p:cNvPicPr>
+          <p:nvPr/>
+        </p:nvPicPr>
+        <p:blipFill>
+          <a:blip r:embed="rId2">
+            <a:extLst>
+              <a:ext uri="{28A0092B-C50C-407E-A947-70E740481C1C}">
+                <a14:useLocalDpi xmlns:a14="http://schemas.microsoft.com/office/drawing/2010/main" val="0"/>
+              </a:ext>
+            </a:extLst>
+          </a:blip>
+          <a:srcRect/>
+          <a:stretch>
+            <a:fillRect/>
+          </a:stretch>
+        </p:blipFill>
+        <p:spPr bwMode="auto">
+          <a:xfrm>
+            <a:off x="535797" y="3305622"/>
+            <a:ext cx="5818062" cy="1117376"/>
+          </a:xfrm>
+          <a:prstGeom prst="rect">
+            <a:avLst/>
+          </a:prstGeom>
+          <a:noFill/>
+          <a:extLst>
+            <a:ext uri="{909E8E84-426E-40DD-AFC4-6F175D3DCCD1}">
+              <a14:hiddenFill xmlns:a14="http://schemas.microsoft.com/office/drawing/2010/main">
+                <a:solidFill>
+                  <a:srgbClr val="FFFFFF"/>
+                </a:solidFill>
+              </a14:hiddenFill>
+            </a:ext>
+          </a:extLst>
+        </p:spPr>
+      </p:pic>
+      <p:pic>
+        <p:nvPicPr>
+          <p:cNvPr id="7" name="図 6">
+            <a:extLst>
+              <a:ext uri="{FF2B5EF4-FFF2-40B4-BE49-F238E27FC236}">
+                <a16:creationId xmlns:a16="http://schemas.microsoft.com/office/drawing/2014/main" id="{17992F70-9740-0BCE-1CB9-0A784448932E}"/>
+              </a:ext>
+            </a:extLst>
+          </p:cNvPr>
+          <p:cNvPicPr>
+            <a:picLocks noChangeAspect="1" noChangeArrowheads="1"/>
           </p:cNvPicPr>
           <p:nvPr/>
         </p:nvPicPr>
         <p:blipFill>
           <a:blip r:embed="rId3">
-            <a:extLst/>
+            <a:extLst>
+              <a:ext uri="{28A0092B-C50C-407E-A947-70E740481C1C}">
+                <a14:useLocalDpi xmlns:a14="http://schemas.microsoft.com/office/drawing/2010/main" val="0"/>
+              </a:ext>
+            </a:extLst>
           </a:blip>
+          <a:srcRect/>
           <a:stretch>
             <a:fillRect/>
           </a:stretch>
         </p:blipFill>
-        <p:spPr>
+        <p:spPr bwMode="auto">
           <a:xfrm>
-            <a:off x="336311" y="3702891"/>
-            <a:ext cx="6219648" cy="858519"/>
+            <a:off x="803027" y="4873452"/>
+            <a:ext cx="5251946" cy="3665739"/>
           </a:xfrm>
           <a:prstGeom prst="rect">
             <a:avLst/>
           </a:prstGeom>
-          <a:ln w="12700">
-            <a:miter lim="400000"/>
-          </a:ln>
+          <a:noFill/>
+          <a:extLst>
+            <a:ext uri="{909E8E84-426E-40DD-AFC4-6F175D3DCCD1}">
+              <a14:hiddenFill xmlns:a14="http://schemas.microsoft.com/office/drawing/2010/main">
+                <a:solidFill>
+                  <a:srgbClr val="FFFFFF"/>
+                </a:solidFill>
+              </a14:hiddenFill>
+            </a:ext>
+          </a:extLst>
         </p:spPr>
       </p:pic>
     </p:spTree>
+    <p:extLst>
+      <p:ext uri="{BB962C8B-B14F-4D97-AF65-F5344CB8AC3E}">
+        <p14:creationId xmlns:p14="http://schemas.microsoft.com/office/powerpoint/2010/main" val="3757303950"/>
+      </p:ext>
+    </p:extLst>
   </p:cSld>
   <p:clrMapOvr>
     <a:masterClrMapping/>
   </p:clrMapOvr>
-  <p:transition xmlns:p14="http://schemas.microsoft.com/office/powerpoint/2010/main" spd="med" advClick="1"/>
+  <p:transition spd="med"/>
 </p:sld>
 </file>
 
 <file path=ppt/slides/slide9.xml><?xml version="1.0" encoding="utf-8"?>
-<p:sld xmlns:a="http://schemas.openxmlformats.org/drawingml/2006/main" xmlns:r="http://schemas.openxmlformats.org/officeDocument/2006/relationships" xmlns:p="http://schemas.openxmlformats.org/presentationml/2006/main" xmlns:m="http://schemas.openxmlformats.org/officeDocument/2006/math" xmlns:a14="http://schemas.microsoft.com/office/drawing/2010/main" showMasterSp="1" showMasterPhAnim="1">
+<p:sld xmlns:a="http://schemas.openxmlformats.org/drawingml/2006/main" xmlns:r="http://schemas.openxmlformats.org/officeDocument/2006/relationships" xmlns:p="http://schemas.openxmlformats.org/presentationml/2006/main">
   <p:cSld>
     <p:spTree>
       <p:nvGrpSpPr>
-        <p:cNvPr id="1" name=""/>
+        <p:cNvPr id="1" name="">
+          <a:extLst>
+            <a:ext uri="{FF2B5EF4-FFF2-40B4-BE49-F238E27FC236}">
+              <a16:creationId xmlns:a16="http://schemas.microsoft.com/office/drawing/2014/main" id="{B2518F59-9DB2-8DBB-57D4-B1DFC727DE93}"/>
+            </a:ext>
+          </a:extLst>
+        </p:cNvPr>
         <p:cNvGrpSpPr/>
         <p:nvPr/>
       </p:nvGrpSpPr>
@@ -8635,7 +11810,13 @@
       </p:grpSpPr>
       <p:sp>
         <p:nvSpPr>
-          <p:cNvPr id="229" name="正方形/長方形 29"/>
+          <p:cNvPr id="177" name="正方形/長方形 29">
+            <a:extLst>
+              <a:ext uri="{FF2B5EF4-FFF2-40B4-BE49-F238E27FC236}">
+                <a16:creationId xmlns:a16="http://schemas.microsoft.com/office/drawing/2014/main" id="{E3C405C9-5B94-2B73-9968-361092C8FA9F}"/>
+              </a:ext>
+            </a:extLst>
+          </p:cNvPr>
           <p:cNvSpPr/>
           <p:nvPr/>
         </p:nvSpPr>
@@ -8676,12 +11857,254 @@
                 </a:solidFill>
               </a:defRPr>
             </a:pPr>
+            <a:endParaRPr/>
           </a:p>
         </p:txBody>
       </p:sp>
       <p:sp>
         <p:nvSpPr>
-          <p:cNvPr id="230" name="テキスト ボックス 16"/>
+          <p:cNvPr id="5" name="フリーフォーム: 図形 4">
+            <a:extLst>
+              <a:ext uri="{FF2B5EF4-FFF2-40B4-BE49-F238E27FC236}">
+                <a16:creationId xmlns:a16="http://schemas.microsoft.com/office/drawing/2014/main" id="{2B7B299E-3851-A4B8-9022-0CB8448C98B8}"/>
+              </a:ext>
+            </a:extLst>
+          </p:cNvPr>
+          <p:cNvSpPr/>
+          <p:nvPr/>
+        </p:nvSpPr>
+        <p:spPr>
+          <a:xfrm>
+            <a:off x="17051" y="5530"/>
+            <a:ext cx="6858001" cy="9144001"/>
+          </a:xfrm>
+          <a:custGeom>
+            <a:avLst/>
+            <a:gdLst>
+              <a:gd name="connsiteX0" fmla="*/ 3717793 w 6858001"/>
+              <a:gd name="connsiteY0" fmla="*/ 8656387 h 9144001"/>
+              <a:gd name="connsiteX1" fmla="*/ 3717793 w 6858001"/>
+              <a:gd name="connsiteY1" fmla="*/ 8710388 h 9144001"/>
+              <a:gd name="connsiteX2" fmla="*/ 6309794 w 6858001"/>
+              <a:gd name="connsiteY2" fmla="*/ 8710388 h 9144001"/>
+              <a:gd name="connsiteX3" fmla="*/ 6309794 w 6858001"/>
+              <a:gd name="connsiteY3" fmla="*/ 8656387 h 9144001"/>
+              <a:gd name="connsiteX4" fmla="*/ 537486 w 6858001"/>
+              <a:gd name="connsiteY4" fmla="*/ 8656387 h 9144001"/>
+              <a:gd name="connsiteX5" fmla="*/ 537486 w 6858001"/>
+              <a:gd name="connsiteY5" fmla="*/ 8710388 h 9144001"/>
+              <a:gd name="connsiteX6" fmla="*/ 3129488 w 6858001"/>
+              <a:gd name="connsiteY6" fmla="*/ 8710388 h 9144001"/>
+              <a:gd name="connsiteX7" fmla="*/ 3129488 w 6858001"/>
+              <a:gd name="connsiteY7" fmla="*/ 8656387 h 9144001"/>
+              <a:gd name="connsiteX8" fmla="*/ 631632 w 6858001"/>
+              <a:gd name="connsiteY8" fmla="*/ 811545 h 9144001"/>
+              <a:gd name="connsiteX9" fmla="*/ 529296 w 6858001"/>
+              <a:gd name="connsiteY9" fmla="*/ 913881 h 9144001"/>
+              <a:gd name="connsiteX10" fmla="*/ 631632 w 6858001"/>
+              <a:gd name="connsiteY10" fmla="*/ 1016217 h 9144001"/>
+              <a:gd name="connsiteX11" fmla="*/ 733968 w 6858001"/>
+              <a:gd name="connsiteY11" fmla="*/ 913881 h 9144001"/>
+              <a:gd name="connsiteX12" fmla="*/ 631632 w 6858001"/>
+              <a:gd name="connsiteY12" fmla="*/ 811545 h 9144001"/>
+              <a:gd name="connsiteX13" fmla="*/ 537485 w 6858001"/>
+              <a:gd name="connsiteY13" fmla="*/ 446938 h 9144001"/>
+              <a:gd name="connsiteX14" fmla="*/ 537485 w 6858001"/>
+              <a:gd name="connsiteY14" fmla="*/ 500939 h 9144001"/>
+              <a:gd name="connsiteX15" fmla="*/ 6293680 w 6858001"/>
+              <a:gd name="connsiteY15" fmla="*/ 500939 h 9144001"/>
+              <a:gd name="connsiteX16" fmla="*/ 6293680 w 6858001"/>
+              <a:gd name="connsiteY16" fmla="*/ 446938 h 9144001"/>
+              <a:gd name="connsiteX17" fmla="*/ 0 w 6858001"/>
+              <a:gd name="connsiteY17" fmla="*/ 0 h 9144001"/>
+              <a:gd name="connsiteX18" fmla="*/ 6858001 w 6858001"/>
+              <a:gd name="connsiteY18" fmla="*/ 0 h 9144001"/>
+              <a:gd name="connsiteX19" fmla="*/ 6858001 w 6858001"/>
+              <a:gd name="connsiteY19" fmla="*/ 9144001 h 9144001"/>
+              <a:gd name="connsiteX20" fmla="*/ 0 w 6858001"/>
+              <a:gd name="connsiteY20" fmla="*/ 9144001 h 9144001"/>
+            </a:gdLst>
+            <a:ahLst/>
+            <a:cxnLst>
+              <a:cxn ang="0">
+                <a:pos x="connsiteX0" y="connsiteY0"/>
+              </a:cxn>
+              <a:cxn ang="0">
+                <a:pos x="connsiteX1" y="connsiteY1"/>
+              </a:cxn>
+              <a:cxn ang="0">
+                <a:pos x="connsiteX2" y="connsiteY2"/>
+              </a:cxn>
+              <a:cxn ang="0">
+                <a:pos x="connsiteX3" y="connsiteY3"/>
+              </a:cxn>
+              <a:cxn ang="0">
+                <a:pos x="connsiteX4" y="connsiteY4"/>
+              </a:cxn>
+              <a:cxn ang="0">
+                <a:pos x="connsiteX5" y="connsiteY5"/>
+              </a:cxn>
+              <a:cxn ang="0">
+                <a:pos x="connsiteX6" y="connsiteY6"/>
+              </a:cxn>
+              <a:cxn ang="0">
+                <a:pos x="connsiteX7" y="connsiteY7"/>
+              </a:cxn>
+              <a:cxn ang="0">
+                <a:pos x="connsiteX8" y="connsiteY8"/>
+              </a:cxn>
+              <a:cxn ang="0">
+                <a:pos x="connsiteX9" y="connsiteY9"/>
+              </a:cxn>
+              <a:cxn ang="0">
+                <a:pos x="connsiteX10" y="connsiteY10"/>
+              </a:cxn>
+              <a:cxn ang="0">
+                <a:pos x="connsiteX11" y="connsiteY11"/>
+              </a:cxn>
+              <a:cxn ang="0">
+                <a:pos x="connsiteX12" y="connsiteY12"/>
+              </a:cxn>
+              <a:cxn ang="0">
+                <a:pos x="connsiteX13" y="connsiteY13"/>
+              </a:cxn>
+              <a:cxn ang="0">
+                <a:pos x="connsiteX14" y="connsiteY14"/>
+              </a:cxn>
+              <a:cxn ang="0">
+                <a:pos x="connsiteX15" y="connsiteY15"/>
+              </a:cxn>
+              <a:cxn ang="0">
+                <a:pos x="connsiteX16" y="connsiteY16"/>
+              </a:cxn>
+              <a:cxn ang="0">
+                <a:pos x="connsiteX17" y="connsiteY17"/>
+              </a:cxn>
+              <a:cxn ang="0">
+                <a:pos x="connsiteX18" y="connsiteY18"/>
+              </a:cxn>
+              <a:cxn ang="0">
+                <a:pos x="connsiteX19" y="connsiteY19"/>
+              </a:cxn>
+              <a:cxn ang="0">
+                <a:pos x="connsiteX20" y="connsiteY20"/>
+              </a:cxn>
+            </a:cxnLst>
+            <a:rect l="l" t="t" r="r" b="b"/>
+            <a:pathLst>
+              <a:path w="6858001" h="9144001">
+                <a:moveTo>
+                  <a:pt x="3717793" y="8656387"/>
+                </a:moveTo>
+                <a:lnTo>
+                  <a:pt x="3717793" y="8710388"/>
+                </a:lnTo>
+                <a:lnTo>
+                  <a:pt x="6309794" y="8710388"/>
+                </a:lnTo>
+                <a:lnTo>
+                  <a:pt x="6309794" y="8656387"/>
+                </a:lnTo>
+                <a:close/>
+                <a:moveTo>
+                  <a:pt x="537486" y="8656387"/>
+                </a:moveTo>
+                <a:lnTo>
+                  <a:pt x="537486" y="8710388"/>
+                </a:lnTo>
+                <a:lnTo>
+                  <a:pt x="3129488" y="8710388"/>
+                </a:lnTo>
+                <a:lnTo>
+                  <a:pt x="3129488" y="8656387"/>
+                </a:lnTo>
+                <a:close/>
+                <a:moveTo>
+                  <a:pt x="631632" y="811545"/>
+                </a:moveTo>
+                <a:cubicBezTo>
+                  <a:pt x="575113" y="811545"/>
+                  <a:pt x="529296" y="857362"/>
+                  <a:pt x="529296" y="913881"/>
+                </a:cubicBezTo>
+                <a:cubicBezTo>
+                  <a:pt x="529296" y="970400"/>
+                  <a:pt x="575113" y="1016217"/>
+                  <a:pt x="631632" y="1016217"/>
+                </a:cubicBezTo>
+                <a:cubicBezTo>
+                  <a:pt x="688151" y="1016217"/>
+                  <a:pt x="733968" y="970400"/>
+                  <a:pt x="733968" y="913881"/>
+                </a:cubicBezTo>
+                <a:cubicBezTo>
+                  <a:pt x="733968" y="857362"/>
+                  <a:pt x="688151" y="811545"/>
+                  <a:pt x="631632" y="811545"/>
+                </a:cubicBezTo>
+                <a:close/>
+                <a:moveTo>
+                  <a:pt x="537485" y="446938"/>
+                </a:moveTo>
+                <a:lnTo>
+                  <a:pt x="537485" y="500939"/>
+                </a:lnTo>
+                <a:lnTo>
+                  <a:pt x="6293680" y="500939"/>
+                </a:lnTo>
+                <a:lnTo>
+                  <a:pt x="6293680" y="446938"/>
+                </a:lnTo>
+                <a:close/>
+                <a:moveTo>
+                  <a:pt x="0" y="0"/>
+                </a:moveTo>
+                <a:lnTo>
+                  <a:pt x="6858001" y="0"/>
+                </a:lnTo>
+                <a:lnTo>
+                  <a:pt x="6858001" y="9144001"/>
+                </a:lnTo>
+                <a:lnTo>
+                  <a:pt x="0" y="9144001"/>
+                </a:lnTo>
+                <a:close/>
+              </a:path>
+            </a:pathLst>
+          </a:custGeom>
+          <a:solidFill>
+            <a:srgbClr val="FFFFFF"/>
+          </a:solidFill>
+          <a:ln w="12700">
+            <a:miter lim="400000"/>
+          </a:ln>
+        </p:spPr>
+        <p:txBody>
+          <a:bodyPr wrap="square" lIns="45719" rIns="45719" anchor="ctr">
+            <a:noAutofit/>
+          </a:bodyPr>
+          <a:lstStyle/>
+          <a:p>
+            <a:pPr algn="ctr">
+              <a:defRPr>
+                <a:solidFill>
+                  <a:srgbClr val="FFFFFF"/>
+                </a:solidFill>
+              </a:defRPr>
+            </a:pPr>
+            <a:endParaRPr/>
+          </a:p>
+        </p:txBody>
+      </p:sp>
+      <p:sp>
+        <p:nvSpPr>
+          <p:cNvPr id="187" name="テキスト ボックス 16">
+            <a:extLst>
+              <a:ext uri="{FF2B5EF4-FFF2-40B4-BE49-F238E27FC236}">
+                <a16:creationId xmlns:a16="http://schemas.microsoft.com/office/drawing/2014/main" id="{0C730130-D168-B011-DBF1-80B0EA2265F8}"/>
+              </a:ext>
+            </a:extLst>
+          </p:cNvPr>
           <p:cNvSpPr txBox="1"/>
           <p:nvPr/>
         </p:nvSpPr>
@@ -8698,7 +12121,7 @@
           </a:ln>
           <a:extLst>
             <a:ext uri="{C572A759-6A51-4108-AA02-DFA0A04FC94B}">
-              <ma14:wrappingTextBoxFlag xmlns:ma14="http://schemas.microsoft.com/office/mac/drawingml/2011/main" val="1"/>
+              <ma14:wrappingTextBoxFlag xmlns="" xmlns:m="http://schemas.openxmlformats.org/officeDocument/2006/math" xmlns:a14="http://schemas.microsoft.com/office/drawing/2010/main" xmlns:ma14="http://schemas.microsoft.com/office/mac/drawingml/2011/main" val="1"/>
             </a:ext>
           </a:extLst>
         </p:spPr>
@@ -8710,7 +12133,6 @@
             <a:lvl1pPr algn="ctr"/>
           </a:lstStyle>
           <a:p>
-            <a:pPr/>
             <a:r>
               <a:t>4</a:t>
             </a:r>
@@ -8719,145 +12141,19 @@
       </p:sp>
       <p:sp>
         <p:nvSpPr>
-          <p:cNvPr id="231" name="正方形/長方形 4"/>
-          <p:cNvSpPr/>
-          <p:nvPr/>
-        </p:nvSpPr>
-        <p:spPr>
-          <a:xfrm>
-            <a:off x="17051" y="5530"/>
-            <a:ext cx="6858001" cy="9144001"/>
-          </a:xfrm>
-          <a:custGeom>
-            <a:avLst/>
-            <a:gdLst/>
-            <a:ahLst/>
-            <a:cxnLst>
-              <a:cxn ang="0">
-                <a:pos x="wd2" y="hd2"/>
-              </a:cxn>
-              <a:cxn ang="5400000">
-                <a:pos x="wd2" y="hd2"/>
-              </a:cxn>
-              <a:cxn ang="10800000">
-                <a:pos x="wd2" y="hd2"/>
-              </a:cxn>
-              <a:cxn ang="16200000">
-                <a:pos x="wd2" y="hd2"/>
-              </a:cxn>
-            </a:cxnLst>
-            <a:rect l="0" t="0" r="r" b="b"/>
-            <a:pathLst>
-              <a:path w="21600" h="21600" fill="norm" stroke="1" extrusionOk="0">
-                <a:moveTo>
-                  <a:pt x="21600" y="21600"/>
-                </a:moveTo>
-                <a:lnTo>
-                  <a:pt x="0" y="21600"/>
-                </a:lnTo>
-                <a:lnTo>
-                  <a:pt x="0" y="0"/>
-                </a:lnTo>
-                <a:lnTo>
-                  <a:pt x="21600" y="0"/>
-                </a:lnTo>
-                <a:close/>
-                <a:moveTo>
-                  <a:pt x="1693" y="20448"/>
-                </a:moveTo>
-                <a:lnTo>
-                  <a:pt x="1693" y="20576"/>
-                </a:lnTo>
-                <a:lnTo>
-                  <a:pt x="9857" y="20576"/>
-                </a:lnTo>
-                <a:lnTo>
-                  <a:pt x="9857" y="20448"/>
-                </a:lnTo>
-                <a:close/>
-                <a:moveTo>
-                  <a:pt x="11710" y="20448"/>
-                </a:moveTo>
-                <a:lnTo>
-                  <a:pt x="11710" y="20576"/>
-                </a:lnTo>
-                <a:lnTo>
-                  <a:pt x="19873" y="20576"/>
-                </a:lnTo>
-                <a:lnTo>
-                  <a:pt x="19873" y="20448"/>
-                </a:lnTo>
-                <a:close/>
-                <a:moveTo>
-                  <a:pt x="1761" y="1988"/>
-                </a:moveTo>
-                <a:cubicBezTo>
-                  <a:pt x="1636" y="2082"/>
-                  <a:pt x="1636" y="2235"/>
-                  <a:pt x="1761" y="2330"/>
-                </a:cubicBezTo>
-                <a:cubicBezTo>
-                  <a:pt x="1887" y="2424"/>
-                  <a:pt x="2091" y="2424"/>
-                  <a:pt x="2217" y="2330"/>
-                </a:cubicBezTo>
-                <a:cubicBezTo>
-                  <a:pt x="2343" y="2235"/>
-                  <a:pt x="2343" y="2082"/>
-                  <a:pt x="2217" y="1988"/>
-                </a:cubicBezTo>
-                <a:cubicBezTo>
-                  <a:pt x="2091" y="1893"/>
-                  <a:pt x="1887" y="1893"/>
-                  <a:pt x="1761" y="1988"/>
-                </a:cubicBezTo>
-                <a:close/>
-                <a:moveTo>
-                  <a:pt x="1693" y="1056"/>
-                </a:moveTo>
-                <a:lnTo>
-                  <a:pt x="1693" y="1183"/>
-                </a:lnTo>
-                <a:lnTo>
-                  <a:pt x="19823" y="1183"/>
-                </a:lnTo>
-                <a:lnTo>
-                  <a:pt x="19823" y="1056"/>
-                </a:lnTo>
-                <a:close/>
-              </a:path>
-            </a:pathLst>
-          </a:custGeom>
-          <a:solidFill>
-            <a:srgbClr val="FFFFFF"/>
-          </a:solidFill>
-          <a:ln w="12700">
-            <a:miter lim="400000"/>
-          </a:ln>
-        </p:spPr>
-        <p:txBody>
-          <a:bodyPr lIns="45719" rIns="45719" anchor="ctr"/>
-          <a:lstStyle/>
-          <a:p>
-            <a:pPr algn="ctr">
-              <a:defRPr>
-                <a:solidFill>
-                  <a:srgbClr val="FFFFFF"/>
-                </a:solidFill>
-              </a:defRPr>
-            </a:pPr>
-          </a:p>
-        </p:txBody>
-      </p:sp>
-      <p:sp>
-        <p:nvSpPr>
-          <p:cNvPr id="232" name="テキスト ボックス 33"/>
+          <p:cNvPr id="189" name="テキスト ボックス 33">
+            <a:extLst>
+              <a:ext uri="{FF2B5EF4-FFF2-40B4-BE49-F238E27FC236}">
+                <a16:creationId xmlns:a16="http://schemas.microsoft.com/office/drawing/2014/main" id="{DF2D9F74-0CB8-7397-100E-CAFF919500A2}"/>
+              </a:ext>
+            </a:extLst>
+          </p:cNvPr>
           <p:cNvSpPr txBox="1"/>
           <p:nvPr/>
         </p:nvSpPr>
         <p:spPr>
           <a:xfrm>
-            <a:off x="823834" y="784293"/>
+            <a:off x="823834" y="762576"/>
             <a:ext cx="1804552" cy="383541"/>
           </a:xfrm>
           <a:prstGeom prst="rect">
@@ -8868,7 +12164,7 @@
           </a:ln>
           <a:extLst>
             <a:ext uri="{C572A759-6A51-4108-AA02-DFA0A04FC94B}">
-              <ma14:wrappingTextBoxFlag xmlns:ma14="http://schemas.microsoft.com/office/mac/drawingml/2011/main" val="1"/>
+              <ma14:wrappingTextBoxFlag xmlns="" xmlns:m="http://schemas.openxmlformats.org/officeDocument/2006/math" xmlns:a14="http://schemas.microsoft.com/office/drawing/2010/main" xmlns:ma14="http://schemas.microsoft.com/office/mac/drawingml/2011/main" val="1"/>
             </a:ext>
           </a:extLst>
         </p:spPr>
@@ -8878,7 +12174,7 @@
           </a:bodyPr>
           <a:lstStyle>
             <a:lvl1pPr>
-              <a:defRPr b="1" sz="1600">
+              <a:defRPr sz="1600" b="1">
                 <a:latin typeface="JostRoman-SemiBold"/>
                 <a:ea typeface="JostRoman-SemiBold"/>
                 <a:cs typeface="JostRoman-SemiBold"/>
@@ -8887,16 +12183,27 @@
             </a:lvl1pPr>
           </a:lstStyle>
           <a:p>
-            <a:pPr/>
-            <a:r>
-              <a:t>6. Update Historie</a:t>
-            </a:r>
+            <a:r>
+              <a:rPr dirty="0"/>
+              <a:t>6. Update </a:t>
+            </a:r>
+            <a:r>
+              <a:rPr dirty="0" err="1"/>
+              <a:t>Historie</a:t>
+            </a:r>
+            <a:endParaRPr dirty="0"/>
           </a:p>
         </p:txBody>
       </p:sp>
       <p:sp>
         <p:nvSpPr>
-          <p:cNvPr id="233" name="テキスト ボックス 34"/>
+          <p:cNvPr id="190" name="テキスト ボックス 34">
+            <a:extLst>
+              <a:ext uri="{FF2B5EF4-FFF2-40B4-BE49-F238E27FC236}">
+                <a16:creationId xmlns:a16="http://schemas.microsoft.com/office/drawing/2014/main" id="{0CC5E96C-B429-EA10-B007-210BB6EC074E}"/>
+              </a:ext>
+            </a:extLst>
+          </p:cNvPr>
           <p:cNvSpPr txBox="1"/>
           <p:nvPr/>
         </p:nvSpPr>
@@ -8913,7 +12220,7 @@
           </a:ln>
           <a:extLst>
             <a:ext uri="{C572A759-6A51-4108-AA02-DFA0A04FC94B}">
-              <ma14:wrappingTextBoxFlag xmlns:ma14="http://schemas.microsoft.com/office/mac/drawingml/2011/main" val="1"/>
+              <ma14:wrappingTextBoxFlag xmlns="" xmlns:m="http://schemas.openxmlformats.org/officeDocument/2006/math" xmlns:a14="http://schemas.microsoft.com/office/drawing/2010/main" xmlns:ma14="http://schemas.microsoft.com/office/mac/drawingml/2011/main" val="1"/>
             </a:ext>
           </a:extLst>
         </p:spPr>
@@ -8927,24 +12234,99 @@
             </a:lvl1pPr>
           </a:lstStyle>
           <a:p>
-            <a:pPr/>
-            <a:r>
-              <a:t>Ver.1.00  2026-09-01  Erste Version veröffentlicht</a:t>
-            </a:r>
+            <a:r>
+              <a:rPr dirty="0"/>
+              <a:t>Ver.1.00  2026-09-01  Erste Version </a:t>
+            </a:r>
+            <a:r>
+              <a:rPr dirty="0" err="1"/>
+              <a:t>veröffentlicht</a:t>
+            </a:r>
+            <a:endParaRPr dirty="0"/>
+          </a:p>
+        </p:txBody>
+      </p:sp>
+      <p:sp>
+        <p:nvSpPr>
+          <p:cNvPr id="6" name="テキスト ボックス 34">
+            <a:extLst>
+              <a:ext uri="{FF2B5EF4-FFF2-40B4-BE49-F238E27FC236}">
+                <a16:creationId xmlns:a16="http://schemas.microsoft.com/office/drawing/2014/main" id="{646A821F-C4D4-9F6F-D616-F25161195522}"/>
+              </a:ext>
+            </a:extLst>
+          </p:cNvPr>
+          <p:cNvSpPr txBox="1"/>
+          <p:nvPr/>
+        </p:nvSpPr>
+        <p:spPr>
+          <a:xfrm>
+            <a:off x="684043" y="1985257"/>
+            <a:ext cx="5558051" cy="400110"/>
+          </a:xfrm>
+          <a:prstGeom prst="rect">
+            <a:avLst/>
+          </a:prstGeom>
+          <a:ln w="12700">
+            <a:miter lim="400000"/>
+          </a:ln>
+          <a:extLst>
+            <a:ext uri="{C572A759-6A51-4108-AA02-DFA0A04FC94B}">
+              <ma14:wrappingTextBoxFlag xmlns="" xmlns:m="http://schemas.openxmlformats.org/officeDocument/2006/math" xmlns:a14="http://schemas.microsoft.com/office/drawing/2010/main" xmlns:ma14="http://schemas.microsoft.com/office/mac/drawingml/2011/main" val="1"/>
+            </a:ext>
+          </a:extLst>
+        </p:spPr>
+        <p:txBody>
+          <a:bodyPr lIns="45719" rIns="45719">
+            <a:spAutoFit/>
+          </a:bodyPr>
+          <a:lstStyle>
+            <a:lvl1pPr>
+              <a:defRPr sz="900"/>
+            </a:lvl1pPr>
+          </a:lstStyle>
+          <a:p>
+            <a:r>
+              <a:rPr lang="en-US" sz="1000" dirty="0" err="1"/>
+              <a:t>Nennung</a:t>
+            </a:r>
+            <a:r>
+              <a:rPr lang="en-US" sz="1000" dirty="0"/>
+              <a:t> : </a:t>
+            </a:r>
+          </a:p>
+          <a:p>
+            <a:r>
+              <a:rPr lang="en-US" sz="1000" dirty="0"/>
+              <a:t> Deutsche </a:t>
+            </a:r>
+            <a:r>
+              <a:rPr lang="en-US" sz="1000" dirty="0" err="1"/>
+              <a:t>Übersetzung</a:t>
+            </a:r>
+            <a:r>
+              <a:rPr lang="en-US" sz="1000" dirty="0"/>
+              <a:t> –Domenik</a:t>
+            </a:r>
+            <a:endParaRPr sz="1000" dirty="0"/>
           </a:p>
         </p:txBody>
       </p:sp>
     </p:spTree>
+    <p:extLst>
+      <p:ext uri="{BB962C8B-B14F-4D97-AF65-F5344CB8AC3E}">
+        <p14:creationId xmlns:p14="http://schemas.microsoft.com/office/powerpoint/2010/main" val="1738846206"/>
+      </p:ext>
+    </p:extLst>
   </p:cSld>
   <p:clrMapOvr>
     <a:masterClrMapping/>
   </p:clrMapOvr>
-  <p:transition xmlns:p14="http://schemas.microsoft.com/office/powerpoint/2010/main" spd="med" advClick="1"/>
+  <p:transition spd="med"/>
 </p:sld>
 </file>
 
 <file path=ppt/theme/theme1.xml><?xml version="1.0" encoding="utf-8"?>
-<a:theme xmlns:a="http://schemas.openxmlformats.org/drawingml/2006/main" xmlns:r="http://schemas.openxmlformats.org/officeDocument/2006/relationships" name="Office テーマ">
+<a:theme xmlns:a="http://schemas.openxmlformats.org/drawingml/2006/main" name="Office テーマ">
   <a:themeElements>
     <a:clrScheme name="Office テーマ">
       <a:dk1>
@@ -9146,7 +12528,7 @@
         <a:effectLst/>
         <a:sp3d/>
       </a:spPr>
-      <a:bodyPr rot="0" spcFirstLastPara="1" vertOverflow="overflow" horzOverflow="overflow" vert="horz" wrap="square" lIns="45719" tIns="45719" rIns="45719" bIns="45719" numCol="1" spcCol="38100" rtlCol="0" anchor="ctr" upright="0">
+      <a:bodyPr rot="0" spcFirstLastPara="1" vertOverflow="overflow" horzOverflow="overflow" vert="horz" wrap="square" lIns="45719" tIns="45719" rIns="45719" bIns="45719" numCol="1" spcCol="38100" rtlCol="0" anchor="ctr">
         <a:spAutoFit/>
       </a:bodyPr>
       <a:lstStyle>
@@ -9165,7 +12547,7 @@
           <a:buFontTx/>
           <a:buNone/>
           <a:tabLst/>
-          <a:defRPr b="0" baseline="0" cap="none" i="0" spc="0" strike="noStrike" sz="1800" u="none" kumimoji="0" normalizeH="0">
+          <a:defRPr kumimoji="0" sz="1800" b="0" i="0" u="none" strike="noStrike" cap="none" spc="0" normalizeH="0" baseline="0">
             <a:ln>
               <a:noFill/>
             </a:ln>
@@ -9195,7 +12577,7 @@
           <a:buFontTx/>
           <a:buNone/>
           <a:tabLst/>
-          <a:defRPr b="0" baseline="0" cap="none" i="0" spc="0" strike="noStrike" sz="1800" u="none" kumimoji="0" normalizeH="0">
+          <a:defRPr kumimoji="0" sz="1800" b="0" i="0" u="none" strike="noStrike" cap="none" spc="0" normalizeH="0" baseline="0">
             <a:ln>
               <a:noFill/>
             </a:ln>
@@ -9221,7 +12603,7 @@
           <a:buFontTx/>
           <a:buNone/>
           <a:tabLst/>
-          <a:defRPr b="0" baseline="0" cap="none" i="0" spc="0" strike="noStrike" sz="1800" u="none" kumimoji="0" normalizeH="0">
+          <a:defRPr kumimoji="0" sz="1800" b="0" i="0" u="none" strike="noStrike" cap="none" spc="0" normalizeH="0" baseline="0">
             <a:ln>
               <a:noFill/>
             </a:ln>
@@ -9247,7 +12629,7 @@
           <a:buFontTx/>
           <a:buNone/>
           <a:tabLst/>
-          <a:defRPr b="0" baseline="0" cap="none" i="0" spc="0" strike="noStrike" sz="1800" u="none" kumimoji="0" normalizeH="0">
+          <a:defRPr kumimoji="0" sz="1800" b="0" i="0" u="none" strike="noStrike" cap="none" spc="0" normalizeH="0" baseline="0">
             <a:ln>
               <a:noFill/>
             </a:ln>
@@ -9273,7 +12655,7 @@
           <a:buFontTx/>
           <a:buNone/>
           <a:tabLst/>
-          <a:defRPr b="0" baseline="0" cap="none" i="0" spc="0" strike="noStrike" sz="1800" u="none" kumimoji="0" normalizeH="0">
+          <a:defRPr kumimoji="0" sz="1800" b="0" i="0" u="none" strike="noStrike" cap="none" spc="0" normalizeH="0" baseline="0">
             <a:ln>
               <a:noFill/>
             </a:ln>
@@ -9299,7 +12681,7 @@
           <a:buFontTx/>
           <a:buNone/>
           <a:tabLst/>
-          <a:defRPr b="0" baseline="0" cap="none" i="0" spc="0" strike="noStrike" sz="1800" u="none" kumimoji="0" normalizeH="0">
+          <a:defRPr kumimoji="0" sz="1800" b="0" i="0" u="none" strike="noStrike" cap="none" spc="0" normalizeH="0" baseline="0">
             <a:ln>
               <a:noFill/>
             </a:ln>
@@ -9325,7 +12707,7 @@
           <a:buFontTx/>
           <a:buNone/>
           <a:tabLst/>
-          <a:defRPr b="0" baseline="0" cap="none" i="0" spc="0" strike="noStrike" sz="1800" u="none" kumimoji="0" normalizeH="0">
+          <a:defRPr kumimoji="0" sz="1800" b="0" i="0" u="none" strike="noStrike" cap="none" spc="0" normalizeH="0" baseline="0">
             <a:ln>
               <a:noFill/>
             </a:ln>
@@ -9351,7 +12733,7 @@
           <a:buFontTx/>
           <a:buNone/>
           <a:tabLst/>
-          <a:defRPr b="0" baseline="0" cap="none" i="0" spc="0" strike="noStrike" sz="1800" u="none" kumimoji="0" normalizeH="0">
+          <a:defRPr kumimoji="0" sz="1800" b="0" i="0" u="none" strike="noStrike" cap="none" spc="0" normalizeH="0" baseline="0">
             <a:ln>
               <a:noFill/>
             </a:ln>
@@ -9377,7 +12759,7 @@
           <a:buFontTx/>
           <a:buNone/>
           <a:tabLst/>
-          <a:defRPr b="0" baseline="0" cap="none" i="0" spc="0" strike="noStrike" sz="1800" u="none" kumimoji="0" normalizeH="0">
+          <a:defRPr kumimoji="0" sz="1800" b="0" i="0" u="none" strike="noStrike" cap="none" spc="0" normalizeH="0" baseline="0">
             <a:ln>
               <a:noFill/>
             </a:ln>
@@ -9403,7 +12785,7 @@
           <a:buFontTx/>
           <a:buNone/>
           <a:tabLst/>
-          <a:defRPr b="0" baseline="0" cap="none" i="0" spc="0" strike="noStrike" sz="1800" u="none" kumimoji="0" normalizeH="0">
+          <a:defRPr kumimoji="0" sz="1800" b="0" i="0" u="none" strike="noStrike" cap="none" spc="0" normalizeH="0" baseline="0">
             <a:ln>
               <a:noFill/>
             </a:ln>
@@ -9416,9 +12798,15 @@
         </a:lvl9pPr>
       </a:lstStyle>
       <a:style>
-        <a:lnRef idx="0"/>
-        <a:fillRef idx="0"/>
-        <a:effectRef idx="0"/>
+        <a:lnRef idx="0">
+          <a:scrgbClr r="0" g="0" b="0"/>
+        </a:lnRef>
+        <a:fillRef idx="0">
+          <a:scrgbClr r="0" g="0" b="0"/>
+        </a:fillRef>
+        <a:effectRef idx="0">
+          <a:scrgbClr r="0" g="0" b="0"/>
+        </a:effectRef>
         <a:fontRef idx="none"/>
       </a:style>
     </a:spDef>
@@ -9435,7 +12823,7 @@
         <a:effectLst/>
         <a:sp3d/>
       </a:spPr>
-      <a:bodyPr rot="0" spcFirstLastPara="1" vertOverflow="overflow" horzOverflow="overflow" vert="horz" wrap="square" lIns="91439" tIns="45719" rIns="91439" bIns="45719" numCol="1" spcCol="38100" rtlCol="0" anchor="t" upright="0">
+      <a:bodyPr rot="0" spcFirstLastPara="1" vertOverflow="overflow" horzOverflow="overflow" vert="horz" wrap="square" lIns="91439" tIns="45719" rIns="91439" bIns="45719" numCol="1" spcCol="38100" rtlCol="0" anchor="t">
         <a:noAutofit/>
       </a:bodyPr>
       <a:lstStyle>
@@ -9454,7 +12842,7 @@
           <a:buFontTx/>
           <a:buNone/>
           <a:tabLst/>
-          <a:defRPr b="0" baseline="0" cap="none" i="0" spc="0" strike="noStrike" sz="1800" u="none" kumimoji="0" normalizeH="0">
+          <a:defRPr kumimoji="0" sz="1800" b="0" i="0" u="none" strike="noStrike" cap="none" spc="0" normalizeH="0" baseline="0">
             <a:ln>
               <a:noFill/>
             </a:ln>
@@ -9480,7 +12868,7 @@
           <a:buFontTx/>
           <a:buNone/>
           <a:tabLst/>
-          <a:defRPr b="0" baseline="0" cap="none" i="0" spc="0" strike="noStrike" sz="1800" u="none" kumimoji="0" normalizeH="0">
+          <a:defRPr kumimoji="0" sz="1800" b="0" i="0" u="none" strike="noStrike" cap="none" spc="0" normalizeH="0" baseline="0">
             <a:ln>
               <a:noFill/>
             </a:ln>
@@ -9506,7 +12894,7 @@
           <a:buFontTx/>
           <a:buNone/>
           <a:tabLst/>
-          <a:defRPr b="0" baseline="0" cap="none" i="0" spc="0" strike="noStrike" sz="1800" u="none" kumimoji="0" normalizeH="0">
+          <a:defRPr kumimoji="0" sz="1800" b="0" i="0" u="none" strike="noStrike" cap="none" spc="0" normalizeH="0" baseline="0">
             <a:ln>
               <a:noFill/>
             </a:ln>
@@ -9532,7 +12920,7 @@
           <a:buFontTx/>
           <a:buNone/>
           <a:tabLst/>
-          <a:defRPr b="0" baseline="0" cap="none" i="0" spc="0" strike="noStrike" sz="1800" u="none" kumimoji="0" normalizeH="0">
+          <a:defRPr kumimoji="0" sz="1800" b="0" i="0" u="none" strike="noStrike" cap="none" spc="0" normalizeH="0" baseline="0">
             <a:ln>
               <a:noFill/>
             </a:ln>
@@ -9558,7 +12946,7 @@
           <a:buFontTx/>
           <a:buNone/>
           <a:tabLst/>
-          <a:defRPr b="0" baseline="0" cap="none" i="0" spc="0" strike="noStrike" sz="1800" u="none" kumimoji="0" normalizeH="0">
+          <a:defRPr kumimoji="0" sz="1800" b="0" i="0" u="none" strike="noStrike" cap="none" spc="0" normalizeH="0" baseline="0">
             <a:ln>
               <a:noFill/>
             </a:ln>
@@ -9584,7 +12972,7 @@
           <a:buFontTx/>
           <a:buNone/>
           <a:tabLst/>
-          <a:defRPr b="0" baseline="0" cap="none" i="0" spc="0" strike="noStrike" sz="1800" u="none" kumimoji="0" normalizeH="0">
+          <a:defRPr kumimoji="0" sz="1800" b="0" i="0" u="none" strike="noStrike" cap="none" spc="0" normalizeH="0" baseline="0">
             <a:ln>
               <a:noFill/>
             </a:ln>
@@ -9610,7 +12998,7 @@
           <a:buFontTx/>
           <a:buNone/>
           <a:tabLst/>
-          <a:defRPr b="0" baseline="0" cap="none" i="0" spc="0" strike="noStrike" sz="1800" u="none" kumimoji="0" normalizeH="0">
+          <a:defRPr kumimoji="0" sz="1800" b="0" i="0" u="none" strike="noStrike" cap="none" spc="0" normalizeH="0" baseline="0">
             <a:ln>
               <a:noFill/>
             </a:ln>
@@ -9636,7 +13024,7 @@
           <a:buFontTx/>
           <a:buNone/>
           <a:tabLst/>
-          <a:defRPr b="0" baseline="0" cap="none" i="0" spc="0" strike="noStrike" sz="1800" u="none" kumimoji="0" normalizeH="0">
+          <a:defRPr kumimoji="0" sz="1800" b="0" i="0" u="none" strike="noStrike" cap="none" spc="0" normalizeH="0" baseline="0">
             <a:ln>
               <a:noFill/>
             </a:ln>
@@ -9662,7 +13050,7 @@
           <a:buFontTx/>
           <a:buNone/>
           <a:tabLst/>
-          <a:defRPr b="0" baseline="0" cap="none" i="0" spc="0" strike="noStrike" sz="1800" u="none" kumimoji="0" normalizeH="0">
+          <a:defRPr kumimoji="0" sz="1800" b="0" i="0" u="none" strike="noStrike" cap="none" spc="0" normalizeH="0" baseline="0">
             <a:ln>
               <a:noFill/>
             </a:ln>
@@ -9688,7 +13076,7 @@
           <a:buFontTx/>
           <a:buNone/>
           <a:tabLst/>
-          <a:defRPr b="0" baseline="0" cap="none" i="0" spc="0" strike="noStrike" sz="1800" u="none" kumimoji="0" normalizeH="0">
+          <a:defRPr kumimoji="0" sz="1800" b="0" i="0" u="none" strike="noStrike" cap="none" spc="0" normalizeH="0" baseline="0">
             <a:ln>
               <a:noFill/>
             </a:ln>
@@ -9701,9 +13089,15 @@
         </a:lvl9pPr>
       </a:lstStyle>
       <a:style>
-        <a:lnRef idx="0"/>
-        <a:fillRef idx="0"/>
-        <a:effectRef idx="0"/>
+        <a:lnRef idx="0">
+          <a:scrgbClr r="0" g="0" b="0"/>
+        </a:lnRef>
+        <a:fillRef idx="0">
+          <a:scrgbClr r="0" g="0" b="0"/>
+        </a:fillRef>
+        <a:effectRef idx="0">
+          <a:scrgbClr r="0" g="0" b="0"/>
+        </a:effectRef>
         <a:fontRef idx="none"/>
       </a:style>
     </a:lnDef>
@@ -9717,7 +13111,7 @@
         <a:effectLst/>
         <a:sp3d/>
       </a:spPr>
-      <a:bodyPr rot="0" spcFirstLastPara="1" vertOverflow="overflow" horzOverflow="overflow" vert="horz" wrap="square" lIns="45719" tIns="45719" rIns="45719" bIns="45719" numCol="1" spcCol="38100" rtlCol="0" anchor="t" upright="0">
+      <a:bodyPr rot="0" spcFirstLastPara="1" vertOverflow="overflow" horzOverflow="overflow" vert="horz" wrap="square" lIns="45719" tIns="45719" rIns="45719" bIns="45719" numCol="1" spcCol="38100" rtlCol="0" anchor="t">
         <a:spAutoFit/>
       </a:bodyPr>
       <a:lstStyle>
@@ -9736,7 +13130,7 @@
           <a:buFontTx/>
           <a:buNone/>
           <a:tabLst/>
-          <a:defRPr b="0" baseline="0" cap="none" i="0" spc="0" strike="noStrike" sz="1800" u="none" kumimoji="0" normalizeH="0">
+          <a:defRPr kumimoji="0" sz="1800" b="0" i="0" u="none" strike="noStrike" cap="none" spc="0" normalizeH="0" baseline="0">
             <a:ln>
               <a:noFill/>
             </a:ln>
@@ -9766,7 +13160,7 @@
           <a:buFontTx/>
           <a:buNone/>
           <a:tabLst/>
-          <a:defRPr b="0" baseline="0" cap="none" i="0" spc="0" strike="noStrike" sz="1800" u="none" kumimoji="0" normalizeH="0">
+          <a:defRPr kumimoji="0" sz="1800" b="0" i="0" u="none" strike="noStrike" cap="none" spc="0" normalizeH="0" baseline="0">
             <a:ln>
               <a:noFill/>
             </a:ln>
@@ -9792,7 +13186,7 @@
           <a:buFontTx/>
           <a:buNone/>
           <a:tabLst/>
-          <a:defRPr b="0" baseline="0" cap="none" i="0" spc="0" strike="noStrike" sz="1800" u="none" kumimoji="0" normalizeH="0">
+          <a:defRPr kumimoji="0" sz="1800" b="0" i="0" u="none" strike="noStrike" cap="none" spc="0" normalizeH="0" baseline="0">
             <a:ln>
               <a:noFill/>
             </a:ln>
@@ -9818,7 +13212,7 @@
           <a:buFontTx/>
           <a:buNone/>
           <a:tabLst/>
-          <a:defRPr b="0" baseline="0" cap="none" i="0" spc="0" strike="noStrike" sz="1800" u="none" kumimoji="0" normalizeH="0">
+          <a:defRPr kumimoji="0" sz="1800" b="0" i="0" u="none" strike="noStrike" cap="none" spc="0" normalizeH="0" baseline="0">
             <a:ln>
               <a:noFill/>
             </a:ln>
@@ -9844,7 +13238,7 @@
           <a:buFontTx/>
           <a:buNone/>
           <a:tabLst/>
-          <a:defRPr b="0" baseline="0" cap="none" i="0" spc="0" strike="noStrike" sz="1800" u="none" kumimoji="0" normalizeH="0">
+          <a:defRPr kumimoji="0" sz="1800" b="0" i="0" u="none" strike="noStrike" cap="none" spc="0" normalizeH="0" baseline="0">
             <a:ln>
               <a:noFill/>
             </a:ln>
@@ -9870,7 +13264,7 @@
           <a:buFontTx/>
           <a:buNone/>
           <a:tabLst/>
-          <a:defRPr b="0" baseline="0" cap="none" i="0" spc="0" strike="noStrike" sz="1800" u="none" kumimoji="0" normalizeH="0">
+          <a:defRPr kumimoji="0" sz="1800" b="0" i="0" u="none" strike="noStrike" cap="none" spc="0" normalizeH="0" baseline="0">
             <a:ln>
               <a:noFill/>
             </a:ln>
@@ -9896,7 +13290,7 @@
           <a:buFontTx/>
           <a:buNone/>
           <a:tabLst/>
-          <a:defRPr b="0" baseline="0" cap="none" i="0" spc="0" strike="noStrike" sz="1800" u="none" kumimoji="0" normalizeH="0">
+          <a:defRPr kumimoji="0" sz="1800" b="0" i="0" u="none" strike="noStrike" cap="none" spc="0" normalizeH="0" baseline="0">
             <a:ln>
               <a:noFill/>
             </a:ln>
@@ -9922,7 +13316,7 @@
           <a:buFontTx/>
           <a:buNone/>
           <a:tabLst/>
-          <a:defRPr b="0" baseline="0" cap="none" i="0" spc="0" strike="noStrike" sz="1800" u="none" kumimoji="0" normalizeH="0">
+          <a:defRPr kumimoji="0" sz="1800" b="0" i="0" u="none" strike="noStrike" cap="none" spc="0" normalizeH="0" baseline="0">
             <a:ln>
               <a:noFill/>
             </a:ln>
@@ -9948,7 +13342,7 @@
           <a:buFontTx/>
           <a:buNone/>
           <a:tabLst/>
-          <a:defRPr b="0" baseline="0" cap="none" i="0" spc="0" strike="noStrike" sz="1800" u="none" kumimoji="0" normalizeH="0">
+          <a:defRPr kumimoji="0" sz="1800" b="0" i="0" u="none" strike="noStrike" cap="none" spc="0" normalizeH="0" baseline="0">
             <a:ln>
               <a:noFill/>
             </a:ln>
@@ -9974,7 +13368,7 @@
           <a:buFontTx/>
           <a:buNone/>
           <a:tabLst/>
-          <a:defRPr b="0" baseline="0" cap="none" i="0" spc="0" strike="noStrike" sz="1800" u="none" kumimoji="0" normalizeH="0">
+          <a:defRPr kumimoji="0" sz="1800" b="0" i="0" u="none" strike="noStrike" cap="none" spc="0" normalizeH="0" baseline="0">
             <a:ln>
               <a:noFill/>
             </a:ln>
@@ -9987,18 +13381,25 @@
         </a:lvl9pPr>
       </a:lstStyle>
       <a:style>
-        <a:lnRef idx="0"/>
-        <a:fillRef idx="0"/>
-        <a:effectRef idx="0"/>
+        <a:lnRef idx="0">
+          <a:scrgbClr r="0" g="0" b="0"/>
+        </a:lnRef>
+        <a:fillRef idx="0">
+          <a:scrgbClr r="0" g="0" b="0"/>
+        </a:fillRef>
+        <a:effectRef idx="0">
+          <a:scrgbClr r="0" g="0" b="0"/>
+        </a:effectRef>
         <a:fontRef idx="none"/>
       </a:style>
     </a:txDef>
   </a:objectDefaults>
+  <a:extraClrSchemeLst/>
 </a:theme>
 </file>
 
 <file path=ppt/theme/theme2.xml><?xml version="1.0" encoding="utf-8"?>
-<a:theme xmlns:a="http://schemas.openxmlformats.org/drawingml/2006/main" xmlns:r="http://schemas.openxmlformats.org/officeDocument/2006/relationships" name="Office テーマ">
+<a:theme xmlns:a="http://schemas.openxmlformats.org/drawingml/2006/main" name="Office テーマ">
   <a:themeElements>
     <a:clrScheme name="Office テーマ">
       <a:dk1>
@@ -10200,7 +13601,7 @@
         <a:effectLst/>
         <a:sp3d/>
       </a:spPr>
-      <a:bodyPr rot="0" spcFirstLastPara="1" vertOverflow="overflow" horzOverflow="overflow" vert="horz" wrap="square" lIns="45719" tIns="45719" rIns="45719" bIns="45719" numCol="1" spcCol="38100" rtlCol="0" anchor="ctr" upright="0">
+      <a:bodyPr rot="0" spcFirstLastPara="1" vertOverflow="overflow" horzOverflow="overflow" vert="horz" wrap="square" lIns="45719" tIns="45719" rIns="45719" bIns="45719" numCol="1" spcCol="38100" rtlCol="0" anchor="ctr">
         <a:spAutoFit/>
       </a:bodyPr>
       <a:lstStyle>
@@ -10219,7 +13620,7 @@
           <a:buFontTx/>
           <a:buNone/>
           <a:tabLst/>
-          <a:defRPr b="0" baseline="0" cap="none" i="0" spc="0" strike="noStrike" sz="1800" u="none" kumimoji="0" normalizeH="0">
+          <a:defRPr kumimoji="0" sz="1800" b="0" i="0" u="none" strike="noStrike" cap="none" spc="0" normalizeH="0" baseline="0">
             <a:ln>
               <a:noFill/>
             </a:ln>
@@ -10249,7 +13650,7 @@
           <a:buFontTx/>
           <a:buNone/>
           <a:tabLst/>
-          <a:defRPr b="0" baseline="0" cap="none" i="0" spc="0" strike="noStrike" sz="1800" u="none" kumimoji="0" normalizeH="0">
+          <a:defRPr kumimoji="0" sz="1800" b="0" i="0" u="none" strike="noStrike" cap="none" spc="0" normalizeH="0" baseline="0">
             <a:ln>
               <a:noFill/>
             </a:ln>
@@ -10275,7 +13676,7 @@
           <a:buFontTx/>
           <a:buNone/>
           <a:tabLst/>
-          <a:defRPr b="0" baseline="0" cap="none" i="0" spc="0" strike="noStrike" sz="1800" u="none" kumimoji="0" normalizeH="0">
+          <a:defRPr kumimoji="0" sz="1800" b="0" i="0" u="none" strike="noStrike" cap="none" spc="0" normalizeH="0" baseline="0">
             <a:ln>
               <a:noFill/>
             </a:ln>
@@ -10301,7 +13702,7 @@
           <a:buFontTx/>
           <a:buNone/>
           <a:tabLst/>
-          <a:defRPr b="0" baseline="0" cap="none" i="0" spc="0" strike="noStrike" sz="1800" u="none" kumimoji="0" normalizeH="0">
+          <a:defRPr kumimoji="0" sz="1800" b="0" i="0" u="none" strike="noStrike" cap="none" spc="0" normalizeH="0" baseline="0">
             <a:ln>
               <a:noFill/>
             </a:ln>
@@ -10327,7 +13728,7 @@
           <a:buFontTx/>
           <a:buNone/>
           <a:tabLst/>
-          <a:defRPr b="0" baseline="0" cap="none" i="0" spc="0" strike="noStrike" sz="1800" u="none" kumimoji="0" normalizeH="0">
+          <a:defRPr kumimoji="0" sz="1800" b="0" i="0" u="none" strike="noStrike" cap="none" spc="0" normalizeH="0" baseline="0">
             <a:ln>
               <a:noFill/>
             </a:ln>
@@ -10353,7 +13754,7 @@
           <a:buFontTx/>
           <a:buNone/>
           <a:tabLst/>
-          <a:defRPr b="0" baseline="0" cap="none" i="0" spc="0" strike="noStrike" sz="1800" u="none" kumimoji="0" normalizeH="0">
+          <a:defRPr kumimoji="0" sz="1800" b="0" i="0" u="none" strike="noStrike" cap="none" spc="0" normalizeH="0" baseline="0">
             <a:ln>
               <a:noFill/>
             </a:ln>
@@ -10379,7 +13780,7 @@
           <a:buFontTx/>
           <a:buNone/>
           <a:tabLst/>
-          <a:defRPr b="0" baseline="0" cap="none" i="0" spc="0" strike="noStrike" sz="1800" u="none" kumimoji="0" normalizeH="0">
+          <a:defRPr kumimoji="0" sz="1800" b="0" i="0" u="none" strike="noStrike" cap="none" spc="0" normalizeH="0" baseline="0">
             <a:ln>
               <a:noFill/>
             </a:ln>
@@ -10405,7 +13806,7 @@
           <a:buFontTx/>
           <a:buNone/>
           <a:tabLst/>
-          <a:defRPr b="0" baseline="0" cap="none" i="0" spc="0" strike="noStrike" sz="1800" u="none" kumimoji="0" normalizeH="0">
+          <a:defRPr kumimoji="0" sz="1800" b="0" i="0" u="none" strike="noStrike" cap="none" spc="0" normalizeH="0" baseline="0">
             <a:ln>
               <a:noFill/>
             </a:ln>
@@ -10431,7 +13832,7 @@
           <a:buFontTx/>
           <a:buNone/>
           <a:tabLst/>
-          <a:defRPr b="0" baseline="0" cap="none" i="0" spc="0" strike="noStrike" sz="1800" u="none" kumimoji="0" normalizeH="0">
+          <a:defRPr kumimoji="0" sz="1800" b="0" i="0" u="none" strike="noStrike" cap="none" spc="0" normalizeH="0" baseline="0">
             <a:ln>
               <a:noFill/>
             </a:ln>
@@ -10457,7 +13858,7 @@
           <a:buFontTx/>
           <a:buNone/>
           <a:tabLst/>
-          <a:defRPr b="0" baseline="0" cap="none" i="0" spc="0" strike="noStrike" sz="1800" u="none" kumimoji="0" normalizeH="0">
+          <a:defRPr kumimoji="0" sz="1800" b="0" i="0" u="none" strike="noStrike" cap="none" spc="0" normalizeH="0" baseline="0">
             <a:ln>
               <a:noFill/>
             </a:ln>
@@ -10470,9 +13871,15 @@
         </a:lvl9pPr>
       </a:lstStyle>
       <a:style>
-        <a:lnRef idx="0"/>
-        <a:fillRef idx="0"/>
-        <a:effectRef idx="0"/>
+        <a:lnRef idx="0">
+          <a:scrgbClr r="0" g="0" b="0"/>
+        </a:lnRef>
+        <a:fillRef idx="0">
+          <a:scrgbClr r="0" g="0" b="0"/>
+        </a:fillRef>
+        <a:effectRef idx="0">
+          <a:scrgbClr r="0" g="0" b="0"/>
+        </a:effectRef>
         <a:fontRef idx="none"/>
       </a:style>
     </a:spDef>
@@ -10489,7 +13896,7 @@
         <a:effectLst/>
         <a:sp3d/>
       </a:spPr>
-      <a:bodyPr rot="0" spcFirstLastPara="1" vertOverflow="overflow" horzOverflow="overflow" vert="horz" wrap="square" lIns="91439" tIns="45719" rIns="91439" bIns="45719" numCol="1" spcCol="38100" rtlCol="0" anchor="t" upright="0">
+      <a:bodyPr rot="0" spcFirstLastPara="1" vertOverflow="overflow" horzOverflow="overflow" vert="horz" wrap="square" lIns="91439" tIns="45719" rIns="91439" bIns="45719" numCol="1" spcCol="38100" rtlCol="0" anchor="t">
         <a:noAutofit/>
       </a:bodyPr>
       <a:lstStyle>
@@ -10508,7 +13915,7 @@
           <a:buFontTx/>
           <a:buNone/>
           <a:tabLst/>
-          <a:defRPr b="0" baseline="0" cap="none" i="0" spc="0" strike="noStrike" sz="1800" u="none" kumimoji="0" normalizeH="0">
+          <a:defRPr kumimoji="0" sz="1800" b="0" i="0" u="none" strike="noStrike" cap="none" spc="0" normalizeH="0" baseline="0">
             <a:ln>
               <a:noFill/>
             </a:ln>
@@ -10534,7 +13941,7 @@
           <a:buFontTx/>
           <a:buNone/>
           <a:tabLst/>
-          <a:defRPr b="0" baseline="0" cap="none" i="0" spc="0" strike="noStrike" sz="1800" u="none" kumimoji="0" normalizeH="0">
+          <a:defRPr kumimoji="0" sz="1800" b="0" i="0" u="none" strike="noStrike" cap="none" spc="0" normalizeH="0" baseline="0">
             <a:ln>
               <a:noFill/>
             </a:ln>
@@ -10560,7 +13967,7 @@
           <a:buFontTx/>
           <a:buNone/>
           <a:tabLst/>
-          <a:defRPr b="0" baseline="0" cap="none" i="0" spc="0" strike="noStrike" sz="1800" u="none" kumimoji="0" normalizeH="0">
+          <a:defRPr kumimoji="0" sz="1800" b="0" i="0" u="none" strike="noStrike" cap="none" spc="0" normalizeH="0" baseline="0">
             <a:ln>
               <a:noFill/>
             </a:ln>
@@ -10586,7 +13993,7 @@
           <a:buFontTx/>
           <a:buNone/>
           <a:tabLst/>
-          <a:defRPr b="0" baseline="0" cap="none" i="0" spc="0" strike="noStrike" sz="1800" u="none" kumimoji="0" normalizeH="0">
+          <a:defRPr kumimoji="0" sz="1800" b="0" i="0" u="none" strike="noStrike" cap="none" spc="0" normalizeH="0" baseline="0">
             <a:ln>
               <a:noFill/>
             </a:ln>
@@ -10612,7 +14019,7 @@
           <a:buFontTx/>
           <a:buNone/>
           <a:tabLst/>
-          <a:defRPr b="0" baseline="0" cap="none" i="0" spc="0" strike="noStrike" sz="1800" u="none" kumimoji="0" normalizeH="0">
+          <a:defRPr kumimoji="0" sz="1800" b="0" i="0" u="none" strike="noStrike" cap="none" spc="0" normalizeH="0" baseline="0">
             <a:ln>
               <a:noFill/>
             </a:ln>
@@ -10638,7 +14045,7 @@
           <a:buFontTx/>
           <a:buNone/>
           <a:tabLst/>
-          <a:defRPr b="0" baseline="0" cap="none" i="0" spc="0" strike="noStrike" sz="1800" u="none" kumimoji="0" normalizeH="0">
+          <a:defRPr kumimoji="0" sz="1800" b="0" i="0" u="none" strike="noStrike" cap="none" spc="0" normalizeH="0" baseline="0">
             <a:ln>
               <a:noFill/>
             </a:ln>
@@ -10664,7 +14071,7 @@
           <a:buFontTx/>
           <a:buNone/>
           <a:tabLst/>
-          <a:defRPr b="0" baseline="0" cap="none" i="0" spc="0" strike="noStrike" sz="1800" u="none" kumimoji="0" normalizeH="0">
+          <a:defRPr kumimoji="0" sz="1800" b="0" i="0" u="none" strike="noStrike" cap="none" spc="0" normalizeH="0" baseline="0">
             <a:ln>
               <a:noFill/>
             </a:ln>
@@ -10690,7 +14097,7 @@
           <a:buFontTx/>
           <a:buNone/>
           <a:tabLst/>
-          <a:defRPr b="0" baseline="0" cap="none" i="0" spc="0" strike="noStrike" sz="1800" u="none" kumimoji="0" normalizeH="0">
+          <a:defRPr kumimoji="0" sz="1800" b="0" i="0" u="none" strike="noStrike" cap="none" spc="0" normalizeH="0" baseline="0">
             <a:ln>
               <a:noFill/>
             </a:ln>
@@ -10716,7 +14123,7 @@
           <a:buFontTx/>
           <a:buNone/>
           <a:tabLst/>
-          <a:defRPr b="0" baseline="0" cap="none" i="0" spc="0" strike="noStrike" sz="1800" u="none" kumimoji="0" normalizeH="0">
+          <a:defRPr kumimoji="0" sz="1800" b="0" i="0" u="none" strike="noStrike" cap="none" spc="0" normalizeH="0" baseline="0">
             <a:ln>
               <a:noFill/>
             </a:ln>
@@ -10742,7 +14149,7 @@
           <a:buFontTx/>
           <a:buNone/>
           <a:tabLst/>
-          <a:defRPr b="0" baseline="0" cap="none" i="0" spc="0" strike="noStrike" sz="1800" u="none" kumimoji="0" normalizeH="0">
+          <a:defRPr kumimoji="0" sz="1800" b="0" i="0" u="none" strike="noStrike" cap="none" spc="0" normalizeH="0" baseline="0">
             <a:ln>
               <a:noFill/>
             </a:ln>
@@ -10755,9 +14162,15 @@
         </a:lvl9pPr>
       </a:lstStyle>
       <a:style>
-        <a:lnRef idx="0"/>
-        <a:fillRef idx="0"/>
-        <a:effectRef idx="0"/>
+        <a:lnRef idx="0">
+          <a:scrgbClr r="0" g="0" b="0"/>
+        </a:lnRef>
+        <a:fillRef idx="0">
+          <a:scrgbClr r="0" g="0" b="0"/>
+        </a:fillRef>
+        <a:effectRef idx="0">
+          <a:scrgbClr r="0" g="0" b="0"/>
+        </a:effectRef>
         <a:fontRef idx="none"/>
       </a:style>
     </a:lnDef>
@@ -10771,7 +14184,7 @@
         <a:effectLst/>
         <a:sp3d/>
       </a:spPr>
-      <a:bodyPr rot="0" spcFirstLastPara="1" vertOverflow="overflow" horzOverflow="overflow" vert="horz" wrap="square" lIns="45719" tIns="45719" rIns="45719" bIns="45719" numCol="1" spcCol="38100" rtlCol="0" anchor="t" upright="0">
+      <a:bodyPr rot="0" spcFirstLastPara="1" vertOverflow="overflow" horzOverflow="overflow" vert="horz" wrap="square" lIns="45719" tIns="45719" rIns="45719" bIns="45719" numCol="1" spcCol="38100" rtlCol="0" anchor="t">
         <a:spAutoFit/>
       </a:bodyPr>
       <a:lstStyle>
@@ -10790,7 +14203,7 @@
           <a:buFontTx/>
           <a:buNone/>
           <a:tabLst/>
-          <a:defRPr b="0" baseline="0" cap="none" i="0" spc="0" strike="noStrike" sz="1800" u="none" kumimoji="0" normalizeH="0">
+          <a:defRPr kumimoji="0" sz="1800" b="0" i="0" u="none" strike="noStrike" cap="none" spc="0" normalizeH="0" baseline="0">
             <a:ln>
               <a:noFill/>
             </a:ln>
@@ -10820,7 +14233,7 @@
           <a:buFontTx/>
           <a:buNone/>
           <a:tabLst/>
-          <a:defRPr b="0" baseline="0" cap="none" i="0" spc="0" strike="noStrike" sz="1800" u="none" kumimoji="0" normalizeH="0">
+          <a:defRPr kumimoji="0" sz="1800" b="0" i="0" u="none" strike="noStrike" cap="none" spc="0" normalizeH="0" baseline="0">
             <a:ln>
               <a:noFill/>
             </a:ln>
@@ -10846,7 +14259,7 @@
           <a:buFontTx/>
           <a:buNone/>
           <a:tabLst/>
-          <a:defRPr b="0" baseline="0" cap="none" i="0" spc="0" strike="noStrike" sz="1800" u="none" kumimoji="0" normalizeH="0">
+          <a:defRPr kumimoji="0" sz="1800" b="0" i="0" u="none" strike="noStrike" cap="none" spc="0" normalizeH="0" baseline="0">
             <a:ln>
               <a:noFill/>
             </a:ln>
@@ -10872,7 +14285,7 @@
           <a:buFontTx/>
           <a:buNone/>
           <a:tabLst/>
-          <a:defRPr b="0" baseline="0" cap="none" i="0" spc="0" strike="noStrike" sz="1800" u="none" kumimoji="0" normalizeH="0">
+          <a:defRPr kumimoji="0" sz="1800" b="0" i="0" u="none" strike="noStrike" cap="none" spc="0" normalizeH="0" baseline="0">
             <a:ln>
               <a:noFill/>
             </a:ln>
@@ -10898,7 +14311,7 @@
           <a:buFontTx/>
           <a:buNone/>
           <a:tabLst/>
-          <a:defRPr b="0" baseline="0" cap="none" i="0" spc="0" strike="noStrike" sz="1800" u="none" kumimoji="0" normalizeH="0">
+          <a:defRPr kumimoji="0" sz="1800" b="0" i="0" u="none" strike="noStrike" cap="none" spc="0" normalizeH="0" baseline="0">
             <a:ln>
               <a:noFill/>
             </a:ln>
@@ -10924,7 +14337,7 @@
           <a:buFontTx/>
           <a:buNone/>
           <a:tabLst/>
-          <a:defRPr b="0" baseline="0" cap="none" i="0" spc="0" strike="noStrike" sz="1800" u="none" kumimoji="0" normalizeH="0">
+          <a:defRPr kumimoji="0" sz="1800" b="0" i="0" u="none" strike="noStrike" cap="none" spc="0" normalizeH="0" baseline="0">
             <a:ln>
               <a:noFill/>
             </a:ln>
@@ -10950,7 +14363,7 @@
           <a:buFontTx/>
           <a:buNone/>
           <a:tabLst/>
-          <a:defRPr b="0" baseline="0" cap="none" i="0" spc="0" strike="noStrike" sz="1800" u="none" kumimoji="0" normalizeH="0">
+          <a:defRPr kumimoji="0" sz="1800" b="0" i="0" u="none" strike="noStrike" cap="none" spc="0" normalizeH="0" baseline="0">
             <a:ln>
               <a:noFill/>
             </a:ln>
@@ -10976,7 +14389,7 @@
           <a:buFontTx/>
           <a:buNone/>
           <a:tabLst/>
-          <a:defRPr b="0" baseline="0" cap="none" i="0" spc="0" strike="noStrike" sz="1800" u="none" kumimoji="0" normalizeH="0">
+          <a:defRPr kumimoji="0" sz="1800" b="0" i="0" u="none" strike="noStrike" cap="none" spc="0" normalizeH="0" baseline="0">
             <a:ln>
               <a:noFill/>
             </a:ln>
@@ -11002,7 +14415,7 @@
           <a:buFontTx/>
           <a:buNone/>
           <a:tabLst/>
-          <a:defRPr b="0" baseline="0" cap="none" i="0" spc="0" strike="noStrike" sz="1800" u="none" kumimoji="0" normalizeH="0">
+          <a:defRPr kumimoji="0" sz="1800" b="0" i="0" u="none" strike="noStrike" cap="none" spc="0" normalizeH="0" baseline="0">
             <a:ln>
               <a:noFill/>
             </a:ln>
@@ -11028,7 +14441,7 @@
           <a:buFontTx/>
           <a:buNone/>
           <a:tabLst/>
-          <a:defRPr b="0" baseline="0" cap="none" i="0" spc="0" strike="noStrike" sz="1800" u="none" kumimoji="0" normalizeH="0">
+          <a:defRPr kumimoji="0" sz="1800" b="0" i="0" u="none" strike="noStrike" cap="none" spc="0" normalizeH="0" baseline="0">
             <a:ln>
               <a:noFill/>
             </a:ln>
@@ -11041,12 +14454,19 @@
         </a:lvl9pPr>
       </a:lstStyle>
       <a:style>
-        <a:lnRef idx="0"/>
-        <a:fillRef idx="0"/>
-        <a:effectRef idx="0"/>
+        <a:lnRef idx="0">
+          <a:scrgbClr r="0" g="0" b="0"/>
+        </a:lnRef>
+        <a:fillRef idx="0">
+          <a:scrgbClr r="0" g="0" b="0"/>
+        </a:fillRef>
+        <a:effectRef idx="0">
+          <a:scrgbClr r="0" g="0" b="0"/>
+        </a:effectRef>
         <a:fontRef idx="none"/>
       </a:style>
     </a:txDef>
   </a:objectDefaults>
+  <a:extraClrSchemeLst/>
 </a:theme>
 </file>